--- a/Working Documents/COMP2025.pptx
+++ b/Working Documents/COMP2025.pptx
@@ -4,6 +4,9 @@
   <p:sldMasterIdLst>
     <p:sldMasterId id="2147483648" r:id="rId1"/>
   </p:sldMasterIdLst>
+  <p:notesMasterIdLst>
+    <p:notesMasterId r:id="rId17"/>
+  </p:notesMasterIdLst>
   <p:sldIdLst>
     <p:sldId id="256" r:id="rId2"/>
     <p:sldId id="260" r:id="rId3"/>
@@ -12,13 +15,14 @@
     <p:sldId id="259" r:id="rId6"/>
     <p:sldId id="264" r:id="rId7"/>
     <p:sldId id="271" r:id="rId8"/>
-    <p:sldId id="273" r:id="rId9"/>
-    <p:sldId id="266" r:id="rId10"/>
-    <p:sldId id="272" r:id="rId11"/>
-    <p:sldId id="268" r:id="rId12"/>
-    <p:sldId id="276" r:id="rId13"/>
-    <p:sldId id="269" r:id="rId14"/>
-    <p:sldId id="263" r:id="rId15"/>
+    <p:sldId id="272" r:id="rId9"/>
+    <p:sldId id="273" r:id="rId10"/>
+    <p:sldId id="268" r:id="rId11"/>
+    <p:sldId id="276" r:id="rId12"/>
+    <p:sldId id="269" r:id="rId13"/>
+    <p:sldId id="263" r:id="rId14"/>
+    <p:sldId id="277" r:id="rId15"/>
+    <p:sldId id="278" r:id="rId16"/>
   </p:sldIdLst>
   <p:sldSz cx="12192000" cy="6858000"/>
   <p:notesSz cx="6858000" cy="9144000"/>
@@ -123,6 +127,1256 @@
     </p:ext>
   </p:extLst>
 </p:presentation>
+</file>
+
+<file path=ppt/notesMasters/notesMaster1.xml><?xml version="1.0" encoding="utf-8"?>
+<p:notesMaster xmlns:a="http://schemas.openxmlformats.org/drawingml/2006/main" xmlns:r="http://schemas.openxmlformats.org/officeDocument/2006/relationships" xmlns:p="http://schemas.openxmlformats.org/presentationml/2006/main">
+  <p:cSld>
+    <p:bg>
+      <p:bgRef idx="1001">
+        <a:schemeClr val="bg1"/>
+      </p:bgRef>
+    </p:bg>
+    <p:spTree>
+      <p:nvGrpSpPr>
+        <p:cNvPr id="1" name=""/>
+        <p:cNvGrpSpPr/>
+        <p:nvPr/>
+      </p:nvGrpSpPr>
+      <p:grpSpPr>
+        <a:xfrm>
+          <a:off x="0" y="0"/>
+          <a:ext cx="0" cy="0"/>
+          <a:chOff x="0" y="0"/>
+          <a:chExt cx="0" cy="0"/>
+        </a:xfrm>
+      </p:grpSpPr>
+      <p:sp>
+        <p:nvSpPr>
+          <p:cNvPr id="2" name="Header Placeholder 1"/>
+          <p:cNvSpPr>
+            <a:spLocks noGrp="1"/>
+          </p:cNvSpPr>
+          <p:nvPr>
+            <p:ph type="hdr" sz="quarter"/>
+          </p:nvPr>
+        </p:nvSpPr>
+        <p:spPr>
+          <a:xfrm>
+            <a:off x="0" y="0"/>
+            <a:ext cx="2971800" cy="458788"/>
+          </a:xfrm>
+          <a:prstGeom prst="rect">
+            <a:avLst/>
+          </a:prstGeom>
+        </p:spPr>
+        <p:txBody>
+          <a:bodyPr vert="horz" lIns="91440" tIns="45720" rIns="91440" bIns="45720" rtlCol="0"/>
+          <a:lstStyle>
+            <a:lvl1pPr algn="l">
+              <a:defRPr sz="1200"/>
+            </a:lvl1pPr>
+          </a:lstStyle>
+          <a:p>
+            <a:endParaRPr lang="en-CA"/>
+          </a:p>
+        </p:txBody>
+      </p:sp>
+      <p:sp>
+        <p:nvSpPr>
+          <p:cNvPr id="3" name="Date Placeholder 2"/>
+          <p:cNvSpPr>
+            <a:spLocks noGrp="1"/>
+          </p:cNvSpPr>
+          <p:nvPr>
+            <p:ph type="dt" idx="1"/>
+          </p:nvPr>
+        </p:nvSpPr>
+        <p:spPr>
+          <a:xfrm>
+            <a:off x="3884613" y="0"/>
+            <a:ext cx="2971800" cy="458788"/>
+          </a:xfrm>
+          <a:prstGeom prst="rect">
+            <a:avLst/>
+          </a:prstGeom>
+        </p:spPr>
+        <p:txBody>
+          <a:bodyPr vert="horz" lIns="91440" tIns="45720" rIns="91440" bIns="45720" rtlCol="0"/>
+          <a:lstStyle>
+            <a:lvl1pPr algn="r">
+              <a:defRPr sz="1200"/>
+            </a:lvl1pPr>
+          </a:lstStyle>
+          <a:p>
+            <a:fld id="{79DBBB50-28C2-4259-8A6E-8511330E65C5}" type="datetimeFigureOut">
+              <a:rPr lang="en-CA" smtClean="0"/>
+              <a:t>14-May-2025</a:t>
+            </a:fld>
+            <a:endParaRPr lang="en-CA"/>
+          </a:p>
+        </p:txBody>
+      </p:sp>
+      <p:sp>
+        <p:nvSpPr>
+          <p:cNvPr id="4" name="Slide Image Placeholder 3"/>
+          <p:cNvSpPr>
+            <a:spLocks noGrp="1" noRot="1" noChangeAspect="1"/>
+          </p:cNvSpPr>
+          <p:nvPr>
+            <p:ph type="sldImg" idx="2"/>
+          </p:nvPr>
+        </p:nvSpPr>
+        <p:spPr>
+          <a:xfrm>
+            <a:off x="685800" y="1143000"/>
+            <a:ext cx="5486400" cy="3086100"/>
+          </a:xfrm>
+          <a:prstGeom prst="rect">
+            <a:avLst/>
+          </a:prstGeom>
+          <a:noFill/>
+          <a:ln w="12700">
+            <a:solidFill>
+              <a:prstClr val="black"/>
+            </a:solidFill>
+          </a:ln>
+        </p:spPr>
+        <p:txBody>
+          <a:bodyPr vert="horz" lIns="91440" tIns="45720" rIns="91440" bIns="45720" rtlCol="0" anchor="ctr"/>
+          <a:lstStyle/>
+          <a:p>
+            <a:endParaRPr lang="en-CA"/>
+          </a:p>
+        </p:txBody>
+      </p:sp>
+      <p:sp>
+        <p:nvSpPr>
+          <p:cNvPr id="5" name="Notes Placeholder 4"/>
+          <p:cNvSpPr>
+            <a:spLocks noGrp="1"/>
+          </p:cNvSpPr>
+          <p:nvPr>
+            <p:ph type="body" sz="quarter" idx="3"/>
+          </p:nvPr>
+        </p:nvSpPr>
+        <p:spPr>
+          <a:xfrm>
+            <a:off x="685800" y="4400550"/>
+            <a:ext cx="5486400" cy="3600450"/>
+          </a:xfrm>
+          <a:prstGeom prst="rect">
+            <a:avLst/>
+          </a:prstGeom>
+        </p:spPr>
+        <p:txBody>
+          <a:bodyPr vert="horz" lIns="91440" tIns="45720" rIns="91440" bIns="45720" rtlCol="0"/>
+          <a:lstStyle/>
+          <a:p>
+            <a:pPr lvl="0"/>
+            <a:r>
+              <a:rPr lang="en-US"/>
+              <a:t>Click to edit Master text styles</a:t>
+            </a:r>
+          </a:p>
+          <a:p>
+            <a:pPr lvl="1"/>
+            <a:r>
+              <a:rPr lang="en-US"/>
+              <a:t>Second level</a:t>
+            </a:r>
+          </a:p>
+          <a:p>
+            <a:pPr lvl="2"/>
+            <a:r>
+              <a:rPr lang="en-US"/>
+              <a:t>Third level</a:t>
+            </a:r>
+          </a:p>
+          <a:p>
+            <a:pPr lvl="3"/>
+            <a:r>
+              <a:rPr lang="en-US"/>
+              <a:t>Fourth level</a:t>
+            </a:r>
+          </a:p>
+          <a:p>
+            <a:pPr lvl="4"/>
+            <a:r>
+              <a:rPr lang="en-US"/>
+              <a:t>Fifth level</a:t>
+            </a:r>
+            <a:endParaRPr lang="en-CA"/>
+          </a:p>
+        </p:txBody>
+      </p:sp>
+      <p:sp>
+        <p:nvSpPr>
+          <p:cNvPr id="6" name="Footer Placeholder 5"/>
+          <p:cNvSpPr>
+            <a:spLocks noGrp="1"/>
+          </p:cNvSpPr>
+          <p:nvPr>
+            <p:ph type="ftr" sz="quarter" idx="4"/>
+          </p:nvPr>
+        </p:nvSpPr>
+        <p:spPr>
+          <a:xfrm>
+            <a:off x="0" y="8685213"/>
+            <a:ext cx="2971800" cy="458787"/>
+          </a:xfrm>
+          <a:prstGeom prst="rect">
+            <a:avLst/>
+          </a:prstGeom>
+        </p:spPr>
+        <p:txBody>
+          <a:bodyPr vert="horz" lIns="91440" tIns="45720" rIns="91440" bIns="45720" rtlCol="0" anchor="b"/>
+          <a:lstStyle>
+            <a:lvl1pPr algn="l">
+              <a:defRPr sz="1200"/>
+            </a:lvl1pPr>
+          </a:lstStyle>
+          <a:p>
+            <a:endParaRPr lang="en-CA"/>
+          </a:p>
+        </p:txBody>
+      </p:sp>
+      <p:sp>
+        <p:nvSpPr>
+          <p:cNvPr id="7" name="Slide Number Placeholder 6"/>
+          <p:cNvSpPr>
+            <a:spLocks noGrp="1"/>
+          </p:cNvSpPr>
+          <p:nvPr>
+            <p:ph type="sldNum" sz="quarter" idx="5"/>
+          </p:nvPr>
+        </p:nvSpPr>
+        <p:spPr>
+          <a:xfrm>
+            <a:off x="3884613" y="8685213"/>
+            <a:ext cx="2971800" cy="458787"/>
+          </a:xfrm>
+          <a:prstGeom prst="rect">
+            <a:avLst/>
+          </a:prstGeom>
+        </p:spPr>
+        <p:txBody>
+          <a:bodyPr vert="horz" lIns="91440" tIns="45720" rIns="91440" bIns="45720" rtlCol="0" anchor="b"/>
+          <a:lstStyle>
+            <a:lvl1pPr algn="r">
+              <a:defRPr sz="1200"/>
+            </a:lvl1pPr>
+          </a:lstStyle>
+          <a:p>
+            <a:fld id="{5C2A1542-6F33-408E-AC39-5232C11A66FF}" type="slidenum">
+              <a:rPr lang="en-CA" smtClean="0"/>
+              <a:t>‹#›</a:t>
+            </a:fld>
+            <a:endParaRPr lang="en-CA"/>
+          </a:p>
+        </p:txBody>
+      </p:sp>
+    </p:spTree>
+    <p:extLst>
+      <p:ext uri="{BB962C8B-B14F-4D97-AF65-F5344CB8AC3E}">
+        <p14:creationId xmlns:p14="http://schemas.microsoft.com/office/powerpoint/2010/main" val="3201946367"/>
+      </p:ext>
+    </p:extLst>
+  </p:cSld>
+  <p:clrMap bg1="lt1" tx1="dk1" bg2="lt2" tx2="dk2" accent1="accent1" accent2="accent2" accent3="accent3" accent4="accent4" accent5="accent5" accent6="accent6" hlink="hlink" folHlink="folHlink"/>
+  <p:notesStyle>
+    <a:lvl1pPr marL="0" algn="l" defTabSz="914400" rtl="0" eaLnBrk="1" latinLnBrk="0" hangingPunct="1">
+      <a:defRPr sz="1200" kern="1200">
+        <a:solidFill>
+          <a:schemeClr val="tx1"/>
+        </a:solidFill>
+        <a:latin typeface="+mn-lt"/>
+        <a:ea typeface="+mn-ea"/>
+        <a:cs typeface="+mn-cs"/>
+      </a:defRPr>
+    </a:lvl1pPr>
+    <a:lvl2pPr marL="457200" algn="l" defTabSz="914400" rtl="0" eaLnBrk="1" latinLnBrk="0" hangingPunct="1">
+      <a:defRPr sz="1200" kern="1200">
+        <a:solidFill>
+          <a:schemeClr val="tx1"/>
+        </a:solidFill>
+        <a:latin typeface="+mn-lt"/>
+        <a:ea typeface="+mn-ea"/>
+        <a:cs typeface="+mn-cs"/>
+      </a:defRPr>
+    </a:lvl2pPr>
+    <a:lvl3pPr marL="914400" algn="l" defTabSz="914400" rtl="0" eaLnBrk="1" latinLnBrk="0" hangingPunct="1">
+      <a:defRPr sz="1200" kern="1200">
+        <a:solidFill>
+          <a:schemeClr val="tx1"/>
+        </a:solidFill>
+        <a:latin typeface="+mn-lt"/>
+        <a:ea typeface="+mn-ea"/>
+        <a:cs typeface="+mn-cs"/>
+      </a:defRPr>
+    </a:lvl3pPr>
+    <a:lvl4pPr marL="1371600" algn="l" defTabSz="914400" rtl="0" eaLnBrk="1" latinLnBrk="0" hangingPunct="1">
+      <a:defRPr sz="1200" kern="1200">
+        <a:solidFill>
+          <a:schemeClr val="tx1"/>
+        </a:solidFill>
+        <a:latin typeface="+mn-lt"/>
+        <a:ea typeface="+mn-ea"/>
+        <a:cs typeface="+mn-cs"/>
+      </a:defRPr>
+    </a:lvl4pPr>
+    <a:lvl5pPr marL="1828800" algn="l" defTabSz="914400" rtl="0" eaLnBrk="1" latinLnBrk="0" hangingPunct="1">
+      <a:defRPr sz="1200" kern="1200">
+        <a:solidFill>
+          <a:schemeClr val="tx1"/>
+        </a:solidFill>
+        <a:latin typeface="+mn-lt"/>
+        <a:ea typeface="+mn-ea"/>
+        <a:cs typeface="+mn-cs"/>
+      </a:defRPr>
+    </a:lvl5pPr>
+    <a:lvl6pPr marL="2286000" algn="l" defTabSz="914400" rtl="0" eaLnBrk="1" latinLnBrk="0" hangingPunct="1">
+      <a:defRPr sz="1200" kern="1200">
+        <a:solidFill>
+          <a:schemeClr val="tx1"/>
+        </a:solidFill>
+        <a:latin typeface="+mn-lt"/>
+        <a:ea typeface="+mn-ea"/>
+        <a:cs typeface="+mn-cs"/>
+      </a:defRPr>
+    </a:lvl6pPr>
+    <a:lvl7pPr marL="2743200" algn="l" defTabSz="914400" rtl="0" eaLnBrk="1" latinLnBrk="0" hangingPunct="1">
+      <a:defRPr sz="1200" kern="1200">
+        <a:solidFill>
+          <a:schemeClr val="tx1"/>
+        </a:solidFill>
+        <a:latin typeface="+mn-lt"/>
+        <a:ea typeface="+mn-ea"/>
+        <a:cs typeface="+mn-cs"/>
+      </a:defRPr>
+    </a:lvl7pPr>
+    <a:lvl8pPr marL="3200400" algn="l" defTabSz="914400" rtl="0" eaLnBrk="1" latinLnBrk="0" hangingPunct="1">
+      <a:defRPr sz="1200" kern="1200">
+        <a:solidFill>
+          <a:schemeClr val="tx1"/>
+        </a:solidFill>
+        <a:latin typeface="+mn-lt"/>
+        <a:ea typeface="+mn-ea"/>
+        <a:cs typeface="+mn-cs"/>
+      </a:defRPr>
+    </a:lvl8pPr>
+    <a:lvl9pPr marL="3657600" algn="l" defTabSz="914400" rtl="0" eaLnBrk="1" latinLnBrk="0" hangingPunct="1">
+      <a:defRPr sz="1200" kern="1200">
+        <a:solidFill>
+          <a:schemeClr val="tx1"/>
+        </a:solidFill>
+        <a:latin typeface="+mn-lt"/>
+        <a:ea typeface="+mn-ea"/>
+        <a:cs typeface="+mn-cs"/>
+      </a:defRPr>
+    </a:lvl9pPr>
+  </p:notesStyle>
+</p:notesMaster>
+</file>
+
+<file path=ppt/notesSlides/notesSlide1.xml><?xml version="1.0" encoding="utf-8"?>
+<p:notes xmlns:a="http://schemas.openxmlformats.org/drawingml/2006/main" xmlns:r="http://schemas.openxmlformats.org/officeDocument/2006/relationships" xmlns:p="http://schemas.openxmlformats.org/presentationml/2006/main">
+  <p:cSld>
+    <p:spTree>
+      <p:nvGrpSpPr>
+        <p:cNvPr id="1" name=""/>
+        <p:cNvGrpSpPr/>
+        <p:nvPr/>
+      </p:nvGrpSpPr>
+      <p:grpSpPr>
+        <a:xfrm>
+          <a:off x="0" y="0"/>
+          <a:ext cx="0" cy="0"/>
+          <a:chOff x="0" y="0"/>
+          <a:chExt cx="0" cy="0"/>
+        </a:xfrm>
+      </p:grpSpPr>
+      <p:sp>
+        <p:nvSpPr>
+          <p:cNvPr id="2" name="Slide Image Placeholder 1"/>
+          <p:cNvSpPr>
+            <a:spLocks noGrp="1" noRot="1" noChangeAspect="1"/>
+          </p:cNvSpPr>
+          <p:nvPr>
+            <p:ph type="sldImg"/>
+          </p:nvPr>
+        </p:nvSpPr>
+        <p:spPr/>
+      </p:sp>
+      <p:sp>
+        <p:nvSpPr>
+          <p:cNvPr id="3" name="Notes Placeholder 2"/>
+          <p:cNvSpPr>
+            <a:spLocks noGrp="1"/>
+          </p:cNvSpPr>
+          <p:nvPr>
+            <p:ph type="body" idx="1"/>
+          </p:nvPr>
+        </p:nvSpPr>
+        <p:spPr/>
+        <p:txBody>
+          <a:bodyPr/>
+          <a:lstStyle/>
+          <a:p>
+            <a:endParaRPr lang="en-CA" dirty="0"/>
+          </a:p>
+        </p:txBody>
+      </p:sp>
+      <p:sp>
+        <p:nvSpPr>
+          <p:cNvPr id="4" name="Slide Number Placeholder 3"/>
+          <p:cNvSpPr>
+            <a:spLocks noGrp="1"/>
+          </p:cNvSpPr>
+          <p:nvPr>
+            <p:ph type="sldNum" sz="quarter" idx="5"/>
+          </p:nvPr>
+        </p:nvSpPr>
+        <p:spPr/>
+        <p:txBody>
+          <a:bodyPr/>
+          <a:lstStyle/>
+          <a:p>
+            <a:fld id="{5C2A1542-6F33-408E-AC39-5232C11A66FF}" type="slidenum">
+              <a:rPr lang="en-CA" smtClean="0"/>
+              <a:t>1</a:t>
+            </a:fld>
+            <a:endParaRPr lang="en-CA"/>
+          </a:p>
+        </p:txBody>
+      </p:sp>
+    </p:spTree>
+    <p:extLst>
+      <p:ext uri="{BB962C8B-B14F-4D97-AF65-F5344CB8AC3E}">
+        <p14:creationId xmlns:p14="http://schemas.microsoft.com/office/powerpoint/2010/main" val="857143852"/>
+      </p:ext>
+    </p:extLst>
+  </p:cSld>
+  <p:clrMapOvr>
+    <a:masterClrMapping/>
+  </p:clrMapOvr>
+</p:notes>
+</file>
+
+<file path=ppt/notesSlides/notesSlide10.xml><?xml version="1.0" encoding="utf-8"?>
+<p:notes xmlns:a="http://schemas.openxmlformats.org/drawingml/2006/main" xmlns:r="http://schemas.openxmlformats.org/officeDocument/2006/relationships" xmlns:p="http://schemas.openxmlformats.org/presentationml/2006/main">
+  <p:cSld>
+    <p:spTree>
+      <p:nvGrpSpPr>
+        <p:cNvPr id="1" name=""/>
+        <p:cNvGrpSpPr/>
+        <p:nvPr/>
+      </p:nvGrpSpPr>
+      <p:grpSpPr>
+        <a:xfrm>
+          <a:off x="0" y="0"/>
+          <a:ext cx="0" cy="0"/>
+          <a:chOff x="0" y="0"/>
+          <a:chExt cx="0" cy="0"/>
+        </a:xfrm>
+      </p:grpSpPr>
+      <p:sp>
+        <p:nvSpPr>
+          <p:cNvPr id="2" name="Slide Image Placeholder 1"/>
+          <p:cNvSpPr>
+            <a:spLocks noGrp="1" noRot="1" noChangeAspect="1"/>
+          </p:cNvSpPr>
+          <p:nvPr>
+            <p:ph type="sldImg"/>
+          </p:nvPr>
+        </p:nvSpPr>
+        <p:spPr/>
+      </p:sp>
+      <p:sp>
+        <p:nvSpPr>
+          <p:cNvPr id="3" name="Notes Placeholder 2"/>
+          <p:cNvSpPr>
+            <a:spLocks noGrp="1"/>
+          </p:cNvSpPr>
+          <p:nvPr>
+            <p:ph type="body" idx="1"/>
+          </p:nvPr>
+        </p:nvSpPr>
+        <p:spPr/>
+        <p:txBody>
+          <a:bodyPr/>
+          <a:lstStyle/>
+          <a:p>
+            <a:endParaRPr lang="en-CA" dirty="0"/>
+          </a:p>
+        </p:txBody>
+      </p:sp>
+      <p:sp>
+        <p:nvSpPr>
+          <p:cNvPr id="4" name="Slide Number Placeholder 3"/>
+          <p:cNvSpPr>
+            <a:spLocks noGrp="1"/>
+          </p:cNvSpPr>
+          <p:nvPr>
+            <p:ph type="sldNum" sz="quarter" idx="5"/>
+          </p:nvPr>
+        </p:nvSpPr>
+        <p:spPr/>
+        <p:txBody>
+          <a:bodyPr/>
+          <a:lstStyle/>
+          <a:p>
+            <a:fld id="{A4F92E4B-81BE-4B7A-B36D-25EE9615AC65}" type="slidenum">
+              <a:rPr lang="en-CA" smtClean="0"/>
+              <a:t>14</a:t>
+            </a:fld>
+            <a:endParaRPr lang="en-CA"/>
+          </a:p>
+        </p:txBody>
+      </p:sp>
+    </p:spTree>
+    <p:extLst>
+      <p:ext uri="{BB962C8B-B14F-4D97-AF65-F5344CB8AC3E}">
+        <p14:creationId xmlns:p14="http://schemas.microsoft.com/office/powerpoint/2010/main" val="3087994279"/>
+      </p:ext>
+    </p:extLst>
+  </p:cSld>
+  <p:clrMapOvr>
+    <a:masterClrMapping/>
+  </p:clrMapOvr>
+</p:notes>
+</file>
+
+<file path=ppt/notesSlides/notesSlide2.xml><?xml version="1.0" encoding="utf-8"?>
+<p:notes xmlns:a="http://schemas.openxmlformats.org/drawingml/2006/main" xmlns:r="http://schemas.openxmlformats.org/officeDocument/2006/relationships" xmlns:p="http://schemas.openxmlformats.org/presentationml/2006/main">
+  <p:cSld>
+    <p:spTree>
+      <p:nvGrpSpPr>
+        <p:cNvPr id="1" name=""/>
+        <p:cNvGrpSpPr/>
+        <p:nvPr/>
+      </p:nvGrpSpPr>
+      <p:grpSpPr>
+        <a:xfrm>
+          <a:off x="0" y="0"/>
+          <a:ext cx="0" cy="0"/>
+          <a:chOff x="0" y="0"/>
+          <a:chExt cx="0" cy="0"/>
+        </a:xfrm>
+      </p:grpSpPr>
+      <p:sp>
+        <p:nvSpPr>
+          <p:cNvPr id="2" name="Slide Image Placeholder 1"/>
+          <p:cNvSpPr>
+            <a:spLocks noGrp="1" noRot="1" noChangeAspect="1"/>
+          </p:cNvSpPr>
+          <p:nvPr>
+            <p:ph type="sldImg"/>
+          </p:nvPr>
+        </p:nvSpPr>
+        <p:spPr/>
+      </p:sp>
+      <p:sp>
+        <p:nvSpPr>
+          <p:cNvPr id="3" name="Notes Placeholder 2"/>
+          <p:cNvSpPr>
+            <a:spLocks noGrp="1"/>
+          </p:cNvSpPr>
+          <p:nvPr>
+            <p:ph type="body" idx="1"/>
+          </p:nvPr>
+        </p:nvSpPr>
+        <p:spPr/>
+        <p:txBody>
+          <a:bodyPr/>
+          <a:lstStyle/>
+          <a:p>
+            <a:r>
+              <a:rPr lang="en-US" dirty="0"/>
+              <a:t>Want to add actual mesh subset image from 3d mesh, also indicate what info we actually extracted from the mesh files for the purposes of the sim</a:t>
+            </a:r>
+            <a:endParaRPr lang="en-CA" dirty="0"/>
+          </a:p>
+        </p:txBody>
+      </p:sp>
+      <p:sp>
+        <p:nvSpPr>
+          <p:cNvPr id="4" name="Slide Number Placeholder 3"/>
+          <p:cNvSpPr>
+            <a:spLocks noGrp="1"/>
+          </p:cNvSpPr>
+          <p:nvPr>
+            <p:ph type="sldNum" sz="quarter" idx="5"/>
+          </p:nvPr>
+        </p:nvSpPr>
+        <p:spPr/>
+        <p:txBody>
+          <a:bodyPr/>
+          <a:lstStyle/>
+          <a:p>
+            <a:fld id="{5C2A1542-6F33-408E-AC39-5232C11A66FF}" type="slidenum">
+              <a:rPr lang="en-CA" smtClean="0"/>
+              <a:t>5</a:t>
+            </a:fld>
+            <a:endParaRPr lang="en-CA"/>
+          </a:p>
+        </p:txBody>
+      </p:sp>
+    </p:spTree>
+    <p:extLst>
+      <p:ext uri="{BB962C8B-B14F-4D97-AF65-F5344CB8AC3E}">
+        <p14:creationId xmlns:p14="http://schemas.microsoft.com/office/powerpoint/2010/main" val="2271637743"/>
+      </p:ext>
+    </p:extLst>
+  </p:cSld>
+  <p:clrMapOvr>
+    <a:masterClrMapping/>
+  </p:clrMapOvr>
+</p:notes>
+</file>
+
+<file path=ppt/notesSlides/notesSlide3.xml><?xml version="1.0" encoding="utf-8"?>
+<p:notes xmlns:a="http://schemas.openxmlformats.org/drawingml/2006/main" xmlns:r="http://schemas.openxmlformats.org/officeDocument/2006/relationships" xmlns:p="http://schemas.openxmlformats.org/presentationml/2006/main">
+  <p:cSld>
+    <p:spTree>
+      <p:nvGrpSpPr>
+        <p:cNvPr id="1" name=""/>
+        <p:cNvGrpSpPr/>
+        <p:nvPr/>
+      </p:nvGrpSpPr>
+      <p:grpSpPr>
+        <a:xfrm>
+          <a:off x="0" y="0"/>
+          <a:ext cx="0" cy="0"/>
+          <a:chOff x="0" y="0"/>
+          <a:chExt cx="0" cy="0"/>
+        </a:xfrm>
+      </p:grpSpPr>
+      <p:sp>
+        <p:nvSpPr>
+          <p:cNvPr id="2" name="Slide Image Placeholder 1"/>
+          <p:cNvSpPr>
+            <a:spLocks noGrp="1" noRot="1" noChangeAspect="1"/>
+          </p:cNvSpPr>
+          <p:nvPr>
+            <p:ph type="sldImg"/>
+          </p:nvPr>
+        </p:nvSpPr>
+        <p:spPr/>
+      </p:sp>
+      <p:sp>
+        <p:nvSpPr>
+          <p:cNvPr id="3" name="Notes Placeholder 2"/>
+          <p:cNvSpPr>
+            <a:spLocks noGrp="1"/>
+          </p:cNvSpPr>
+          <p:nvPr>
+            <p:ph type="body" idx="1"/>
+          </p:nvPr>
+        </p:nvSpPr>
+        <p:spPr/>
+        <p:txBody>
+          <a:bodyPr/>
+          <a:lstStyle/>
+          <a:p>
+            <a:r>
+              <a:rPr lang="en-US" dirty="0"/>
+              <a:t>Create an illustration that contains both arteries and veins with an indication of compartments that is based on the illustrations from the paper. Promise we will go on a BVs journey</a:t>
+            </a:r>
+            <a:endParaRPr lang="en-CA" dirty="0"/>
+          </a:p>
+        </p:txBody>
+      </p:sp>
+      <p:sp>
+        <p:nvSpPr>
+          <p:cNvPr id="4" name="Slide Number Placeholder 3"/>
+          <p:cNvSpPr>
+            <a:spLocks noGrp="1"/>
+          </p:cNvSpPr>
+          <p:nvPr>
+            <p:ph type="sldNum" sz="quarter" idx="5"/>
+          </p:nvPr>
+        </p:nvSpPr>
+        <p:spPr/>
+        <p:txBody>
+          <a:bodyPr/>
+          <a:lstStyle/>
+          <a:p>
+            <a:fld id="{5C2A1542-6F33-408E-AC39-5232C11A66FF}" type="slidenum">
+              <a:rPr lang="en-CA" smtClean="0"/>
+              <a:t>6</a:t>
+            </a:fld>
+            <a:endParaRPr lang="en-CA"/>
+          </a:p>
+        </p:txBody>
+      </p:sp>
+    </p:spTree>
+    <p:extLst>
+      <p:ext uri="{BB962C8B-B14F-4D97-AF65-F5344CB8AC3E}">
+        <p14:creationId xmlns:p14="http://schemas.microsoft.com/office/powerpoint/2010/main" val="4121113550"/>
+      </p:ext>
+    </p:extLst>
+  </p:cSld>
+  <p:clrMapOvr>
+    <a:masterClrMapping/>
+  </p:clrMapOvr>
+</p:notes>
+</file>
+
+<file path=ppt/notesSlides/notesSlide4.xml><?xml version="1.0" encoding="utf-8"?>
+<p:notes xmlns:a="http://schemas.openxmlformats.org/drawingml/2006/main" xmlns:r="http://schemas.openxmlformats.org/officeDocument/2006/relationships" xmlns:p="http://schemas.openxmlformats.org/presentationml/2006/main">
+  <p:cSld>
+    <p:spTree>
+      <p:nvGrpSpPr>
+        <p:cNvPr id="1" name=""/>
+        <p:cNvGrpSpPr/>
+        <p:nvPr/>
+      </p:nvGrpSpPr>
+      <p:grpSpPr>
+        <a:xfrm>
+          <a:off x="0" y="0"/>
+          <a:ext cx="0" cy="0"/>
+          <a:chOff x="0" y="0"/>
+          <a:chExt cx="0" cy="0"/>
+        </a:xfrm>
+      </p:grpSpPr>
+      <p:sp>
+        <p:nvSpPr>
+          <p:cNvPr id="2" name="Slide Image Placeholder 1"/>
+          <p:cNvSpPr>
+            <a:spLocks noGrp="1" noRot="1" noChangeAspect="1"/>
+          </p:cNvSpPr>
+          <p:nvPr>
+            <p:ph type="sldImg"/>
+          </p:nvPr>
+        </p:nvSpPr>
+        <p:spPr/>
+      </p:sp>
+      <p:sp>
+        <p:nvSpPr>
+          <p:cNvPr id="3" name="Notes Placeholder 2"/>
+          <p:cNvSpPr>
+            <a:spLocks noGrp="1"/>
+          </p:cNvSpPr>
+          <p:nvPr>
+            <p:ph type="body" idx="1"/>
+          </p:nvPr>
+        </p:nvSpPr>
+        <p:spPr/>
+        <p:txBody>
+          <a:bodyPr/>
+          <a:lstStyle/>
+          <a:p>
+            <a:r>
+              <a:rPr lang="en-US" dirty="0"/>
+              <a:t>1D modelling, what is it, how are vessels connected to each other, how does </a:t>
+            </a:r>
+            <a:r>
+              <a:rPr lang="en-US" dirty="0" err="1"/>
+              <a:t>bv</a:t>
+            </a:r>
+            <a:r>
+              <a:rPr lang="en-US" dirty="0"/>
+              <a:t> move down the vessels starting at the heart.</a:t>
+            </a:r>
+            <a:endParaRPr lang="en-CA" dirty="0"/>
+          </a:p>
+        </p:txBody>
+      </p:sp>
+      <p:sp>
+        <p:nvSpPr>
+          <p:cNvPr id="4" name="Slide Number Placeholder 3"/>
+          <p:cNvSpPr>
+            <a:spLocks noGrp="1"/>
+          </p:cNvSpPr>
+          <p:nvPr>
+            <p:ph type="sldNum" sz="quarter" idx="5"/>
+          </p:nvPr>
+        </p:nvSpPr>
+        <p:spPr/>
+        <p:txBody>
+          <a:bodyPr/>
+          <a:lstStyle/>
+          <a:p>
+            <a:fld id="{5C2A1542-6F33-408E-AC39-5232C11A66FF}" type="slidenum">
+              <a:rPr lang="en-CA" smtClean="0"/>
+              <a:t>7</a:t>
+            </a:fld>
+            <a:endParaRPr lang="en-CA"/>
+          </a:p>
+        </p:txBody>
+      </p:sp>
+    </p:spTree>
+    <p:extLst>
+      <p:ext uri="{BB962C8B-B14F-4D97-AF65-F5344CB8AC3E}">
+        <p14:creationId xmlns:p14="http://schemas.microsoft.com/office/powerpoint/2010/main" val="980482677"/>
+      </p:ext>
+    </p:extLst>
+  </p:cSld>
+  <p:clrMapOvr>
+    <a:masterClrMapping/>
+  </p:clrMapOvr>
+</p:notes>
+</file>
+
+<file path=ppt/notesSlides/notesSlide5.xml><?xml version="1.0" encoding="utf-8"?>
+<p:notes xmlns:a="http://schemas.openxmlformats.org/drawingml/2006/main" xmlns:r="http://schemas.openxmlformats.org/officeDocument/2006/relationships" xmlns:p="http://schemas.openxmlformats.org/presentationml/2006/main">
+  <p:cSld>
+    <p:spTree>
+      <p:nvGrpSpPr>
+        <p:cNvPr id="1" name=""/>
+        <p:cNvGrpSpPr/>
+        <p:nvPr/>
+      </p:nvGrpSpPr>
+      <p:grpSpPr>
+        <a:xfrm>
+          <a:off x="0" y="0"/>
+          <a:ext cx="0" cy="0"/>
+          <a:chOff x="0" y="0"/>
+          <a:chExt cx="0" cy="0"/>
+        </a:xfrm>
+      </p:grpSpPr>
+      <p:sp>
+        <p:nvSpPr>
+          <p:cNvPr id="2" name="Slide Image Placeholder 1"/>
+          <p:cNvSpPr>
+            <a:spLocks noGrp="1" noRot="1" noChangeAspect="1"/>
+          </p:cNvSpPr>
+          <p:nvPr>
+            <p:ph type="sldImg"/>
+          </p:nvPr>
+        </p:nvSpPr>
+        <p:spPr/>
+      </p:sp>
+      <p:sp>
+        <p:nvSpPr>
+          <p:cNvPr id="3" name="Notes Placeholder 2"/>
+          <p:cNvSpPr>
+            <a:spLocks noGrp="1"/>
+          </p:cNvSpPr>
+          <p:nvPr>
+            <p:ph type="body" idx="1"/>
+          </p:nvPr>
+        </p:nvSpPr>
+        <p:spPr/>
+        <p:txBody>
+          <a:bodyPr/>
+          <a:lstStyle/>
+          <a:p>
+            <a:r>
+              <a:rPr lang="en-US" dirty="0"/>
+              <a:t>What happens when the BV reaches a compartment, </a:t>
+            </a:r>
+            <a:endParaRPr lang="en-CA" dirty="0"/>
+          </a:p>
+        </p:txBody>
+      </p:sp>
+      <p:sp>
+        <p:nvSpPr>
+          <p:cNvPr id="4" name="Slide Number Placeholder 3"/>
+          <p:cNvSpPr>
+            <a:spLocks noGrp="1"/>
+          </p:cNvSpPr>
+          <p:nvPr>
+            <p:ph type="sldNum" sz="quarter" idx="5"/>
+          </p:nvPr>
+        </p:nvSpPr>
+        <p:spPr/>
+        <p:txBody>
+          <a:bodyPr/>
+          <a:lstStyle/>
+          <a:p>
+            <a:fld id="{5C2A1542-6F33-408E-AC39-5232C11A66FF}" type="slidenum">
+              <a:rPr lang="en-CA" smtClean="0"/>
+              <a:t>8</a:t>
+            </a:fld>
+            <a:endParaRPr lang="en-CA"/>
+          </a:p>
+        </p:txBody>
+      </p:sp>
+    </p:spTree>
+    <p:extLst>
+      <p:ext uri="{BB962C8B-B14F-4D97-AF65-F5344CB8AC3E}">
+        <p14:creationId xmlns:p14="http://schemas.microsoft.com/office/powerpoint/2010/main" val="2631160625"/>
+      </p:ext>
+    </p:extLst>
+  </p:cSld>
+  <p:clrMapOvr>
+    <a:masterClrMapping/>
+  </p:clrMapOvr>
+</p:notes>
+</file>
+
+<file path=ppt/notesSlides/notesSlide6.xml><?xml version="1.0" encoding="utf-8"?>
+<p:notes xmlns:a="http://schemas.openxmlformats.org/drawingml/2006/main" xmlns:r="http://schemas.openxmlformats.org/officeDocument/2006/relationships" xmlns:p="http://schemas.openxmlformats.org/presentationml/2006/main">
+  <p:cSld>
+    <p:spTree>
+      <p:nvGrpSpPr>
+        <p:cNvPr id="1" name=""/>
+        <p:cNvGrpSpPr/>
+        <p:nvPr/>
+      </p:nvGrpSpPr>
+      <p:grpSpPr>
+        <a:xfrm>
+          <a:off x="0" y="0"/>
+          <a:ext cx="0" cy="0"/>
+          <a:chOff x="0" y="0"/>
+          <a:chExt cx="0" cy="0"/>
+        </a:xfrm>
+      </p:grpSpPr>
+      <p:sp>
+        <p:nvSpPr>
+          <p:cNvPr id="2" name="Slide Image Placeholder 1"/>
+          <p:cNvSpPr>
+            <a:spLocks noGrp="1" noRot="1" noChangeAspect="1"/>
+          </p:cNvSpPr>
+          <p:nvPr>
+            <p:ph type="sldImg"/>
+          </p:nvPr>
+        </p:nvSpPr>
+        <p:spPr/>
+      </p:sp>
+      <p:sp>
+        <p:nvSpPr>
+          <p:cNvPr id="3" name="Notes Placeholder 2"/>
+          <p:cNvSpPr>
+            <a:spLocks noGrp="1"/>
+          </p:cNvSpPr>
+          <p:nvPr>
+            <p:ph type="body" idx="1"/>
+          </p:nvPr>
+        </p:nvSpPr>
+        <p:spPr/>
+        <p:txBody>
+          <a:bodyPr/>
+          <a:lstStyle/>
+          <a:p>
+            <a:r>
+              <a:rPr lang="en-US" dirty="0"/>
+              <a:t>Where did the data come from! What validates or doesn’t validate it</a:t>
+            </a:r>
+            <a:endParaRPr lang="en-CA" dirty="0"/>
+          </a:p>
+        </p:txBody>
+      </p:sp>
+      <p:sp>
+        <p:nvSpPr>
+          <p:cNvPr id="4" name="Slide Number Placeholder 3"/>
+          <p:cNvSpPr>
+            <a:spLocks noGrp="1"/>
+          </p:cNvSpPr>
+          <p:nvPr>
+            <p:ph type="sldNum" sz="quarter" idx="5"/>
+          </p:nvPr>
+        </p:nvSpPr>
+        <p:spPr/>
+        <p:txBody>
+          <a:bodyPr/>
+          <a:lstStyle/>
+          <a:p>
+            <a:fld id="{5C2A1542-6F33-408E-AC39-5232C11A66FF}" type="slidenum">
+              <a:rPr lang="en-CA" smtClean="0"/>
+              <a:t>9</a:t>
+            </a:fld>
+            <a:endParaRPr lang="en-CA"/>
+          </a:p>
+        </p:txBody>
+      </p:sp>
+    </p:spTree>
+    <p:extLst>
+      <p:ext uri="{BB962C8B-B14F-4D97-AF65-F5344CB8AC3E}">
+        <p14:creationId xmlns:p14="http://schemas.microsoft.com/office/powerpoint/2010/main" val="995576684"/>
+      </p:ext>
+    </p:extLst>
+  </p:cSld>
+  <p:clrMapOvr>
+    <a:masterClrMapping/>
+  </p:clrMapOvr>
+</p:notes>
+</file>
+
+<file path=ppt/notesSlides/notesSlide7.xml><?xml version="1.0" encoding="utf-8"?>
+<p:notes xmlns:a="http://schemas.openxmlformats.org/drawingml/2006/main" xmlns:r="http://schemas.openxmlformats.org/officeDocument/2006/relationships" xmlns:p="http://schemas.openxmlformats.org/presentationml/2006/main">
+  <p:cSld>
+    <p:spTree>
+      <p:nvGrpSpPr>
+        <p:cNvPr id="1" name=""/>
+        <p:cNvGrpSpPr/>
+        <p:nvPr/>
+      </p:nvGrpSpPr>
+      <p:grpSpPr>
+        <a:xfrm>
+          <a:off x="0" y="0"/>
+          <a:ext cx="0" cy="0"/>
+          <a:chOff x="0" y="0"/>
+          <a:chExt cx="0" cy="0"/>
+        </a:xfrm>
+      </p:grpSpPr>
+      <p:sp>
+        <p:nvSpPr>
+          <p:cNvPr id="2" name="Slide Image Placeholder 1"/>
+          <p:cNvSpPr>
+            <a:spLocks noGrp="1" noRot="1" noChangeAspect="1"/>
+          </p:cNvSpPr>
+          <p:nvPr>
+            <p:ph type="sldImg"/>
+          </p:nvPr>
+        </p:nvSpPr>
+        <p:spPr/>
+      </p:sp>
+      <p:sp>
+        <p:nvSpPr>
+          <p:cNvPr id="3" name="Notes Placeholder 2"/>
+          <p:cNvSpPr>
+            <a:spLocks noGrp="1"/>
+          </p:cNvSpPr>
+          <p:nvPr>
+            <p:ph type="body" idx="1"/>
+          </p:nvPr>
+        </p:nvSpPr>
+        <p:spPr/>
+        <p:txBody>
+          <a:bodyPr/>
+          <a:lstStyle/>
+          <a:p>
+            <a:r>
+              <a:rPr lang="en-US" dirty="0"/>
+              <a:t>What we used to determine the initial estimates, how we tuned the values and the resulting BV </a:t>
+            </a:r>
+            <a:r>
+              <a:rPr lang="en-US" dirty="0" err="1"/>
+              <a:t>dist</a:t>
+            </a:r>
+            <a:endParaRPr lang="en-CA" dirty="0"/>
+          </a:p>
+        </p:txBody>
+      </p:sp>
+      <p:sp>
+        <p:nvSpPr>
+          <p:cNvPr id="4" name="Slide Number Placeholder 3"/>
+          <p:cNvSpPr>
+            <a:spLocks noGrp="1"/>
+          </p:cNvSpPr>
+          <p:nvPr>
+            <p:ph type="sldNum" sz="quarter" idx="5"/>
+          </p:nvPr>
+        </p:nvSpPr>
+        <p:spPr/>
+        <p:txBody>
+          <a:bodyPr/>
+          <a:lstStyle/>
+          <a:p>
+            <a:fld id="{5C2A1542-6F33-408E-AC39-5232C11A66FF}" type="slidenum">
+              <a:rPr lang="en-CA" smtClean="0"/>
+              <a:t>10</a:t>
+            </a:fld>
+            <a:endParaRPr lang="en-CA"/>
+          </a:p>
+        </p:txBody>
+      </p:sp>
+    </p:spTree>
+    <p:extLst>
+      <p:ext uri="{BB962C8B-B14F-4D97-AF65-F5344CB8AC3E}">
+        <p14:creationId xmlns:p14="http://schemas.microsoft.com/office/powerpoint/2010/main" val="3639498453"/>
+      </p:ext>
+    </p:extLst>
+  </p:cSld>
+  <p:clrMapOvr>
+    <a:masterClrMapping/>
+  </p:clrMapOvr>
+</p:notes>
+</file>
+
+<file path=ppt/notesSlides/notesSlide8.xml><?xml version="1.0" encoding="utf-8"?>
+<p:notes xmlns:a="http://schemas.openxmlformats.org/drawingml/2006/main" xmlns:r="http://schemas.openxmlformats.org/officeDocument/2006/relationships" xmlns:p="http://schemas.openxmlformats.org/presentationml/2006/main">
+  <p:cSld>
+    <p:spTree>
+      <p:nvGrpSpPr>
+        <p:cNvPr id="1" name=""/>
+        <p:cNvGrpSpPr/>
+        <p:nvPr/>
+      </p:nvGrpSpPr>
+      <p:grpSpPr>
+        <a:xfrm>
+          <a:off x="0" y="0"/>
+          <a:ext cx="0" cy="0"/>
+          <a:chOff x="0" y="0"/>
+          <a:chExt cx="0" cy="0"/>
+        </a:xfrm>
+      </p:grpSpPr>
+      <p:sp>
+        <p:nvSpPr>
+          <p:cNvPr id="2" name="Slide Image Placeholder 1"/>
+          <p:cNvSpPr>
+            <a:spLocks noGrp="1" noRot="1" noChangeAspect="1"/>
+          </p:cNvSpPr>
+          <p:nvPr>
+            <p:ph type="sldImg"/>
+          </p:nvPr>
+        </p:nvSpPr>
+        <p:spPr/>
+      </p:sp>
+      <p:sp>
+        <p:nvSpPr>
+          <p:cNvPr id="3" name="Notes Placeholder 2"/>
+          <p:cNvSpPr>
+            <a:spLocks noGrp="1"/>
+          </p:cNvSpPr>
+          <p:nvPr>
+            <p:ph type="body" idx="1"/>
+          </p:nvPr>
+        </p:nvSpPr>
+        <p:spPr/>
+        <p:txBody>
+          <a:bodyPr/>
+          <a:lstStyle/>
+          <a:p>
+            <a:r>
+              <a:rPr lang="en-US" dirty="0"/>
+              <a:t>Why we need to know this, how we determined it, results</a:t>
+            </a:r>
+            <a:endParaRPr lang="en-CA" dirty="0"/>
+          </a:p>
+        </p:txBody>
+      </p:sp>
+      <p:sp>
+        <p:nvSpPr>
+          <p:cNvPr id="4" name="Slide Number Placeholder 3"/>
+          <p:cNvSpPr>
+            <a:spLocks noGrp="1"/>
+          </p:cNvSpPr>
+          <p:nvPr>
+            <p:ph type="sldNum" sz="quarter" idx="5"/>
+          </p:nvPr>
+        </p:nvSpPr>
+        <p:spPr/>
+        <p:txBody>
+          <a:bodyPr/>
+          <a:lstStyle/>
+          <a:p>
+            <a:fld id="{5C2A1542-6F33-408E-AC39-5232C11A66FF}" type="slidenum">
+              <a:rPr lang="en-CA" smtClean="0"/>
+              <a:t>11</a:t>
+            </a:fld>
+            <a:endParaRPr lang="en-CA"/>
+          </a:p>
+        </p:txBody>
+      </p:sp>
+    </p:spTree>
+    <p:extLst>
+      <p:ext uri="{BB962C8B-B14F-4D97-AF65-F5344CB8AC3E}">
+        <p14:creationId xmlns:p14="http://schemas.microsoft.com/office/powerpoint/2010/main" val="969050603"/>
+      </p:ext>
+    </p:extLst>
+  </p:cSld>
+  <p:clrMapOvr>
+    <a:masterClrMapping/>
+  </p:clrMapOvr>
+</p:notes>
+</file>
+
+<file path=ppt/notesSlides/notesSlide9.xml><?xml version="1.0" encoding="utf-8"?>
+<p:notes xmlns:a="http://schemas.openxmlformats.org/drawingml/2006/main" xmlns:r="http://schemas.openxmlformats.org/officeDocument/2006/relationships" xmlns:p="http://schemas.openxmlformats.org/presentationml/2006/main">
+  <p:cSld>
+    <p:spTree>
+      <p:nvGrpSpPr>
+        <p:cNvPr id="1" name=""/>
+        <p:cNvGrpSpPr/>
+        <p:nvPr/>
+      </p:nvGrpSpPr>
+      <p:grpSpPr>
+        <a:xfrm>
+          <a:off x="0" y="0"/>
+          <a:ext cx="0" cy="0"/>
+          <a:chOff x="0" y="0"/>
+          <a:chExt cx="0" cy="0"/>
+        </a:xfrm>
+      </p:grpSpPr>
+      <p:sp>
+        <p:nvSpPr>
+          <p:cNvPr id="2" name="Slide Image Placeholder 1"/>
+          <p:cNvSpPr>
+            <a:spLocks noGrp="1" noRot="1" noChangeAspect="1"/>
+          </p:cNvSpPr>
+          <p:nvPr>
+            <p:ph type="sldImg"/>
+          </p:nvPr>
+        </p:nvSpPr>
+        <p:spPr/>
+      </p:sp>
+      <p:sp>
+        <p:nvSpPr>
+          <p:cNvPr id="3" name="Notes Placeholder 2"/>
+          <p:cNvSpPr>
+            <a:spLocks noGrp="1"/>
+          </p:cNvSpPr>
+          <p:nvPr>
+            <p:ph type="body" idx="1"/>
+          </p:nvPr>
+        </p:nvSpPr>
+        <p:spPr/>
+        <p:txBody>
+          <a:bodyPr/>
+          <a:lstStyle/>
+          <a:p>
+            <a:r>
+              <a:rPr lang="en-US" dirty="0"/>
+              <a:t>Using 4d mc to determine does to locations of </a:t>
+            </a:r>
+            <a:r>
+              <a:rPr lang="en-US" dirty="0" err="1"/>
+              <a:t>xcat</a:t>
+            </a:r>
+            <a:r>
+              <a:rPr lang="en-US" dirty="0"/>
+              <a:t> during </a:t>
+            </a:r>
+            <a:r>
+              <a:rPr lang="en-US" dirty="0" err="1"/>
+              <a:t>tbi</a:t>
+            </a:r>
+            <a:r>
+              <a:rPr lang="en-US"/>
+              <a:t> methods</a:t>
+            </a:r>
+            <a:endParaRPr lang="en-CA"/>
+          </a:p>
+        </p:txBody>
+      </p:sp>
+      <p:sp>
+        <p:nvSpPr>
+          <p:cNvPr id="4" name="Slide Number Placeholder 3"/>
+          <p:cNvSpPr>
+            <a:spLocks noGrp="1"/>
+          </p:cNvSpPr>
+          <p:nvPr>
+            <p:ph type="sldNum" sz="quarter" idx="5"/>
+          </p:nvPr>
+        </p:nvSpPr>
+        <p:spPr/>
+        <p:txBody>
+          <a:bodyPr/>
+          <a:lstStyle/>
+          <a:p>
+            <a:fld id="{5C2A1542-6F33-408E-AC39-5232C11A66FF}" type="slidenum">
+              <a:rPr lang="en-CA" smtClean="0"/>
+              <a:t>12</a:t>
+            </a:fld>
+            <a:endParaRPr lang="en-CA"/>
+          </a:p>
+        </p:txBody>
+      </p:sp>
+    </p:spTree>
+    <p:extLst>
+      <p:ext uri="{BB962C8B-B14F-4D97-AF65-F5344CB8AC3E}">
+        <p14:creationId xmlns:p14="http://schemas.microsoft.com/office/powerpoint/2010/main" val="2267054878"/>
+      </p:ext>
+    </p:extLst>
+  </p:cSld>
+  <p:clrMapOvr>
+    <a:masterClrMapping/>
+  </p:clrMapOvr>
+</p:notes>
 </file>
 
 <file path=ppt/slideLayouts/slideLayout1.xml><?xml version="1.0" encoding="utf-8"?>
@@ -3760,11 +5014,7 @@
           <a:p>
             <a:r>
               <a:rPr lang="en-US" sz="2400" dirty="0"/>
-              <a:t>Model Components - </a:t>
-            </a:r>
-            <a:r>
-              <a:rPr lang="en-US" sz="2400" b="1" dirty="0"/>
-              <a:t>Compartments</a:t>
+              <a:t>Model Tuning</a:t>
             </a:r>
             <a:endParaRPr lang="en-CA" sz="2400" dirty="0"/>
           </a:p>
@@ -3775,7 +5025,7 @@
           <p:cNvPr id="2" name="TextBox 1">
             <a:extLst>
               <a:ext uri="{FF2B5EF4-FFF2-40B4-BE49-F238E27FC236}">
-                <a16:creationId xmlns:a16="http://schemas.microsoft.com/office/drawing/2014/main" id="{19C695FA-AD9D-882B-AFD7-2C4D89C65984}"/>
+                <a16:creationId xmlns:a16="http://schemas.microsoft.com/office/drawing/2014/main" id="{34796938-FE8E-B250-2E91-CB1AB7CFEB0C}"/>
               </a:ext>
             </a:extLst>
           </p:cNvPr>
@@ -3785,7 +5035,7 @@
         <p:spPr>
           <a:xfrm>
             <a:off x="962952" y="1327094"/>
-            <a:ext cx="1035781" cy="1200329"/>
+            <a:ext cx="1035781" cy="2031325"/>
           </a:xfrm>
           <a:prstGeom prst="rect">
             <a:avLst/>
@@ -3800,15 +5050,7 @@
           <a:p>
             <a:r>
               <a:rPr lang="en-US" dirty="0"/>
-              <a:t>od </a:t>
-            </a:r>
-            <a:r>
-              <a:rPr lang="en-US" dirty="0" err="1"/>
-              <a:t>compatments</a:t>
-            </a:r>
-            <a:r>
-              <a:rPr lang="en-US" dirty="0"/>
-              <a:t> image</a:t>
+              <a:t>Compartments with tuning applied highlights</a:t>
             </a:r>
             <a:endParaRPr lang="en-CA" dirty="0"/>
           </a:p>
@@ -3819,7 +5061,7 @@
           <p:cNvPr id="3" name="TextBox 2">
             <a:extLst>
               <a:ext uri="{FF2B5EF4-FFF2-40B4-BE49-F238E27FC236}">
-                <a16:creationId xmlns:a16="http://schemas.microsoft.com/office/drawing/2014/main" id="{51196DD4-C2EA-350C-D9F0-D864AE27B815}"/>
+                <a16:creationId xmlns:a16="http://schemas.microsoft.com/office/drawing/2014/main" id="{35243EA1-286A-7FA5-EE0B-CBBCC185F1FE}"/>
               </a:ext>
             </a:extLst>
           </p:cNvPr>
@@ -3844,13 +5086,13 @@
           <a:p>
             <a:r>
               <a:rPr lang="en-US" dirty="0"/>
-              <a:t>0d modelling</a:t>
+              <a:t>Gold star, initial estimates, tuning, results</a:t>
             </a:r>
           </a:p>
           <a:p>
             <a:r>
               <a:rPr lang="en-US" dirty="0"/>
-              <a:t>Source tunning</a:t>
+              <a:t>+</a:t>
             </a:r>
             <a:endParaRPr lang="en-CA" dirty="0"/>
           </a:p>
@@ -3859,7 +5101,7 @@
     </p:spTree>
     <p:extLst>
       <p:ext uri="{BB962C8B-B14F-4D97-AF65-F5344CB8AC3E}">
-        <p14:creationId xmlns:p14="http://schemas.microsoft.com/office/powerpoint/2010/main" val="1045741411"/>
+        <p14:creationId xmlns:p14="http://schemas.microsoft.com/office/powerpoint/2010/main" val="1211893413"/>
       </p:ext>
     </p:extLst>
   </p:cSld>
@@ -4054,296 +5296,14 @@
           <a:p>
             <a:r>
               <a:rPr lang="en-US" sz="2400" dirty="0"/>
-              <a:t>Model Tuning</a:t>
+              <a:t>Steady State Identification</a:t>
             </a:r>
             <a:endParaRPr lang="en-CA" sz="2400" dirty="0"/>
           </a:p>
         </p:txBody>
       </p:sp>
-      <p:sp>
-        <p:nvSpPr>
-          <p:cNvPr id="2" name="TextBox 1">
-            <a:extLst>
-              <a:ext uri="{FF2B5EF4-FFF2-40B4-BE49-F238E27FC236}">
-                <a16:creationId xmlns:a16="http://schemas.microsoft.com/office/drawing/2014/main" id="{34796938-FE8E-B250-2E91-CB1AB7CFEB0C}"/>
-              </a:ext>
-            </a:extLst>
-          </p:cNvPr>
-          <p:cNvSpPr txBox="1"/>
-          <p:nvPr/>
-        </p:nvSpPr>
-        <p:spPr>
-          <a:xfrm>
-            <a:off x="962952" y="1327094"/>
-            <a:ext cx="1035781" cy="2031325"/>
-          </a:xfrm>
-          <a:prstGeom prst="rect">
-            <a:avLst/>
-          </a:prstGeom>
-          <a:noFill/>
-        </p:spPr>
-        <p:txBody>
-          <a:bodyPr wrap="square" rtlCol="0">
-            <a:spAutoFit/>
-          </a:bodyPr>
-          <a:lstStyle/>
-          <a:p>
-            <a:r>
-              <a:rPr lang="en-US" dirty="0"/>
-              <a:t>Compartments with tuning applied highlights</a:t>
-            </a:r>
-            <a:endParaRPr lang="en-CA" dirty="0"/>
-          </a:p>
-        </p:txBody>
-      </p:sp>
-      <p:sp>
-        <p:nvSpPr>
-          <p:cNvPr id="3" name="TextBox 2">
-            <a:extLst>
-              <a:ext uri="{FF2B5EF4-FFF2-40B4-BE49-F238E27FC236}">
-                <a16:creationId xmlns:a16="http://schemas.microsoft.com/office/drawing/2014/main" id="{35243EA1-286A-7FA5-EE0B-CBBCC185F1FE}"/>
-              </a:ext>
-            </a:extLst>
-          </p:cNvPr>
-          <p:cNvSpPr txBox="1"/>
-          <p:nvPr/>
-        </p:nvSpPr>
-        <p:spPr>
-          <a:xfrm>
-            <a:off x="4021742" y="708053"/>
-            <a:ext cx="7719801" cy="646331"/>
-          </a:xfrm>
-          <a:prstGeom prst="rect">
-            <a:avLst/>
-          </a:prstGeom>
-          <a:noFill/>
-        </p:spPr>
-        <p:txBody>
-          <a:bodyPr wrap="square" rtlCol="0">
-            <a:spAutoFit/>
-          </a:bodyPr>
-          <a:lstStyle/>
-          <a:p>
-            <a:r>
-              <a:rPr lang="en-US" dirty="0"/>
-              <a:t>Gold star, initial estimates, tuning, results</a:t>
-            </a:r>
-          </a:p>
-          <a:p>
-            <a:r>
-              <a:rPr lang="en-US" dirty="0"/>
-              <a:t>+</a:t>
-            </a:r>
-            <a:endParaRPr lang="en-CA" dirty="0"/>
-          </a:p>
-        </p:txBody>
-      </p:sp>
-    </p:spTree>
-    <p:extLst>
-      <p:ext uri="{BB962C8B-B14F-4D97-AF65-F5344CB8AC3E}">
-        <p14:creationId xmlns:p14="http://schemas.microsoft.com/office/powerpoint/2010/main" val="1211893413"/>
-      </p:ext>
-    </p:extLst>
-  </p:cSld>
-  <p:clrMapOvr>
-    <a:masterClrMapping/>
-  </p:clrMapOvr>
-</p:sld>
-</file>
-
-<file path=ppt/slides/slide12.xml><?xml version="1.0" encoding="utf-8"?>
-<p:sld xmlns:a="http://schemas.openxmlformats.org/drawingml/2006/main" xmlns:r="http://schemas.openxmlformats.org/officeDocument/2006/relationships" xmlns:p="http://schemas.openxmlformats.org/presentationml/2006/main">
-  <p:cSld>
-    <p:spTree>
-      <p:nvGrpSpPr>
-        <p:cNvPr id="1" name=""/>
-        <p:cNvGrpSpPr/>
-        <p:nvPr/>
-      </p:nvGrpSpPr>
-      <p:grpSpPr>
-        <a:xfrm>
-          <a:off x="0" y="0"/>
-          <a:ext cx="0" cy="0"/>
-          <a:chOff x="0" y="0"/>
-          <a:chExt cx="0" cy="0"/>
-        </a:xfrm>
-      </p:grpSpPr>
-      <p:sp>
-        <p:nvSpPr>
-          <p:cNvPr id="6" name="Slide Number Placeholder 5">
-            <a:extLst>
-              <a:ext uri="{FF2B5EF4-FFF2-40B4-BE49-F238E27FC236}">
-                <a16:creationId xmlns:a16="http://schemas.microsoft.com/office/drawing/2014/main" id="{74FB7EC2-71BA-402D-7669-A778C3CC61F4}"/>
-              </a:ext>
-            </a:extLst>
-          </p:cNvPr>
-          <p:cNvSpPr>
-            <a:spLocks noGrp="1"/>
-          </p:cNvSpPr>
-          <p:nvPr>
-            <p:ph type="sldNum" sz="quarter" idx="12"/>
-          </p:nvPr>
-        </p:nvSpPr>
-        <p:spPr>
-          <a:xfrm>
-            <a:off x="9282793" y="6420757"/>
-            <a:ext cx="2743200" cy="365125"/>
-          </a:xfrm>
-        </p:spPr>
-        <p:txBody>
-          <a:bodyPr/>
-          <a:lstStyle/>
-          <a:p>
-            <a:fld id="{1E5564C7-97C0-40C1-9717-452594735347}" type="slidenum">
-              <a:rPr lang="en-CA" smtClean="0"/>
-              <a:t>12</a:t>
-            </a:fld>
-            <a:endParaRPr lang="en-CA" dirty="0"/>
-          </a:p>
-        </p:txBody>
-      </p:sp>
-      <p:cxnSp>
-        <p:nvCxnSpPr>
-          <p:cNvPr id="8" name="Straight Connector 7">
-            <a:extLst>
-              <a:ext uri="{FF2B5EF4-FFF2-40B4-BE49-F238E27FC236}">
-                <a16:creationId xmlns:a16="http://schemas.microsoft.com/office/drawing/2014/main" id="{FF39A71E-9C68-0132-D8FD-8A9DB6E41BDE}"/>
-              </a:ext>
-            </a:extLst>
-          </p:cNvPr>
-          <p:cNvCxnSpPr>
-            <a:cxnSpLocks/>
-          </p:cNvCxnSpPr>
-          <p:nvPr/>
-        </p:nvCxnSpPr>
-        <p:spPr>
-          <a:xfrm>
-            <a:off x="166007" y="6356350"/>
-            <a:ext cx="11859986" cy="0"/>
-          </a:xfrm>
-          <a:prstGeom prst="line">
-            <a:avLst/>
-          </a:prstGeom>
-          <a:ln>
-            <a:solidFill>
-              <a:srgbClr val="905AA6"/>
-            </a:solidFill>
-          </a:ln>
-        </p:spPr>
-        <p:style>
-          <a:lnRef idx="1">
-            <a:schemeClr val="accent1"/>
-          </a:lnRef>
-          <a:fillRef idx="0">
-            <a:schemeClr val="accent1"/>
-          </a:fillRef>
-          <a:effectRef idx="0">
-            <a:schemeClr val="accent1"/>
-          </a:effectRef>
-          <a:fontRef idx="minor">
-            <a:schemeClr val="tx1"/>
-          </a:fontRef>
-        </p:style>
-      </p:cxnSp>
-      <p:sp>
-        <p:nvSpPr>
-          <p:cNvPr id="10" name="Half Frame 9">
-            <a:extLst>
-              <a:ext uri="{FF2B5EF4-FFF2-40B4-BE49-F238E27FC236}">
-                <a16:creationId xmlns:a16="http://schemas.microsoft.com/office/drawing/2014/main" id="{BBE0D6D3-13F9-2B97-D1DB-5C47044A0DF8}"/>
-              </a:ext>
-            </a:extLst>
-          </p:cNvPr>
-          <p:cNvSpPr>
-            <a:spLocks noChangeAspect="1"/>
-          </p:cNvSpPr>
-          <p:nvPr/>
-        </p:nvSpPr>
-        <p:spPr>
-          <a:xfrm>
-            <a:off x="54000" y="54000"/>
-            <a:ext cx="576000" cy="576000"/>
-          </a:xfrm>
-          <a:prstGeom prst="halfFrame">
-            <a:avLst>
-              <a:gd name="adj1" fmla="val 7127"/>
-              <a:gd name="adj2" fmla="val 8806"/>
-            </a:avLst>
-          </a:prstGeom>
-          <a:solidFill>
-            <a:srgbClr val="905AA6"/>
-          </a:solidFill>
-          <a:ln>
-            <a:noFill/>
-          </a:ln>
-        </p:spPr>
-        <p:style>
-          <a:lnRef idx="2">
-            <a:schemeClr val="accent1">
-              <a:shade val="15000"/>
-            </a:schemeClr>
-          </a:lnRef>
-          <a:fillRef idx="1">
-            <a:schemeClr val="accent1"/>
-          </a:fillRef>
-          <a:effectRef idx="0">
-            <a:schemeClr val="accent1"/>
-          </a:effectRef>
-          <a:fontRef idx="minor">
-            <a:schemeClr val="lt1"/>
-          </a:fontRef>
-        </p:style>
-        <p:txBody>
-          <a:bodyPr rtlCol="0" anchor="ctr"/>
-          <a:lstStyle/>
-          <a:p>
-            <a:pPr algn="ctr"/>
-            <a:endParaRPr lang="en-CA">
-              <a:solidFill>
-                <a:schemeClr val="tx1"/>
-              </a:solidFill>
-            </a:endParaRPr>
-          </a:p>
-        </p:txBody>
-      </p:sp>
-      <p:sp>
-        <p:nvSpPr>
-          <p:cNvPr id="11" name="TextBox 10">
-            <a:extLst>
-              <a:ext uri="{FF2B5EF4-FFF2-40B4-BE49-F238E27FC236}">
-                <a16:creationId xmlns:a16="http://schemas.microsoft.com/office/drawing/2014/main" id="{83A72DEE-4D6D-459E-6399-5DDE30903E99}"/>
-              </a:ext>
-            </a:extLst>
-          </p:cNvPr>
-          <p:cNvSpPr txBox="1"/>
-          <p:nvPr/>
-        </p:nvSpPr>
-        <p:spPr>
-          <a:xfrm>
-            <a:off x="108857" y="114299"/>
-            <a:ext cx="5600700" cy="461665"/>
-          </a:xfrm>
-          <a:prstGeom prst="rect">
-            <a:avLst/>
-          </a:prstGeom>
-          <a:noFill/>
-        </p:spPr>
-        <p:txBody>
-          <a:bodyPr wrap="square" rtlCol="0">
-            <a:spAutoFit/>
-          </a:bodyPr>
-          <a:lstStyle/>
-          <a:p>
-            <a:r>
-              <a:rPr lang="en-US" sz="2400" dirty="0"/>
-              <a:t>Steady State Identification</a:t>
-            </a:r>
-            <a:endParaRPr lang="en-CA" sz="2400" dirty="0"/>
-          </a:p>
-        </p:txBody>
-      </p:sp>
-      <mc:AlternateContent xmlns:mc="http://schemas.openxmlformats.org/markup-compatibility/2006">
-        <mc:Choice xmlns:a14="http://schemas.microsoft.com/office/drawing/2010/main" Requires="a14">
+      <mc:AlternateContent xmlns:mc="http://schemas.openxmlformats.org/markup-compatibility/2006" xmlns:a14="http://schemas.microsoft.com/office/drawing/2010/main">
+        <mc:Choice Requires="a14">
           <p:sp>
             <p:nvSpPr>
               <p:cNvPr id="3" name="TextBox 2">
@@ -4372,6 +5332,7 @@
               </a:bodyPr>
               <a:lstStyle/>
               <a:p>
+                <a:pPr/>
                 <a14:m>
                   <m:oMathPara xmlns:m="http://schemas.openxmlformats.org/officeDocument/2006/math">
                     <m:oMathParaPr>
@@ -4540,7 +5501,7 @@
             </p:txBody>
           </p:sp>
         </mc:Choice>
-        <mc:Fallback>
+        <mc:Fallback xmlns="">
           <p:sp>
             <p:nvSpPr>
               <p:cNvPr id="3" name="TextBox 2">
@@ -4564,7 +5525,7 @@
                 <a:avLst/>
               </a:prstGeom>
               <a:blipFill>
-                <a:blip r:embed="rId2"/>
+                <a:blip r:embed="rId3"/>
                 <a:stretch>
                   <a:fillRect/>
                 </a:stretch>
@@ -4600,7 +5561,7 @@
           <p:nvPr/>
         </p:nvPicPr>
         <p:blipFill>
-          <a:blip r:embed="rId3">
+          <a:blip r:embed="rId4">
             <a:extLst>
               <a:ext uri="{28A0092B-C50C-407E-A947-70E740481C1C}">
                 <a14:useLocalDpi xmlns:a14="http://schemas.microsoft.com/office/drawing/2010/main" val="0"/>
@@ -4697,6 +5658,282 @@
     <p:extLst>
       <p:ext uri="{BB962C8B-B14F-4D97-AF65-F5344CB8AC3E}">
         <p14:creationId xmlns:p14="http://schemas.microsoft.com/office/powerpoint/2010/main" val="1351717344"/>
+      </p:ext>
+    </p:extLst>
+  </p:cSld>
+  <p:clrMapOvr>
+    <a:masterClrMapping/>
+  </p:clrMapOvr>
+</p:sld>
+</file>
+
+<file path=ppt/slides/slide12.xml><?xml version="1.0" encoding="utf-8"?>
+<p:sld xmlns:a="http://schemas.openxmlformats.org/drawingml/2006/main" xmlns:r="http://schemas.openxmlformats.org/officeDocument/2006/relationships" xmlns:p="http://schemas.openxmlformats.org/presentationml/2006/main">
+  <p:cSld>
+    <p:spTree>
+      <p:nvGrpSpPr>
+        <p:cNvPr id="1" name=""/>
+        <p:cNvGrpSpPr/>
+        <p:nvPr/>
+      </p:nvGrpSpPr>
+      <p:grpSpPr>
+        <a:xfrm>
+          <a:off x="0" y="0"/>
+          <a:ext cx="0" cy="0"/>
+          <a:chOff x="0" y="0"/>
+          <a:chExt cx="0" cy="0"/>
+        </a:xfrm>
+      </p:grpSpPr>
+      <p:sp>
+        <p:nvSpPr>
+          <p:cNvPr id="6" name="Slide Number Placeholder 5">
+            <a:extLst>
+              <a:ext uri="{FF2B5EF4-FFF2-40B4-BE49-F238E27FC236}">
+                <a16:creationId xmlns:a16="http://schemas.microsoft.com/office/drawing/2014/main" id="{74FB7EC2-71BA-402D-7669-A778C3CC61F4}"/>
+              </a:ext>
+            </a:extLst>
+          </p:cNvPr>
+          <p:cNvSpPr>
+            <a:spLocks noGrp="1"/>
+          </p:cNvSpPr>
+          <p:nvPr>
+            <p:ph type="sldNum" sz="quarter" idx="12"/>
+          </p:nvPr>
+        </p:nvSpPr>
+        <p:spPr>
+          <a:xfrm>
+            <a:off x="9282793" y="6420757"/>
+            <a:ext cx="2743200" cy="365125"/>
+          </a:xfrm>
+        </p:spPr>
+        <p:txBody>
+          <a:bodyPr/>
+          <a:lstStyle/>
+          <a:p>
+            <a:fld id="{1E5564C7-97C0-40C1-9717-452594735347}" type="slidenum">
+              <a:rPr lang="en-CA" smtClean="0"/>
+              <a:t>12</a:t>
+            </a:fld>
+            <a:endParaRPr lang="en-CA" dirty="0"/>
+          </a:p>
+        </p:txBody>
+      </p:sp>
+      <p:cxnSp>
+        <p:nvCxnSpPr>
+          <p:cNvPr id="8" name="Straight Connector 7">
+            <a:extLst>
+              <a:ext uri="{FF2B5EF4-FFF2-40B4-BE49-F238E27FC236}">
+                <a16:creationId xmlns:a16="http://schemas.microsoft.com/office/drawing/2014/main" id="{FF39A71E-9C68-0132-D8FD-8A9DB6E41BDE}"/>
+              </a:ext>
+            </a:extLst>
+          </p:cNvPr>
+          <p:cNvCxnSpPr>
+            <a:cxnSpLocks/>
+          </p:cNvCxnSpPr>
+          <p:nvPr/>
+        </p:nvCxnSpPr>
+        <p:spPr>
+          <a:xfrm>
+            <a:off x="166007" y="6356350"/>
+            <a:ext cx="11859986" cy="0"/>
+          </a:xfrm>
+          <a:prstGeom prst="line">
+            <a:avLst/>
+          </a:prstGeom>
+          <a:ln>
+            <a:solidFill>
+              <a:srgbClr val="905AA6"/>
+            </a:solidFill>
+          </a:ln>
+        </p:spPr>
+        <p:style>
+          <a:lnRef idx="1">
+            <a:schemeClr val="accent1"/>
+          </a:lnRef>
+          <a:fillRef idx="0">
+            <a:schemeClr val="accent1"/>
+          </a:fillRef>
+          <a:effectRef idx="0">
+            <a:schemeClr val="accent1"/>
+          </a:effectRef>
+          <a:fontRef idx="minor">
+            <a:schemeClr val="tx1"/>
+          </a:fontRef>
+        </p:style>
+      </p:cxnSp>
+      <p:sp>
+        <p:nvSpPr>
+          <p:cNvPr id="10" name="Half Frame 9">
+            <a:extLst>
+              <a:ext uri="{FF2B5EF4-FFF2-40B4-BE49-F238E27FC236}">
+                <a16:creationId xmlns:a16="http://schemas.microsoft.com/office/drawing/2014/main" id="{BBE0D6D3-13F9-2B97-D1DB-5C47044A0DF8}"/>
+              </a:ext>
+            </a:extLst>
+          </p:cNvPr>
+          <p:cNvSpPr>
+            <a:spLocks noChangeAspect="1"/>
+          </p:cNvSpPr>
+          <p:nvPr/>
+        </p:nvSpPr>
+        <p:spPr>
+          <a:xfrm>
+            <a:off x="54000" y="54000"/>
+            <a:ext cx="576000" cy="576000"/>
+          </a:xfrm>
+          <a:prstGeom prst="halfFrame">
+            <a:avLst>
+              <a:gd name="adj1" fmla="val 7127"/>
+              <a:gd name="adj2" fmla="val 8806"/>
+            </a:avLst>
+          </a:prstGeom>
+          <a:solidFill>
+            <a:srgbClr val="905AA6"/>
+          </a:solidFill>
+          <a:ln>
+            <a:noFill/>
+          </a:ln>
+        </p:spPr>
+        <p:style>
+          <a:lnRef idx="2">
+            <a:schemeClr val="accent1">
+              <a:shade val="15000"/>
+            </a:schemeClr>
+          </a:lnRef>
+          <a:fillRef idx="1">
+            <a:schemeClr val="accent1"/>
+          </a:fillRef>
+          <a:effectRef idx="0">
+            <a:schemeClr val="accent1"/>
+          </a:effectRef>
+          <a:fontRef idx="minor">
+            <a:schemeClr val="lt1"/>
+          </a:fontRef>
+        </p:style>
+        <p:txBody>
+          <a:bodyPr rtlCol="0" anchor="ctr"/>
+          <a:lstStyle/>
+          <a:p>
+            <a:pPr algn="ctr"/>
+            <a:endParaRPr lang="en-CA">
+              <a:solidFill>
+                <a:schemeClr val="tx1"/>
+              </a:solidFill>
+            </a:endParaRPr>
+          </a:p>
+        </p:txBody>
+      </p:sp>
+      <p:sp>
+        <p:nvSpPr>
+          <p:cNvPr id="11" name="TextBox 10">
+            <a:extLst>
+              <a:ext uri="{FF2B5EF4-FFF2-40B4-BE49-F238E27FC236}">
+                <a16:creationId xmlns:a16="http://schemas.microsoft.com/office/drawing/2014/main" id="{83A72DEE-4D6D-459E-6399-5DDE30903E99}"/>
+              </a:ext>
+            </a:extLst>
+          </p:cNvPr>
+          <p:cNvSpPr txBox="1"/>
+          <p:nvPr/>
+        </p:nvSpPr>
+        <p:spPr>
+          <a:xfrm>
+            <a:off x="108857" y="114299"/>
+            <a:ext cx="5600700" cy="461665"/>
+          </a:xfrm>
+          <a:prstGeom prst="rect">
+            <a:avLst/>
+          </a:prstGeom>
+          <a:noFill/>
+        </p:spPr>
+        <p:txBody>
+          <a:bodyPr wrap="square" rtlCol="0">
+            <a:spAutoFit/>
+          </a:bodyPr>
+          <a:lstStyle/>
+          <a:p>
+            <a:r>
+              <a:rPr lang="en-US" sz="2400" dirty="0"/>
+              <a:t>Future Applications</a:t>
+            </a:r>
+            <a:endParaRPr lang="en-CA" sz="2400" dirty="0"/>
+          </a:p>
+        </p:txBody>
+      </p:sp>
+      <p:sp>
+        <p:nvSpPr>
+          <p:cNvPr id="3" name="TextBox 2">
+            <a:extLst>
+              <a:ext uri="{FF2B5EF4-FFF2-40B4-BE49-F238E27FC236}">
+                <a16:creationId xmlns:a16="http://schemas.microsoft.com/office/drawing/2014/main" id="{0EF5C8D2-34E8-0575-8C17-1F5871EF581A}"/>
+              </a:ext>
+            </a:extLst>
+          </p:cNvPr>
+          <p:cNvSpPr txBox="1"/>
+          <p:nvPr/>
+        </p:nvSpPr>
+        <p:spPr>
+          <a:xfrm>
+            <a:off x="4021742" y="708053"/>
+            <a:ext cx="7719801" cy="369332"/>
+          </a:xfrm>
+          <a:prstGeom prst="rect">
+            <a:avLst/>
+          </a:prstGeom>
+          <a:noFill/>
+        </p:spPr>
+        <p:txBody>
+          <a:bodyPr wrap="square" rtlCol="0">
+            <a:spAutoFit/>
+          </a:bodyPr>
+          <a:lstStyle/>
+          <a:p>
+            <a:r>
+              <a:rPr lang="en-US" dirty="0"/>
+              <a:t>Combine with 4MC data for following treatment methods</a:t>
+            </a:r>
+            <a:endParaRPr lang="en-CA" dirty="0"/>
+          </a:p>
+        </p:txBody>
+      </p:sp>
+      <p:sp>
+        <p:nvSpPr>
+          <p:cNvPr id="4" name="TextBox 3">
+            <a:extLst>
+              <a:ext uri="{FF2B5EF4-FFF2-40B4-BE49-F238E27FC236}">
+                <a16:creationId xmlns:a16="http://schemas.microsoft.com/office/drawing/2014/main" id="{9544BEBD-FB06-C76C-3240-25D64D3F42C5}"/>
+              </a:ext>
+            </a:extLst>
+          </p:cNvPr>
+          <p:cNvSpPr txBox="1"/>
+          <p:nvPr/>
+        </p:nvSpPr>
+        <p:spPr>
+          <a:xfrm>
+            <a:off x="962952" y="1327094"/>
+            <a:ext cx="1035781" cy="646331"/>
+          </a:xfrm>
+          <a:prstGeom prst="rect">
+            <a:avLst/>
+          </a:prstGeom>
+          <a:noFill/>
+        </p:spPr>
+        <p:txBody>
+          <a:bodyPr wrap="square" rtlCol="0">
+            <a:spAutoFit/>
+          </a:bodyPr>
+          <a:lstStyle/>
+          <a:p>
+            <a:r>
+              <a:rPr lang="en-US" dirty="0"/>
+              <a:t>4mc image</a:t>
+            </a:r>
+            <a:endParaRPr lang="en-CA" dirty="0"/>
+          </a:p>
+        </p:txBody>
+      </p:sp>
+    </p:spTree>
+    <p:extLst>
+      <p:ext uri="{BB962C8B-B14F-4D97-AF65-F5344CB8AC3E}">
+        <p14:creationId xmlns:p14="http://schemas.microsoft.com/office/powerpoint/2010/main" val="1619414215"/>
       </p:ext>
     </p:extLst>
   </p:cSld>
@@ -4802,6 +6039,94 @@
       </p:cxnSp>
       <p:sp>
         <p:nvSpPr>
+          <p:cNvPr id="9" name="TextBox 8">
+            <a:extLst>
+              <a:ext uri="{FF2B5EF4-FFF2-40B4-BE49-F238E27FC236}">
+                <a16:creationId xmlns:a16="http://schemas.microsoft.com/office/drawing/2014/main" id="{4ABF1282-B5C0-FA52-786E-5BC6A03931A6}"/>
+              </a:ext>
+            </a:extLst>
+          </p:cNvPr>
+          <p:cNvSpPr txBox="1"/>
+          <p:nvPr/>
+        </p:nvSpPr>
+        <p:spPr>
+          <a:xfrm>
+            <a:off x="166007" y="6464819"/>
+            <a:ext cx="11531412" cy="276999"/>
+          </a:xfrm>
+          <a:prstGeom prst="rect">
+            <a:avLst/>
+          </a:prstGeom>
+          <a:noFill/>
+        </p:spPr>
+        <p:txBody>
+          <a:bodyPr wrap="square" rtlCol="0">
+            <a:spAutoFit/>
+          </a:bodyPr>
+          <a:lstStyle/>
+          <a:p>
+            <a:r>
+              <a:rPr lang="en-US" sz="1200" b="0" i="0" dirty="0">
+                <a:solidFill>
+                  <a:srgbClr val="212121"/>
+                </a:solidFill>
+                <a:effectLst/>
+                <a:latin typeface="BlinkMacSystemFont"/>
+              </a:rPr>
+              <a:t>Su, S et al. “A new </a:t>
+            </a:r>
+            <a:r>
+              <a:rPr lang="en-US" sz="1200" b="0" i="0" dirty="0" err="1">
+                <a:solidFill>
+                  <a:srgbClr val="212121"/>
+                </a:solidFill>
+                <a:effectLst/>
+                <a:latin typeface="BlinkMacSystemFont"/>
+              </a:rPr>
+              <a:t>DOSXYZnrc</a:t>
+            </a:r>
+            <a:r>
+              <a:rPr lang="en-US" sz="1200" b="0" i="0" dirty="0">
+                <a:solidFill>
+                  <a:srgbClr val="212121"/>
+                </a:solidFill>
+                <a:effectLst/>
+                <a:latin typeface="BlinkMacSystemFont"/>
+              </a:rPr>
+              <a:t> method for Monte Carlo simulations of 4D dose distributions.” </a:t>
+            </a:r>
+            <a:r>
+              <a:rPr lang="en-US" sz="1200" b="0" i="1" dirty="0">
+                <a:solidFill>
+                  <a:srgbClr val="212121"/>
+                </a:solidFill>
+                <a:effectLst/>
+                <a:latin typeface="BlinkMacSystemFont"/>
+              </a:rPr>
+              <a:t>Physics in medicine and biology</a:t>
+            </a:r>
+            <a:r>
+              <a:rPr lang="en-US" sz="1200" b="0" i="0" dirty="0">
+                <a:solidFill>
+                  <a:srgbClr val="212121"/>
+                </a:solidFill>
+                <a:effectLst/>
+                <a:latin typeface="BlinkMacSystemFont"/>
+              </a:rPr>
+              <a:t> vol. 66, 24 2021.</a:t>
+            </a:r>
+            <a:endParaRPr lang="en-CA" sz="1200" dirty="0">
+              <a:solidFill>
+                <a:schemeClr val="tx1">
+                  <a:tint val="75000"/>
+                </a:schemeClr>
+              </a:solidFill>
+            </a:endParaRPr>
+          </a:p>
+        </p:txBody>
+      </p:sp>
+      <p:sp>
+        <p:nvSpPr>
           <p:cNvPr id="10" name="Half Frame 9">
             <a:extLst>
               <a:ext uri="{FF2B5EF4-FFF2-40B4-BE49-F238E27FC236}">
@@ -4891,54 +6216,54 @@
           <a:p>
             <a:r>
               <a:rPr lang="en-US" sz="2400" dirty="0"/>
-              <a:t>Future Applications</a:t>
+              <a:t>Acknowledgements</a:t>
             </a:r>
             <a:endParaRPr lang="en-CA" sz="2400" dirty="0"/>
           </a:p>
         </p:txBody>
       </p:sp>
-      <p:sp>
-        <p:nvSpPr>
-          <p:cNvPr id="3" name="TextBox 2">
-            <a:extLst>
-              <a:ext uri="{FF2B5EF4-FFF2-40B4-BE49-F238E27FC236}">
-                <a16:creationId xmlns:a16="http://schemas.microsoft.com/office/drawing/2014/main" id="{0EF5C8D2-34E8-0575-8C17-1F5871EF581A}"/>
-              </a:ext>
-            </a:extLst>
-          </p:cNvPr>
-          <p:cNvSpPr txBox="1"/>
+      <p:pic>
+        <p:nvPicPr>
+          <p:cNvPr id="2" name="Picture 1" descr="A blue and purple text&#10;&#10;Description automatically generated">
+            <a:extLst>
+              <a:ext uri="{FF2B5EF4-FFF2-40B4-BE49-F238E27FC236}">
+                <a16:creationId xmlns:a16="http://schemas.microsoft.com/office/drawing/2014/main" id="{47013E2D-5EA5-45DC-D7BD-D1575875E241}"/>
+              </a:ext>
+            </a:extLst>
+          </p:cNvPr>
+          <p:cNvPicPr>
+            <a:picLocks noChangeAspect="1"/>
+          </p:cNvPicPr>
           <p:nvPr/>
-        </p:nvSpPr>
-        <p:spPr>
-          <a:xfrm>
-            <a:off x="4021742" y="708053"/>
-            <a:ext cx="7719801" cy="369332"/>
+        </p:nvPicPr>
+        <p:blipFill>
+          <a:blip r:embed="rId2">
+            <a:extLst>
+              <a:ext uri="{28A0092B-C50C-407E-A947-70E740481C1C}">
+                <a14:useLocalDpi xmlns:a14="http://schemas.microsoft.com/office/drawing/2010/main" val="0"/>
+              </a:ext>
+            </a:extLst>
+          </a:blip>
+          <a:stretch>
+            <a:fillRect/>
+          </a:stretch>
+        </p:blipFill>
+        <p:spPr>
+          <a:xfrm>
+            <a:off x="10668000" y="51361"/>
+            <a:ext cx="1443769" cy="1638996"/>
           </a:xfrm>
           <a:prstGeom prst="rect">
             <a:avLst/>
           </a:prstGeom>
-          <a:noFill/>
-        </p:spPr>
-        <p:txBody>
-          <a:bodyPr wrap="square" rtlCol="0">
-            <a:spAutoFit/>
-          </a:bodyPr>
-          <a:lstStyle/>
-          <a:p>
-            <a:r>
-              <a:rPr lang="en-US" dirty="0"/>
-              <a:t>Combine with 4MC data for following treatment methods</a:t>
-            </a:r>
-            <a:endParaRPr lang="en-CA" dirty="0"/>
-          </a:p>
-        </p:txBody>
-      </p:sp>
-      <p:sp>
-        <p:nvSpPr>
-          <p:cNvPr id="4" name="TextBox 3">
-            <a:extLst>
-              <a:ext uri="{FF2B5EF4-FFF2-40B4-BE49-F238E27FC236}">
-                <a16:creationId xmlns:a16="http://schemas.microsoft.com/office/drawing/2014/main" id="{9544BEBD-FB06-C76C-3240-25D64D3F42C5}"/>
+        </p:spPr>
+      </p:pic>
+      <p:sp>
+        <p:nvSpPr>
+          <p:cNvPr id="7" name="TextBox 6">
+            <a:extLst>
+              <a:ext uri="{FF2B5EF4-FFF2-40B4-BE49-F238E27FC236}">
+                <a16:creationId xmlns:a16="http://schemas.microsoft.com/office/drawing/2014/main" id="{BFB7DBD1-F91D-5EE6-C5CA-F64423E0729D}"/>
               </a:ext>
             </a:extLst>
           </p:cNvPr>
@@ -4947,32 +6272,40 @@
         </p:nvSpPr>
         <p:spPr>
           <a:xfrm>
-            <a:off x="962952" y="1327094"/>
-            <a:ext cx="1035781" cy="646331"/>
+            <a:off x="3699075" y="4675556"/>
+            <a:ext cx="8328146" cy="1572326"/>
           </a:xfrm>
           <a:prstGeom prst="rect">
             <a:avLst/>
           </a:prstGeom>
-          <a:noFill/>
-        </p:spPr>
-        <p:txBody>
-          <a:bodyPr wrap="square" rtlCol="0">
+          <a:solidFill>
+            <a:srgbClr val="905AA6">
+              <a:alpha val="25000"/>
+            </a:srgbClr>
+          </a:solidFill>
+        </p:spPr>
+        <p:txBody>
+          <a:bodyPr wrap="square" tIns="108000" bIns="108000" rtlCol="0">
             <a:spAutoFit/>
           </a:bodyPr>
           <a:lstStyle/>
           <a:p>
-            <a:r>
-              <a:rPr lang="en-US" dirty="0"/>
-              <a:t>4mc image</a:t>
-            </a:r>
-            <a:endParaRPr lang="en-CA" dirty="0"/>
+            <a:pPr algn="ctr"/>
+            <a:r>
+              <a:rPr lang="en-CA" sz="8800" dirty="0">
+                <a:solidFill>
+                  <a:schemeClr val="bg1"/>
+                </a:solidFill>
+              </a:rPr>
+              <a:t>Thank you</a:t>
+            </a:r>
           </a:p>
         </p:txBody>
       </p:sp>
     </p:spTree>
     <p:extLst>
       <p:ext uri="{BB962C8B-B14F-4D97-AF65-F5344CB8AC3E}">
-        <p14:creationId xmlns:p14="http://schemas.microsoft.com/office/powerpoint/2010/main" val="1619414215"/>
+        <p14:creationId xmlns:p14="http://schemas.microsoft.com/office/powerpoint/2010/main" val="1875021657"/>
       </p:ext>
     </p:extLst>
   </p:cSld>
@@ -5090,8 +6423,8 @@
         </p:nvSpPr>
         <p:spPr>
           <a:xfrm>
-            <a:off x="166007" y="6464819"/>
-            <a:ext cx="11531412" cy="276999"/>
+            <a:off x="122130" y="6294440"/>
+            <a:ext cx="11715802" cy="646331"/>
           </a:xfrm>
           <a:prstGeom prst="rect">
             <a:avLst/>
@@ -5105,61 +6438,91 @@
           <a:lstStyle/>
           <a:p>
             <a:r>
-              <a:rPr lang="en-US" sz="1200" b="0" i="0" dirty="0">
-                <a:solidFill>
-                  <a:srgbClr val="212121"/>
-                </a:solidFill>
+              <a:rPr lang="en-US" sz="1200" dirty="0">
                 <a:effectLst/>
-                <a:latin typeface="BlinkMacSystemFont"/>
               </a:rPr>
-              <a:t>Su, S et al. “A new </a:t>
-            </a:r>
-            <a:r>
-              <a:rPr lang="en-US" sz="1200" b="0" i="0" dirty="0" err="1">
-                <a:solidFill>
-                  <a:srgbClr val="212121"/>
-                </a:solidFill>
+              <a:t>Jin, Young-Hoon, </a:t>
+            </a:r>
+            <a:r>
+              <a:rPr lang="en-US" sz="1200" dirty="0"/>
+              <a:t>and</a:t>
+            </a:r>
+            <a:r>
+              <a:rPr lang="en-US" sz="1200" dirty="0">
                 <a:effectLst/>
-                <a:latin typeface="BlinkMacSystemFont"/>
               </a:rPr>
-              <a:t>DOSXYZnrc</a:t>
-            </a:r>
-            <a:r>
-              <a:rPr lang="en-US" sz="1200" b="0" i="0" dirty="0">
-                <a:solidFill>
-                  <a:srgbClr val="212121"/>
-                </a:solidFill>
+              <a:t> Won-Hyung Lee. “Fast cylinder shape matching using random sample consensus in large Scale Point Cloud.” </a:t>
+            </a:r>
+            <a:r>
+              <a:rPr lang="en-US" sz="1200" i="1" dirty="0">
                 <a:effectLst/>
-                <a:latin typeface="BlinkMacSystemFont"/>
               </a:rPr>
-              <a:t> method for Monte Carlo simulations of 4D dose distributions.” </a:t>
-            </a:r>
-            <a:r>
-              <a:rPr lang="en-US" sz="1200" b="0" i="1" dirty="0">
-                <a:solidFill>
-                  <a:srgbClr val="212121"/>
-                </a:solidFill>
+              <a:t>Applied Sciences</a:t>
+            </a:r>
+            <a:r>
+              <a:rPr lang="en-US" sz="1200" dirty="0">
                 <a:effectLst/>
-                <a:latin typeface="BlinkMacSystemFont"/>
               </a:rPr>
-              <a:t>Physics in medicine and biology</a:t>
-            </a:r>
-            <a:r>
-              <a:rPr lang="en-US" sz="1200" b="0" i="0" dirty="0">
-                <a:solidFill>
-                  <a:srgbClr val="212121"/>
-                </a:solidFill>
+              <a:t>,  9,  5, 2019.</a:t>
+            </a:r>
+          </a:p>
+          <a:p>
+            <a:r>
+              <a:rPr lang="en-CA" sz="1200" dirty="0"/>
+              <a:t>Watanabe, </a:t>
+            </a:r>
+            <a:r>
+              <a:rPr lang="en-CA" sz="1200" dirty="0" err="1"/>
+              <a:t>Sansuke</a:t>
+            </a:r>
+            <a:r>
+              <a:rPr lang="en-CA" sz="1200" dirty="0"/>
+              <a:t> M., Blanco, Pablo J., and </a:t>
+            </a:r>
+            <a:r>
+              <a:rPr lang="en-CA" sz="1200" dirty="0" err="1"/>
+              <a:t>Feijóo</a:t>
+            </a:r>
+            <a:r>
+              <a:rPr lang="en-CA" sz="1200" dirty="0"/>
+              <a:t>, Raúl A.. "Mathematical Model of Blood Flow in an Anatomically Detailed Arterial Network of the Arm." </a:t>
+            </a:r>
+            <a:r>
+              <a:rPr lang="en-CA" sz="1200" i="1" dirty="0">
                 <a:effectLst/>
-                <a:latin typeface="BlinkMacSystemFont"/>
               </a:rPr>
-              <a:t> vol. 66, 24 2021.</a:t>
-            </a:r>
-            <a:endParaRPr lang="en-CA" sz="1200" dirty="0">
-              <a:solidFill>
-                <a:schemeClr val="tx1">
-                  <a:tint val="75000"/>
-                </a:schemeClr>
-              </a:solidFill>
+              <a:t>ESAIM: Mathematical   	Modelling and Numerical Analysis - </a:t>
+            </a:r>
+            <a:r>
+              <a:rPr lang="en-CA" sz="1200" i="1" dirty="0" err="1">
+                <a:effectLst/>
+              </a:rPr>
+              <a:t>Modélisation</a:t>
+            </a:r>
+            <a:r>
+              <a:rPr lang="en-CA" sz="1200" i="1" dirty="0">
+                <a:effectLst/>
+              </a:rPr>
+              <a:t> </a:t>
+            </a:r>
+            <a:r>
+              <a:rPr lang="en-CA" sz="1200" i="1" dirty="0" err="1">
+                <a:effectLst/>
+              </a:rPr>
+              <a:t>Mathématique</a:t>
+            </a:r>
+            <a:r>
+              <a:rPr lang="en-CA" sz="1200" i="1" dirty="0">
+                <a:effectLst/>
+              </a:rPr>
+              <a:t> et Analyse Numérique</a:t>
+            </a:r>
+            <a:r>
+              <a:rPr lang="en-CA" sz="1200" dirty="0"/>
+              <a:t> 47, 4, 2013.</a:t>
+            </a:r>
+            <a:endParaRPr lang="en-US" sz="1200" dirty="0">
+              <a:effectLst/>
             </a:endParaRPr>
           </a:p>
         </p:txBody>
@@ -5255,18 +6618,267 @@
           <a:p>
             <a:r>
               <a:rPr lang="en-US" sz="2400" dirty="0"/>
-              <a:t>Acknowledgements</a:t>
-            </a:r>
-            <a:endParaRPr lang="en-CA" sz="2400" dirty="0"/>
-          </a:p>
-        </p:txBody>
-      </p:sp>
+              <a:t>D</a:t>
+            </a:r>
+            <a:r>
+              <a:rPr lang="en-CA" sz="2400" dirty="0" err="1"/>
+              <a:t>imension</a:t>
+            </a:r>
+            <a:r>
+              <a:rPr lang="en-CA" sz="2400" dirty="0"/>
+              <a:t> Extraction</a:t>
+            </a:r>
+          </a:p>
+        </p:txBody>
+      </p:sp>
+      <p:sp>
+        <p:nvSpPr>
+          <p:cNvPr id="4" name="Arc 3">
+            <a:extLst>
+              <a:ext uri="{FF2B5EF4-FFF2-40B4-BE49-F238E27FC236}">
+                <a16:creationId xmlns:a16="http://schemas.microsoft.com/office/drawing/2014/main" id="{E0573126-EBCF-5DE9-B420-6770F516C707}"/>
+              </a:ext>
+            </a:extLst>
+          </p:cNvPr>
+          <p:cNvSpPr/>
+          <p:nvPr/>
+        </p:nvSpPr>
+        <p:spPr>
+          <a:xfrm rot="1392224">
+            <a:off x="2418564" y="2133211"/>
+            <a:ext cx="2700641" cy="2655983"/>
+          </a:xfrm>
+          <a:prstGeom prst="arc">
+            <a:avLst>
+              <a:gd name="adj1" fmla="val 12755381"/>
+              <a:gd name="adj2" fmla="val 12687122"/>
+            </a:avLst>
+          </a:prstGeom>
+          <a:ln w="76200">
+            <a:solidFill>
+              <a:srgbClr val="0DBFD5"/>
+            </a:solidFill>
+            <a:prstDash val="sysDot"/>
+          </a:ln>
+        </p:spPr>
+        <p:style>
+          <a:lnRef idx="1">
+            <a:schemeClr val="accent1"/>
+          </a:lnRef>
+          <a:fillRef idx="0">
+            <a:schemeClr val="accent1"/>
+          </a:fillRef>
+          <a:effectRef idx="0">
+            <a:schemeClr val="accent1"/>
+          </a:effectRef>
+          <a:fontRef idx="minor">
+            <a:schemeClr val="tx1"/>
+          </a:fontRef>
+        </p:style>
+        <p:txBody>
+          <a:bodyPr rtlCol="0" anchor="ctr"/>
+          <a:lstStyle/>
+          <a:p>
+            <a:pPr algn="ctr"/>
+            <a:endParaRPr lang="en-CA"/>
+          </a:p>
+        </p:txBody>
+      </p:sp>
+      <p:sp>
+        <p:nvSpPr>
+          <p:cNvPr id="12" name="Arc 11">
+            <a:extLst>
+              <a:ext uri="{FF2B5EF4-FFF2-40B4-BE49-F238E27FC236}">
+                <a16:creationId xmlns:a16="http://schemas.microsoft.com/office/drawing/2014/main" id="{3D6BBEFC-8A51-D0F5-9A64-B09A0495572A}"/>
+              </a:ext>
+            </a:extLst>
+          </p:cNvPr>
+          <p:cNvSpPr/>
+          <p:nvPr/>
+        </p:nvSpPr>
+        <p:spPr>
+          <a:xfrm rot="1392224">
+            <a:off x="2418565" y="2133210"/>
+            <a:ext cx="2700641" cy="2655983"/>
+          </a:xfrm>
+          <a:prstGeom prst="arc">
+            <a:avLst>
+              <a:gd name="adj1" fmla="val 12755381"/>
+              <a:gd name="adj2" fmla="val 21052343"/>
+            </a:avLst>
+          </a:prstGeom>
+          <a:ln w="76200">
+            <a:solidFill>
+              <a:srgbClr val="905AA6"/>
+            </a:solidFill>
+            <a:prstDash val="sysDot"/>
+          </a:ln>
+        </p:spPr>
+        <p:style>
+          <a:lnRef idx="1">
+            <a:schemeClr val="accent1"/>
+          </a:lnRef>
+          <a:fillRef idx="0">
+            <a:schemeClr val="accent1"/>
+          </a:fillRef>
+          <a:effectRef idx="0">
+            <a:schemeClr val="accent1"/>
+          </a:effectRef>
+          <a:fontRef idx="minor">
+            <a:schemeClr val="tx1"/>
+          </a:fontRef>
+        </p:style>
+        <p:txBody>
+          <a:bodyPr rtlCol="0" anchor="ctr"/>
+          <a:lstStyle/>
+          <a:p>
+            <a:pPr algn="ctr"/>
+            <a:endParaRPr lang="en-CA" dirty="0"/>
+          </a:p>
+        </p:txBody>
+      </p:sp>
+      <p:cxnSp>
+        <p:nvCxnSpPr>
+          <p:cNvPr id="14" name="Straight Connector 13">
+            <a:extLst>
+              <a:ext uri="{FF2B5EF4-FFF2-40B4-BE49-F238E27FC236}">
+                <a16:creationId xmlns:a16="http://schemas.microsoft.com/office/drawing/2014/main" id="{A4BA0C3F-21DB-ED55-5967-798EB89EE961}"/>
+              </a:ext>
+            </a:extLst>
+          </p:cNvPr>
+          <p:cNvCxnSpPr>
+            <a:cxnSpLocks/>
+            <a:stCxn id="12" idx="0"/>
+          </p:cNvCxnSpPr>
+          <p:nvPr/>
+        </p:nvCxnSpPr>
+        <p:spPr>
+          <a:xfrm>
+            <a:off x="3013471" y="2349918"/>
+            <a:ext cx="2079956" cy="1307229"/>
+          </a:xfrm>
+          <a:prstGeom prst="line">
+            <a:avLst/>
+          </a:prstGeom>
+          <a:ln w="28575">
+            <a:solidFill>
+              <a:schemeClr val="tx1"/>
+            </a:solidFill>
+            <a:headEnd type="triangle"/>
+            <a:tailEnd type="triangle"/>
+          </a:ln>
+        </p:spPr>
+        <p:style>
+          <a:lnRef idx="1">
+            <a:schemeClr val="accent1"/>
+          </a:lnRef>
+          <a:fillRef idx="0">
+            <a:schemeClr val="accent1"/>
+          </a:fillRef>
+          <a:effectRef idx="0">
+            <a:schemeClr val="accent1"/>
+          </a:effectRef>
+          <a:fontRef idx="minor">
+            <a:schemeClr val="tx1"/>
+          </a:fontRef>
+        </p:style>
+      </p:cxnSp>
+      <p:cxnSp>
+        <p:nvCxnSpPr>
+          <p:cNvPr id="17" name="Straight Connector 16">
+            <a:extLst>
+              <a:ext uri="{FF2B5EF4-FFF2-40B4-BE49-F238E27FC236}">
+                <a16:creationId xmlns:a16="http://schemas.microsoft.com/office/drawing/2014/main" id="{C3D9307D-6C57-D380-33FF-9F70C81C64A2}"/>
+              </a:ext>
+            </a:extLst>
+          </p:cNvPr>
+          <p:cNvCxnSpPr>
+            <a:cxnSpLocks/>
+          </p:cNvCxnSpPr>
+          <p:nvPr/>
+        </p:nvCxnSpPr>
+        <p:spPr>
+          <a:xfrm>
+            <a:off x="3013471" y="2348975"/>
+            <a:ext cx="1459470" cy="0"/>
+          </a:xfrm>
+          <a:prstGeom prst="line">
+            <a:avLst/>
+          </a:prstGeom>
+          <a:ln w="28575">
+            <a:solidFill>
+              <a:schemeClr val="tx1"/>
+            </a:solidFill>
+            <a:headEnd type="triangle"/>
+            <a:tailEnd type="triangle"/>
+          </a:ln>
+        </p:spPr>
+        <p:style>
+          <a:lnRef idx="1">
+            <a:schemeClr val="accent1"/>
+          </a:lnRef>
+          <a:fillRef idx="0">
+            <a:schemeClr val="accent1"/>
+          </a:fillRef>
+          <a:effectRef idx="0">
+            <a:schemeClr val="accent1"/>
+          </a:effectRef>
+          <a:fontRef idx="minor">
+            <a:schemeClr val="tx1"/>
+          </a:fontRef>
+        </p:style>
+      </p:cxnSp>
+      <p:cxnSp>
+        <p:nvCxnSpPr>
+          <p:cNvPr id="20" name="Straight Connector 19">
+            <a:extLst>
+              <a:ext uri="{FF2B5EF4-FFF2-40B4-BE49-F238E27FC236}">
+                <a16:creationId xmlns:a16="http://schemas.microsoft.com/office/drawing/2014/main" id="{D4C55116-67F3-5493-5627-2C8F4464B651}"/>
+              </a:ext>
+            </a:extLst>
+          </p:cNvPr>
+          <p:cNvCxnSpPr>
+            <a:cxnSpLocks/>
+          </p:cNvCxnSpPr>
+          <p:nvPr/>
+        </p:nvCxnSpPr>
+        <p:spPr>
+          <a:xfrm flipH="1" flipV="1">
+            <a:off x="4472941" y="2371007"/>
+            <a:ext cx="620486" cy="1307229"/>
+          </a:xfrm>
+          <a:prstGeom prst="line">
+            <a:avLst/>
+          </a:prstGeom>
+          <a:ln w="28575">
+            <a:solidFill>
+              <a:schemeClr val="tx1"/>
+            </a:solidFill>
+            <a:headEnd type="triangle"/>
+            <a:tailEnd type="triangle"/>
+          </a:ln>
+        </p:spPr>
+        <p:style>
+          <a:lnRef idx="1">
+            <a:schemeClr val="accent1"/>
+          </a:lnRef>
+          <a:fillRef idx="0">
+            <a:schemeClr val="accent1"/>
+          </a:fillRef>
+          <a:effectRef idx="0">
+            <a:schemeClr val="accent1"/>
+          </a:effectRef>
+          <a:fontRef idx="minor">
+            <a:schemeClr val="tx1"/>
+          </a:fontRef>
+        </p:style>
+      </p:cxnSp>
       <p:pic>
         <p:nvPicPr>
-          <p:cNvPr id="2" name="Picture 1" descr="A blue and purple text&#10;&#10;Description automatically generated">
-            <a:extLst>
-              <a:ext uri="{FF2B5EF4-FFF2-40B4-BE49-F238E27FC236}">
-                <a16:creationId xmlns:a16="http://schemas.microsoft.com/office/drawing/2014/main" id="{47013E2D-5EA5-45DC-D7BD-D1575875E241}"/>
+          <p:cNvPr id="32" name="Picture 31">
+            <a:extLst>
+              <a:ext uri="{FF2B5EF4-FFF2-40B4-BE49-F238E27FC236}">
+                <a16:creationId xmlns:a16="http://schemas.microsoft.com/office/drawing/2014/main" id="{4E8D8672-08F8-B93A-D89A-B4734AAA2DC9}"/>
               </a:ext>
             </a:extLst>
           </p:cNvPr>
@@ -5276,33 +6888,689 @@
           <p:nvPr/>
         </p:nvPicPr>
         <p:blipFill>
-          <a:blip r:embed="rId2">
-            <a:extLst>
-              <a:ext uri="{28A0092B-C50C-407E-A947-70E740481C1C}">
-                <a14:useLocalDpi xmlns:a14="http://schemas.microsoft.com/office/drawing/2010/main" val="0"/>
-              </a:ext>
-            </a:extLst>
-          </a:blip>
+          <a:blip r:embed="rId3"/>
           <a:stretch>
             <a:fillRect/>
           </a:stretch>
         </p:blipFill>
         <p:spPr>
           <a:xfrm>
-            <a:off x="10668000" y="51361"/>
-            <a:ext cx="1443769" cy="1638996"/>
+            <a:off x="108857" y="1123684"/>
+            <a:ext cx="2086385" cy="5149633"/>
           </a:xfrm>
           <a:prstGeom prst="rect">
             <a:avLst/>
           </a:prstGeom>
         </p:spPr>
       </p:pic>
-      <p:sp>
-        <p:nvSpPr>
-          <p:cNvPr id="7" name="TextBox 6">
-            <a:extLst>
-              <a:ext uri="{FF2B5EF4-FFF2-40B4-BE49-F238E27FC236}">
-                <a16:creationId xmlns:a16="http://schemas.microsoft.com/office/drawing/2014/main" id="{BFB7DBD1-F91D-5EE6-C5CA-F64423E0729D}"/>
+      <p:pic>
+        <p:nvPicPr>
+          <p:cNvPr id="34" name="Picture 33">
+            <a:extLst>
+              <a:ext uri="{FF2B5EF4-FFF2-40B4-BE49-F238E27FC236}">
+                <a16:creationId xmlns:a16="http://schemas.microsoft.com/office/drawing/2014/main" id="{3337AAFA-CD46-A0E9-37ED-F57C9F4956B3}"/>
+              </a:ext>
+            </a:extLst>
+          </p:cNvPr>
+          <p:cNvPicPr>
+            <a:picLocks noChangeAspect="1"/>
+          </p:cNvPicPr>
+          <p:nvPr/>
+        </p:nvPicPr>
+        <p:blipFill>
+          <a:blip r:embed="rId4"/>
+          <a:stretch>
+            <a:fillRect/>
+          </a:stretch>
+        </p:blipFill>
+        <p:spPr>
+          <a:xfrm>
+            <a:off x="5415712" y="1184687"/>
+            <a:ext cx="1871451" cy="5149632"/>
+          </a:xfrm>
+          <a:prstGeom prst="rect">
+            <a:avLst/>
+          </a:prstGeom>
+        </p:spPr>
+      </p:pic>
+      <p:pic>
+        <p:nvPicPr>
+          <p:cNvPr id="36" name="Picture 35">
+            <a:extLst>
+              <a:ext uri="{FF2B5EF4-FFF2-40B4-BE49-F238E27FC236}">
+                <a16:creationId xmlns:a16="http://schemas.microsoft.com/office/drawing/2014/main" id="{4248CDBB-64E2-31DF-D6E0-19555A459572}"/>
+              </a:ext>
+            </a:extLst>
+          </p:cNvPr>
+          <p:cNvPicPr>
+            <a:picLocks noChangeAspect="1"/>
+          </p:cNvPicPr>
+          <p:nvPr/>
+        </p:nvPicPr>
+        <p:blipFill rotWithShape="1">
+          <a:blip r:embed="rId5"/>
+          <a:srcRect l="12992" b="6968"/>
+          <a:stretch/>
+        </p:blipFill>
+        <p:spPr>
+          <a:xfrm>
+            <a:off x="7371126" y="1046477"/>
+            <a:ext cx="1871451" cy="5100616"/>
+          </a:xfrm>
+          <a:prstGeom prst="rect">
+            <a:avLst/>
+          </a:prstGeom>
+        </p:spPr>
+      </p:pic>
+      <mc:AlternateContent xmlns:mc="http://schemas.openxmlformats.org/markup-compatibility/2006" xmlns:a14="http://schemas.microsoft.com/office/drawing/2010/main">
+        <mc:Choice Requires="a14">
+          <p:sp>
+            <p:nvSpPr>
+              <p:cNvPr id="37" name="TextBox 36">
+                <a:extLst>
+                  <a:ext uri="{FF2B5EF4-FFF2-40B4-BE49-F238E27FC236}">
+                    <a16:creationId xmlns:a16="http://schemas.microsoft.com/office/drawing/2014/main" id="{F35ED0CC-8A7A-228E-07D7-83C709E2E4A7}"/>
+                  </a:ext>
+                </a:extLst>
+              </p:cNvPr>
+              <p:cNvSpPr txBox="1"/>
+              <p:nvPr/>
+            </p:nvSpPr>
+            <p:spPr>
+              <a:xfrm>
+                <a:off x="9134360" y="1277687"/>
+                <a:ext cx="2855867" cy="4524315"/>
+              </a:xfrm>
+              <a:prstGeom prst="rect">
+                <a:avLst/>
+              </a:prstGeom>
+              <a:solidFill>
+                <a:srgbClr val="905AA6">
+                  <a:alpha val="25000"/>
+                </a:srgbClr>
+              </a:solidFill>
+              <a:ln w="57150">
+                <a:noFill/>
+              </a:ln>
+            </p:spPr>
+            <p:txBody>
+              <a:bodyPr wrap="square" rtlCol="0">
+                <a:spAutoFit/>
+              </a:bodyPr>
+              <a:lstStyle/>
+              <a:p>
+                <a:r>
+                  <a:rPr lang="en-CA" dirty="0"/>
+                  <a:t>Superior Mesenteric Artery</a:t>
+                </a:r>
+              </a:p>
+              <a:p>
+                <a:endParaRPr lang="en-CA" i="1" dirty="0">
+                  <a:latin typeface="Cambria Math" panose="02040503050406030204" pitchFamily="18" charset="0"/>
+                </a:endParaRPr>
+              </a:p>
+              <a:p>
+                <a:r>
+                  <a:rPr lang="en-CA" dirty="0"/>
+                  <a:t>Calculated length (N =12)</a:t>
+                </a:r>
+              </a:p>
+              <a:p>
+                <a14:m>
+                  <m:oMath xmlns:m="http://schemas.openxmlformats.org/officeDocument/2006/math">
+                    <m:acc>
+                      <m:accPr>
+                        <m:chr m:val="̅"/>
+                        <m:ctrlPr>
+                          <a:rPr lang="en-CA" i="1" smtClean="0">
+                            <a:latin typeface="Cambria Math" panose="02040503050406030204" pitchFamily="18" charset="0"/>
+                          </a:rPr>
+                        </m:ctrlPr>
+                      </m:accPr>
+                      <m:e>
+                        <m:r>
+                          <a:rPr lang="en-CA" b="0" i="1" smtClean="0">
+                            <a:latin typeface="Cambria Math" panose="02040503050406030204" pitchFamily="18" charset="0"/>
+                          </a:rPr>
+                          <m:t>𝐿</m:t>
+                        </m:r>
+                      </m:e>
+                    </m:acc>
+                    <m:r>
+                      <a:rPr lang="en-CA" b="0" i="1" smtClean="0">
+                        <a:latin typeface="Cambria Math" panose="02040503050406030204" pitchFamily="18" charset="0"/>
+                      </a:rPr>
+                      <m:t>=220.84</m:t>
+                    </m:r>
+                    <m:r>
+                      <a:rPr lang="en-US" b="0" i="1" smtClean="0">
+                        <a:latin typeface="Cambria Math" panose="02040503050406030204" pitchFamily="18" charset="0"/>
+                      </a:rPr>
+                      <m:t> </m:t>
+                    </m:r>
+                    <m:r>
+                      <m:rPr>
+                        <m:sty m:val="p"/>
+                      </m:rPr>
+                      <a:rPr lang="en-US" b="0" i="0" smtClean="0">
+                        <a:latin typeface="Cambria Math" panose="02040503050406030204" pitchFamily="18" charset="0"/>
+                      </a:rPr>
+                      <m:t>mm</m:t>
+                    </m:r>
+                    <m:r>
+                      <a:rPr lang="en-CA" b="0" i="1" smtClean="0">
+                        <a:latin typeface="Cambria Math" panose="02040503050406030204" pitchFamily="18" charset="0"/>
+                      </a:rPr>
+                      <m:t> </m:t>
+                    </m:r>
+                    <m:r>
+                      <a:rPr lang="en-CA" b="0" i="1" smtClean="0">
+                        <a:latin typeface="Cambria Math" panose="02040503050406030204" pitchFamily="18" charset="0"/>
+                        <a:ea typeface="Cambria Math" panose="02040503050406030204" pitchFamily="18" charset="0"/>
+                      </a:rPr>
+                      <m:t>±0.</m:t>
+                    </m:r>
+                    <m:r>
+                      <a:rPr lang="en-US" b="0" i="1" smtClean="0">
+                        <a:latin typeface="Cambria Math" panose="02040503050406030204" pitchFamily="18" charset="0"/>
+                        <a:ea typeface="Cambria Math" panose="02040503050406030204" pitchFamily="18" charset="0"/>
+                      </a:rPr>
+                      <m:t>33</m:t>
+                    </m:r>
+                    <m:r>
+                      <a:rPr lang="en-US" b="0" i="0" smtClean="0">
+                        <a:latin typeface="Cambria Math" panose="02040503050406030204" pitchFamily="18" charset="0"/>
+                        <a:ea typeface="Cambria Math" panose="02040503050406030204" pitchFamily="18" charset="0"/>
+                      </a:rPr>
+                      <m:t> %</m:t>
+                    </m:r>
+                  </m:oMath>
+                </a14:m>
+                <a:r>
+                  <a:rPr lang="en-CA" b="0" dirty="0">
+                    <a:ea typeface="Cambria Math" panose="02040503050406030204" pitchFamily="18" charset="0"/>
+                  </a:rPr>
+                  <a:t> </a:t>
+                </a:r>
+              </a:p>
+              <a:p>
+                <a:endParaRPr lang="en-CA" dirty="0"/>
+              </a:p>
+              <a:p>
+                <a:r>
+                  <a:rPr lang="en-CA" dirty="0"/>
+                  <a:t>Manually measured length</a:t>
+                </a:r>
+              </a:p>
+              <a:p>
+                <a14:m>
+                  <m:oMath xmlns:m="http://schemas.openxmlformats.org/officeDocument/2006/math">
+                    <m:r>
+                      <a:rPr lang="en-CA" b="0" i="1" smtClean="0">
+                        <a:latin typeface="Cambria Math" panose="02040503050406030204" pitchFamily="18" charset="0"/>
+                      </a:rPr>
+                      <m:t>𝐿</m:t>
+                    </m:r>
+                    <m:r>
+                      <a:rPr lang="en-CA" b="0" i="1" smtClean="0">
+                        <a:latin typeface="Cambria Math" panose="02040503050406030204" pitchFamily="18" charset="0"/>
+                      </a:rPr>
+                      <m:t>=212.75</m:t>
+                    </m:r>
+                  </m:oMath>
+                </a14:m>
+                <a:r>
+                  <a:rPr lang="en-CA" dirty="0"/>
+                  <a:t> mm</a:t>
+                </a:r>
+              </a:p>
+              <a:p>
+                <a:endParaRPr lang="en-CA" dirty="0"/>
+              </a:p>
+              <a:p>
+                <a:r>
+                  <a:rPr lang="en-CA" dirty="0" err="1"/>
+                  <a:t>Hemolab</a:t>
+                </a:r>
+                <a:r>
+                  <a:rPr lang="en-CA" dirty="0"/>
+                  <a:t> Value:</a:t>
+                </a:r>
+              </a:p>
+              <a:p>
+                <a14:m>
+                  <m:oMath xmlns:m="http://schemas.openxmlformats.org/officeDocument/2006/math">
+                    <m:r>
+                      <a:rPr lang="en-CA" b="0" i="1" smtClean="0">
+                        <a:latin typeface="Cambria Math" panose="02040503050406030204" pitchFamily="18" charset="0"/>
+                      </a:rPr>
+                      <m:t>𝐿</m:t>
+                    </m:r>
+                    <m:r>
+                      <a:rPr lang="en-CA" b="0" i="1" smtClean="0">
+                        <a:latin typeface="Cambria Math" panose="02040503050406030204" pitchFamily="18" charset="0"/>
+                      </a:rPr>
+                      <m:t>=216.79 </m:t>
+                    </m:r>
+                  </m:oMath>
+                </a14:m>
+                <a:r>
+                  <a:rPr lang="en-CA" dirty="0"/>
+                  <a:t> mm</a:t>
+                </a:r>
+              </a:p>
+              <a:p>
+                <a:endParaRPr lang="en-CA" dirty="0"/>
+              </a:p>
+              <a:p>
+                <a:endParaRPr lang="en-CA" dirty="0"/>
+              </a:p>
+              <a:p>
+                <a:r>
+                  <a:rPr lang="en-CA" dirty="0">
+                    <a:latin typeface="Cambria Math" panose="02040503050406030204" pitchFamily="18" charset="0"/>
+                  </a:rPr>
+                  <a:t>Calculated radius (N = 12)</a:t>
+                </a:r>
+              </a:p>
+              <a:p>
+                <a14:m>
+                  <m:oMath xmlns:m="http://schemas.openxmlformats.org/officeDocument/2006/math">
+                    <m:sSub>
+                      <m:sSubPr>
+                        <m:ctrlPr>
+                          <a:rPr lang="en-CA" i="1" smtClean="0">
+                            <a:latin typeface="Cambria Math" panose="02040503050406030204" pitchFamily="18" charset="0"/>
+                          </a:rPr>
+                        </m:ctrlPr>
+                      </m:sSubPr>
+                      <m:e>
+                        <m:r>
+                          <a:rPr lang="en-CA" b="0" i="1" smtClean="0">
+                            <a:latin typeface="Cambria Math" panose="02040503050406030204" pitchFamily="18" charset="0"/>
+                          </a:rPr>
+                          <m:t>𝑅</m:t>
+                        </m:r>
+                      </m:e>
+                      <m:sub>
+                        <m:r>
+                          <a:rPr lang="en-CA" b="0" i="1" smtClean="0">
+                            <a:latin typeface="Cambria Math" panose="02040503050406030204" pitchFamily="18" charset="0"/>
+                          </a:rPr>
+                          <m:t>𝑢</m:t>
+                        </m:r>
+                      </m:sub>
+                    </m:sSub>
+                    <m:r>
+                      <a:rPr lang="en-CA" b="0" i="1" smtClean="0">
+                        <a:latin typeface="Cambria Math" panose="02040503050406030204" pitchFamily="18" charset="0"/>
+                      </a:rPr>
+                      <m:t>=1.79</m:t>
+                    </m:r>
+                    <m:r>
+                      <a:rPr lang="en-US" b="0" i="1" smtClean="0">
+                        <a:latin typeface="Cambria Math" panose="02040503050406030204" pitchFamily="18" charset="0"/>
+                      </a:rPr>
+                      <m:t> </m:t>
+                    </m:r>
+                    <m:r>
+                      <m:rPr>
+                        <m:sty m:val="p"/>
+                      </m:rPr>
+                      <a:rPr lang="en-US" b="0" i="0" smtClean="0">
+                        <a:latin typeface="Cambria Math" panose="02040503050406030204" pitchFamily="18" charset="0"/>
+                      </a:rPr>
+                      <m:t>mm</m:t>
+                    </m:r>
+                    <m:r>
+                      <a:rPr lang="en-CA" b="0" i="1" smtClean="0">
+                        <a:latin typeface="Cambria Math" panose="02040503050406030204" pitchFamily="18" charset="0"/>
+                      </a:rPr>
+                      <m:t> </m:t>
+                    </m:r>
+                    <m:r>
+                      <a:rPr lang="en-CA" b="0" i="1" smtClean="0">
+                        <a:latin typeface="Cambria Math" panose="02040503050406030204" pitchFamily="18" charset="0"/>
+                        <a:ea typeface="Cambria Math" panose="02040503050406030204" pitchFamily="18" charset="0"/>
+                      </a:rPr>
+                      <m:t>±</m:t>
+                    </m:r>
+                    <m:r>
+                      <a:rPr lang="en-US" b="0" i="0" smtClean="0">
+                        <a:latin typeface="Cambria Math" panose="02040503050406030204" pitchFamily="18" charset="0"/>
+                      </a:rPr>
+                      <m:t>2.79 %</m:t>
+                    </m:r>
+                  </m:oMath>
+                </a14:m>
+                <a:r>
+                  <a:rPr lang="en-CA" b="0" dirty="0"/>
+                  <a:t> </a:t>
+                </a:r>
+              </a:p>
+              <a:p>
+                <a14:m>
+                  <m:oMath xmlns:m="http://schemas.openxmlformats.org/officeDocument/2006/math">
+                    <m:sSub>
+                      <m:sSubPr>
+                        <m:ctrlPr>
+                          <a:rPr lang="en-CA" b="0" i="1" smtClean="0">
+                            <a:latin typeface="Cambria Math" panose="02040503050406030204" pitchFamily="18" charset="0"/>
+                          </a:rPr>
+                        </m:ctrlPr>
+                      </m:sSubPr>
+                      <m:e>
+                        <m:r>
+                          <a:rPr lang="en-CA" b="0" i="1" smtClean="0">
+                            <a:latin typeface="Cambria Math" panose="02040503050406030204" pitchFamily="18" charset="0"/>
+                          </a:rPr>
+                          <m:t>𝑅</m:t>
+                        </m:r>
+                      </m:e>
+                      <m:sub>
+                        <m:r>
+                          <a:rPr lang="en-CA" b="0" i="1" smtClean="0">
+                            <a:latin typeface="Cambria Math" panose="02040503050406030204" pitchFamily="18" charset="0"/>
+                          </a:rPr>
+                          <m:t>𝑑</m:t>
+                        </m:r>
+                      </m:sub>
+                    </m:sSub>
+                    <m:r>
+                      <a:rPr lang="en-CA" b="0" i="1" smtClean="0">
+                        <a:latin typeface="Cambria Math" panose="02040503050406030204" pitchFamily="18" charset="0"/>
+                      </a:rPr>
+                      <m:t>=1.66</m:t>
+                    </m:r>
+                    <m:r>
+                      <a:rPr lang="en-US" b="0" i="0" smtClean="0">
+                        <a:latin typeface="Cambria Math" panose="02040503050406030204" pitchFamily="18" charset="0"/>
+                      </a:rPr>
+                      <m:t> </m:t>
+                    </m:r>
+                    <m:r>
+                      <m:rPr>
+                        <m:sty m:val="p"/>
+                      </m:rPr>
+                      <a:rPr lang="en-US">
+                        <a:latin typeface="Cambria Math" panose="02040503050406030204" pitchFamily="18" charset="0"/>
+                      </a:rPr>
+                      <m:t>mm</m:t>
+                    </m:r>
+                    <m:r>
+                      <a:rPr lang="en-CA" b="0" i="1" smtClean="0">
+                        <a:latin typeface="Cambria Math" panose="02040503050406030204" pitchFamily="18" charset="0"/>
+                        <a:ea typeface="Cambria Math" panose="02040503050406030204" pitchFamily="18" charset="0"/>
+                      </a:rPr>
+                      <m:t>±</m:t>
+                    </m:r>
+                    <m:r>
+                      <a:rPr lang="en-US" b="0" i="0" smtClean="0">
+                        <a:latin typeface="Cambria Math" panose="02040503050406030204" pitchFamily="18" charset="0"/>
+                        <a:ea typeface="Cambria Math" panose="02040503050406030204" pitchFamily="18" charset="0"/>
+                      </a:rPr>
+                      <m:t>18.67 %</m:t>
+                    </m:r>
+                  </m:oMath>
+                </a14:m>
+                <a:r>
+                  <a:rPr lang="en-CA" b="0" dirty="0"/>
+                  <a:t> </a:t>
+                </a:r>
+              </a:p>
+              <a:p>
+                <a:endParaRPr lang="en-CA" dirty="0"/>
+              </a:p>
+            </p:txBody>
+          </p:sp>
+        </mc:Choice>
+        <mc:Fallback xmlns="">
+          <p:sp>
+            <p:nvSpPr>
+              <p:cNvPr id="37" name="TextBox 36">
+                <a:extLst>
+                  <a:ext uri="{FF2B5EF4-FFF2-40B4-BE49-F238E27FC236}">
+                    <a16:creationId xmlns:a16="http://schemas.microsoft.com/office/drawing/2014/main" id="{F35ED0CC-8A7A-228E-07D7-83C709E2E4A7}"/>
+                  </a:ext>
+                </a:extLst>
+              </p:cNvPr>
+              <p:cNvSpPr txBox="1">
+                <a:spLocks noRot="1" noChangeAspect="1" noMove="1" noResize="1" noEditPoints="1" noAdjustHandles="1" noChangeArrowheads="1" noChangeShapeType="1" noTextEdit="1"/>
+              </p:cNvSpPr>
+              <p:nvPr/>
+            </p:nvSpPr>
+            <p:spPr>
+              <a:xfrm>
+                <a:off x="9134360" y="1277687"/>
+                <a:ext cx="2855867" cy="4524315"/>
+              </a:xfrm>
+              <a:prstGeom prst="rect">
+                <a:avLst/>
+              </a:prstGeom>
+              <a:blipFill>
+                <a:blip r:embed="rId6"/>
+                <a:stretch>
+                  <a:fillRect l="-1706" t="-809"/>
+                </a:stretch>
+              </a:blipFill>
+              <a:ln w="57150">
+                <a:noFill/>
+              </a:ln>
+            </p:spPr>
+            <p:txBody>
+              <a:bodyPr/>
+              <a:lstStyle/>
+              <a:p>
+                <a:r>
+                  <a:rPr lang="en-CA">
+                    <a:noFill/>
+                  </a:rPr>
+                  <a:t> </a:t>
+                </a:r>
+              </a:p>
+            </p:txBody>
+          </p:sp>
+        </mc:Fallback>
+      </mc:AlternateContent>
+      <p:cxnSp>
+        <p:nvCxnSpPr>
+          <p:cNvPr id="5" name="Straight Connector 4">
+            <a:extLst>
+              <a:ext uri="{FF2B5EF4-FFF2-40B4-BE49-F238E27FC236}">
+                <a16:creationId xmlns:a16="http://schemas.microsoft.com/office/drawing/2014/main" id="{74CE217D-5F63-B2BF-8D2A-06B8E42D1B56}"/>
+              </a:ext>
+            </a:extLst>
+          </p:cNvPr>
+          <p:cNvCxnSpPr>
+            <a:cxnSpLocks/>
+          </p:cNvCxnSpPr>
+          <p:nvPr/>
+        </p:nvCxnSpPr>
+        <p:spPr>
+          <a:xfrm flipV="1">
+            <a:off x="9079699" y="1706637"/>
+            <a:ext cx="2855867" cy="1965"/>
+          </a:xfrm>
+          <a:prstGeom prst="line">
+            <a:avLst/>
+          </a:prstGeom>
+          <a:ln>
+            <a:solidFill>
+              <a:srgbClr val="905AA6"/>
+            </a:solidFill>
+          </a:ln>
+        </p:spPr>
+        <p:style>
+          <a:lnRef idx="1">
+            <a:schemeClr val="accent1"/>
+          </a:lnRef>
+          <a:fillRef idx="0">
+            <a:schemeClr val="accent1"/>
+          </a:fillRef>
+          <a:effectRef idx="0">
+            <a:schemeClr val="accent1"/>
+          </a:effectRef>
+          <a:fontRef idx="minor">
+            <a:schemeClr val="tx1"/>
+          </a:fontRef>
+        </p:style>
+      </p:cxnSp>
+      <p:cxnSp>
+        <p:nvCxnSpPr>
+          <p:cNvPr id="15" name="Straight Connector 14">
+            <a:extLst>
+              <a:ext uri="{FF2B5EF4-FFF2-40B4-BE49-F238E27FC236}">
+                <a16:creationId xmlns:a16="http://schemas.microsoft.com/office/drawing/2014/main" id="{6DAE53CA-C48B-1910-D20E-CAF02EC79EBF}"/>
+              </a:ext>
+            </a:extLst>
+          </p:cNvPr>
+          <p:cNvCxnSpPr>
+            <a:cxnSpLocks/>
+          </p:cNvCxnSpPr>
+          <p:nvPr/>
+        </p:nvCxnSpPr>
+        <p:spPr>
+          <a:xfrm flipV="1">
+            <a:off x="9134359" y="4341854"/>
+            <a:ext cx="2855867" cy="1965"/>
+          </a:xfrm>
+          <a:prstGeom prst="line">
+            <a:avLst/>
+          </a:prstGeom>
+          <a:ln>
+            <a:solidFill>
+              <a:srgbClr val="905AA6"/>
+            </a:solidFill>
+          </a:ln>
+        </p:spPr>
+        <p:style>
+          <a:lnRef idx="1">
+            <a:schemeClr val="accent1"/>
+          </a:lnRef>
+          <a:fillRef idx="0">
+            <a:schemeClr val="accent1"/>
+          </a:fillRef>
+          <a:effectRef idx="0">
+            <a:schemeClr val="accent1"/>
+          </a:effectRef>
+          <a:fontRef idx="minor">
+            <a:schemeClr val="tx1"/>
+          </a:fontRef>
+        </p:style>
+      </p:cxnSp>
+    </p:spTree>
+    <p:extLst>
+      <p:ext uri="{BB962C8B-B14F-4D97-AF65-F5344CB8AC3E}">
+        <p14:creationId xmlns:p14="http://schemas.microsoft.com/office/powerpoint/2010/main" val="1026091811"/>
+      </p:ext>
+    </p:extLst>
+  </p:cSld>
+  <p:clrMapOvr>
+    <a:masterClrMapping/>
+  </p:clrMapOvr>
+</p:sld>
+</file>
+
+<file path=ppt/slides/slide15.xml><?xml version="1.0" encoding="utf-8"?>
+<p:sld xmlns:a="http://schemas.openxmlformats.org/drawingml/2006/main" xmlns:r="http://schemas.openxmlformats.org/officeDocument/2006/relationships" xmlns:p="http://schemas.openxmlformats.org/presentationml/2006/main">
+  <p:cSld>
+    <p:spTree>
+      <p:nvGrpSpPr>
+        <p:cNvPr id="1" name=""/>
+        <p:cNvGrpSpPr/>
+        <p:nvPr/>
+      </p:nvGrpSpPr>
+      <p:grpSpPr>
+        <a:xfrm>
+          <a:off x="0" y="0"/>
+          <a:ext cx="0" cy="0"/>
+          <a:chOff x="0" y="0"/>
+          <a:chExt cx="0" cy="0"/>
+        </a:xfrm>
+      </p:grpSpPr>
+      <p:sp>
+        <p:nvSpPr>
+          <p:cNvPr id="6" name="Slide Number Placeholder 5">
+            <a:extLst>
+              <a:ext uri="{FF2B5EF4-FFF2-40B4-BE49-F238E27FC236}">
+                <a16:creationId xmlns:a16="http://schemas.microsoft.com/office/drawing/2014/main" id="{74FB7EC2-71BA-402D-7669-A778C3CC61F4}"/>
+              </a:ext>
+            </a:extLst>
+          </p:cNvPr>
+          <p:cNvSpPr>
+            <a:spLocks noGrp="1"/>
+          </p:cNvSpPr>
+          <p:nvPr>
+            <p:ph type="sldNum" sz="quarter" idx="12"/>
+          </p:nvPr>
+        </p:nvSpPr>
+        <p:spPr>
+          <a:xfrm>
+            <a:off x="9282793" y="6420757"/>
+            <a:ext cx="2743200" cy="365125"/>
+          </a:xfrm>
+        </p:spPr>
+        <p:txBody>
+          <a:bodyPr/>
+          <a:lstStyle/>
+          <a:p>
+            <a:fld id="{1E5564C7-97C0-40C1-9717-452594735347}" type="slidenum">
+              <a:rPr lang="en-CA" smtClean="0"/>
+              <a:t>15</a:t>
+            </a:fld>
+            <a:endParaRPr lang="en-CA" dirty="0"/>
+          </a:p>
+        </p:txBody>
+      </p:sp>
+      <p:cxnSp>
+        <p:nvCxnSpPr>
+          <p:cNvPr id="8" name="Straight Connector 7">
+            <a:extLst>
+              <a:ext uri="{FF2B5EF4-FFF2-40B4-BE49-F238E27FC236}">
+                <a16:creationId xmlns:a16="http://schemas.microsoft.com/office/drawing/2014/main" id="{FF39A71E-9C68-0132-D8FD-8A9DB6E41BDE}"/>
+              </a:ext>
+            </a:extLst>
+          </p:cNvPr>
+          <p:cNvCxnSpPr>
+            <a:cxnSpLocks/>
+          </p:cNvCxnSpPr>
+          <p:nvPr/>
+        </p:nvCxnSpPr>
+        <p:spPr>
+          <a:xfrm>
+            <a:off x="166007" y="6356350"/>
+            <a:ext cx="11859986" cy="0"/>
+          </a:xfrm>
+          <a:prstGeom prst="line">
+            <a:avLst/>
+          </a:prstGeom>
+          <a:ln>
+            <a:solidFill>
+              <a:srgbClr val="905AA6"/>
+            </a:solidFill>
+          </a:ln>
+        </p:spPr>
+        <p:style>
+          <a:lnRef idx="1">
+            <a:schemeClr val="accent1"/>
+          </a:lnRef>
+          <a:fillRef idx="0">
+            <a:schemeClr val="accent1"/>
+          </a:fillRef>
+          <a:effectRef idx="0">
+            <a:schemeClr val="accent1"/>
+          </a:effectRef>
+          <a:fontRef idx="minor">
+            <a:schemeClr val="tx1"/>
+          </a:fontRef>
+        </p:style>
+      </p:cxnSp>
+      <p:sp>
+        <p:nvSpPr>
+          <p:cNvPr id="9" name="TextBox 8">
+            <a:extLst>
+              <a:ext uri="{FF2B5EF4-FFF2-40B4-BE49-F238E27FC236}">
+                <a16:creationId xmlns:a16="http://schemas.microsoft.com/office/drawing/2014/main" id="{4ABF1282-B5C0-FA52-786E-5BC6A03931A6}"/>
               </a:ext>
             </a:extLst>
           </p:cNvPr>
@@ -5311,8 +7579,1044 @@
         </p:nvSpPr>
         <p:spPr>
           <a:xfrm>
-            <a:off x="3699075" y="4675556"/>
-            <a:ext cx="8328146" cy="1572326"/>
+            <a:off x="166007" y="6420757"/>
+            <a:ext cx="11655879" cy="276999"/>
+          </a:xfrm>
+          <a:prstGeom prst="rect">
+            <a:avLst/>
+          </a:prstGeom>
+          <a:noFill/>
+        </p:spPr>
+        <p:txBody>
+          <a:bodyPr wrap="square" rtlCol="0">
+            <a:spAutoFit/>
+          </a:bodyPr>
+          <a:lstStyle/>
+          <a:p>
+            <a:r>
+              <a:rPr lang="en-US" sz="1200" b="0" i="0" dirty="0">
+                <a:solidFill>
+                  <a:srgbClr val="2E414F"/>
+                </a:solidFill>
+                <a:effectLst/>
+              </a:rPr>
+              <a:t>Olufsen, Mette Sofie. “Structured tree outflow condition for blood flow in larger systemic arteries.” </a:t>
+            </a:r>
+            <a:r>
+              <a:rPr lang="en-US" sz="1200" b="0" i="1" dirty="0">
+                <a:solidFill>
+                  <a:srgbClr val="2E414F"/>
+                </a:solidFill>
+                <a:effectLst/>
+              </a:rPr>
+              <a:t>American journal of physiology. Heart and circulatory physiology</a:t>
+            </a:r>
+            <a:r>
+              <a:rPr lang="en-US" sz="1200" b="0" i="0" dirty="0">
+                <a:solidFill>
+                  <a:srgbClr val="2E414F"/>
+                </a:solidFill>
+                <a:effectLst/>
+              </a:rPr>
+              <a:t> , 276,  1, 1999</a:t>
+            </a:r>
+            <a:r>
+              <a:rPr lang="en-US" sz="1200" dirty="0">
+                <a:solidFill>
+                  <a:srgbClr val="2E414F"/>
+                </a:solidFill>
+              </a:rPr>
+              <a:t>.</a:t>
+            </a:r>
+            <a:endParaRPr lang="en-CA" sz="1200" dirty="0">
+              <a:solidFill>
+                <a:schemeClr val="tx1">
+                  <a:tint val="75000"/>
+                </a:schemeClr>
+              </a:solidFill>
+            </a:endParaRPr>
+          </a:p>
+        </p:txBody>
+      </p:sp>
+      <p:sp>
+        <p:nvSpPr>
+          <p:cNvPr id="10" name="Half Frame 9">
+            <a:extLst>
+              <a:ext uri="{FF2B5EF4-FFF2-40B4-BE49-F238E27FC236}">
+                <a16:creationId xmlns:a16="http://schemas.microsoft.com/office/drawing/2014/main" id="{BBE0D6D3-13F9-2B97-D1DB-5C47044A0DF8}"/>
+              </a:ext>
+            </a:extLst>
+          </p:cNvPr>
+          <p:cNvSpPr>
+            <a:spLocks noChangeAspect="1"/>
+          </p:cNvSpPr>
+          <p:nvPr/>
+        </p:nvSpPr>
+        <p:spPr>
+          <a:xfrm>
+            <a:off x="54000" y="54000"/>
+            <a:ext cx="576000" cy="576000"/>
+          </a:xfrm>
+          <a:prstGeom prst="halfFrame">
+            <a:avLst>
+              <a:gd name="adj1" fmla="val 7127"/>
+              <a:gd name="adj2" fmla="val 8806"/>
+            </a:avLst>
+          </a:prstGeom>
+          <a:solidFill>
+            <a:srgbClr val="905AA6"/>
+          </a:solidFill>
+          <a:ln>
+            <a:noFill/>
+          </a:ln>
+        </p:spPr>
+        <p:style>
+          <a:lnRef idx="2">
+            <a:schemeClr val="accent1">
+              <a:shade val="15000"/>
+            </a:schemeClr>
+          </a:lnRef>
+          <a:fillRef idx="1">
+            <a:schemeClr val="accent1"/>
+          </a:fillRef>
+          <a:effectRef idx="0">
+            <a:schemeClr val="accent1"/>
+          </a:effectRef>
+          <a:fontRef idx="minor">
+            <a:schemeClr val="lt1"/>
+          </a:fontRef>
+        </p:style>
+        <p:txBody>
+          <a:bodyPr rtlCol="0" anchor="ctr"/>
+          <a:lstStyle/>
+          <a:p>
+            <a:pPr algn="ctr"/>
+            <a:endParaRPr lang="en-CA">
+              <a:solidFill>
+                <a:schemeClr val="tx1"/>
+              </a:solidFill>
+            </a:endParaRPr>
+          </a:p>
+        </p:txBody>
+      </p:sp>
+      <p:sp>
+        <p:nvSpPr>
+          <p:cNvPr id="11" name="TextBox 10">
+            <a:extLst>
+              <a:ext uri="{FF2B5EF4-FFF2-40B4-BE49-F238E27FC236}">
+                <a16:creationId xmlns:a16="http://schemas.microsoft.com/office/drawing/2014/main" id="{83A72DEE-4D6D-459E-6399-5DDE30903E99}"/>
+              </a:ext>
+            </a:extLst>
+          </p:cNvPr>
+          <p:cNvSpPr txBox="1"/>
+          <p:nvPr/>
+        </p:nvSpPr>
+        <p:spPr>
+          <a:xfrm>
+            <a:off x="108857" y="114299"/>
+            <a:ext cx="5600700" cy="461665"/>
+          </a:xfrm>
+          <a:prstGeom prst="rect">
+            <a:avLst/>
+          </a:prstGeom>
+          <a:noFill/>
+        </p:spPr>
+        <p:txBody>
+          <a:bodyPr wrap="square" rtlCol="0">
+            <a:spAutoFit/>
+          </a:bodyPr>
+          <a:lstStyle/>
+          <a:p>
+            <a:r>
+              <a:rPr lang="en-CA" sz="2400" dirty="0"/>
+              <a:t>Network and Simplifications</a:t>
+            </a:r>
+          </a:p>
+        </p:txBody>
+      </p:sp>
+      <p:cxnSp>
+        <p:nvCxnSpPr>
+          <p:cNvPr id="4" name="Straight Connector 3">
+            <a:extLst>
+              <a:ext uri="{FF2B5EF4-FFF2-40B4-BE49-F238E27FC236}">
+                <a16:creationId xmlns:a16="http://schemas.microsoft.com/office/drawing/2014/main" id="{8438CB7F-0AFF-38AA-73E5-C682FE1B077A}"/>
+              </a:ext>
+            </a:extLst>
+          </p:cNvPr>
+          <p:cNvCxnSpPr/>
+          <p:nvPr/>
+        </p:nvCxnSpPr>
+        <p:spPr>
+          <a:xfrm flipV="1">
+            <a:off x="1195251" y="1136469"/>
+            <a:ext cx="0" cy="4898571"/>
+          </a:xfrm>
+          <a:prstGeom prst="line">
+            <a:avLst/>
+          </a:prstGeom>
+          <a:ln w="38100">
+            <a:solidFill>
+              <a:srgbClr val="905AA6"/>
+            </a:solidFill>
+          </a:ln>
+        </p:spPr>
+        <p:style>
+          <a:lnRef idx="1">
+            <a:schemeClr val="accent1"/>
+          </a:lnRef>
+          <a:fillRef idx="0">
+            <a:schemeClr val="accent1"/>
+          </a:fillRef>
+          <a:effectRef idx="0">
+            <a:schemeClr val="accent1"/>
+          </a:effectRef>
+          <a:fontRef idx="minor">
+            <a:schemeClr val="tx1"/>
+          </a:fontRef>
+        </p:style>
+      </p:cxnSp>
+      <p:cxnSp>
+        <p:nvCxnSpPr>
+          <p:cNvPr id="12" name="Straight Connector 11">
+            <a:extLst>
+              <a:ext uri="{FF2B5EF4-FFF2-40B4-BE49-F238E27FC236}">
+                <a16:creationId xmlns:a16="http://schemas.microsoft.com/office/drawing/2014/main" id="{4EE46859-D6D2-D990-CA2C-3ADDF7B42026}"/>
+              </a:ext>
+            </a:extLst>
+          </p:cNvPr>
+          <p:cNvCxnSpPr>
+            <a:cxnSpLocks/>
+          </p:cNvCxnSpPr>
+          <p:nvPr/>
+        </p:nvCxnSpPr>
+        <p:spPr>
+          <a:xfrm flipV="1">
+            <a:off x="1195251" y="3261052"/>
+            <a:ext cx="661851" cy="1724297"/>
+          </a:xfrm>
+          <a:prstGeom prst="line">
+            <a:avLst/>
+          </a:prstGeom>
+          <a:ln w="38100">
+            <a:solidFill>
+              <a:srgbClr val="0DBFD5"/>
+            </a:solidFill>
+          </a:ln>
+        </p:spPr>
+        <p:style>
+          <a:lnRef idx="1">
+            <a:schemeClr val="accent1"/>
+          </a:lnRef>
+          <a:fillRef idx="0">
+            <a:schemeClr val="accent1"/>
+          </a:fillRef>
+          <a:effectRef idx="0">
+            <a:schemeClr val="accent1"/>
+          </a:effectRef>
+          <a:fontRef idx="minor">
+            <a:schemeClr val="tx1"/>
+          </a:fontRef>
+        </p:style>
+      </p:cxnSp>
+      <p:cxnSp>
+        <p:nvCxnSpPr>
+          <p:cNvPr id="13" name="Straight Connector 12">
+            <a:extLst>
+              <a:ext uri="{FF2B5EF4-FFF2-40B4-BE49-F238E27FC236}">
+                <a16:creationId xmlns:a16="http://schemas.microsoft.com/office/drawing/2014/main" id="{1C86B578-3A27-11CD-0DBE-9D9422EDF378}"/>
+              </a:ext>
+            </a:extLst>
+          </p:cNvPr>
+          <p:cNvCxnSpPr>
+            <a:cxnSpLocks/>
+          </p:cNvCxnSpPr>
+          <p:nvPr/>
+        </p:nvCxnSpPr>
+        <p:spPr>
+          <a:xfrm flipH="1" flipV="1">
+            <a:off x="439782" y="1817801"/>
+            <a:ext cx="755469" cy="1389017"/>
+          </a:xfrm>
+          <a:prstGeom prst="line">
+            <a:avLst/>
+          </a:prstGeom>
+          <a:ln w="38100">
+            <a:solidFill>
+              <a:srgbClr val="0DBFD5"/>
+            </a:solidFill>
+          </a:ln>
+        </p:spPr>
+        <p:style>
+          <a:lnRef idx="1">
+            <a:schemeClr val="accent1"/>
+          </a:lnRef>
+          <a:fillRef idx="0">
+            <a:schemeClr val="accent1"/>
+          </a:fillRef>
+          <a:effectRef idx="0">
+            <a:schemeClr val="accent1"/>
+          </a:effectRef>
+          <a:fontRef idx="minor">
+            <a:schemeClr val="tx1"/>
+          </a:fontRef>
+        </p:style>
+      </p:cxnSp>
+      <p:cxnSp>
+        <p:nvCxnSpPr>
+          <p:cNvPr id="14" name="Straight Connector 13">
+            <a:extLst>
+              <a:ext uri="{FF2B5EF4-FFF2-40B4-BE49-F238E27FC236}">
+                <a16:creationId xmlns:a16="http://schemas.microsoft.com/office/drawing/2014/main" id="{E7C910EB-F1FD-F8BE-2F9A-58466EF45986}"/>
+              </a:ext>
+            </a:extLst>
+          </p:cNvPr>
+          <p:cNvCxnSpPr>
+            <a:cxnSpLocks/>
+          </p:cNvCxnSpPr>
+          <p:nvPr/>
+        </p:nvCxnSpPr>
+        <p:spPr>
+          <a:xfrm flipH="1" flipV="1">
+            <a:off x="1476648" y="2981336"/>
+            <a:ext cx="218803" cy="744160"/>
+          </a:xfrm>
+          <a:prstGeom prst="line">
+            <a:avLst/>
+          </a:prstGeom>
+          <a:ln w="38100">
+            <a:solidFill>
+              <a:srgbClr val="905AA6"/>
+            </a:solidFill>
+          </a:ln>
+        </p:spPr>
+        <p:style>
+          <a:lnRef idx="1">
+            <a:schemeClr val="accent1"/>
+          </a:lnRef>
+          <a:fillRef idx="0">
+            <a:schemeClr val="accent1"/>
+          </a:fillRef>
+          <a:effectRef idx="0">
+            <a:schemeClr val="accent1"/>
+          </a:effectRef>
+          <a:fontRef idx="minor">
+            <a:schemeClr val="tx1"/>
+          </a:fontRef>
+        </p:style>
+      </p:cxnSp>
+      <p:cxnSp>
+        <p:nvCxnSpPr>
+          <p:cNvPr id="15" name="Straight Connector 14">
+            <a:extLst>
+              <a:ext uri="{FF2B5EF4-FFF2-40B4-BE49-F238E27FC236}">
+                <a16:creationId xmlns:a16="http://schemas.microsoft.com/office/drawing/2014/main" id="{E8F0774D-CF89-C9FD-AC60-44764F6A270A}"/>
+              </a:ext>
+            </a:extLst>
+          </p:cNvPr>
+          <p:cNvCxnSpPr>
+            <a:cxnSpLocks/>
+          </p:cNvCxnSpPr>
+          <p:nvPr/>
+        </p:nvCxnSpPr>
+        <p:spPr>
+          <a:xfrm flipH="1">
+            <a:off x="1476648" y="4226595"/>
+            <a:ext cx="688249" cy="47493"/>
+          </a:xfrm>
+          <a:prstGeom prst="line">
+            <a:avLst/>
+          </a:prstGeom>
+          <a:ln w="38100">
+            <a:solidFill>
+              <a:srgbClr val="905AA6"/>
+            </a:solidFill>
+          </a:ln>
+        </p:spPr>
+        <p:style>
+          <a:lnRef idx="1">
+            <a:schemeClr val="accent1"/>
+          </a:lnRef>
+          <a:fillRef idx="0">
+            <a:schemeClr val="accent1"/>
+          </a:fillRef>
+          <a:effectRef idx="0">
+            <a:schemeClr val="accent1"/>
+          </a:effectRef>
+          <a:fontRef idx="minor">
+            <a:schemeClr val="tx1"/>
+          </a:fontRef>
+        </p:style>
+      </p:cxnSp>
+      <p:cxnSp>
+        <p:nvCxnSpPr>
+          <p:cNvPr id="23" name="Straight Connector 22">
+            <a:extLst>
+              <a:ext uri="{FF2B5EF4-FFF2-40B4-BE49-F238E27FC236}">
+                <a16:creationId xmlns:a16="http://schemas.microsoft.com/office/drawing/2014/main" id="{760B26D4-9099-02BE-20A0-AD3A198B2973}"/>
+              </a:ext>
+            </a:extLst>
+          </p:cNvPr>
+          <p:cNvCxnSpPr>
+            <a:cxnSpLocks/>
+          </p:cNvCxnSpPr>
+          <p:nvPr/>
+        </p:nvCxnSpPr>
+        <p:spPr>
+          <a:xfrm flipV="1">
+            <a:off x="3509006" y="4985349"/>
+            <a:ext cx="0" cy="1049691"/>
+          </a:xfrm>
+          <a:prstGeom prst="line">
+            <a:avLst/>
+          </a:prstGeom>
+          <a:ln w="38100">
+            <a:solidFill>
+              <a:srgbClr val="905AA6"/>
+            </a:solidFill>
+          </a:ln>
+        </p:spPr>
+        <p:style>
+          <a:lnRef idx="1">
+            <a:schemeClr val="accent1"/>
+          </a:lnRef>
+          <a:fillRef idx="0">
+            <a:schemeClr val="accent1"/>
+          </a:fillRef>
+          <a:effectRef idx="0">
+            <a:schemeClr val="accent1"/>
+          </a:effectRef>
+          <a:fontRef idx="minor">
+            <a:schemeClr val="tx1"/>
+          </a:fontRef>
+        </p:style>
+      </p:cxnSp>
+      <p:cxnSp>
+        <p:nvCxnSpPr>
+          <p:cNvPr id="25" name="Straight Connector 24">
+            <a:extLst>
+              <a:ext uri="{FF2B5EF4-FFF2-40B4-BE49-F238E27FC236}">
+                <a16:creationId xmlns:a16="http://schemas.microsoft.com/office/drawing/2014/main" id="{397248EC-E49F-B417-0D64-7447699A262D}"/>
+              </a:ext>
+            </a:extLst>
+          </p:cNvPr>
+          <p:cNvCxnSpPr>
+            <a:cxnSpLocks/>
+          </p:cNvCxnSpPr>
+          <p:nvPr/>
+        </p:nvCxnSpPr>
+        <p:spPr>
+          <a:xfrm flipV="1">
+            <a:off x="3509006" y="3261052"/>
+            <a:ext cx="0" cy="1647055"/>
+          </a:xfrm>
+          <a:prstGeom prst="line">
+            <a:avLst/>
+          </a:prstGeom>
+          <a:ln w="38100">
+            <a:solidFill>
+              <a:srgbClr val="905AA6"/>
+            </a:solidFill>
+          </a:ln>
+        </p:spPr>
+        <p:style>
+          <a:lnRef idx="1">
+            <a:schemeClr val="accent1"/>
+          </a:lnRef>
+          <a:fillRef idx="0">
+            <a:schemeClr val="accent1"/>
+          </a:fillRef>
+          <a:effectRef idx="0">
+            <a:schemeClr val="accent1"/>
+          </a:effectRef>
+          <a:fontRef idx="minor">
+            <a:schemeClr val="tx1"/>
+          </a:fontRef>
+        </p:style>
+      </p:cxnSp>
+      <p:cxnSp>
+        <p:nvCxnSpPr>
+          <p:cNvPr id="28" name="Straight Connector 27">
+            <a:extLst>
+              <a:ext uri="{FF2B5EF4-FFF2-40B4-BE49-F238E27FC236}">
+                <a16:creationId xmlns:a16="http://schemas.microsoft.com/office/drawing/2014/main" id="{44EBEB58-F2BC-6A7A-D8FD-B51E7513DC74}"/>
+              </a:ext>
+            </a:extLst>
+          </p:cNvPr>
+          <p:cNvCxnSpPr>
+            <a:cxnSpLocks/>
+          </p:cNvCxnSpPr>
+          <p:nvPr/>
+        </p:nvCxnSpPr>
+        <p:spPr>
+          <a:xfrm flipV="1">
+            <a:off x="3487235" y="1168072"/>
+            <a:ext cx="0" cy="1945015"/>
+          </a:xfrm>
+          <a:prstGeom prst="line">
+            <a:avLst/>
+          </a:prstGeom>
+          <a:ln w="38100">
+            <a:solidFill>
+              <a:srgbClr val="905AA6"/>
+            </a:solidFill>
+          </a:ln>
+        </p:spPr>
+        <p:style>
+          <a:lnRef idx="1">
+            <a:schemeClr val="accent1"/>
+          </a:lnRef>
+          <a:fillRef idx="0">
+            <a:schemeClr val="accent1"/>
+          </a:fillRef>
+          <a:effectRef idx="0">
+            <a:schemeClr val="accent1"/>
+          </a:effectRef>
+          <a:fontRef idx="minor">
+            <a:schemeClr val="tx1"/>
+          </a:fontRef>
+        </p:style>
+      </p:cxnSp>
+      <p:cxnSp>
+        <p:nvCxnSpPr>
+          <p:cNvPr id="30" name="Straight Connector 29">
+            <a:extLst>
+              <a:ext uri="{FF2B5EF4-FFF2-40B4-BE49-F238E27FC236}">
+                <a16:creationId xmlns:a16="http://schemas.microsoft.com/office/drawing/2014/main" id="{E62FF62E-9BAF-7952-1BBA-F0EF738654D1}"/>
+              </a:ext>
+            </a:extLst>
+          </p:cNvPr>
+          <p:cNvCxnSpPr>
+            <a:cxnSpLocks/>
+          </p:cNvCxnSpPr>
+          <p:nvPr/>
+        </p:nvCxnSpPr>
+        <p:spPr>
+          <a:xfrm flipH="1" flipV="1">
+            <a:off x="2683870" y="1817801"/>
+            <a:ext cx="755469" cy="1389017"/>
+          </a:xfrm>
+          <a:prstGeom prst="line">
+            <a:avLst/>
+          </a:prstGeom>
+          <a:ln w="38100">
+            <a:solidFill>
+              <a:srgbClr val="0DBFD5"/>
+            </a:solidFill>
+          </a:ln>
+        </p:spPr>
+        <p:style>
+          <a:lnRef idx="1">
+            <a:schemeClr val="accent1"/>
+          </a:lnRef>
+          <a:fillRef idx="0">
+            <a:schemeClr val="accent1"/>
+          </a:fillRef>
+          <a:effectRef idx="0">
+            <a:schemeClr val="accent1"/>
+          </a:effectRef>
+          <a:fontRef idx="minor">
+            <a:schemeClr val="tx1"/>
+          </a:fontRef>
+        </p:style>
+      </p:cxnSp>
+      <p:cxnSp>
+        <p:nvCxnSpPr>
+          <p:cNvPr id="31" name="Straight Connector 30">
+            <a:extLst>
+              <a:ext uri="{FF2B5EF4-FFF2-40B4-BE49-F238E27FC236}">
+                <a16:creationId xmlns:a16="http://schemas.microsoft.com/office/drawing/2014/main" id="{6AE1C829-FBFC-FFD6-E03C-4CCE7CD60E78}"/>
+              </a:ext>
+            </a:extLst>
+          </p:cNvPr>
+          <p:cNvCxnSpPr>
+            <a:cxnSpLocks/>
+          </p:cNvCxnSpPr>
+          <p:nvPr/>
+        </p:nvCxnSpPr>
+        <p:spPr>
+          <a:xfrm flipV="1">
+            <a:off x="3561805" y="4330337"/>
+            <a:ext cx="254996" cy="619348"/>
+          </a:xfrm>
+          <a:prstGeom prst="line">
+            <a:avLst/>
+          </a:prstGeom>
+          <a:ln w="38100">
+            <a:solidFill>
+              <a:srgbClr val="0DBFD5"/>
+            </a:solidFill>
+          </a:ln>
+        </p:spPr>
+        <p:style>
+          <a:lnRef idx="1">
+            <a:schemeClr val="accent1"/>
+          </a:lnRef>
+          <a:fillRef idx="0">
+            <a:schemeClr val="accent1"/>
+          </a:fillRef>
+          <a:effectRef idx="0">
+            <a:schemeClr val="accent1"/>
+          </a:effectRef>
+          <a:fontRef idx="minor">
+            <a:schemeClr val="tx1"/>
+          </a:fontRef>
+        </p:style>
+      </p:cxnSp>
+      <p:cxnSp>
+        <p:nvCxnSpPr>
+          <p:cNvPr id="32" name="Straight Connector 31">
+            <a:extLst>
+              <a:ext uri="{FF2B5EF4-FFF2-40B4-BE49-F238E27FC236}">
+                <a16:creationId xmlns:a16="http://schemas.microsoft.com/office/drawing/2014/main" id="{E9DCEF6C-0D57-1AC9-95D8-0654564A9B31}"/>
+              </a:ext>
+            </a:extLst>
+          </p:cNvPr>
+          <p:cNvCxnSpPr>
+            <a:cxnSpLocks/>
+          </p:cNvCxnSpPr>
+          <p:nvPr/>
+        </p:nvCxnSpPr>
+        <p:spPr>
+          <a:xfrm flipV="1">
+            <a:off x="3860071" y="3847351"/>
+            <a:ext cx="171995" cy="417379"/>
+          </a:xfrm>
+          <a:prstGeom prst="line">
+            <a:avLst/>
+          </a:prstGeom>
+          <a:ln w="38100">
+            <a:solidFill>
+              <a:srgbClr val="0DBFD5"/>
+            </a:solidFill>
+          </a:ln>
+        </p:spPr>
+        <p:style>
+          <a:lnRef idx="1">
+            <a:schemeClr val="accent1"/>
+          </a:lnRef>
+          <a:fillRef idx="0">
+            <a:schemeClr val="accent1"/>
+          </a:fillRef>
+          <a:effectRef idx="0">
+            <a:schemeClr val="accent1"/>
+          </a:effectRef>
+          <a:fontRef idx="minor">
+            <a:schemeClr val="tx1"/>
+          </a:fontRef>
+        </p:style>
+      </p:cxnSp>
+      <p:cxnSp>
+        <p:nvCxnSpPr>
+          <p:cNvPr id="33" name="Straight Connector 32">
+            <a:extLst>
+              <a:ext uri="{FF2B5EF4-FFF2-40B4-BE49-F238E27FC236}">
+                <a16:creationId xmlns:a16="http://schemas.microsoft.com/office/drawing/2014/main" id="{49D059B0-B9A5-9796-F4FC-734620244C4D}"/>
+              </a:ext>
+            </a:extLst>
+          </p:cNvPr>
+          <p:cNvCxnSpPr>
+            <a:cxnSpLocks/>
+          </p:cNvCxnSpPr>
+          <p:nvPr/>
+        </p:nvCxnSpPr>
+        <p:spPr>
+          <a:xfrm flipH="1">
+            <a:off x="3892730" y="4226595"/>
+            <a:ext cx="688249" cy="47493"/>
+          </a:xfrm>
+          <a:prstGeom prst="line">
+            <a:avLst/>
+          </a:prstGeom>
+          <a:ln w="38100">
+            <a:solidFill>
+              <a:srgbClr val="905AA6"/>
+            </a:solidFill>
+          </a:ln>
+        </p:spPr>
+        <p:style>
+          <a:lnRef idx="1">
+            <a:schemeClr val="accent1"/>
+          </a:lnRef>
+          <a:fillRef idx="0">
+            <a:schemeClr val="accent1"/>
+          </a:fillRef>
+          <a:effectRef idx="0">
+            <a:schemeClr val="accent1"/>
+          </a:effectRef>
+          <a:fontRef idx="minor">
+            <a:schemeClr val="tx1"/>
+          </a:fontRef>
+        </p:style>
+      </p:cxnSp>
+      <p:cxnSp>
+        <p:nvCxnSpPr>
+          <p:cNvPr id="36" name="Straight Connector 35">
+            <a:extLst>
+              <a:ext uri="{FF2B5EF4-FFF2-40B4-BE49-F238E27FC236}">
+                <a16:creationId xmlns:a16="http://schemas.microsoft.com/office/drawing/2014/main" id="{BBA19BB3-B8C8-6ABC-7620-52D254EF8C98}"/>
+              </a:ext>
+            </a:extLst>
+          </p:cNvPr>
+          <p:cNvCxnSpPr>
+            <a:cxnSpLocks/>
+          </p:cNvCxnSpPr>
+          <p:nvPr/>
+        </p:nvCxnSpPr>
+        <p:spPr>
+          <a:xfrm flipH="1" flipV="1">
+            <a:off x="3807821" y="3037585"/>
+            <a:ext cx="218803" cy="744160"/>
+          </a:xfrm>
+          <a:prstGeom prst="line">
+            <a:avLst/>
+          </a:prstGeom>
+          <a:ln w="38100">
+            <a:solidFill>
+              <a:srgbClr val="905AA6"/>
+            </a:solidFill>
+          </a:ln>
+        </p:spPr>
+        <p:style>
+          <a:lnRef idx="1">
+            <a:schemeClr val="accent1"/>
+          </a:lnRef>
+          <a:fillRef idx="0">
+            <a:schemeClr val="accent1"/>
+          </a:fillRef>
+          <a:effectRef idx="0">
+            <a:schemeClr val="accent1"/>
+          </a:effectRef>
+          <a:fontRef idx="minor">
+            <a:schemeClr val="tx1"/>
+          </a:fontRef>
+        </p:style>
+      </p:cxnSp>
+      <p:cxnSp>
+        <p:nvCxnSpPr>
+          <p:cNvPr id="37" name="Straight Connector 36">
+            <a:extLst>
+              <a:ext uri="{FF2B5EF4-FFF2-40B4-BE49-F238E27FC236}">
+                <a16:creationId xmlns:a16="http://schemas.microsoft.com/office/drawing/2014/main" id="{91E1A42B-1A55-5F42-E926-B291BC121C8F}"/>
+              </a:ext>
+            </a:extLst>
+          </p:cNvPr>
+          <p:cNvCxnSpPr>
+            <a:cxnSpLocks/>
+          </p:cNvCxnSpPr>
+          <p:nvPr/>
+        </p:nvCxnSpPr>
+        <p:spPr>
+          <a:xfrm flipV="1">
+            <a:off x="4064859" y="3364366"/>
+            <a:ext cx="171995" cy="417379"/>
+          </a:xfrm>
+          <a:prstGeom prst="line">
+            <a:avLst/>
+          </a:prstGeom>
+          <a:ln w="38100">
+            <a:solidFill>
+              <a:srgbClr val="0DBFD5"/>
+            </a:solidFill>
+          </a:ln>
+        </p:spPr>
+        <p:style>
+          <a:lnRef idx="1">
+            <a:schemeClr val="accent1"/>
+          </a:lnRef>
+          <a:fillRef idx="0">
+            <a:schemeClr val="accent1"/>
+          </a:fillRef>
+          <a:effectRef idx="0">
+            <a:schemeClr val="accent1"/>
+          </a:effectRef>
+          <a:fontRef idx="minor">
+            <a:schemeClr val="tx1"/>
+          </a:fontRef>
+        </p:style>
+      </p:cxnSp>
+      <mc:AlternateContent xmlns:mc="http://schemas.openxmlformats.org/markup-compatibility/2006" xmlns:a14="http://schemas.microsoft.com/office/drawing/2010/main">
+        <mc:Choice Requires="a14">
+          <p:sp>
+            <p:nvSpPr>
+              <p:cNvPr id="39" name="TextBox 38">
+                <a:extLst>
+                  <a:ext uri="{FF2B5EF4-FFF2-40B4-BE49-F238E27FC236}">
+                    <a16:creationId xmlns:a16="http://schemas.microsoft.com/office/drawing/2014/main" id="{C6A62372-B7C3-B8D4-4CF4-7E5B0A4040F9}"/>
+                  </a:ext>
+                </a:extLst>
+              </p:cNvPr>
+              <p:cNvSpPr txBox="1"/>
+              <p:nvPr/>
+            </p:nvSpPr>
+            <p:spPr>
+              <a:xfrm>
+                <a:off x="3981380" y="842736"/>
+                <a:ext cx="3456354" cy="1610414"/>
+              </a:xfrm>
+              <a:prstGeom prst="rect">
+                <a:avLst/>
+              </a:prstGeom>
+              <a:solidFill>
+                <a:srgbClr val="905AA6">
+                  <a:alpha val="25000"/>
+                </a:srgbClr>
+              </a:solidFill>
+              <a:ln w="57150">
+                <a:noFill/>
+              </a:ln>
+            </p:spPr>
+            <p:txBody>
+              <a:bodyPr wrap="square" lIns="108000" tIns="108000" rIns="108000" bIns="108000" rtlCol="0" anchor="ctr" anchorCtr="0">
+                <a:spAutoFit/>
+              </a:bodyPr>
+              <a:lstStyle/>
+              <a:p>
+                <a:pPr/>
+                <a14:m>
+                  <m:oMathPara xmlns:m="http://schemas.openxmlformats.org/officeDocument/2006/math">
+                    <m:oMathParaPr>
+                      <m:jc m:val="centerGroup"/>
+                    </m:oMathParaPr>
+                    <m:oMath xmlns:m="http://schemas.openxmlformats.org/officeDocument/2006/math">
+                      <m:r>
+                        <a:rPr lang="en-US" sz="3600" b="0" i="1" smtClean="0">
+                          <a:latin typeface="Cambria Math" panose="02040503050406030204" pitchFamily="18" charset="0"/>
+                        </a:rPr>
+                        <m:t>𝑅</m:t>
+                      </m:r>
+                      <m:r>
+                        <a:rPr lang="en-US" sz="3600" b="0" i="1" smtClean="0">
+                          <a:latin typeface="Cambria Math" panose="02040503050406030204" pitchFamily="18" charset="0"/>
+                        </a:rPr>
+                        <m:t> </m:t>
+                      </m:r>
+                      <m:d>
+                        <m:dPr>
+                          <m:ctrlPr>
+                            <a:rPr lang="en-US" sz="3600" b="0" i="1" smtClean="0">
+                              <a:latin typeface="Cambria Math" panose="02040503050406030204" pitchFamily="18" charset="0"/>
+                            </a:rPr>
+                          </m:ctrlPr>
+                        </m:dPr>
+                        <m:e>
+                          <m:r>
+                            <a:rPr lang="en-US" sz="3600" b="0" i="1" smtClean="0">
+                              <a:latin typeface="Cambria Math" panose="02040503050406030204" pitchFamily="18" charset="0"/>
+                            </a:rPr>
+                            <m:t>𝑥</m:t>
+                          </m:r>
+                        </m:e>
+                      </m:d>
+                      <m:r>
+                        <a:rPr lang="en-US" sz="3600" b="0" i="1" smtClean="0">
+                          <a:latin typeface="Cambria Math" panose="02040503050406030204" pitchFamily="18" charset="0"/>
+                        </a:rPr>
+                        <m:t>=</m:t>
+                      </m:r>
+                      <m:sSub>
+                        <m:sSubPr>
+                          <m:ctrlPr>
+                            <a:rPr lang="en-US" sz="3600" b="0" i="1" smtClean="0">
+                              <a:latin typeface="Cambria Math" panose="02040503050406030204" pitchFamily="18" charset="0"/>
+                            </a:rPr>
+                          </m:ctrlPr>
+                        </m:sSubPr>
+                        <m:e>
+                          <m:r>
+                            <a:rPr lang="en-US" sz="3600" b="0" i="1" smtClean="0">
+                              <a:latin typeface="Cambria Math" panose="02040503050406030204" pitchFamily="18" charset="0"/>
+                            </a:rPr>
+                            <m:t>𝑅</m:t>
+                          </m:r>
+                        </m:e>
+                        <m:sub>
+                          <m:r>
+                            <a:rPr lang="en-US" sz="3600" b="0" i="1" smtClean="0">
+                              <a:latin typeface="Cambria Math" panose="02040503050406030204" pitchFamily="18" charset="0"/>
+                            </a:rPr>
+                            <m:t>𝑢</m:t>
+                          </m:r>
+                        </m:sub>
+                      </m:sSub>
+                      <m:r>
+                        <a:rPr lang="en-US" sz="3600" b="0" i="1" smtClean="0">
+                          <a:latin typeface="Cambria Math" panose="02040503050406030204" pitchFamily="18" charset="0"/>
+                        </a:rPr>
+                        <m:t> </m:t>
+                      </m:r>
+                      <m:sSup>
+                        <m:sSupPr>
+                          <m:ctrlPr>
+                            <a:rPr lang="en-US" sz="3600" b="0" i="1" smtClean="0">
+                              <a:latin typeface="Cambria Math" panose="02040503050406030204" pitchFamily="18" charset="0"/>
+                            </a:rPr>
+                          </m:ctrlPr>
+                        </m:sSupPr>
+                        <m:e>
+                          <m:f>
+                            <m:fPr>
+                              <m:ctrlPr>
+                                <a:rPr lang="en-US" sz="3600" b="0" i="1" smtClean="0">
+                                  <a:latin typeface="Cambria Math" panose="02040503050406030204" pitchFamily="18" charset="0"/>
+                                </a:rPr>
+                              </m:ctrlPr>
+                            </m:fPr>
+                            <m:num>
+                              <m:sSub>
+                                <m:sSubPr>
+                                  <m:ctrlPr>
+                                    <a:rPr lang="en-US" sz="3600" b="0" i="1" smtClean="0">
+                                      <a:latin typeface="Cambria Math" panose="02040503050406030204" pitchFamily="18" charset="0"/>
+                                    </a:rPr>
+                                  </m:ctrlPr>
+                                </m:sSubPr>
+                                <m:e>
+                                  <m:r>
+                                    <a:rPr lang="en-US" sz="3600" b="0" i="1" smtClean="0">
+                                      <a:latin typeface="Cambria Math" panose="02040503050406030204" pitchFamily="18" charset="0"/>
+                                    </a:rPr>
+                                    <m:t>𝑅</m:t>
+                                  </m:r>
+                                </m:e>
+                                <m:sub>
+                                  <m:r>
+                                    <a:rPr lang="en-US" sz="3600" b="0" i="1" smtClean="0">
+                                      <a:latin typeface="Cambria Math" panose="02040503050406030204" pitchFamily="18" charset="0"/>
+                                    </a:rPr>
+                                    <m:t>𝑑</m:t>
+                                  </m:r>
+                                </m:sub>
+                              </m:sSub>
+                            </m:num>
+                            <m:den>
+                              <m:sSub>
+                                <m:sSubPr>
+                                  <m:ctrlPr>
+                                    <a:rPr lang="en-US" sz="3600" b="0" i="1" smtClean="0">
+                                      <a:latin typeface="Cambria Math" panose="02040503050406030204" pitchFamily="18" charset="0"/>
+                                    </a:rPr>
+                                  </m:ctrlPr>
+                                </m:sSubPr>
+                                <m:e>
+                                  <m:r>
+                                    <a:rPr lang="en-US" sz="3600" b="0" i="1" smtClean="0">
+                                      <a:latin typeface="Cambria Math" panose="02040503050406030204" pitchFamily="18" charset="0"/>
+                                    </a:rPr>
+                                    <m:t>𝑅</m:t>
+                                  </m:r>
+                                </m:e>
+                                <m:sub>
+                                  <m:r>
+                                    <a:rPr lang="en-US" sz="3600" b="0" i="1" smtClean="0">
+                                      <a:latin typeface="Cambria Math" panose="02040503050406030204" pitchFamily="18" charset="0"/>
+                                    </a:rPr>
+                                    <m:t>𝑢</m:t>
+                                  </m:r>
+                                </m:sub>
+                              </m:sSub>
+                            </m:den>
+                          </m:f>
+                        </m:e>
+                        <m:sup>
+                          <m:f>
+                            <m:fPr>
+                              <m:ctrlPr>
+                                <a:rPr lang="en-US" sz="3600" b="0" i="1" smtClean="0">
+                                  <a:latin typeface="Cambria Math" panose="02040503050406030204" pitchFamily="18" charset="0"/>
+                                </a:rPr>
+                              </m:ctrlPr>
+                            </m:fPr>
+                            <m:num>
+                              <m:r>
+                                <a:rPr lang="en-US" sz="3600" b="0" i="1" smtClean="0">
+                                  <a:latin typeface="Cambria Math" panose="02040503050406030204" pitchFamily="18" charset="0"/>
+                                </a:rPr>
+                                <m:t>𝑥</m:t>
+                              </m:r>
+                            </m:num>
+                            <m:den>
+                              <m:r>
+                                <a:rPr lang="en-US" sz="3600" b="0" i="1" smtClean="0">
+                                  <a:latin typeface="Cambria Math" panose="02040503050406030204" pitchFamily="18" charset="0"/>
+                                </a:rPr>
+                                <m:t>𝐿</m:t>
+                              </m:r>
+                            </m:den>
+                          </m:f>
+                        </m:sup>
+                      </m:sSup>
+                    </m:oMath>
+                  </m:oMathPara>
+                </a14:m>
+                <a:endParaRPr lang="en-CA" sz="3600" dirty="0"/>
+              </a:p>
+            </p:txBody>
+          </p:sp>
+        </mc:Choice>
+        <mc:Fallback xmlns="">
+          <p:sp>
+            <p:nvSpPr>
+              <p:cNvPr id="39" name="TextBox 38">
+                <a:extLst>
+                  <a:ext uri="{FF2B5EF4-FFF2-40B4-BE49-F238E27FC236}">
+                    <a16:creationId xmlns:a16="http://schemas.microsoft.com/office/drawing/2014/main" id="{C6A62372-B7C3-B8D4-4CF4-7E5B0A4040F9}"/>
+                  </a:ext>
+                </a:extLst>
+              </p:cNvPr>
+              <p:cNvSpPr txBox="1">
+                <a:spLocks noRot="1" noChangeAspect="1" noMove="1" noResize="1" noEditPoints="1" noAdjustHandles="1" noChangeArrowheads="1" noChangeShapeType="1" noTextEdit="1"/>
+              </p:cNvSpPr>
+              <p:nvPr/>
+            </p:nvSpPr>
+            <p:spPr>
+              <a:xfrm>
+                <a:off x="3981380" y="842736"/>
+                <a:ext cx="3456354" cy="1610414"/>
+              </a:xfrm>
+              <a:prstGeom prst="rect">
+                <a:avLst/>
+              </a:prstGeom>
+              <a:blipFill>
+                <a:blip r:embed="rId2"/>
+                <a:stretch>
+                  <a:fillRect/>
+                </a:stretch>
+              </a:blipFill>
+              <a:ln w="57150">
+                <a:noFill/>
+              </a:ln>
+            </p:spPr>
+            <p:txBody>
+              <a:bodyPr/>
+              <a:lstStyle/>
+              <a:p>
+                <a:r>
+                  <a:rPr lang="en-CA">
+                    <a:noFill/>
+                  </a:rPr>
+                  <a:t> </a:t>
+                </a:r>
+              </a:p>
+            </p:txBody>
+          </p:sp>
+        </mc:Fallback>
+      </mc:AlternateContent>
+      <p:sp>
+        <p:nvSpPr>
+          <p:cNvPr id="40" name="TextBox 39">
+            <a:extLst>
+              <a:ext uri="{FF2B5EF4-FFF2-40B4-BE49-F238E27FC236}">
+                <a16:creationId xmlns:a16="http://schemas.microsoft.com/office/drawing/2014/main" id="{2618BB12-C664-E47E-1E47-3C0A9A7EFD53}"/>
+              </a:ext>
+            </a:extLst>
+          </p:cNvPr>
+          <p:cNvSpPr txBox="1"/>
+          <p:nvPr/>
+        </p:nvSpPr>
+        <p:spPr>
+          <a:xfrm>
+            <a:off x="7660276" y="115496"/>
+            <a:ext cx="4477723" cy="6240817"/>
           </a:xfrm>
           <a:prstGeom prst="rect">
             <a:avLst/>
@@ -5322,29 +8626,142 @@
               <a:alpha val="25000"/>
             </a:srgbClr>
           </a:solidFill>
-        </p:spPr>
-        <p:txBody>
-          <a:bodyPr wrap="square" tIns="108000" bIns="108000" rtlCol="0">
+          <a:ln w="57150">
+            <a:noFill/>
+          </a:ln>
+        </p:spPr>
+        <p:txBody>
+          <a:bodyPr wrap="square" rtlCol="0">
             <a:spAutoFit/>
           </a:bodyPr>
           <a:lstStyle/>
           <a:p>
-            <a:pPr algn="ctr"/>
-            <a:r>
-              <a:rPr lang="en-CA" sz="8800" dirty="0">
-                <a:solidFill>
-                  <a:schemeClr val="bg1"/>
-                </a:solidFill>
-              </a:rPr>
-              <a:t>Thank you</a:t>
-            </a:r>
-          </a:p>
-        </p:txBody>
-      </p:sp>
+            <a:endParaRPr lang="en-CA" dirty="0"/>
+          </a:p>
+        </p:txBody>
+      </p:sp>
+      <p:pic>
+        <p:nvPicPr>
+          <p:cNvPr id="3" name="Picture 2">
+            <a:extLst>
+              <a:ext uri="{FF2B5EF4-FFF2-40B4-BE49-F238E27FC236}">
+                <a16:creationId xmlns:a16="http://schemas.microsoft.com/office/drawing/2014/main" id="{3FFB7EA6-4DB5-4758-2C01-F01657621058}"/>
+              </a:ext>
+            </a:extLst>
+          </p:cNvPr>
+          <p:cNvPicPr>
+            <a:picLocks noChangeAspect="1"/>
+          </p:cNvPicPr>
+          <p:nvPr/>
+        </p:nvPicPr>
+        <p:blipFill rotWithShape="1">
+          <a:blip r:embed="rId3"/>
+          <a:srcRect l="1611" r="2344"/>
+          <a:stretch/>
+        </p:blipFill>
+        <p:spPr>
+          <a:xfrm>
+            <a:off x="7860361" y="196558"/>
+            <a:ext cx="4158000" cy="3307505"/>
+          </a:xfrm>
+          <a:prstGeom prst="rect">
+            <a:avLst/>
+          </a:prstGeom>
+        </p:spPr>
+      </p:pic>
+      <p:pic>
+        <p:nvPicPr>
+          <p:cNvPr id="7" name="Picture 6">
+            <a:extLst>
+              <a:ext uri="{FF2B5EF4-FFF2-40B4-BE49-F238E27FC236}">
+                <a16:creationId xmlns:a16="http://schemas.microsoft.com/office/drawing/2014/main" id="{FFCD60C4-6156-DC97-38B2-CDB0BA2C9787}"/>
+              </a:ext>
+            </a:extLst>
+          </p:cNvPr>
+          <p:cNvPicPr>
+            <a:picLocks noChangeAspect="1"/>
+          </p:cNvPicPr>
+          <p:nvPr/>
+        </p:nvPicPr>
+        <p:blipFill rotWithShape="1">
+          <a:blip r:embed="rId4"/>
+          <a:srcRect t="2186" b="-1"/>
+          <a:stretch/>
+        </p:blipFill>
+        <p:spPr>
+          <a:xfrm>
+            <a:off x="7860362" y="3065992"/>
+            <a:ext cx="4158000" cy="3173564"/>
+          </a:xfrm>
+          <a:prstGeom prst="rect">
+            <a:avLst/>
+          </a:prstGeom>
+        </p:spPr>
+      </p:pic>
+      <p:pic>
+        <p:nvPicPr>
+          <p:cNvPr id="5" name="Picture 4">
+            <a:extLst>
+              <a:ext uri="{FF2B5EF4-FFF2-40B4-BE49-F238E27FC236}">
+                <a16:creationId xmlns:a16="http://schemas.microsoft.com/office/drawing/2014/main" id="{46F6BC5E-1DDE-F4D9-128F-E5D89ADFB236}"/>
+              </a:ext>
+            </a:extLst>
+          </p:cNvPr>
+          <p:cNvPicPr>
+            <a:picLocks noChangeAspect="1"/>
+          </p:cNvPicPr>
+          <p:nvPr/>
+        </p:nvPicPr>
+        <p:blipFill>
+          <a:blip r:embed="rId5"/>
+          <a:stretch>
+            <a:fillRect/>
+          </a:stretch>
+        </p:blipFill>
+        <p:spPr>
+          <a:xfrm>
+            <a:off x="9686289" y="344248"/>
+            <a:ext cx="2066940" cy="571504"/>
+          </a:xfrm>
+          <a:prstGeom prst="rect">
+            <a:avLst/>
+          </a:prstGeom>
+        </p:spPr>
+      </p:pic>
+      <p:pic>
+        <p:nvPicPr>
+          <p:cNvPr id="16" name="Picture 15">
+            <a:extLst>
+              <a:ext uri="{FF2B5EF4-FFF2-40B4-BE49-F238E27FC236}">
+                <a16:creationId xmlns:a16="http://schemas.microsoft.com/office/drawing/2014/main" id="{360AAB71-8CD8-E745-F20E-9893626DB946}"/>
+              </a:ext>
+            </a:extLst>
+          </p:cNvPr>
+          <p:cNvPicPr>
+            <a:picLocks noChangeAspect="1"/>
+          </p:cNvPicPr>
+          <p:nvPr/>
+        </p:nvPicPr>
+        <p:blipFill>
+          <a:blip r:embed="rId5"/>
+          <a:stretch>
+            <a:fillRect/>
+          </a:stretch>
+        </p:blipFill>
+        <p:spPr>
+          <a:xfrm>
+            <a:off x="9664183" y="3153992"/>
+            <a:ext cx="2066940" cy="571504"/>
+          </a:xfrm>
+          <a:prstGeom prst="rect">
+            <a:avLst/>
+          </a:prstGeom>
+        </p:spPr>
+      </p:pic>
     </p:spTree>
     <p:extLst>
       <p:ext uri="{BB962C8B-B14F-4D97-AF65-F5344CB8AC3E}">
-        <p14:creationId xmlns:p14="http://schemas.microsoft.com/office/powerpoint/2010/main" val="1875021657"/>
+        <p14:creationId xmlns:p14="http://schemas.microsoft.com/office/powerpoint/2010/main" val="2945413337"/>
       </p:ext>
     </p:extLst>
   </p:cSld>
@@ -6995,7 +10412,7 @@
           <p:nvPr/>
         </p:nvPicPr>
         <p:blipFill rotWithShape="1">
-          <a:blip r:embed="rId2">
+          <a:blip r:embed="rId3">
             <a:extLst>
               <a:ext uri="{28A0092B-C50C-407E-A947-70E740481C1C}">
                 <a14:useLocalDpi xmlns:a14="http://schemas.microsoft.com/office/drawing/2010/main" val="0"/>
@@ -7357,8 +10774,8 @@
         </p:nvSpPr>
         <p:spPr>
           <a:xfrm>
-            <a:off x="4879497" y="2079653"/>
-            <a:ext cx="5655523" cy="369332"/>
+            <a:off x="8578016" y="114299"/>
+            <a:ext cx="3505127" cy="1200329"/>
           </a:xfrm>
           <a:prstGeom prst="rect">
             <a:avLst/>
@@ -7373,11 +10790,25 @@
           <a:p>
             <a:r>
               <a:rPr lang="en-US" dirty="0"/>
-              <a:t>Overlap arteries and venous images with </a:t>
-            </a:r>
-            <a:r>
-              <a:rPr lang="en-US" dirty="0" err="1"/>
-              <a:t>comparments</a:t>
+              <a:t>Systemic arteries: 1D  (pulsatile)</a:t>
+            </a:r>
+          </a:p>
+          <a:p>
+            <a:r>
+              <a:rPr lang="en-US" dirty="0"/>
+              <a:t>Systemic veins: 1D</a:t>
+            </a:r>
+          </a:p>
+          <a:p>
+            <a:r>
+              <a:rPr lang="en-US" dirty="0"/>
+              <a:t>Pulmonary Vessels: 1D (pulsatile)</a:t>
+            </a:r>
+          </a:p>
+          <a:p>
+            <a:r>
+              <a:rPr lang="en-US" dirty="0"/>
+              <a:t>Compartments: 0D</a:t>
             </a:r>
             <a:endParaRPr lang="en-CA" dirty="0"/>
           </a:p>
@@ -7637,10 +11068,10 @@
       </p:sp>
       <p:sp>
         <p:nvSpPr>
-          <p:cNvPr id="3" name="TextBox 2">
-            <a:extLst>
-              <a:ext uri="{FF2B5EF4-FFF2-40B4-BE49-F238E27FC236}">
-                <a16:creationId xmlns:a16="http://schemas.microsoft.com/office/drawing/2014/main" id="{D4B51A57-DFD0-8B45-3B1D-D633F4E980D1}"/>
+          <p:cNvPr id="12" name="TextBox 11">
+            <a:extLst>
+              <a:ext uri="{FF2B5EF4-FFF2-40B4-BE49-F238E27FC236}">
+                <a16:creationId xmlns:a16="http://schemas.microsoft.com/office/drawing/2014/main" id="{69F995CC-2273-24A1-3EC8-AA0C0ACD25BB}"/>
               </a:ext>
             </a:extLst>
           </p:cNvPr>
@@ -7649,8 +11080,8 @@
         </p:nvSpPr>
         <p:spPr>
           <a:xfrm>
-            <a:off x="4021742" y="708053"/>
-            <a:ext cx="7719801" cy="369332"/>
+            <a:off x="5972432" y="947351"/>
+            <a:ext cx="5428736" cy="369332"/>
           </a:xfrm>
           <a:prstGeom prst="rect">
             <a:avLst/>
@@ -7665,7 +11096,7 @@
           <a:p>
             <a:r>
               <a:rPr lang="en-US" dirty="0"/>
-              <a:t>1D modelling info</a:t>
+              <a:t>1-Dimesnional (1D) </a:t>
             </a:r>
             <a:endParaRPr lang="en-CA" dirty="0"/>
           </a:p>
@@ -7869,7 +11300,11 @@
           <a:p>
             <a:r>
               <a:rPr lang="en-US" sz="2400" dirty="0"/>
-              <a:t>1D Arteries</a:t>
+              <a:t>Model Components - </a:t>
+            </a:r>
+            <a:r>
+              <a:rPr lang="en-US" sz="2400" b="1" dirty="0"/>
+              <a:t>Compartments</a:t>
             </a:r>
             <a:endParaRPr lang="en-CA" sz="2400" dirty="0"/>
           </a:p>
@@ -7880,7 +11315,7 @@
           <p:cNvPr id="2" name="TextBox 1">
             <a:extLst>
               <a:ext uri="{FF2B5EF4-FFF2-40B4-BE49-F238E27FC236}">
-                <a16:creationId xmlns:a16="http://schemas.microsoft.com/office/drawing/2014/main" id="{4693CD8A-4FD1-A4F3-6054-7AAE24A59C97}"/>
+                <a16:creationId xmlns:a16="http://schemas.microsoft.com/office/drawing/2014/main" id="{19C695FA-AD9D-882B-AFD7-2C4D89C65984}"/>
               </a:ext>
             </a:extLst>
           </p:cNvPr>
@@ -7890,7 +11325,7 @@
         <p:spPr>
           <a:xfrm>
             <a:off x="962952" y="1327094"/>
-            <a:ext cx="1035781" cy="923330"/>
+            <a:ext cx="1035781" cy="1200329"/>
           </a:xfrm>
           <a:prstGeom prst="rect">
             <a:avLst/>
@@ -7905,7 +11340,15 @@
           <a:p>
             <a:r>
               <a:rPr lang="en-US" dirty="0"/>
-              <a:t>1d artery image</a:t>
+              <a:t>od </a:t>
+            </a:r>
+            <a:r>
+              <a:rPr lang="en-US" dirty="0" err="1"/>
+              <a:t>compatments</a:t>
+            </a:r>
+            <a:r>
+              <a:rPr lang="en-US" dirty="0"/>
+              <a:t> image</a:t>
             </a:r>
             <a:endParaRPr lang="en-CA" dirty="0"/>
           </a:p>
@@ -7916,7 +11359,7 @@
           <p:cNvPr id="3" name="TextBox 2">
             <a:extLst>
               <a:ext uri="{FF2B5EF4-FFF2-40B4-BE49-F238E27FC236}">
-                <a16:creationId xmlns:a16="http://schemas.microsoft.com/office/drawing/2014/main" id="{D6B95598-2FA0-E522-7B48-6B38F6001501}"/>
+                <a16:creationId xmlns:a16="http://schemas.microsoft.com/office/drawing/2014/main" id="{51196DD4-C2EA-350C-D9F0-D864AE27B815}"/>
               </a:ext>
             </a:extLst>
           </p:cNvPr>
@@ -7926,7 +11369,7 @@
         <p:spPr>
           <a:xfrm>
             <a:off x="4021742" y="708053"/>
-            <a:ext cx="7719801" cy="923330"/>
+            <a:ext cx="7719801" cy="646331"/>
           </a:xfrm>
           <a:prstGeom prst="rect">
             <a:avLst/>
@@ -7940,28 +11383,14 @@
           <a:lstStyle/>
           <a:p>
             <a:r>
-              <a:rPr lang="en-US" dirty="0" err="1"/>
-              <a:t>Nektar</a:t>
-            </a:r>
-            <a:r>
               <a:rPr lang="en-US" dirty="0"/>
-              <a:t> </a:t>
-            </a:r>
-          </a:p>
-          <a:p>
-            <a:r>
-              <a:rPr lang="en-US" dirty="0" err="1"/>
-              <a:t>Nektar</a:t>
-            </a:r>
+              <a:t>0d modelling</a:t>
+            </a:r>
+          </a:p>
+          <a:p>
             <a:r>
               <a:rPr lang="en-US" dirty="0"/>
-              <a:t> data</a:t>
-            </a:r>
-          </a:p>
-          <a:p>
-            <a:r>
-              <a:rPr lang="en-US" dirty="0"/>
-              <a:t>Applied to what, calculated where</a:t>
+              <a:t>Source tunning</a:t>
             </a:r>
             <a:endParaRPr lang="en-CA" dirty="0"/>
           </a:p>
@@ -7970,7 +11399,7 @@
     </p:spTree>
     <p:extLst>
       <p:ext uri="{BB962C8B-B14F-4D97-AF65-F5344CB8AC3E}">
-        <p14:creationId xmlns:p14="http://schemas.microsoft.com/office/powerpoint/2010/main" val="3166955391"/>
+        <p14:creationId xmlns:p14="http://schemas.microsoft.com/office/powerpoint/2010/main" val="1045741411"/>
       </p:ext>
     </p:extLst>
   </p:cSld>
@@ -8165,7 +11594,7 @@
           <a:p>
             <a:r>
               <a:rPr lang="en-US" sz="2400" dirty="0"/>
-              <a:t>1D Veins</a:t>
+              <a:t>Data Sources</a:t>
             </a:r>
             <a:endParaRPr lang="en-CA" sz="2400" dirty="0"/>
           </a:p>
@@ -8176,7 +11605,7 @@
           <p:cNvPr id="2" name="TextBox 1">
             <a:extLst>
               <a:ext uri="{FF2B5EF4-FFF2-40B4-BE49-F238E27FC236}">
-                <a16:creationId xmlns:a16="http://schemas.microsoft.com/office/drawing/2014/main" id="{BA08A034-4F4E-C802-F410-06FE1AE4A920}"/>
+                <a16:creationId xmlns:a16="http://schemas.microsoft.com/office/drawing/2014/main" id="{4693CD8A-4FD1-A4F3-6054-7AAE24A59C97}"/>
               </a:ext>
             </a:extLst>
           </p:cNvPr>
@@ -8186,7 +11615,7 @@
         <p:spPr>
           <a:xfrm>
             <a:off x="962952" y="1327094"/>
-            <a:ext cx="1035781" cy="646331"/>
+            <a:ext cx="1035781" cy="923330"/>
           </a:xfrm>
           <a:prstGeom prst="rect">
             <a:avLst/>
@@ -8201,7 +11630,7 @@
           <a:p>
             <a:r>
               <a:rPr lang="en-US" dirty="0"/>
-              <a:t>1d veins image</a:t>
+              <a:t>1d artery image</a:t>
             </a:r>
             <a:endParaRPr lang="en-CA" dirty="0"/>
           </a:p>
@@ -8212,7 +11641,7 @@
           <p:cNvPr id="3" name="TextBox 2">
             <a:extLst>
               <a:ext uri="{FF2B5EF4-FFF2-40B4-BE49-F238E27FC236}">
-                <a16:creationId xmlns:a16="http://schemas.microsoft.com/office/drawing/2014/main" id="{A36E93B5-8BBE-6B54-3D83-9B5CE2AEA8B2}"/>
+                <a16:creationId xmlns:a16="http://schemas.microsoft.com/office/drawing/2014/main" id="{D6B95598-2FA0-E522-7B48-6B38F6001501}"/>
               </a:ext>
             </a:extLst>
           </p:cNvPr>
@@ -8222,7 +11651,7 @@
         <p:spPr>
           <a:xfrm>
             <a:off x="4021742" y="708053"/>
-            <a:ext cx="7719801" cy="646331"/>
+            <a:ext cx="7719801" cy="923330"/>
           </a:xfrm>
           <a:prstGeom prst="rect">
             <a:avLst/>
@@ -8236,14 +11665,28 @@
           <a:lstStyle/>
           <a:p>
             <a:r>
+              <a:rPr lang="en-US" dirty="0" err="1"/>
+              <a:t>Nektar</a:t>
+            </a:r>
+            <a:r>
               <a:rPr lang="en-US" dirty="0"/>
-              <a:t>Clinical data</a:t>
-            </a:r>
-          </a:p>
-          <a:p>
+              <a:t> </a:t>
+            </a:r>
+          </a:p>
+          <a:p>
+            <a:r>
+              <a:rPr lang="en-US" dirty="0" err="1"/>
+              <a:t>Nektar</a:t>
+            </a:r>
             <a:r>
               <a:rPr lang="en-US" dirty="0"/>
-              <a:t>How mapped</a:t>
+              <a:t> data</a:t>
+            </a:r>
+          </a:p>
+          <a:p>
+            <a:r>
+              <a:rPr lang="en-US" dirty="0"/>
+              <a:t>Applied to what, calculated where</a:t>
             </a:r>
             <a:endParaRPr lang="en-CA" dirty="0"/>
           </a:p>
@@ -8252,7 +11695,7 @@
     </p:spTree>
     <p:extLst>
       <p:ext uri="{BB962C8B-B14F-4D97-AF65-F5344CB8AC3E}">
-        <p14:creationId xmlns:p14="http://schemas.microsoft.com/office/powerpoint/2010/main" val="3582914736"/>
+        <p14:creationId xmlns:p14="http://schemas.microsoft.com/office/powerpoint/2010/main" val="3166955391"/>
       </p:ext>
     </p:extLst>
   </p:cSld>
@@ -8575,4 +12018,319 @@
     </a:ext>
   </a:extLst>
 </a:theme>
+</file>
+
+<file path=ppt/theme/theme2.xml><?xml version="1.0" encoding="utf-8"?>
+<a:theme xmlns:a="http://schemas.openxmlformats.org/drawingml/2006/main" name="Office Theme">
+  <a:themeElements>
+    <a:clrScheme name="Office">
+      <a:dk1>
+        <a:sysClr val="windowText" lastClr="000000"/>
+      </a:dk1>
+      <a:lt1>
+        <a:sysClr val="window" lastClr="FFFFFF"/>
+      </a:lt1>
+      <a:dk2>
+        <a:srgbClr val="0E2841"/>
+      </a:dk2>
+      <a:lt2>
+        <a:srgbClr val="E8E8E8"/>
+      </a:lt2>
+      <a:accent1>
+        <a:srgbClr val="156082"/>
+      </a:accent1>
+      <a:accent2>
+        <a:srgbClr val="E97132"/>
+      </a:accent2>
+      <a:accent3>
+        <a:srgbClr val="196B24"/>
+      </a:accent3>
+      <a:accent4>
+        <a:srgbClr val="0F9ED5"/>
+      </a:accent4>
+      <a:accent5>
+        <a:srgbClr val="A02B93"/>
+      </a:accent5>
+      <a:accent6>
+        <a:srgbClr val="4EA72E"/>
+      </a:accent6>
+      <a:hlink>
+        <a:srgbClr val="467886"/>
+      </a:hlink>
+      <a:folHlink>
+        <a:srgbClr val="96607D"/>
+      </a:folHlink>
+    </a:clrScheme>
+    <a:fontScheme name="Office">
+      <a:majorFont>
+        <a:latin typeface="Aptos Display" panose="02110004020202020204"/>
+        <a:ea typeface=""/>
+        <a:cs typeface=""/>
+        <a:font script="Jpan" typeface="游ゴシック Light"/>
+        <a:font script="Hang" typeface="맑은 고딕"/>
+        <a:font script="Hans" typeface="等线 Light"/>
+        <a:font script="Hant" typeface="新細明體"/>
+        <a:font script="Arab" typeface="Times New Roman"/>
+        <a:font script="Hebr" typeface="Times New Roman"/>
+        <a:font script="Thai" typeface="Angsana New"/>
+        <a:font script="Ethi" typeface="Nyala"/>
+        <a:font script="Beng" typeface="Vrinda"/>
+        <a:font script="Gujr" typeface="Shruti"/>
+        <a:font script="Khmr" typeface="MoolBoran"/>
+        <a:font script="Knda" typeface="Tunga"/>
+        <a:font script="Guru" typeface="Raavi"/>
+        <a:font script="Cans" typeface="Euphemia"/>
+        <a:font script="Cher" typeface="Plantagenet Cherokee"/>
+        <a:font script="Yiii" typeface="Microsoft Yi Baiti"/>
+        <a:font script="Tibt" typeface="Microsoft Himalaya"/>
+        <a:font script="Thaa" typeface="MV Boli"/>
+        <a:font script="Deva" typeface="Mangal"/>
+        <a:font script="Telu" typeface="Gautami"/>
+        <a:font script="Taml" typeface="Latha"/>
+        <a:font script="Syrc" typeface="Estrangelo Edessa"/>
+        <a:font script="Orya" typeface="Kalinga"/>
+        <a:font script="Mlym" typeface="Kartika"/>
+        <a:font script="Laoo" typeface="DokChampa"/>
+        <a:font script="Sinh" typeface="Iskoola Pota"/>
+        <a:font script="Mong" typeface="Mongolian Baiti"/>
+        <a:font script="Viet" typeface="Times New Roman"/>
+        <a:font script="Uigh" typeface="Microsoft Uighur"/>
+        <a:font script="Geor" typeface="Sylfaen"/>
+        <a:font script="Armn" typeface="Arial"/>
+        <a:font script="Bugi" typeface="Leelawadee UI"/>
+        <a:font script="Bopo" typeface="Microsoft JhengHei"/>
+        <a:font script="Java" typeface="Javanese Text"/>
+        <a:font script="Lisu" typeface="Segoe UI"/>
+        <a:font script="Mymr" typeface="Myanmar Text"/>
+        <a:font script="Nkoo" typeface="Ebrima"/>
+        <a:font script="Olck" typeface="Nirmala UI"/>
+        <a:font script="Osma" typeface="Ebrima"/>
+        <a:font script="Phag" typeface="Phagspa"/>
+        <a:font script="Syrn" typeface="Estrangelo Edessa"/>
+        <a:font script="Syrj" typeface="Estrangelo Edessa"/>
+        <a:font script="Syre" typeface="Estrangelo Edessa"/>
+        <a:font script="Sora" typeface="Nirmala UI"/>
+        <a:font script="Tale" typeface="Microsoft Tai Le"/>
+        <a:font script="Talu" typeface="Microsoft New Tai Lue"/>
+        <a:font script="Tfng" typeface="Ebrima"/>
+      </a:majorFont>
+      <a:minorFont>
+        <a:latin typeface="Aptos" panose="02110004020202020204"/>
+        <a:ea typeface=""/>
+        <a:cs typeface=""/>
+        <a:font script="Jpan" typeface="游ゴシック"/>
+        <a:font script="Hang" typeface="맑은 고딕"/>
+        <a:font script="Hans" typeface="等线"/>
+        <a:font script="Hant" typeface="新細明體"/>
+        <a:font script="Arab" typeface="Arial"/>
+        <a:font script="Hebr" typeface="Arial"/>
+        <a:font script="Thai" typeface="Cordia New"/>
+        <a:font script="Ethi" typeface="Nyala"/>
+        <a:font script="Beng" typeface="Vrinda"/>
+        <a:font script="Gujr" typeface="Shruti"/>
+        <a:font script="Khmr" typeface="DaunPenh"/>
+        <a:font script="Knda" typeface="Tunga"/>
+        <a:font script="Guru" typeface="Raavi"/>
+        <a:font script="Cans" typeface="Euphemia"/>
+        <a:font script="Cher" typeface="Plantagenet Cherokee"/>
+        <a:font script="Yiii" typeface="Microsoft Yi Baiti"/>
+        <a:font script="Tibt" typeface="Microsoft Himalaya"/>
+        <a:font script="Thaa" typeface="MV Boli"/>
+        <a:font script="Deva" typeface="Mangal"/>
+        <a:font script="Telu" typeface="Gautami"/>
+        <a:font script="Taml" typeface="Latha"/>
+        <a:font script="Syrc" typeface="Estrangelo Edessa"/>
+        <a:font script="Orya" typeface="Kalinga"/>
+        <a:font script="Mlym" typeface="Kartika"/>
+        <a:font script="Laoo" typeface="DokChampa"/>
+        <a:font script="Sinh" typeface="Iskoola Pota"/>
+        <a:font script="Mong" typeface="Mongolian Baiti"/>
+        <a:font script="Viet" typeface="Arial"/>
+        <a:font script="Uigh" typeface="Microsoft Uighur"/>
+        <a:font script="Geor" typeface="Sylfaen"/>
+        <a:font script="Armn" typeface="Arial"/>
+        <a:font script="Bugi" typeface="Leelawadee UI"/>
+        <a:font script="Bopo" typeface="Microsoft JhengHei"/>
+        <a:font script="Java" typeface="Javanese Text"/>
+        <a:font script="Lisu" typeface="Segoe UI"/>
+        <a:font script="Mymr" typeface="Myanmar Text"/>
+        <a:font script="Nkoo" typeface="Ebrima"/>
+        <a:font script="Olck" typeface="Nirmala UI"/>
+        <a:font script="Osma" typeface="Ebrima"/>
+        <a:font script="Phag" typeface="Phagspa"/>
+        <a:font script="Syrn" typeface="Estrangelo Edessa"/>
+        <a:font script="Syrj" typeface="Estrangelo Edessa"/>
+        <a:font script="Syre" typeface="Estrangelo Edessa"/>
+        <a:font script="Sora" typeface="Nirmala UI"/>
+        <a:font script="Tale" typeface="Microsoft Tai Le"/>
+        <a:font script="Talu" typeface="Microsoft New Tai Lue"/>
+        <a:font script="Tfng" typeface="Ebrima"/>
+      </a:minorFont>
+    </a:fontScheme>
+    <a:fmtScheme name="Office">
+      <a:fillStyleLst>
+        <a:solidFill>
+          <a:schemeClr val="phClr"/>
+        </a:solidFill>
+        <a:gradFill rotWithShape="1">
+          <a:gsLst>
+            <a:gs pos="0">
+              <a:schemeClr val="phClr">
+                <a:lumMod val="110000"/>
+                <a:satMod val="105000"/>
+                <a:tint val="67000"/>
+              </a:schemeClr>
+            </a:gs>
+            <a:gs pos="50000">
+              <a:schemeClr val="phClr">
+                <a:lumMod val="105000"/>
+                <a:satMod val="103000"/>
+                <a:tint val="73000"/>
+              </a:schemeClr>
+            </a:gs>
+            <a:gs pos="100000">
+              <a:schemeClr val="phClr">
+                <a:lumMod val="105000"/>
+                <a:satMod val="109000"/>
+                <a:tint val="81000"/>
+              </a:schemeClr>
+            </a:gs>
+          </a:gsLst>
+          <a:lin ang="5400000" scaled="0"/>
+        </a:gradFill>
+        <a:gradFill rotWithShape="1">
+          <a:gsLst>
+            <a:gs pos="0">
+              <a:schemeClr val="phClr">
+                <a:satMod val="103000"/>
+                <a:lumMod val="102000"/>
+                <a:tint val="94000"/>
+              </a:schemeClr>
+            </a:gs>
+            <a:gs pos="50000">
+              <a:schemeClr val="phClr">
+                <a:satMod val="110000"/>
+                <a:lumMod val="100000"/>
+                <a:shade val="100000"/>
+              </a:schemeClr>
+            </a:gs>
+            <a:gs pos="100000">
+              <a:schemeClr val="phClr">
+                <a:lumMod val="99000"/>
+                <a:satMod val="120000"/>
+                <a:shade val="78000"/>
+              </a:schemeClr>
+            </a:gs>
+          </a:gsLst>
+          <a:lin ang="5400000" scaled="0"/>
+        </a:gradFill>
+      </a:fillStyleLst>
+      <a:lnStyleLst>
+        <a:ln w="12700" cap="flat" cmpd="sng" algn="ctr">
+          <a:solidFill>
+            <a:schemeClr val="phClr"/>
+          </a:solidFill>
+          <a:prstDash val="solid"/>
+          <a:miter lim="800000"/>
+        </a:ln>
+        <a:ln w="19050" cap="flat" cmpd="sng" algn="ctr">
+          <a:solidFill>
+            <a:schemeClr val="phClr"/>
+          </a:solidFill>
+          <a:prstDash val="solid"/>
+          <a:miter lim="800000"/>
+        </a:ln>
+        <a:ln w="25400" cap="flat" cmpd="sng" algn="ctr">
+          <a:solidFill>
+            <a:schemeClr val="phClr"/>
+          </a:solidFill>
+          <a:prstDash val="solid"/>
+          <a:miter lim="800000"/>
+        </a:ln>
+      </a:lnStyleLst>
+      <a:effectStyleLst>
+        <a:effectStyle>
+          <a:effectLst/>
+        </a:effectStyle>
+        <a:effectStyle>
+          <a:effectLst/>
+        </a:effectStyle>
+        <a:effectStyle>
+          <a:effectLst>
+            <a:outerShdw blurRad="57150" dist="19050" dir="5400000" algn="ctr" rotWithShape="0">
+              <a:srgbClr val="000000">
+                <a:alpha val="63000"/>
+              </a:srgbClr>
+            </a:outerShdw>
+          </a:effectLst>
+        </a:effectStyle>
+      </a:effectStyleLst>
+      <a:bgFillStyleLst>
+        <a:solidFill>
+          <a:schemeClr val="phClr"/>
+        </a:solidFill>
+        <a:solidFill>
+          <a:schemeClr val="phClr">
+            <a:tint val="95000"/>
+            <a:satMod val="170000"/>
+          </a:schemeClr>
+        </a:solidFill>
+        <a:gradFill rotWithShape="1">
+          <a:gsLst>
+            <a:gs pos="0">
+              <a:schemeClr val="phClr">
+                <a:tint val="93000"/>
+                <a:satMod val="150000"/>
+                <a:shade val="98000"/>
+                <a:lumMod val="102000"/>
+              </a:schemeClr>
+            </a:gs>
+            <a:gs pos="50000">
+              <a:schemeClr val="phClr">
+                <a:tint val="98000"/>
+                <a:satMod val="130000"/>
+                <a:shade val="90000"/>
+                <a:lumMod val="103000"/>
+              </a:schemeClr>
+            </a:gs>
+            <a:gs pos="100000">
+              <a:schemeClr val="phClr">
+                <a:shade val="63000"/>
+                <a:satMod val="120000"/>
+              </a:schemeClr>
+            </a:gs>
+          </a:gsLst>
+          <a:lin ang="5400000" scaled="0"/>
+        </a:gradFill>
+      </a:bgFillStyleLst>
+    </a:fmtScheme>
+  </a:themeElements>
+  <a:objectDefaults>
+    <a:lnDef>
+      <a:spPr/>
+      <a:bodyPr/>
+      <a:lstStyle/>
+      <a:style>
+        <a:lnRef idx="2">
+          <a:schemeClr val="accent1"/>
+        </a:lnRef>
+        <a:fillRef idx="0">
+          <a:schemeClr val="accent1"/>
+        </a:fillRef>
+        <a:effectRef idx="1">
+          <a:schemeClr val="accent1"/>
+        </a:effectRef>
+        <a:fontRef idx="minor">
+          <a:schemeClr val="tx1"/>
+        </a:fontRef>
+      </a:style>
+    </a:lnDef>
+  </a:objectDefaults>
+  <a:extraClrSchemeLst/>
+  <a:extLst>
+    <a:ext uri="{05A4C25C-085E-4340-85A3-A5531E510DB2}">
+      <thm15:themeFamily xmlns:thm15="http://schemas.microsoft.com/office/thememl/2012/main" name="Office Theme" id="{2E142A2C-CD16-42D6-873A-C26D2A0506FA}" vid="{1BDDFF52-6CD6-40A5-AB3C-68EB2F1E4D0A}"/>
+    </a:ext>
+  </a:extLst>
+</a:theme>
 </file>
--- a/Working Documents/COMP2025.pptx
+++ b/Working Documents/COMP2025.pptx
@@ -5,7 +5,7 @@
     <p:sldMasterId id="2147483648" r:id="rId1"/>
   </p:sldMasterIdLst>
   <p:notesMasterIdLst>
-    <p:notesMasterId r:id="rId23"/>
+    <p:notesMasterId r:id="rId25"/>
   </p:notesMasterIdLst>
   <p:sldIdLst>
     <p:sldId id="260" r:id="rId2"/>
@@ -24,11 +24,13 @@
     <p:sldId id="268" r:id="rId15"/>
     <p:sldId id="286" r:id="rId16"/>
     <p:sldId id="287" r:id="rId17"/>
-    <p:sldId id="269" r:id="rId18"/>
-    <p:sldId id="276" r:id="rId19"/>
-    <p:sldId id="289" r:id="rId20"/>
-    <p:sldId id="277" r:id="rId21"/>
-    <p:sldId id="278" r:id="rId22"/>
+    <p:sldId id="291" r:id="rId18"/>
+    <p:sldId id="292" r:id="rId19"/>
+    <p:sldId id="269" r:id="rId20"/>
+    <p:sldId id="276" r:id="rId21"/>
+    <p:sldId id="289" r:id="rId22"/>
+    <p:sldId id="277" r:id="rId23"/>
+    <p:sldId id="278" r:id="rId24"/>
   </p:sldIdLst>
   <p:sldSz cx="12192000" cy="6858000"/>
   <p:notesSz cx="6858000" cy="9144000"/>
@@ -1781,7 +1783,7 @@
                   <a:cs typeface="+mn-cs"/>
                 </a:defRPr>
               </a:pPr>
-              <a:endParaRPr lang="en-CA"/>
+              <a:endParaRPr lang="en-US"/>
             </a:p>
           </c:txPr>
         </c:title>
@@ -3481,7 +3483,7 @@
                   <a:cs typeface="+mn-cs"/>
                 </a:defRPr>
               </a:pPr>
-              <a:endParaRPr lang="en-CA"/>
+              <a:endParaRPr lang="en-US"/>
             </a:p>
           </c:txPr>
         </c:title>
@@ -5254,7 +5256,17 @@
   <c:chart>
     <c:autoTitleDeleted val="1"/>
     <c:plotArea>
-      <c:layout/>
+      <c:layout>
+        <c:manualLayout>
+          <c:layoutTarget val="inner"/>
+          <c:xMode val="edge"/>
+          <c:yMode val="edge"/>
+          <c:x val="8.8616688707440078E-2"/>
+          <c:y val="3.1040567822418621E-2"/>
+          <c:w val="0.88467555577124513"/>
+          <c:h val="0.79091277933733606"/>
+        </c:manualLayout>
+      </c:layout>
       <c:barChart>
         <c:barDir val="col"/>
         <c:grouping val="clustered"/>
@@ -5269,131 +5281,6 @@
                 <c:ptCount val="1"/>
                 <c:pt idx="0">
                   <c:v>Tuning Results</c:v>
-                </c:pt>
-              </c:strCache>
-            </c:strRef>
-          </c:tx>
-          <c:spPr>
-            <a:solidFill>
-              <a:srgbClr val="905AA6"/>
-            </a:solidFill>
-            <a:ln>
-              <a:noFill/>
-            </a:ln>
-            <a:effectLst/>
-          </c:spPr>
-          <c:invertIfNegative val="0"/>
-          <c:cat>
-            <c:strRef>
-              <c:f>Sheet1!$A$2:$A$14</c:f>
-              <c:strCache>
-                <c:ptCount val="13"/>
-                <c:pt idx="0">
-                  <c:v>Brain</c:v>
-                </c:pt>
-                <c:pt idx="1">
-                  <c:v> Stomach</c:v>
-                </c:pt>
-                <c:pt idx="2">
-                  <c:v> S. Intestine</c:v>
-                </c:pt>
-                <c:pt idx="3">
-                  <c:v> L. Intestine</c:v>
-                </c:pt>
-                <c:pt idx="4">
-                  <c:v> Heart</c:v>
-                </c:pt>
-                <c:pt idx="5">
-                  <c:v>Kidneys</c:v>
-                </c:pt>
-                <c:pt idx="6">
-                  <c:v> Liver</c:v>
-                </c:pt>
-                <c:pt idx="7">
-                  <c:v>Pulmonary</c:v>
-                </c:pt>
-                <c:pt idx="8">
-                  <c:v> Pancreas</c:v>
-                </c:pt>
-                <c:pt idx="9">
-                  <c:v> Spleen</c:v>
-                </c:pt>
-                <c:pt idx="10">
-                  <c:v> Aorta and L. Arteries</c:v>
-                </c:pt>
-                <c:pt idx="11">
-                  <c:v> L. Veins</c:v>
-                </c:pt>
-                <c:pt idx="12">
-                  <c:v> Distributed Tissues</c:v>
-                </c:pt>
-              </c:strCache>
-            </c:strRef>
-          </c:cat>
-          <c:val>
-            <c:numRef>
-              <c:f>Sheet1!$B$2:$B$14</c:f>
-              <c:numCache>
-                <c:formatCode>General</c:formatCode>
-                <c:ptCount val="13"/>
-                <c:pt idx="0">
-                  <c:v>0.20899999999999999</c:v>
-                </c:pt>
-                <c:pt idx="1">
-                  <c:v>1.968</c:v>
-                </c:pt>
-                <c:pt idx="2">
-                  <c:v>2.1680000000000001</c:v>
-                </c:pt>
-                <c:pt idx="3">
-                  <c:v>0.69699999999999995</c:v>
-                </c:pt>
-                <c:pt idx="4">
-                  <c:v>1.9929999999999899</c:v>
-                </c:pt>
-                <c:pt idx="5">
-                  <c:v>0.89700000000000002</c:v>
-                </c:pt>
-                <c:pt idx="6">
-                  <c:v>4.7190000000000003</c:v>
-                </c:pt>
-                <c:pt idx="7">
-                  <c:v>13.215999999999999</c:v>
-                </c:pt>
-                <c:pt idx="8">
-                  <c:v>0.34499999999999997</c:v>
-                </c:pt>
-                <c:pt idx="9">
-                  <c:v>0.75800000000000001</c:v>
-                </c:pt>
-                <c:pt idx="10">
-                  <c:v>4.0979999999999999</c:v>
-                </c:pt>
-                <c:pt idx="11">
-                  <c:v>38.191000000000003</c:v>
-                </c:pt>
-                <c:pt idx="12">
-                  <c:v>30.741</c:v>
-                </c:pt>
-              </c:numCache>
-            </c:numRef>
-          </c:val>
-          <c:extLst>
-            <c:ext xmlns:c16="http://schemas.microsoft.com/office/drawing/2014/chart" uri="{C3380CC4-5D6E-409C-BE32-E72D297353CC}">
-              <c16:uniqueId val="{00000000-05A9-4934-8E5D-39B53C4F65A6}"/>
-            </c:ext>
-          </c:extLst>
-        </c:ser>
-        <c:ser>
-          <c:idx val="1"/>
-          <c:order val="1"/>
-          <c:tx>
-            <c:strRef>
-              <c:f>Sheet1!$C$1</c:f>
-              <c:strCache>
-                <c:ptCount val="1"/>
-                <c:pt idx="0">
-                  <c:v>Modified Reference Man Values</c:v>
                 </c:pt>
               </c:strCache>
             </c:strRef>
@@ -5457,7 +5344,246 @@
           </c:cat>
           <c:val>
             <c:numRef>
-              <c:f>Sheet1!$C$2:$C$14</c:f>
+              <c:f>Sheet1!$B$2:$B$14</c:f>
+              <c:numCache>
+                <c:formatCode>General</c:formatCode>
+                <c:ptCount val="13"/>
+                <c:pt idx="0">
+                  <c:v>0.86</c:v>
+                </c:pt>
+                <c:pt idx="1">
+                  <c:v>2.56</c:v>
+                </c:pt>
+                <c:pt idx="2">
+                  <c:v>3.52</c:v>
+                </c:pt>
+                <c:pt idx="3">
+                  <c:v>2.04</c:v>
+                </c:pt>
+                <c:pt idx="4">
+                  <c:v>10.09</c:v>
+                </c:pt>
+                <c:pt idx="5">
+                  <c:v>2.08</c:v>
+                </c:pt>
+                <c:pt idx="6">
+                  <c:v>11.79</c:v>
+                </c:pt>
+                <c:pt idx="7">
+                  <c:v>9.4499999999999993</c:v>
+                </c:pt>
+                <c:pt idx="8">
+                  <c:v>0.78</c:v>
+                </c:pt>
+                <c:pt idx="9">
+                  <c:v>1.85</c:v>
+                </c:pt>
+                <c:pt idx="10">
+                  <c:v>9.4</c:v>
+                </c:pt>
+                <c:pt idx="11">
+                  <c:v>8.98</c:v>
+                </c:pt>
+                <c:pt idx="12">
+                  <c:v>36.58</c:v>
+                </c:pt>
+              </c:numCache>
+            </c:numRef>
+          </c:val>
+          <c:extLst>
+            <c:ext xmlns:c16="http://schemas.microsoft.com/office/drawing/2014/chart" uri="{C3380CC4-5D6E-409C-BE32-E72D297353CC}">
+              <c16:uniqueId val="{00000000-F8BB-4FCA-B088-80FBA6E39C9D}"/>
+            </c:ext>
+          </c:extLst>
+        </c:ser>
+        <c:ser>
+          <c:idx val="1"/>
+          <c:order val="1"/>
+          <c:tx>
+            <c:strRef>
+              <c:f>Sheet1!$D$1</c:f>
+              <c:strCache>
+                <c:ptCount val="1"/>
+                <c:pt idx="0">
+                  <c:v>Modified Reference Man Values</c:v>
+                </c:pt>
+              </c:strCache>
+            </c:strRef>
+          </c:tx>
+          <c:spPr>
+            <a:solidFill>
+              <a:srgbClr val="905AA6"/>
+            </a:solidFill>
+            <a:ln>
+              <a:noFill/>
+            </a:ln>
+            <a:effectLst/>
+          </c:spPr>
+          <c:invertIfNegative val="0"/>
+          <c:errBars>
+            <c:errBarType val="both"/>
+            <c:errValType val="cust"/>
+            <c:noEndCap val="0"/>
+            <c:plus>
+              <c:numRef>
+                <c:f>Sheet1!$F$2:$F$14</c:f>
+                <c:numCache>
+                  <c:formatCode>General</c:formatCode>
+                  <c:ptCount val="13"/>
+                  <c:pt idx="0">
+                    <c:v>0.15999999999999992</c:v>
+                  </c:pt>
+                  <c:pt idx="1">
+                    <c:v>0.27</c:v>
+                  </c:pt>
+                  <c:pt idx="2">
+                    <c:v>0.4700000000000002</c:v>
+                  </c:pt>
+                  <c:pt idx="3">
+                    <c:v>0.22999999999999998</c:v>
+                  </c:pt>
+                  <c:pt idx="4">
+                    <c:v>4.1999999999999993</c:v>
+                  </c:pt>
+                  <c:pt idx="5">
+                    <c:v>0.83000000000000007</c:v>
+                  </c:pt>
+                  <c:pt idx="6">
+                    <c:v>1.6600000000000001</c:v>
+                  </c:pt>
+                  <c:pt idx="7">
+                    <c:v>2.1500000000000004</c:v>
+                  </c:pt>
+                  <c:pt idx="8">
+                    <c:v>7.999999999999996E-2</c:v>
+                  </c:pt>
+                  <c:pt idx="9">
+                    <c:v>0.44999999999999996</c:v>
+                  </c:pt>
+                  <c:pt idx="10">
+                    <c:v>2.8</c:v>
+                  </c:pt>
+                  <c:pt idx="11">
+                    <c:v>6.3900000000000006</c:v>
+                  </c:pt>
+                  <c:pt idx="12">
+                    <c:v>10.909999999999997</c:v>
+                  </c:pt>
+                </c:numCache>
+              </c:numRef>
+            </c:plus>
+            <c:minus>
+              <c:numRef>
+                <c:f>Sheet1!$E$2:$E$14</c:f>
+                <c:numCache>
+                  <c:formatCode>General</c:formatCode>
+                  <c:ptCount val="13"/>
+                  <c:pt idx="0">
+                    <c:v>0.43999999999999995</c:v>
+                  </c:pt>
+                  <c:pt idx="1">
+                    <c:v>0.83000000000000007</c:v>
+                  </c:pt>
+                  <c:pt idx="2">
+                    <c:v>3.0300000000000002</c:v>
+                  </c:pt>
+                  <c:pt idx="3">
+                    <c:v>1.77</c:v>
+                  </c:pt>
+                  <c:pt idx="4">
+                    <c:v>2.8000000000000007</c:v>
+                  </c:pt>
+                  <c:pt idx="5">
+                    <c:v>0.7699999999999998</c:v>
+                  </c:pt>
+                  <c:pt idx="6">
+                    <c:v>6.34</c:v>
+                  </c:pt>
+                  <c:pt idx="7">
+                    <c:v>2.8499999999999996</c:v>
+                  </c:pt>
+                  <c:pt idx="8">
+                    <c:v>0.52</c:v>
+                  </c:pt>
+                  <c:pt idx="9">
+                    <c:v>0.25</c:v>
+                  </c:pt>
+                  <c:pt idx="10">
+                    <c:v>3.2</c:v>
+                  </c:pt>
+                  <c:pt idx="11">
+                    <c:v>7.6099999999999994</c:v>
+                  </c:pt>
+                  <c:pt idx="12">
+                    <c:v>15.090000000000003</c:v>
+                  </c:pt>
+                </c:numCache>
+              </c:numRef>
+            </c:minus>
+            <c:spPr>
+              <a:noFill/>
+              <a:ln w="22225" cap="flat" cmpd="sng" algn="ctr">
+                <a:solidFill>
+                  <a:schemeClr val="tx1">
+                    <a:lumMod val="65000"/>
+                    <a:lumOff val="35000"/>
+                  </a:schemeClr>
+                </a:solidFill>
+                <a:round/>
+              </a:ln>
+              <a:effectLst/>
+            </c:spPr>
+          </c:errBars>
+          <c:cat>
+            <c:strRef>
+              <c:f>Sheet1!$A$2:$A$14</c:f>
+              <c:strCache>
+                <c:ptCount val="13"/>
+                <c:pt idx="0">
+                  <c:v>Brain</c:v>
+                </c:pt>
+                <c:pt idx="1">
+                  <c:v> Stomach</c:v>
+                </c:pt>
+                <c:pt idx="2">
+                  <c:v> S. Intestine</c:v>
+                </c:pt>
+                <c:pt idx="3">
+                  <c:v> L. Intestine</c:v>
+                </c:pt>
+                <c:pt idx="4">
+                  <c:v> Heart</c:v>
+                </c:pt>
+                <c:pt idx="5">
+                  <c:v>Kidneys</c:v>
+                </c:pt>
+                <c:pt idx="6">
+                  <c:v> Liver</c:v>
+                </c:pt>
+                <c:pt idx="7">
+                  <c:v>Pulmonary</c:v>
+                </c:pt>
+                <c:pt idx="8">
+                  <c:v> Pancreas</c:v>
+                </c:pt>
+                <c:pt idx="9">
+                  <c:v> Spleen</c:v>
+                </c:pt>
+                <c:pt idx="10">
+                  <c:v> Aorta and L. Arteries</c:v>
+                </c:pt>
+                <c:pt idx="11">
+                  <c:v> L. Veins</c:v>
+                </c:pt>
+                <c:pt idx="12">
+                  <c:v> Distributed Tissues</c:v>
+                </c:pt>
+              </c:strCache>
+            </c:strRef>
+          </c:cat>
+          <c:val>
+            <c:numRef>
+              <c:f>Sheet1!$D$2:$D$14</c:f>
               <c:numCache>
                 <c:formatCode>General</c:formatCode>
                 <c:ptCount val="13"/>
@@ -5505,7 +5631,7 @@
           </c:val>
           <c:extLst>
             <c:ext xmlns:c16="http://schemas.microsoft.com/office/drawing/2014/chart" uri="{C3380CC4-5D6E-409C-BE32-E72D297353CC}">
-              <c16:uniqueId val="{00000001-05A9-4934-8E5D-39B53C4F65A6}"/>
+              <c16:uniqueId val="{00000001-F8BB-4FCA-B088-80FBA6E39C9D}"/>
             </c:ext>
           </c:extLst>
         </c:ser>
@@ -5551,7 +5677,7 @@
           <a:lstStyle/>
           <a:p>
             <a:pPr>
-              <a:defRPr sz="1197" b="0" i="0" u="none" strike="noStrike" kern="1200" baseline="0">
+              <a:defRPr sz="900" b="0" i="0" u="none" strike="noStrike" kern="1200" baseline="0">
                 <a:solidFill>
                   <a:schemeClr val="tx1">
                     <a:lumMod val="65000"/>
@@ -5601,7 +5727,7 @@
               <a:lstStyle/>
               <a:p>
                 <a:pPr>
-                  <a:defRPr sz="1330" b="0" i="0" u="none" strike="noStrike" kern="1200" baseline="0">
+                  <a:defRPr sz="1800" b="0" i="0" u="none" strike="noStrike" kern="1200" baseline="0">
                     <a:solidFill>
                       <a:schemeClr val="tx1">
                         <a:lumMod val="65000"/>
@@ -5614,7 +5740,7 @@
                   </a:defRPr>
                 </a:pPr>
                 <a:r>
-                  <a:rPr lang="en-CA"/>
+                  <a:rPr lang="en-CA" sz="1800"/>
                   <a:t>BV Distribution (%)</a:t>
                 </a:r>
               </a:p>
@@ -5633,7 +5759,7 @@
             <a:lstStyle/>
             <a:p>
               <a:pPr>
-                <a:defRPr sz="1330" b="0" i="0" u="none" strike="noStrike" kern="1200" baseline="0">
+                <a:defRPr sz="1800" b="0" i="0" u="none" strike="noStrike" kern="1200" baseline="0">
                   <a:solidFill>
                     <a:schemeClr val="tx1">
                       <a:lumMod val="65000"/>
@@ -5665,7 +5791,7 @@
           <a:lstStyle/>
           <a:p>
             <a:pPr>
-              <a:defRPr sz="1197" b="0" i="0" u="none" strike="noStrike" kern="1200" baseline="0">
+              <a:defRPr sz="900" b="0" i="0" u="none" strike="noStrike" kern="1200" baseline="0">
                 <a:solidFill>
                   <a:schemeClr val="tx1">
                     <a:lumMod val="65000"/>
@@ -5694,6 +5820,52 @@
     </c:plotArea>
     <c:legend>
       <c:legendPos val="b"/>
+      <c:legendEntry>
+        <c:idx val="0"/>
+        <c:txPr>
+          <a:bodyPr rot="0" spcFirstLastPara="1" vertOverflow="ellipsis" vert="horz" wrap="square" anchor="ctr" anchorCtr="1"/>
+          <a:lstStyle/>
+          <a:p>
+            <a:pPr>
+              <a:defRPr sz="1600" b="0" i="0" u="none" strike="noStrike" kern="1200" baseline="0">
+                <a:solidFill>
+                  <a:schemeClr val="tx1">
+                    <a:lumMod val="65000"/>
+                    <a:lumOff val="35000"/>
+                  </a:schemeClr>
+                </a:solidFill>
+                <a:latin typeface="+mn-lt"/>
+                <a:ea typeface="+mn-ea"/>
+                <a:cs typeface="+mn-cs"/>
+              </a:defRPr>
+            </a:pPr>
+            <a:endParaRPr lang="en-US"/>
+          </a:p>
+        </c:txPr>
+      </c:legendEntry>
+      <c:legendEntry>
+        <c:idx val="1"/>
+        <c:txPr>
+          <a:bodyPr rot="0" spcFirstLastPara="1" vertOverflow="ellipsis" vert="horz" wrap="square" anchor="ctr" anchorCtr="1"/>
+          <a:lstStyle/>
+          <a:p>
+            <a:pPr>
+              <a:defRPr sz="1400" b="0" i="0" u="none" strike="noStrike" kern="1200" baseline="0">
+                <a:solidFill>
+                  <a:schemeClr val="tx1">
+                    <a:lumMod val="65000"/>
+                    <a:lumOff val="35000"/>
+                  </a:schemeClr>
+                </a:solidFill>
+                <a:latin typeface="+mn-lt"/>
+                <a:ea typeface="+mn-ea"/>
+                <a:cs typeface="+mn-cs"/>
+              </a:defRPr>
+            </a:pPr>
+            <a:endParaRPr lang="en-US"/>
+          </a:p>
+        </c:txPr>
+      </c:legendEntry>
       <c:overlay val="0"/>
       <c:spPr>
         <a:noFill/>
@@ -5707,7 +5879,7 @@
         <a:lstStyle/>
         <a:p>
           <a:pPr>
-            <a:defRPr sz="1197" b="0" i="0" u="none" strike="noStrike" kern="1200" baseline="0">
+            <a:defRPr sz="900" b="0" i="0" u="none" strike="noStrike" kern="1200" baseline="0">
               <a:solidFill>
                 <a:schemeClr val="tx1">
                   <a:lumMod val="65000"/>
@@ -5773,7 +5945,17 @@
   <c:chart>
     <c:autoTitleDeleted val="1"/>
     <c:plotArea>
-      <c:layout/>
+      <c:layout>
+        <c:manualLayout>
+          <c:layoutTarget val="inner"/>
+          <c:xMode val="edge"/>
+          <c:yMode val="edge"/>
+          <c:x val="8.8616688707440078E-2"/>
+          <c:y val="3.1040567822418621E-2"/>
+          <c:w val="0.88467555577124513"/>
+          <c:h val="0.79091277933733606"/>
+        </c:manualLayout>
+      </c:layout>
       <c:barChart>
         <c:barDir val="col"/>
         <c:grouping val="clustered"/>
@@ -5788,131 +5970,6 @@
                 <c:ptCount val="1"/>
                 <c:pt idx="0">
                   <c:v>Tuning Results</c:v>
-                </c:pt>
-              </c:strCache>
-            </c:strRef>
-          </c:tx>
-          <c:spPr>
-            <a:solidFill>
-              <a:srgbClr val="905AA6"/>
-            </a:solidFill>
-            <a:ln>
-              <a:noFill/>
-            </a:ln>
-            <a:effectLst/>
-          </c:spPr>
-          <c:invertIfNegative val="0"/>
-          <c:cat>
-            <c:strRef>
-              <c:f>Sheet1!$A$2:$A$14</c:f>
-              <c:strCache>
-                <c:ptCount val="13"/>
-                <c:pt idx="0">
-                  <c:v>Brain</c:v>
-                </c:pt>
-                <c:pt idx="1">
-                  <c:v> Stomach</c:v>
-                </c:pt>
-                <c:pt idx="2">
-                  <c:v> S. Intestine</c:v>
-                </c:pt>
-                <c:pt idx="3">
-                  <c:v> L. Intestine</c:v>
-                </c:pt>
-                <c:pt idx="4">
-                  <c:v> Heart</c:v>
-                </c:pt>
-                <c:pt idx="5">
-                  <c:v>Kidneys</c:v>
-                </c:pt>
-                <c:pt idx="6">
-                  <c:v> Liver</c:v>
-                </c:pt>
-                <c:pt idx="7">
-                  <c:v>Pulmonary</c:v>
-                </c:pt>
-                <c:pt idx="8">
-                  <c:v> Pancreas</c:v>
-                </c:pt>
-                <c:pt idx="9">
-                  <c:v> Spleen</c:v>
-                </c:pt>
-                <c:pt idx="10">
-                  <c:v> Aorta and L. Arteries</c:v>
-                </c:pt>
-                <c:pt idx="11">
-                  <c:v> L. Veins</c:v>
-                </c:pt>
-                <c:pt idx="12">
-                  <c:v> Distributed Tissues</c:v>
-                </c:pt>
-              </c:strCache>
-            </c:strRef>
-          </c:cat>
-          <c:val>
-            <c:numRef>
-              <c:f>Sheet1!$B$2:$B$14</c:f>
-              <c:numCache>
-                <c:formatCode>General</c:formatCode>
-                <c:ptCount val="13"/>
-                <c:pt idx="0">
-                  <c:v>0.20899999999999999</c:v>
-                </c:pt>
-                <c:pt idx="1">
-                  <c:v>1.968</c:v>
-                </c:pt>
-                <c:pt idx="2">
-                  <c:v>2.1680000000000001</c:v>
-                </c:pt>
-                <c:pt idx="3">
-                  <c:v>0.69699999999999995</c:v>
-                </c:pt>
-                <c:pt idx="4">
-                  <c:v>1.9929999999999899</c:v>
-                </c:pt>
-                <c:pt idx="5">
-                  <c:v>0.89700000000000002</c:v>
-                </c:pt>
-                <c:pt idx="6">
-                  <c:v>4.7190000000000003</c:v>
-                </c:pt>
-                <c:pt idx="7">
-                  <c:v>13.215999999999999</c:v>
-                </c:pt>
-                <c:pt idx="8">
-                  <c:v>0.34499999999999997</c:v>
-                </c:pt>
-                <c:pt idx="9">
-                  <c:v>0.75800000000000001</c:v>
-                </c:pt>
-                <c:pt idx="10">
-                  <c:v>4.0979999999999999</c:v>
-                </c:pt>
-                <c:pt idx="11">
-                  <c:v>38.191000000000003</c:v>
-                </c:pt>
-                <c:pt idx="12">
-                  <c:v>30.741</c:v>
-                </c:pt>
-              </c:numCache>
-            </c:numRef>
-          </c:val>
-          <c:extLst>
-            <c:ext xmlns:c16="http://schemas.microsoft.com/office/drawing/2014/chart" uri="{C3380CC4-5D6E-409C-BE32-E72D297353CC}">
-              <c16:uniqueId val="{00000000-05A9-4934-8E5D-39B53C4F65A6}"/>
-            </c:ext>
-          </c:extLst>
-        </c:ser>
-        <c:ser>
-          <c:idx val="1"/>
-          <c:order val="1"/>
-          <c:tx>
-            <c:strRef>
-              <c:f>Sheet1!$C$1</c:f>
-              <c:strCache>
-                <c:ptCount val="1"/>
-                <c:pt idx="0">
-                  <c:v>Modified Reference Man Values</c:v>
                 </c:pt>
               </c:strCache>
             </c:strRef>
@@ -5976,7 +6033,246 @@
           </c:cat>
           <c:val>
             <c:numRef>
-              <c:f>Sheet1!$C$2:$C$14</c:f>
+              <c:f>Sheet1!$B$2:$B$14</c:f>
+              <c:numCache>
+                <c:formatCode>General</c:formatCode>
+                <c:ptCount val="13"/>
+                <c:pt idx="0">
+                  <c:v>0.86</c:v>
+                </c:pt>
+                <c:pt idx="1">
+                  <c:v>2.56</c:v>
+                </c:pt>
+                <c:pt idx="2">
+                  <c:v>3.52</c:v>
+                </c:pt>
+                <c:pt idx="3">
+                  <c:v>2.04</c:v>
+                </c:pt>
+                <c:pt idx="4">
+                  <c:v>10.09</c:v>
+                </c:pt>
+                <c:pt idx="5">
+                  <c:v>2.08</c:v>
+                </c:pt>
+                <c:pt idx="6">
+                  <c:v>11.79</c:v>
+                </c:pt>
+                <c:pt idx="7">
+                  <c:v>9.4499999999999993</c:v>
+                </c:pt>
+                <c:pt idx="8">
+                  <c:v>0.78</c:v>
+                </c:pt>
+                <c:pt idx="9">
+                  <c:v>1.85</c:v>
+                </c:pt>
+                <c:pt idx="10">
+                  <c:v>9.4</c:v>
+                </c:pt>
+                <c:pt idx="11">
+                  <c:v>8.98</c:v>
+                </c:pt>
+                <c:pt idx="12">
+                  <c:v>36.58</c:v>
+                </c:pt>
+              </c:numCache>
+            </c:numRef>
+          </c:val>
+          <c:extLst>
+            <c:ext xmlns:c16="http://schemas.microsoft.com/office/drawing/2014/chart" uri="{C3380CC4-5D6E-409C-BE32-E72D297353CC}">
+              <c16:uniqueId val="{00000000-03AB-4B7C-B075-63F4EFE78A10}"/>
+            </c:ext>
+          </c:extLst>
+        </c:ser>
+        <c:ser>
+          <c:idx val="1"/>
+          <c:order val="1"/>
+          <c:tx>
+            <c:strRef>
+              <c:f>Sheet1!$D$1</c:f>
+              <c:strCache>
+                <c:ptCount val="1"/>
+                <c:pt idx="0">
+                  <c:v>Modified Reference Man Values</c:v>
+                </c:pt>
+              </c:strCache>
+            </c:strRef>
+          </c:tx>
+          <c:spPr>
+            <a:solidFill>
+              <a:srgbClr val="905AA6"/>
+            </a:solidFill>
+            <a:ln>
+              <a:noFill/>
+            </a:ln>
+            <a:effectLst/>
+          </c:spPr>
+          <c:invertIfNegative val="0"/>
+          <c:errBars>
+            <c:errBarType val="both"/>
+            <c:errValType val="cust"/>
+            <c:noEndCap val="0"/>
+            <c:plus>
+              <c:numRef>
+                <c:f>Sheet1!$F$2:$F$14</c:f>
+                <c:numCache>
+                  <c:formatCode>General</c:formatCode>
+                  <c:ptCount val="13"/>
+                  <c:pt idx="0">
+                    <c:v>0.15999999999999992</c:v>
+                  </c:pt>
+                  <c:pt idx="1">
+                    <c:v>0.27</c:v>
+                  </c:pt>
+                  <c:pt idx="2">
+                    <c:v>0.4700000000000002</c:v>
+                  </c:pt>
+                  <c:pt idx="3">
+                    <c:v>0.22999999999999998</c:v>
+                  </c:pt>
+                  <c:pt idx="4">
+                    <c:v>4.1999999999999993</c:v>
+                  </c:pt>
+                  <c:pt idx="5">
+                    <c:v>0.83000000000000007</c:v>
+                  </c:pt>
+                  <c:pt idx="6">
+                    <c:v>1.6600000000000001</c:v>
+                  </c:pt>
+                  <c:pt idx="7">
+                    <c:v>2.1500000000000004</c:v>
+                  </c:pt>
+                  <c:pt idx="8">
+                    <c:v>7.999999999999996E-2</c:v>
+                  </c:pt>
+                  <c:pt idx="9">
+                    <c:v>0.44999999999999996</c:v>
+                  </c:pt>
+                  <c:pt idx="10">
+                    <c:v>2.8</c:v>
+                  </c:pt>
+                  <c:pt idx="11">
+                    <c:v>6.3900000000000006</c:v>
+                  </c:pt>
+                  <c:pt idx="12">
+                    <c:v>10.909999999999997</c:v>
+                  </c:pt>
+                </c:numCache>
+              </c:numRef>
+            </c:plus>
+            <c:minus>
+              <c:numRef>
+                <c:f>Sheet1!$E$2:$E$14</c:f>
+                <c:numCache>
+                  <c:formatCode>General</c:formatCode>
+                  <c:ptCount val="13"/>
+                  <c:pt idx="0">
+                    <c:v>0.43999999999999995</c:v>
+                  </c:pt>
+                  <c:pt idx="1">
+                    <c:v>0.83000000000000007</c:v>
+                  </c:pt>
+                  <c:pt idx="2">
+                    <c:v>3.0300000000000002</c:v>
+                  </c:pt>
+                  <c:pt idx="3">
+                    <c:v>1.77</c:v>
+                  </c:pt>
+                  <c:pt idx="4">
+                    <c:v>2.8000000000000007</c:v>
+                  </c:pt>
+                  <c:pt idx="5">
+                    <c:v>0.7699999999999998</c:v>
+                  </c:pt>
+                  <c:pt idx="6">
+                    <c:v>6.34</c:v>
+                  </c:pt>
+                  <c:pt idx="7">
+                    <c:v>2.8499999999999996</c:v>
+                  </c:pt>
+                  <c:pt idx="8">
+                    <c:v>0.52</c:v>
+                  </c:pt>
+                  <c:pt idx="9">
+                    <c:v>0.25</c:v>
+                  </c:pt>
+                  <c:pt idx="10">
+                    <c:v>3.2</c:v>
+                  </c:pt>
+                  <c:pt idx="11">
+                    <c:v>7.6099999999999994</c:v>
+                  </c:pt>
+                  <c:pt idx="12">
+                    <c:v>15.090000000000003</c:v>
+                  </c:pt>
+                </c:numCache>
+              </c:numRef>
+            </c:minus>
+            <c:spPr>
+              <a:noFill/>
+              <a:ln w="22225" cap="flat" cmpd="sng" algn="ctr">
+                <a:solidFill>
+                  <a:schemeClr val="tx1">
+                    <a:lumMod val="65000"/>
+                    <a:lumOff val="35000"/>
+                  </a:schemeClr>
+                </a:solidFill>
+                <a:round/>
+              </a:ln>
+              <a:effectLst/>
+            </c:spPr>
+          </c:errBars>
+          <c:cat>
+            <c:strRef>
+              <c:f>Sheet1!$A$2:$A$14</c:f>
+              <c:strCache>
+                <c:ptCount val="13"/>
+                <c:pt idx="0">
+                  <c:v>Brain</c:v>
+                </c:pt>
+                <c:pt idx="1">
+                  <c:v> Stomach</c:v>
+                </c:pt>
+                <c:pt idx="2">
+                  <c:v> S. Intestine</c:v>
+                </c:pt>
+                <c:pt idx="3">
+                  <c:v> L. Intestine</c:v>
+                </c:pt>
+                <c:pt idx="4">
+                  <c:v> Heart</c:v>
+                </c:pt>
+                <c:pt idx="5">
+                  <c:v>Kidneys</c:v>
+                </c:pt>
+                <c:pt idx="6">
+                  <c:v> Liver</c:v>
+                </c:pt>
+                <c:pt idx="7">
+                  <c:v>Pulmonary</c:v>
+                </c:pt>
+                <c:pt idx="8">
+                  <c:v> Pancreas</c:v>
+                </c:pt>
+                <c:pt idx="9">
+                  <c:v> Spleen</c:v>
+                </c:pt>
+                <c:pt idx="10">
+                  <c:v> Aorta and L. Arteries</c:v>
+                </c:pt>
+                <c:pt idx="11">
+                  <c:v> L. Veins</c:v>
+                </c:pt>
+                <c:pt idx="12">
+                  <c:v> Distributed Tissues</c:v>
+                </c:pt>
+              </c:strCache>
+            </c:strRef>
+          </c:cat>
+          <c:val>
+            <c:numRef>
+              <c:f>Sheet1!$D$2:$D$14</c:f>
               <c:numCache>
                 <c:formatCode>General</c:formatCode>
                 <c:ptCount val="13"/>
@@ -6024,7 +6320,7 @@
           </c:val>
           <c:extLst>
             <c:ext xmlns:c16="http://schemas.microsoft.com/office/drawing/2014/chart" uri="{C3380CC4-5D6E-409C-BE32-E72D297353CC}">
-              <c16:uniqueId val="{00000001-05A9-4934-8E5D-39B53C4F65A6}"/>
+              <c16:uniqueId val="{00000001-03AB-4B7C-B075-63F4EFE78A10}"/>
             </c:ext>
           </c:extLst>
         </c:ser>
@@ -6070,7 +6366,7 @@
           <a:lstStyle/>
           <a:p>
             <a:pPr>
-              <a:defRPr sz="1197" b="0" i="0" u="none" strike="noStrike" kern="1200" baseline="0">
+              <a:defRPr sz="900" b="0" i="0" u="none" strike="noStrike" kern="1200" baseline="0">
                 <a:solidFill>
                   <a:schemeClr val="tx1">
                     <a:lumMod val="65000"/>
@@ -6120,7 +6416,7 @@
               <a:lstStyle/>
               <a:p>
                 <a:pPr>
-                  <a:defRPr sz="1330" b="0" i="0" u="none" strike="noStrike" kern="1200" baseline="0">
+                  <a:defRPr sz="1800" b="0" i="0" u="none" strike="noStrike" kern="1200" baseline="0">
                     <a:solidFill>
                       <a:schemeClr val="tx1">
                         <a:lumMod val="65000"/>
@@ -6133,7 +6429,7 @@
                   </a:defRPr>
                 </a:pPr>
                 <a:r>
-                  <a:rPr lang="en-CA"/>
+                  <a:rPr lang="en-CA" sz="1800"/>
                   <a:t>BV Distribution (%)</a:t>
                 </a:r>
               </a:p>
@@ -6152,7 +6448,7 @@
             <a:lstStyle/>
             <a:p>
               <a:pPr>
-                <a:defRPr sz="1330" b="0" i="0" u="none" strike="noStrike" kern="1200" baseline="0">
+                <a:defRPr sz="1800" b="0" i="0" u="none" strike="noStrike" kern="1200" baseline="0">
                   <a:solidFill>
                     <a:schemeClr val="tx1">
                       <a:lumMod val="65000"/>
@@ -6184,7 +6480,7 @@
           <a:lstStyle/>
           <a:p>
             <a:pPr>
-              <a:defRPr sz="1197" b="0" i="0" u="none" strike="noStrike" kern="1200" baseline="0">
+              <a:defRPr sz="900" b="0" i="0" u="none" strike="noStrike" kern="1200" baseline="0">
                 <a:solidFill>
                   <a:schemeClr val="tx1">
                     <a:lumMod val="65000"/>
@@ -6213,6 +6509,52 @@
     </c:plotArea>
     <c:legend>
       <c:legendPos val="b"/>
+      <c:legendEntry>
+        <c:idx val="0"/>
+        <c:txPr>
+          <a:bodyPr rot="0" spcFirstLastPara="1" vertOverflow="ellipsis" vert="horz" wrap="square" anchor="ctr" anchorCtr="1"/>
+          <a:lstStyle/>
+          <a:p>
+            <a:pPr>
+              <a:defRPr sz="1600" b="0" i="0" u="none" strike="noStrike" kern="1200" baseline="0">
+                <a:solidFill>
+                  <a:schemeClr val="tx1">
+                    <a:lumMod val="65000"/>
+                    <a:lumOff val="35000"/>
+                  </a:schemeClr>
+                </a:solidFill>
+                <a:latin typeface="+mn-lt"/>
+                <a:ea typeface="+mn-ea"/>
+                <a:cs typeface="+mn-cs"/>
+              </a:defRPr>
+            </a:pPr>
+            <a:endParaRPr lang="en-US"/>
+          </a:p>
+        </c:txPr>
+      </c:legendEntry>
+      <c:legendEntry>
+        <c:idx val="1"/>
+        <c:txPr>
+          <a:bodyPr rot="0" spcFirstLastPara="1" vertOverflow="ellipsis" vert="horz" wrap="square" anchor="ctr" anchorCtr="1"/>
+          <a:lstStyle/>
+          <a:p>
+            <a:pPr>
+              <a:defRPr sz="1400" b="0" i="0" u="none" strike="noStrike" kern="1200" baseline="0">
+                <a:solidFill>
+                  <a:schemeClr val="tx1">
+                    <a:lumMod val="65000"/>
+                    <a:lumOff val="35000"/>
+                  </a:schemeClr>
+                </a:solidFill>
+                <a:latin typeface="+mn-lt"/>
+                <a:ea typeface="+mn-ea"/>
+                <a:cs typeface="+mn-cs"/>
+              </a:defRPr>
+            </a:pPr>
+            <a:endParaRPr lang="en-US"/>
+          </a:p>
+        </c:txPr>
+      </c:legendEntry>
       <c:overlay val="0"/>
       <c:spPr>
         <a:noFill/>
@@ -6226,7 +6568,7 @@
         <a:lstStyle/>
         <a:p>
           <a:pPr>
-            <a:defRPr sz="1197" b="0" i="0" u="none" strike="noStrike" kern="1200" baseline="0">
+            <a:defRPr sz="900" b="0" i="0" u="none" strike="noStrike" kern="1200" baseline="0">
               <a:solidFill>
                 <a:schemeClr val="tx1">
                   <a:lumMod val="65000"/>
@@ -9643,7 +9985,7 @@
         <a:lumOff val="35000"/>
       </a:schemeClr>
     </cs:fontRef>
-    <cs:defRPr sz="1330" kern="1200"/>
+    <cs:defRPr sz="1000" kern="1200"/>
   </cs:axisTitle>
   <cs:categoryAxis>
     <cs:lnRef idx="0"/>
@@ -9666,7 +10008,7 @@
         <a:round/>
       </a:ln>
     </cs:spPr>
-    <cs:defRPr sz="1197" kern="1200"/>
+    <cs:defRPr sz="900" kern="1200"/>
   </cs:categoryAxis>
   <cs:chartArea mods="allowNoFillOverride allowNoLineOverride">
     <cs:lnRef idx="0"/>
@@ -9689,7 +10031,7 @@
         <a:round/>
       </a:ln>
     </cs:spPr>
-    <cs:defRPr sz="1330" kern="1200"/>
+    <cs:defRPr sz="1000" kern="1200"/>
   </cs:chartArea>
   <cs:dataLabel>
     <cs:lnRef idx="0"/>
@@ -9701,7 +10043,7 @@
         <a:lumOff val="25000"/>
       </a:schemeClr>
     </cs:fontRef>
-    <cs:defRPr sz="1197" kern="1200"/>
+    <cs:defRPr sz="900" kern="1200"/>
   </cs:dataLabel>
   <cs:dataLabelCallout>
     <cs:lnRef idx="0"/>
@@ -9726,7 +10068,7 @@
         </a:solidFill>
       </a:ln>
     </cs:spPr>
-    <cs:defRPr sz="1197" kern="1200"/>
+    <cs:defRPr sz="900" kern="1200"/>
     <cs:bodyPr rot="0" spcFirstLastPara="1" vertOverflow="clip" horzOverflow="clip" vert="horz" wrap="square" lIns="36576" tIns="18288" rIns="36576" bIns="18288" anchor="ctr" anchorCtr="1">
       <a:spAutoFit/>
     </cs:bodyPr>
@@ -9829,7 +10171,7 @@
         <a:round/>
       </a:ln>
     </cs:spPr>
-    <cs:defRPr sz="1197" kern="1200"/>
+    <cs:defRPr sz="900" kern="1200"/>
   </cs:dataTable>
   <cs:downBar>
     <cs:lnRef idx="0"/>
@@ -9993,7 +10335,7 @@
         <a:lumOff val="35000"/>
       </a:schemeClr>
     </cs:fontRef>
-    <cs:defRPr sz="1197" kern="1200"/>
+    <cs:defRPr sz="900" kern="1200"/>
   </cs:legend>
   <cs:plotArea mods="allowNoFillOverride allowNoLineOverride">
     <cs:lnRef idx="0"/>
@@ -10021,7 +10363,7 @@
         <a:lumOff val="35000"/>
       </a:schemeClr>
     </cs:fontRef>
-    <cs:defRPr sz="1197" kern="1200"/>
+    <cs:defRPr sz="900" kern="1200"/>
   </cs:seriesAxis>
   <cs:seriesLine>
     <cs:lnRef idx="0"/>
@@ -10052,7 +10394,7 @@
         <a:lumOff val="35000"/>
       </a:schemeClr>
     </cs:fontRef>
-    <cs:defRPr sz="1862" b="0" kern="1200" spc="0" baseline="0"/>
+    <cs:defRPr sz="1400" b="0" kern="1200" spc="0" baseline="0"/>
   </cs:title>
   <cs:trendline>
     <cs:lnRef idx="0">
@@ -10082,7 +10424,7 @@
         <a:lumOff val="35000"/>
       </a:schemeClr>
     </cs:fontRef>
-    <cs:defRPr sz="1197" kern="1200"/>
+    <cs:defRPr sz="900" kern="1200"/>
   </cs:trendlineLabel>
   <cs:upBar>
     <cs:lnRef idx="0"/>
@@ -10115,7 +10457,7 @@
         <a:lumOff val="35000"/>
       </a:schemeClr>
     </cs:fontRef>
-    <cs:defRPr sz="1197" kern="1200"/>
+    <cs:defRPr sz="900" kern="1200"/>
   </cs:valueAxis>
   <cs:wall>
     <cs:lnRef idx="0"/>
@@ -10146,7 +10488,7 @@
         <a:lumOff val="35000"/>
       </a:schemeClr>
     </cs:fontRef>
-    <cs:defRPr sz="1330" kern="1200"/>
+    <cs:defRPr sz="1000" kern="1200"/>
   </cs:axisTitle>
   <cs:categoryAxis>
     <cs:lnRef idx="0"/>
@@ -10169,7 +10511,7 @@
         <a:round/>
       </a:ln>
     </cs:spPr>
-    <cs:defRPr sz="1197" kern="1200"/>
+    <cs:defRPr sz="900" kern="1200"/>
   </cs:categoryAxis>
   <cs:chartArea mods="allowNoFillOverride allowNoLineOverride">
     <cs:lnRef idx="0"/>
@@ -10192,7 +10534,7 @@
         <a:round/>
       </a:ln>
     </cs:spPr>
-    <cs:defRPr sz="1330" kern="1200"/>
+    <cs:defRPr sz="1000" kern="1200"/>
   </cs:chartArea>
   <cs:dataLabel>
     <cs:lnRef idx="0"/>
@@ -10204,7 +10546,7 @@
         <a:lumOff val="25000"/>
       </a:schemeClr>
     </cs:fontRef>
-    <cs:defRPr sz="1197" kern="1200"/>
+    <cs:defRPr sz="900" kern="1200"/>
   </cs:dataLabel>
   <cs:dataLabelCallout>
     <cs:lnRef idx="0"/>
@@ -10229,7 +10571,7 @@
         </a:solidFill>
       </a:ln>
     </cs:spPr>
-    <cs:defRPr sz="1197" kern="1200"/>
+    <cs:defRPr sz="900" kern="1200"/>
     <cs:bodyPr rot="0" spcFirstLastPara="1" vertOverflow="clip" horzOverflow="clip" vert="horz" wrap="square" lIns="36576" tIns="18288" rIns="36576" bIns="18288" anchor="ctr" anchorCtr="1">
       <a:spAutoFit/>
     </cs:bodyPr>
@@ -10332,7 +10674,7 @@
         <a:round/>
       </a:ln>
     </cs:spPr>
-    <cs:defRPr sz="1197" kern="1200"/>
+    <cs:defRPr sz="900" kern="1200"/>
   </cs:dataTable>
   <cs:downBar>
     <cs:lnRef idx="0"/>
@@ -10496,7 +10838,7 @@
         <a:lumOff val="35000"/>
       </a:schemeClr>
     </cs:fontRef>
-    <cs:defRPr sz="1197" kern="1200"/>
+    <cs:defRPr sz="900" kern="1200"/>
   </cs:legend>
   <cs:plotArea mods="allowNoFillOverride allowNoLineOverride">
     <cs:lnRef idx="0"/>
@@ -10524,7 +10866,7 @@
         <a:lumOff val="35000"/>
       </a:schemeClr>
     </cs:fontRef>
-    <cs:defRPr sz="1197" kern="1200"/>
+    <cs:defRPr sz="900" kern="1200"/>
   </cs:seriesAxis>
   <cs:seriesLine>
     <cs:lnRef idx="0"/>
@@ -10555,7 +10897,7 @@
         <a:lumOff val="35000"/>
       </a:schemeClr>
     </cs:fontRef>
-    <cs:defRPr sz="1862" b="0" kern="1200" spc="0" baseline="0"/>
+    <cs:defRPr sz="1400" b="0" kern="1200" spc="0" baseline="0"/>
   </cs:title>
   <cs:trendline>
     <cs:lnRef idx="0">
@@ -10585,7 +10927,7 @@
         <a:lumOff val="35000"/>
       </a:schemeClr>
     </cs:fontRef>
-    <cs:defRPr sz="1197" kern="1200"/>
+    <cs:defRPr sz="900" kern="1200"/>
   </cs:trendlineLabel>
   <cs:upBar>
     <cs:lnRef idx="0"/>
@@ -10618,7 +10960,7 @@
         <a:lumOff val="35000"/>
       </a:schemeClr>
     </cs:fontRef>
-    <cs:defRPr sz="1197" kern="1200"/>
+    <cs:defRPr sz="900" kern="1200"/>
   </cs:valueAxis>
   <cs:wall>
     <cs:lnRef idx="0"/>
@@ -11235,7 +11577,7 @@
           <a:p>
             <a:fld id="{79DBBB50-28C2-4259-8A6E-8511330E65C5}" type="datetimeFigureOut">
               <a:rPr lang="en-CA" smtClean="0"/>
-              <a:t>2025-05-20</a:t>
+              <a:t>29-May-2025</a:t>
             </a:fld>
             <a:endParaRPr lang="en-CA"/>
           </a:p>
@@ -11985,11 +12327,7 @@
           <a:p>
             <a:r>
               <a:rPr lang="en-US" dirty="0"/>
-              <a:t>Spending great blood pool in veins. Compare avg transit time to test whether this is a </a:t>
-            </a:r>
-            <a:r>
-              <a:rPr lang="en-US"/>
-              <a:t>sig issue. </a:t>
+              <a:t>Spending great blood pool in veins. Compare avg transit time to test whether this is a sig issue. </a:t>
             </a:r>
             <a:endParaRPr lang="en-CA" dirty="0"/>
           </a:p>
@@ -12038,6 +12376,242 @@
 </file>
 
 <file path=ppt/notesSlides/notesSlide14.xml><?xml version="1.0" encoding="utf-8"?>
+<p:notes xmlns:a="http://schemas.openxmlformats.org/drawingml/2006/main" xmlns:r="http://schemas.openxmlformats.org/officeDocument/2006/relationships" xmlns:p="http://schemas.openxmlformats.org/presentationml/2006/main">
+  <p:cSld>
+    <p:spTree>
+      <p:nvGrpSpPr>
+        <p:cNvPr id="1" name="">
+          <a:extLst>
+            <a:ext uri="{FF2B5EF4-FFF2-40B4-BE49-F238E27FC236}">
+              <a16:creationId xmlns:a16="http://schemas.microsoft.com/office/drawing/2014/main" id="{AC3E9551-FC57-7CC0-E7FF-A1BE0F1021AA}"/>
+            </a:ext>
+          </a:extLst>
+        </p:cNvPr>
+        <p:cNvGrpSpPr/>
+        <p:nvPr/>
+      </p:nvGrpSpPr>
+      <p:grpSpPr>
+        <a:xfrm>
+          <a:off x="0" y="0"/>
+          <a:ext cx="0" cy="0"/>
+          <a:chOff x="0" y="0"/>
+          <a:chExt cx="0" cy="0"/>
+        </a:xfrm>
+      </p:grpSpPr>
+      <p:sp>
+        <p:nvSpPr>
+          <p:cNvPr id="2" name="Slide Image Placeholder 1">
+            <a:extLst>
+              <a:ext uri="{FF2B5EF4-FFF2-40B4-BE49-F238E27FC236}">
+                <a16:creationId xmlns:a16="http://schemas.microsoft.com/office/drawing/2014/main" id="{0284A94D-CA8B-8128-CF98-638D26C904FA}"/>
+              </a:ext>
+            </a:extLst>
+          </p:cNvPr>
+          <p:cNvSpPr>
+            <a:spLocks noGrp="1" noRot="1" noChangeAspect="1"/>
+          </p:cNvSpPr>
+          <p:nvPr>
+            <p:ph type="sldImg"/>
+          </p:nvPr>
+        </p:nvSpPr>
+        <p:spPr/>
+      </p:sp>
+      <p:sp>
+        <p:nvSpPr>
+          <p:cNvPr id="3" name="Notes Placeholder 2">
+            <a:extLst>
+              <a:ext uri="{FF2B5EF4-FFF2-40B4-BE49-F238E27FC236}">
+                <a16:creationId xmlns:a16="http://schemas.microsoft.com/office/drawing/2014/main" id="{2049C22D-26CB-277F-8D94-EE865B768CCC}"/>
+              </a:ext>
+            </a:extLst>
+          </p:cNvPr>
+          <p:cNvSpPr>
+            <a:spLocks noGrp="1"/>
+          </p:cNvSpPr>
+          <p:nvPr>
+            <p:ph type="body" idx="1"/>
+          </p:nvPr>
+        </p:nvSpPr>
+        <p:spPr/>
+        <p:txBody>
+          <a:bodyPr/>
+          <a:lstStyle/>
+          <a:p>
+            <a:r>
+              <a:rPr lang="en-US" dirty="0"/>
+              <a:t>Heart compressed to one unit as opposed to multiple chambers</a:t>
+            </a:r>
+          </a:p>
+          <a:p>
+            <a:r>
+              <a:rPr lang="en-US" dirty="0"/>
+              <a:t>Spending great blood pool in veins. Compare avg transit time to test whether this is a sig issue. </a:t>
+            </a:r>
+            <a:endParaRPr lang="en-CA" dirty="0"/>
+          </a:p>
+        </p:txBody>
+      </p:sp>
+      <p:sp>
+        <p:nvSpPr>
+          <p:cNvPr id="4" name="Slide Number Placeholder 3">
+            <a:extLst>
+              <a:ext uri="{FF2B5EF4-FFF2-40B4-BE49-F238E27FC236}">
+                <a16:creationId xmlns:a16="http://schemas.microsoft.com/office/drawing/2014/main" id="{F94482A2-9D57-BF3D-D60D-7FCE42538689}"/>
+              </a:ext>
+            </a:extLst>
+          </p:cNvPr>
+          <p:cNvSpPr>
+            <a:spLocks noGrp="1"/>
+          </p:cNvSpPr>
+          <p:nvPr>
+            <p:ph type="sldNum" sz="quarter" idx="5"/>
+          </p:nvPr>
+        </p:nvSpPr>
+        <p:spPr/>
+        <p:txBody>
+          <a:bodyPr/>
+          <a:lstStyle/>
+          <a:p>
+            <a:fld id="{5C2A1542-6F33-408E-AC39-5232C11A66FF}" type="slidenum">
+              <a:rPr lang="en-CA" smtClean="0"/>
+              <a:t>17</a:t>
+            </a:fld>
+            <a:endParaRPr lang="en-CA"/>
+          </a:p>
+        </p:txBody>
+      </p:sp>
+    </p:spTree>
+    <p:extLst>
+      <p:ext uri="{BB962C8B-B14F-4D97-AF65-F5344CB8AC3E}">
+        <p14:creationId xmlns:p14="http://schemas.microsoft.com/office/powerpoint/2010/main" val="4259750577"/>
+      </p:ext>
+    </p:extLst>
+  </p:cSld>
+  <p:clrMapOvr>
+    <a:masterClrMapping/>
+  </p:clrMapOvr>
+</p:notes>
+</file>
+
+<file path=ppt/notesSlides/notesSlide15.xml><?xml version="1.0" encoding="utf-8"?>
+<p:notes xmlns:a="http://schemas.openxmlformats.org/drawingml/2006/main" xmlns:r="http://schemas.openxmlformats.org/officeDocument/2006/relationships" xmlns:p="http://schemas.openxmlformats.org/presentationml/2006/main">
+  <p:cSld>
+    <p:spTree>
+      <p:nvGrpSpPr>
+        <p:cNvPr id="1" name="">
+          <a:extLst>
+            <a:ext uri="{FF2B5EF4-FFF2-40B4-BE49-F238E27FC236}">
+              <a16:creationId xmlns:a16="http://schemas.microsoft.com/office/drawing/2014/main" id="{AC3E9551-FC57-7CC0-E7FF-A1BE0F1021AA}"/>
+            </a:ext>
+          </a:extLst>
+        </p:cNvPr>
+        <p:cNvGrpSpPr/>
+        <p:nvPr/>
+      </p:nvGrpSpPr>
+      <p:grpSpPr>
+        <a:xfrm>
+          <a:off x="0" y="0"/>
+          <a:ext cx="0" cy="0"/>
+          <a:chOff x="0" y="0"/>
+          <a:chExt cx="0" cy="0"/>
+        </a:xfrm>
+      </p:grpSpPr>
+      <p:sp>
+        <p:nvSpPr>
+          <p:cNvPr id="2" name="Slide Image Placeholder 1">
+            <a:extLst>
+              <a:ext uri="{FF2B5EF4-FFF2-40B4-BE49-F238E27FC236}">
+                <a16:creationId xmlns:a16="http://schemas.microsoft.com/office/drawing/2014/main" id="{0284A94D-CA8B-8128-CF98-638D26C904FA}"/>
+              </a:ext>
+            </a:extLst>
+          </p:cNvPr>
+          <p:cNvSpPr>
+            <a:spLocks noGrp="1" noRot="1" noChangeAspect="1"/>
+          </p:cNvSpPr>
+          <p:nvPr>
+            <p:ph type="sldImg"/>
+          </p:nvPr>
+        </p:nvSpPr>
+        <p:spPr/>
+      </p:sp>
+      <p:sp>
+        <p:nvSpPr>
+          <p:cNvPr id="3" name="Notes Placeholder 2">
+            <a:extLst>
+              <a:ext uri="{FF2B5EF4-FFF2-40B4-BE49-F238E27FC236}">
+                <a16:creationId xmlns:a16="http://schemas.microsoft.com/office/drawing/2014/main" id="{2049C22D-26CB-277F-8D94-EE865B768CCC}"/>
+              </a:ext>
+            </a:extLst>
+          </p:cNvPr>
+          <p:cNvSpPr>
+            <a:spLocks noGrp="1"/>
+          </p:cNvSpPr>
+          <p:nvPr>
+            <p:ph type="body" idx="1"/>
+          </p:nvPr>
+        </p:nvSpPr>
+        <p:spPr/>
+        <p:txBody>
+          <a:bodyPr/>
+          <a:lstStyle/>
+          <a:p>
+            <a:r>
+              <a:rPr lang="en-US" dirty="0"/>
+              <a:t>Heart compressed to one unit as opposed to multiple chambers</a:t>
+            </a:r>
+          </a:p>
+          <a:p>
+            <a:r>
+              <a:rPr lang="en-US" dirty="0"/>
+              <a:t>Spending great blood pool in veins. Compare avg transit time to test whether this is a sig issue. </a:t>
+            </a:r>
+            <a:endParaRPr lang="en-CA" dirty="0"/>
+          </a:p>
+        </p:txBody>
+      </p:sp>
+      <p:sp>
+        <p:nvSpPr>
+          <p:cNvPr id="4" name="Slide Number Placeholder 3">
+            <a:extLst>
+              <a:ext uri="{FF2B5EF4-FFF2-40B4-BE49-F238E27FC236}">
+                <a16:creationId xmlns:a16="http://schemas.microsoft.com/office/drawing/2014/main" id="{F94482A2-9D57-BF3D-D60D-7FCE42538689}"/>
+              </a:ext>
+            </a:extLst>
+          </p:cNvPr>
+          <p:cNvSpPr>
+            <a:spLocks noGrp="1"/>
+          </p:cNvSpPr>
+          <p:nvPr>
+            <p:ph type="sldNum" sz="quarter" idx="5"/>
+          </p:nvPr>
+        </p:nvSpPr>
+        <p:spPr/>
+        <p:txBody>
+          <a:bodyPr/>
+          <a:lstStyle/>
+          <a:p>
+            <a:fld id="{5C2A1542-6F33-408E-AC39-5232C11A66FF}" type="slidenum">
+              <a:rPr lang="en-CA" smtClean="0"/>
+              <a:t>18</a:t>
+            </a:fld>
+            <a:endParaRPr lang="en-CA"/>
+          </a:p>
+        </p:txBody>
+      </p:sp>
+    </p:spTree>
+    <p:extLst>
+      <p:ext uri="{BB962C8B-B14F-4D97-AF65-F5344CB8AC3E}">
+        <p14:creationId xmlns:p14="http://schemas.microsoft.com/office/powerpoint/2010/main" val="473353391"/>
+      </p:ext>
+    </p:extLst>
+  </p:cSld>
+  <p:clrMapOvr>
+    <a:masterClrMapping/>
+  </p:clrMapOvr>
+</p:notes>
+</file>
+
+<file path=ppt/notesSlides/notesSlide16.xml><?xml version="1.0" encoding="utf-8"?>
 <p:notes xmlns:a="http://schemas.openxmlformats.org/drawingml/2006/main" xmlns:r="http://schemas.openxmlformats.org/officeDocument/2006/relationships" xmlns:p="http://schemas.openxmlformats.org/presentationml/2006/main">
   <p:cSld>
     <p:spTree>
@@ -12102,7 +12676,7 @@
           <a:p>
             <a:fld id="{5C2A1542-6F33-408E-AC39-5232C11A66FF}" type="slidenum">
               <a:rPr lang="en-CA" smtClean="0"/>
-              <a:t>17</a:t>
+              <a:t>19</a:t>
             </a:fld>
             <a:endParaRPr lang="en-CA"/>
           </a:p>
@@ -12112,210 +12686,6 @@
     <p:extLst>
       <p:ext uri="{BB962C8B-B14F-4D97-AF65-F5344CB8AC3E}">
         <p14:creationId xmlns:p14="http://schemas.microsoft.com/office/powerpoint/2010/main" val="2267054878"/>
-      </p:ext>
-    </p:extLst>
-  </p:cSld>
-  <p:clrMapOvr>
-    <a:masterClrMapping/>
-  </p:clrMapOvr>
-</p:notes>
-</file>
-
-<file path=ppt/notesSlides/notesSlide15.xml><?xml version="1.0" encoding="utf-8"?>
-<p:notes xmlns:a="http://schemas.openxmlformats.org/drawingml/2006/main" xmlns:r="http://schemas.openxmlformats.org/officeDocument/2006/relationships" xmlns:p="http://schemas.openxmlformats.org/presentationml/2006/main">
-  <p:cSld>
-    <p:spTree>
-      <p:nvGrpSpPr>
-        <p:cNvPr id="1" name=""/>
-        <p:cNvGrpSpPr/>
-        <p:nvPr/>
-      </p:nvGrpSpPr>
-      <p:grpSpPr>
-        <a:xfrm>
-          <a:off x="0" y="0"/>
-          <a:ext cx="0" cy="0"/>
-          <a:chOff x="0" y="0"/>
-          <a:chExt cx="0" cy="0"/>
-        </a:xfrm>
-      </p:grpSpPr>
-      <p:sp>
-        <p:nvSpPr>
-          <p:cNvPr id="2" name="Slide Image Placeholder 1"/>
-          <p:cNvSpPr>
-            <a:spLocks noGrp="1" noRot="1" noChangeAspect="1"/>
-          </p:cNvSpPr>
-          <p:nvPr>
-            <p:ph type="sldImg"/>
-          </p:nvPr>
-        </p:nvSpPr>
-        <p:spPr/>
-      </p:sp>
-      <p:sp>
-        <p:nvSpPr>
-          <p:cNvPr id="3" name="Notes Placeholder 2"/>
-          <p:cNvSpPr>
-            <a:spLocks noGrp="1"/>
-          </p:cNvSpPr>
-          <p:nvPr>
-            <p:ph type="body" idx="1"/>
-          </p:nvPr>
-        </p:nvSpPr>
-        <p:spPr/>
-        <p:txBody>
-          <a:bodyPr/>
-          <a:lstStyle/>
-          <a:p>
-            <a:endParaRPr lang="en-CA" dirty="0"/>
-          </a:p>
-        </p:txBody>
-      </p:sp>
-      <p:sp>
-        <p:nvSpPr>
-          <p:cNvPr id="4" name="Slide Number Placeholder 3"/>
-          <p:cNvSpPr>
-            <a:spLocks noGrp="1"/>
-          </p:cNvSpPr>
-          <p:nvPr>
-            <p:ph type="sldNum" sz="quarter" idx="5"/>
-          </p:nvPr>
-        </p:nvSpPr>
-        <p:spPr/>
-        <p:txBody>
-          <a:bodyPr/>
-          <a:lstStyle/>
-          <a:p>
-            <a:fld id="{5C2A1542-6F33-408E-AC39-5232C11A66FF}" type="slidenum">
-              <a:rPr lang="en-CA" smtClean="0"/>
-              <a:t>18</a:t>
-            </a:fld>
-            <a:endParaRPr lang="en-CA"/>
-          </a:p>
-        </p:txBody>
-      </p:sp>
-    </p:spTree>
-    <p:extLst>
-      <p:ext uri="{BB962C8B-B14F-4D97-AF65-F5344CB8AC3E}">
-        <p14:creationId xmlns:p14="http://schemas.microsoft.com/office/powerpoint/2010/main" val="969050603"/>
-      </p:ext>
-    </p:extLst>
-  </p:cSld>
-  <p:clrMapOvr>
-    <a:masterClrMapping/>
-  </p:clrMapOvr>
-</p:notes>
-</file>
-
-<file path=ppt/notesSlides/notesSlide16.xml><?xml version="1.0" encoding="utf-8"?>
-<p:notes xmlns:a="http://schemas.openxmlformats.org/drawingml/2006/main" xmlns:r="http://schemas.openxmlformats.org/officeDocument/2006/relationships" xmlns:p="http://schemas.openxmlformats.org/presentationml/2006/main">
-  <p:cSld>
-    <p:spTree>
-      <p:nvGrpSpPr>
-        <p:cNvPr id="1" name="">
-          <a:extLst>
-            <a:ext uri="{FF2B5EF4-FFF2-40B4-BE49-F238E27FC236}">
-              <a16:creationId xmlns:a16="http://schemas.microsoft.com/office/drawing/2014/main" id="{B8C9E854-16ED-E826-38F6-49D7D5EA9A7D}"/>
-            </a:ext>
-          </a:extLst>
-        </p:cNvPr>
-        <p:cNvGrpSpPr/>
-        <p:nvPr/>
-      </p:nvGrpSpPr>
-      <p:grpSpPr>
-        <a:xfrm>
-          <a:off x="0" y="0"/>
-          <a:ext cx="0" cy="0"/>
-          <a:chOff x="0" y="0"/>
-          <a:chExt cx="0" cy="0"/>
-        </a:xfrm>
-      </p:grpSpPr>
-      <p:sp>
-        <p:nvSpPr>
-          <p:cNvPr id="2" name="Slide Image Placeholder 1">
-            <a:extLst>
-              <a:ext uri="{FF2B5EF4-FFF2-40B4-BE49-F238E27FC236}">
-                <a16:creationId xmlns:a16="http://schemas.microsoft.com/office/drawing/2014/main" id="{D8873EFC-CC87-D3FE-E566-ED464A6A0F34}"/>
-              </a:ext>
-            </a:extLst>
-          </p:cNvPr>
-          <p:cNvSpPr>
-            <a:spLocks noGrp="1" noRot="1" noChangeAspect="1"/>
-          </p:cNvSpPr>
-          <p:nvPr>
-            <p:ph type="sldImg"/>
-          </p:nvPr>
-        </p:nvSpPr>
-        <p:spPr/>
-      </p:sp>
-      <p:sp>
-        <p:nvSpPr>
-          <p:cNvPr id="3" name="Notes Placeholder 2">
-            <a:extLst>
-              <a:ext uri="{FF2B5EF4-FFF2-40B4-BE49-F238E27FC236}">
-                <a16:creationId xmlns:a16="http://schemas.microsoft.com/office/drawing/2014/main" id="{ABDC82C9-367D-31E6-5D55-EA5DF6B691F3}"/>
-              </a:ext>
-            </a:extLst>
-          </p:cNvPr>
-          <p:cNvSpPr>
-            <a:spLocks noGrp="1"/>
-          </p:cNvSpPr>
-          <p:nvPr>
-            <p:ph type="body" idx="1"/>
-          </p:nvPr>
-        </p:nvSpPr>
-        <p:spPr/>
-        <p:txBody>
-          <a:bodyPr/>
-          <a:lstStyle/>
-          <a:p>
-            <a:r>
-              <a:rPr lang="en-US" dirty="0"/>
-              <a:t>1D modelling, what is it, how are vessels connected to each other, how does </a:t>
-            </a:r>
-            <a:r>
-              <a:rPr lang="en-US" dirty="0" err="1"/>
-              <a:t>bv</a:t>
-            </a:r>
-            <a:r>
-              <a:rPr lang="en-US" dirty="0"/>
-              <a:t> move down the vessels starting at the heart.</a:t>
-            </a:r>
-            <a:endParaRPr lang="en-CA" dirty="0"/>
-          </a:p>
-        </p:txBody>
-      </p:sp>
-      <p:sp>
-        <p:nvSpPr>
-          <p:cNvPr id="4" name="Slide Number Placeholder 3">
-            <a:extLst>
-              <a:ext uri="{FF2B5EF4-FFF2-40B4-BE49-F238E27FC236}">
-                <a16:creationId xmlns:a16="http://schemas.microsoft.com/office/drawing/2014/main" id="{F5951CBB-A54C-D3B4-76CA-FC1736258A14}"/>
-              </a:ext>
-            </a:extLst>
-          </p:cNvPr>
-          <p:cNvSpPr>
-            <a:spLocks noGrp="1"/>
-          </p:cNvSpPr>
-          <p:nvPr>
-            <p:ph type="sldNum" sz="quarter" idx="5"/>
-          </p:nvPr>
-        </p:nvSpPr>
-        <p:spPr/>
-        <p:txBody>
-          <a:bodyPr/>
-          <a:lstStyle/>
-          <a:p>
-            <a:fld id="{5C2A1542-6F33-408E-AC39-5232C11A66FF}" type="slidenum">
-              <a:rPr lang="en-CA" smtClean="0"/>
-              <a:t>19</a:t>
-            </a:fld>
-            <a:endParaRPr lang="en-CA"/>
-          </a:p>
-        </p:txBody>
-      </p:sp>
-    </p:spTree>
-    <p:extLst>
-      <p:ext uri="{BB962C8B-B14F-4D97-AF65-F5344CB8AC3E}">
-        <p14:creationId xmlns:p14="http://schemas.microsoft.com/office/powerpoint/2010/main" val="2905299308"/>
       </p:ext>
     </p:extLst>
   </p:cSld>
@@ -12388,9 +12758,213 @@
           <a:bodyPr/>
           <a:lstStyle/>
           <a:p>
+            <a:fld id="{5C2A1542-6F33-408E-AC39-5232C11A66FF}" type="slidenum">
+              <a:rPr lang="en-CA" smtClean="0"/>
+              <a:t>20</a:t>
+            </a:fld>
+            <a:endParaRPr lang="en-CA"/>
+          </a:p>
+        </p:txBody>
+      </p:sp>
+    </p:spTree>
+    <p:extLst>
+      <p:ext uri="{BB962C8B-B14F-4D97-AF65-F5344CB8AC3E}">
+        <p14:creationId xmlns:p14="http://schemas.microsoft.com/office/powerpoint/2010/main" val="969050603"/>
+      </p:ext>
+    </p:extLst>
+  </p:cSld>
+  <p:clrMapOvr>
+    <a:masterClrMapping/>
+  </p:clrMapOvr>
+</p:notes>
+</file>
+
+<file path=ppt/notesSlides/notesSlide18.xml><?xml version="1.0" encoding="utf-8"?>
+<p:notes xmlns:a="http://schemas.openxmlformats.org/drawingml/2006/main" xmlns:r="http://schemas.openxmlformats.org/officeDocument/2006/relationships" xmlns:p="http://schemas.openxmlformats.org/presentationml/2006/main">
+  <p:cSld>
+    <p:spTree>
+      <p:nvGrpSpPr>
+        <p:cNvPr id="1" name="">
+          <a:extLst>
+            <a:ext uri="{FF2B5EF4-FFF2-40B4-BE49-F238E27FC236}">
+              <a16:creationId xmlns:a16="http://schemas.microsoft.com/office/drawing/2014/main" id="{B8C9E854-16ED-E826-38F6-49D7D5EA9A7D}"/>
+            </a:ext>
+          </a:extLst>
+        </p:cNvPr>
+        <p:cNvGrpSpPr/>
+        <p:nvPr/>
+      </p:nvGrpSpPr>
+      <p:grpSpPr>
+        <a:xfrm>
+          <a:off x="0" y="0"/>
+          <a:ext cx="0" cy="0"/>
+          <a:chOff x="0" y="0"/>
+          <a:chExt cx="0" cy="0"/>
+        </a:xfrm>
+      </p:grpSpPr>
+      <p:sp>
+        <p:nvSpPr>
+          <p:cNvPr id="2" name="Slide Image Placeholder 1">
+            <a:extLst>
+              <a:ext uri="{FF2B5EF4-FFF2-40B4-BE49-F238E27FC236}">
+                <a16:creationId xmlns:a16="http://schemas.microsoft.com/office/drawing/2014/main" id="{D8873EFC-CC87-D3FE-E566-ED464A6A0F34}"/>
+              </a:ext>
+            </a:extLst>
+          </p:cNvPr>
+          <p:cNvSpPr>
+            <a:spLocks noGrp="1" noRot="1" noChangeAspect="1"/>
+          </p:cNvSpPr>
+          <p:nvPr>
+            <p:ph type="sldImg"/>
+          </p:nvPr>
+        </p:nvSpPr>
+        <p:spPr/>
+      </p:sp>
+      <p:sp>
+        <p:nvSpPr>
+          <p:cNvPr id="3" name="Notes Placeholder 2">
+            <a:extLst>
+              <a:ext uri="{FF2B5EF4-FFF2-40B4-BE49-F238E27FC236}">
+                <a16:creationId xmlns:a16="http://schemas.microsoft.com/office/drawing/2014/main" id="{ABDC82C9-367D-31E6-5D55-EA5DF6B691F3}"/>
+              </a:ext>
+            </a:extLst>
+          </p:cNvPr>
+          <p:cNvSpPr>
+            <a:spLocks noGrp="1"/>
+          </p:cNvSpPr>
+          <p:nvPr>
+            <p:ph type="body" idx="1"/>
+          </p:nvPr>
+        </p:nvSpPr>
+        <p:spPr/>
+        <p:txBody>
+          <a:bodyPr/>
+          <a:lstStyle/>
+          <a:p>
+            <a:r>
+              <a:rPr lang="en-US" dirty="0"/>
+              <a:t>1D modelling, what is it, how are vessels connected to each other, how does </a:t>
+            </a:r>
+            <a:r>
+              <a:rPr lang="en-US" dirty="0" err="1"/>
+              <a:t>bv</a:t>
+            </a:r>
+            <a:r>
+              <a:rPr lang="en-US" dirty="0"/>
+              <a:t> move down the vessels starting at the heart.</a:t>
+            </a:r>
+            <a:endParaRPr lang="en-CA" dirty="0"/>
+          </a:p>
+        </p:txBody>
+      </p:sp>
+      <p:sp>
+        <p:nvSpPr>
+          <p:cNvPr id="4" name="Slide Number Placeholder 3">
+            <a:extLst>
+              <a:ext uri="{FF2B5EF4-FFF2-40B4-BE49-F238E27FC236}">
+                <a16:creationId xmlns:a16="http://schemas.microsoft.com/office/drawing/2014/main" id="{F5951CBB-A54C-D3B4-76CA-FC1736258A14}"/>
+              </a:ext>
+            </a:extLst>
+          </p:cNvPr>
+          <p:cNvSpPr>
+            <a:spLocks noGrp="1"/>
+          </p:cNvSpPr>
+          <p:nvPr>
+            <p:ph type="sldNum" sz="quarter" idx="5"/>
+          </p:nvPr>
+        </p:nvSpPr>
+        <p:spPr/>
+        <p:txBody>
+          <a:bodyPr/>
+          <a:lstStyle/>
+          <a:p>
+            <a:fld id="{5C2A1542-6F33-408E-AC39-5232C11A66FF}" type="slidenum">
+              <a:rPr lang="en-CA" smtClean="0"/>
+              <a:t>21</a:t>
+            </a:fld>
+            <a:endParaRPr lang="en-CA"/>
+          </a:p>
+        </p:txBody>
+      </p:sp>
+    </p:spTree>
+    <p:extLst>
+      <p:ext uri="{BB962C8B-B14F-4D97-AF65-F5344CB8AC3E}">
+        <p14:creationId xmlns:p14="http://schemas.microsoft.com/office/powerpoint/2010/main" val="2905299308"/>
+      </p:ext>
+    </p:extLst>
+  </p:cSld>
+  <p:clrMapOvr>
+    <a:masterClrMapping/>
+  </p:clrMapOvr>
+</p:notes>
+</file>
+
+<file path=ppt/notesSlides/notesSlide19.xml><?xml version="1.0" encoding="utf-8"?>
+<p:notes xmlns:a="http://schemas.openxmlformats.org/drawingml/2006/main" xmlns:r="http://schemas.openxmlformats.org/officeDocument/2006/relationships" xmlns:p="http://schemas.openxmlformats.org/presentationml/2006/main">
+  <p:cSld>
+    <p:spTree>
+      <p:nvGrpSpPr>
+        <p:cNvPr id="1" name=""/>
+        <p:cNvGrpSpPr/>
+        <p:nvPr/>
+      </p:nvGrpSpPr>
+      <p:grpSpPr>
+        <a:xfrm>
+          <a:off x="0" y="0"/>
+          <a:ext cx="0" cy="0"/>
+          <a:chOff x="0" y="0"/>
+          <a:chExt cx="0" cy="0"/>
+        </a:xfrm>
+      </p:grpSpPr>
+      <p:sp>
+        <p:nvSpPr>
+          <p:cNvPr id="2" name="Slide Image Placeholder 1"/>
+          <p:cNvSpPr>
+            <a:spLocks noGrp="1" noRot="1" noChangeAspect="1"/>
+          </p:cNvSpPr>
+          <p:nvPr>
+            <p:ph type="sldImg"/>
+          </p:nvPr>
+        </p:nvSpPr>
+        <p:spPr/>
+      </p:sp>
+      <p:sp>
+        <p:nvSpPr>
+          <p:cNvPr id="3" name="Notes Placeholder 2"/>
+          <p:cNvSpPr>
+            <a:spLocks noGrp="1"/>
+          </p:cNvSpPr>
+          <p:nvPr>
+            <p:ph type="body" idx="1"/>
+          </p:nvPr>
+        </p:nvSpPr>
+        <p:spPr/>
+        <p:txBody>
+          <a:bodyPr/>
+          <a:lstStyle/>
+          <a:p>
+            <a:endParaRPr lang="en-CA" dirty="0"/>
+          </a:p>
+        </p:txBody>
+      </p:sp>
+      <p:sp>
+        <p:nvSpPr>
+          <p:cNvPr id="4" name="Slide Number Placeholder 3"/>
+          <p:cNvSpPr>
+            <a:spLocks noGrp="1"/>
+          </p:cNvSpPr>
+          <p:nvPr>
+            <p:ph type="sldNum" sz="quarter" idx="5"/>
+          </p:nvPr>
+        </p:nvSpPr>
+        <p:spPr/>
+        <p:txBody>
+          <a:bodyPr/>
+          <a:lstStyle/>
+          <a:p>
             <a:fld id="{A4F92E4B-81BE-4B7A-B36D-25EE9615AC65}" type="slidenum">
               <a:rPr lang="en-CA" smtClean="0"/>
-              <a:t>20</a:t>
+              <a:t>22</a:t>
             </a:fld>
             <a:endParaRPr lang="en-CA"/>
           </a:p>
@@ -13386,7 +13960,7 @@
           <a:p>
             <a:fld id="{DF0AE50A-D16A-47CD-AF47-75A773AE29BA}" type="datetimeFigureOut">
               <a:rPr lang="en-CA" smtClean="0"/>
-              <a:t>2025-05-20</a:t>
+              <a:t>29-May-2025</a:t>
             </a:fld>
             <a:endParaRPr lang="en-CA"/>
           </a:p>
@@ -13586,7 +14160,7 @@
           <a:p>
             <a:fld id="{DF0AE50A-D16A-47CD-AF47-75A773AE29BA}" type="datetimeFigureOut">
               <a:rPr lang="en-CA" smtClean="0"/>
-              <a:t>2025-05-20</a:t>
+              <a:t>29-May-2025</a:t>
             </a:fld>
             <a:endParaRPr lang="en-CA"/>
           </a:p>
@@ -13796,7 +14370,7 @@
           <a:p>
             <a:fld id="{DF0AE50A-D16A-47CD-AF47-75A773AE29BA}" type="datetimeFigureOut">
               <a:rPr lang="en-CA" smtClean="0"/>
-              <a:t>2025-05-20</a:t>
+              <a:t>29-May-2025</a:t>
             </a:fld>
             <a:endParaRPr lang="en-CA"/>
           </a:p>
@@ -13996,7 +14570,7 @@
           <a:p>
             <a:fld id="{DF0AE50A-D16A-47CD-AF47-75A773AE29BA}" type="datetimeFigureOut">
               <a:rPr lang="en-CA" smtClean="0"/>
-              <a:t>2025-05-20</a:t>
+              <a:t>29-May-2025</a:t>
             </a:fld>
             <a:endParaRPr lang="en-CA"/>
           </a:p>
@@ -14272,7 +14846,7 @@
           <a:p>
             <a:fld id="{DF0AE50A-D16A-47CD-AF47-75A773AE29BA}" type="datetimeFigureOut">
               <a:rPr lang="en-CA" smtClean="0"/>
-              <a:t>2025-05-20</a:t>
+              <a:t>29-May-2025</a:t>
             </a:fld>
             <a:endParaRPr lang="en-CA"/>
           </a:p>
@@ -14540,7 +15114,7 @@
           <a:p>
             <a:fld id="{DF0AE50A-D16A-47CD-AF47-75A773AE29BA}" type="datetimeFigureOut">
               <a:rPr lang="en-CA" smtClean="0"/>
-              <a:t>2025-05-20</a:t>
+              <a:t>29-May-2025</a:t>
             </a:fld>
             <a:endParaRPr lang="en-CA"/>
           </a:p>
@@ -14955,7 +15529,7 @@
           <a:p>
             <a:fld id="{DF0AE50A-D16A-47CD-AF47-75A773AE29BA}" type="datetimeFigureOut">
               <a:rPr lang="en-CA" smtClean="0"/>
-              <a:t>2025-05-20</a:t>
+              <a:t>29-May-2025</a:t>
             </a:fld>
             <a:endParaRPr lang="en-CA"/>
           </a:p>
@@ -15097,7 +15671,7 @@
           <a:p>
             <a:fld id="{DF0AE50A-D16A-47CD-AF47-75A773AE29BA}" type="datetimeFigureOut">
               <a:rPr lang="en-CA" smtClean="0"/>
-              <a:t>2025-05-20</a:t>
+              <a:t>29-May-2025</a:t>
             </a:fld>
             <a:endParaRPr lang="en-CA"/>
           </a:p>
@@ -15210,7 +15784,7 @@
           <a:p>
             <a:fld id="{DF0AE50A-D16A-47CD-AF47-75A773AE29BA}" type="datetimeFigureOut">
               <a:rPr lang="en-CA" smtClean="0"/>
-              <a:t>2025-05-20</a:t>
+              <a:t>29-May-2025</a:t>
             </a:fld>
             <a:endParaRPr lang="en-CA"/>
           </a:p>
@@ -15523,7 +16097,7 @@
           <a:p>
             <a:fld id="{DF0AE50A-D16A-47CD-AF47-75A773AE29BA}" type="datetimeFigureOut">
               <a:rPr lang="en-CA" smtClean="0"/>
-              <a:t>2025-05-20</a:t>
+              <a:t>29-May-2025</a:t>
             </a:fld>
             <a:endParaRPr lang="en-CA"/>
           </a:p>
@@ -15812,7 +16386,7 @@
           <a:p>
             <a:fld id="{DF0AE50A-D16A-47CD-AF47-75A773AE29BA}" type="datetimeFigureOut">
               <a:rPr lang="en-CA" smtClean="0"/>
-              <a:t>2025-05-20</a:t>
+              <a:t>29-May-2025</a:t>
             </a:fld>
             <a:endParaRPr lang="en-CA"/>
           </a:p>
@@ -16055,7 +16629,7 @@
           <a:p>
             <a:fld id="{DF0AE50A-D16A-47CD-AF47-75A773AE29BA}" type="datetimeFigureOut">
               <a:rPr lang="en-CA" smtClean="0"/>
-              <a:t>2025-05-20</a:t>
+              <a:t>29-May-2025</a:t>
             </a:fld>
             <a:endParaRPr lang="en-CA"/>
           </a:p>
@@ -18961,14 +19535,14 @@
           <p:nvPr>
             <p:extLst>
               <p:ext uri="{D42A27DB-BD31-4B8C-83A1-F6EECF244321}">
-                <p14:modId xmlns:p14="http://schemas.microsoft.com/office/powerpoint/2010/main" val="1508538316"/>
+                <p14:modId xmlns:p14="http://schemas.microsoft.com/office/powerpoint/2010/main" val="189417802"/>
               </p:ext>
             </p:extLst>
           </p:nvPr>
         </p:nvGraphicFramePr>
         <p:xfrm>
-          <a:off x="3771987" y="1107864"/>
-          <a:ext cx="7802880" cy="4590288"/>
+          <a:off x="3068907" y="762518"/>
+          <a:ext cx="8626690" cy="5242038"/>
         </p:xfrm>
         <a:graphic>
           <a:graphicData uri="http://schemas.openxmlformats.org/drawingml/2006/chart">
@@ -19221,36 +19795,6 @@
           </a:prstGeom>
         </p:spPr>
       </p:pic>
-      <p:graphicFrame>
-        <p:nvGraphicFramePr>
-          <p:cNvPr id="2" name="Chart 1">
-            <a:extLst>
-              <a:ext uri="{FF2B5EF4-FFF2-40B4-BE49-F238E27FC236}">
-                <a16:creationId xmlns:a16="http://schemas.microsoft.com/office/drawing/2014/main" id="{80C560E7-B353-5377-7859-E7013567046F}"/>
-              </a:ext>
-            </a:extLst>
-          </p:cNvPr>
-          <p:cNvGraphicFramePr>
-            <a:graphicFrameLocks/>
-          </p:cNvGraphicFramePr>
-          <p:nvPr>
-            <p:extLst>
-              <p:ext uri="{D42A27DB-BD31-4B8C-83A1-F6EECF244321}">
-                <p14:modId xmlns:p14="http://schemas.microsoft.com/office/powerpoint/2010/main" val="3831283328"/>
-              </p:ext>
-            </p:extLst>
-          </p:nvPr>
-        </p:nvGraphicFramePr>
-        <p:xfrm>
-          <a:off x="3771987" y="1107864"/>
-          <a:ext cx="7802880" cy="4590288"/>
-        </p:xfrm>
-        <a:graphic>
-          <a:graphicData uri="http://schemas.openxmlformats.org/drawingml/2006/chart">
-            <c:chart xmlns:c="http://schemas.openxmlformats.org/drawingml/2006/chart" xmlns:r="http://schemas.openxmlformats.org/officeDocument/2006/relationships" r:id="rId4"/>
-          </a:graphicData>
-        </a:graphic>
-      </p:graphicFrame>
       <p:sp>
         <p:nvSpPr>
           <p:cNvPr id="3" name="Rectangle 2">
@@ -19265,8 +19809,8 @@
         </p:nvSpPr>
         <p:spPr>
           <a:xfrm>
-            <a:off x="4421172" y="1107864"/>
-            <a:ext cx="7153696" cy="461665"/>
+            <a:off x="3867151" y="853444"/>
+            <a:ext cx="7707716" cy="716085"/>
           </a:xfrm>
           <a:prstGeom prst="rect">
             <a:avLst/>
@@ -19320,8 +19864,8 @@
         </p:nvSpPr>
         <p:spPr>
           <a:xfrm>
-            <a:off x="4421171" y="1569529"/>
-            <a:ext cx="5769205" cy="1712445"/>
+            <a:off x="3867150" y="1569530"/>
+            <a:ext cx="7017223" cy="1278446"/>
           </a:xfrm>
           <a:prstGeom prst="rect">
             <a:avLst/>
@@ -19375,8 +19919,8 @@
         </p:nvSpPr>
         <p:spPr>
           <a:xfrm>
-            <a:off x="4421171" y="3281974"/>
-            <a:ext cx="2135077" cy="1444985"/>
+            <a:off x="3867150" y="2847977"/>
+            <a:ext cx="2486025" cy="2627044"/>
           </a:xfrm>
           <a:prstGeom prst="rect">
             <a:avLst/>
@@ -19430,8 +19974,8 @@
         </p:nvSpPr>
         <p:spPr>
           <a:xfrm>
-            <a:off x="7205432" y="3281974"/>
-            <a:ext cx="2984944" cy="1444984"/>
+            <a:off x="6353174" y="2847977"/>
+            <a:ext cx="3284269" cy="2266948"/>
           </a:xfrm>
           <a:prstGeom prst="rect">
             <a:avLst/>
@@ -19485,8 +20029,8 @@
         </p:nvSpPr>
         <p:spPr>
           <a:xfrm>
-            <a:off x="10953946" y="1569529"/>
-            <a:ext cx="620921" cy="3157429"/>
+            <a:off x="10884374" y="1569529"/>
+            <a:ext cx="690494" cy="3545395"/>
           </a:xfrm>
           <a:prstGeom prst="rect">
             <a:avLst/>
@@ -19540,8 +20084,93 @@
         </p:nvSpPr>
         <p:spPr>
           <a:xfrm>
-            <a:off x="4421172" y="4726959"/>
-            <a:ext cx="7153696" cy="561509"/>
+            <a:off x="10884371" y="5114924"/>
+            <a:ext cx="690495" cy="360097"/>
+          </a:xfrm>
+          <a:prstGeom prst="rect">
+            <a:avLst/>
+          </a:prstGeom>
+          <a:solidFill>
+            <a:srgbClr val="E3D6E9">
+              <a:alpha val="55000"/>
+            </a:srgbClr>
+          </a:solidFill>
+          <a:ln w="76200">
+            <a:noFill/>
+            <a:prstDash val="sysDash"/>
+          </a:ln>
+        </p:spPr>
+        <p:style>
+          <a:lnRef idx="2">
+            <a:schemeClr val="accent1">
+              <a:shade val="15000"/>
+            </a:schemeClr>
+          </a:lnRef>
+          <a:fillRef idx="1">
+            <a:schemeClr val="accent1"/>
+          </a:fillRef>
+          <a:effectRef idx="0">
+            <a:schemeClr val="accent1"/>
+          </a:effectRef>
+          <a:fontRef idx="minor">
+            <a:schemeClr val="lt1"/>
+          </a:fontRef>
+        </p:style>
+        <p:txBody>
+          <a:bodyPr rtlCol="0" anchor="ctr"/>
+          <a:lstStyle/>
+          <a:p>
+            <a:pPr algn="ctr"/>
+            <a:endParaRPr lang="en-CA"/>
+          </a:p>
+        </p:txBody>
+      </p:sp>
+      <p:graphicFrame>
+        <p:nvGraphicFramePr>
+          <p:cNvPr id="2" name="Chart 1">
+            <a:extLst>
+              <a:ext uri="{FF2B5EF4-FFF2-40B4-BE49-F238E27FC236}">
+                <a16:creationId xmlns:a16="http://schemas.microsoft.com/office/drawing/2014/main" id="{96E1F594-8726-DF63-E85D-A4848C2B5520}"/>
+              </a:ext>
+            </a:extLst>
+          </p:cNvPr>
+          <p:cNvGraphicFramePr>
+            <a:graphicFrameLocks/>
+          </p:cNvGraphicFramePr>
+          <p:nvPr>
+            <p:extLst>
+              <p:ext uri="{D42A27DB-BD31-4B8C-83A1-F6EECF244321}">
+                <p14:modId xmlns:p14="http://schemas.microsoft.com/office/powerpoint/2010/main" val="162379948"/>
+              </p:ext>
+            </p:extLst>
+          </p:nvPr>
+        </p:nvGraphicFramePr>
+        <p:xfrm>
+          <a:off x="3068907" y="762518"/>
+          <a:ext cx="8626690" cy="5242038"/>
+        </p:xfrm>
+        <a:graphic>
+          <a:graphicData uri="http://schemas.openxmlformats.org/drawingml/2006/chart">
+            <c:chart xmlns:c="http://schemas.openxmlformats.org/drawingml/2006/chart" xmlns:r="http://schemas.openxmlformats.org/officeDocument/2006/relationships" r:id="rId4"/>
+          </a:graphicData>
+        </a:graphic>
+      </p:graphicFrame>
+      <p:sp>
+        <p:nvSpPr>
+          <p:cNvPr id="5" name="Rectangle 4">
+            <a:extLst>
+              <a:ext uri="{FF2B5EF4-FFF2-40B4-BE49-F238E27FC236}">
+                <a16:creationId xmlns:a16="http://schemas.microsoft.com/office/drawing/2014/main" id="{167EE289-6BFB-B3C2-43BF-0C663E6961F7}"/>
+              </a:ext>
+            </a:extLst>
+          </p:cNvPr>
+          <p:cNvSpPr/>
+          <p:nvPr/>
+        </p:nvSpPr>
+        <p:spPr>
+          <a:xfrm>
+            <a:off x="6353174" y="5106622"/>
+            <a:ext cx="3284269" cy="360097"/>
           </a:xfrm>
           <a:prstGeom prst="rect">
             <a:avLst/>
@@ -19599,7 +20228,13 @@
   <p:cSld>
     <p:spTree>
       <p:nvGrpSpPr>
-        <p:cNvPr id="1" name=""/>
+        <p:cNvPr id="1" name="">
+          <a:extLst>
+            <a:ext uri="{FF2B5EF4-FFF2-40B4-BE49-F238E27FC236}">
+              <a16:creationId xmlns:a16="http://schemas.microsoft.com/office/drawing/2014/main" id="{ED9C4F43-C940-5B4C-2C98-0C009FFE940F}"/>
+            </a:ext>
+          </a:extLst>
+        </p:cNvPr>
         <p:cNvGrpSpPr/>
         <p:nvPr/>
       </p:nvGrpSpPr>
@@ -19616,7 +20251,7 @@
           <p:cNvPr id="6" name="Slide Number Placeholder 5">
             <a:extLst>
               <a:ext uri="{FF2B5EF4-FFF2-40B4-BE49-F238E27FC236}">
-                <a16:creationId xmlns:a16="http://schemas.microsoft.com/office/drawing/2014/main" id="{74FB7EC2-71BA-402D-7669-A778C3CC61F4}"/>
+                <a16:creationId xmlns:a16="http://schemas.microsoft.com/office/drawing/2014/main" id="{4B5043D3-3984-403D-E672-FEBAFB7FFEF8}"/>
               </a:ext>
             </a:extLst>
           </p:cNvPr>
@@ -19640,6 +20275,1194 @@
             <a:fld id="{1E5564C7-97C0-40C1-9717-452594735347}" type="slidenum">
               <a:rPr lang="en-CA" smtClean="0"/>
               <a:t>17</a:t>
+            </a:fld>
+            <a:endParaRPr lang="en-CA" dirty="0"/>
+          </a:p>
+        </p:txBody>
+      </p:sp>
+      <p:cxnSp>
+        <p:nvCxnSpPr>
+          <p:cNvPr id="8" name="Straight Connector 7">
+            <a:extLst>
+              <a:ext uri="{FF2B5EF4-FFF2-40B4-BE49-F238E27FC236}">
+                <a16:creationId xmlns:a16="http://schemas.microsoft.com/office/drawing/2014/main" id="{40770288-6DCB-1CC6-F152-5AAD17F3FC09}"/>
+              </a:ext>
+            </a:extLst>
+          </p:cNvPr>
+          <p:cNvCxnSpPr>
+            <a:cxnSpLocks/>
+          </p:cNvCxnSpPr>
+          <p:nvPr/>
+        </p:nvCxnSpPr>
+        <p:spPr>
+          <a:xfrm>
+            <a:off x="166007" y="6356350"/>
+            <a:ext cx="11859986" cy="0"/>
+          </a:xfrm>
+          <a:prstGeom prst="line">
+            <a:avLst/>
+          </a:prstGeom>
+          <a:ln>
+            <a:solidFill>
+              <a:srgbClr val="905AA6"/>
+            </a:solidFill>
+          </a:ln>
+        </p:spPr>
+        <p:style>
+          <a:lnRef idx="1">
+            <a:schemeClr val="accent1"/>
+          </a:lnRef>
+          <a:fillRef idx="0">
+            <a:schemeClr val="accent1"/>
+          </a:fillRef>
+          <a:effectRef idx="0">
+            <a:schemeClr val="accent1"/>
+          </a:effectRef>
+          <a:fontRef idx="minor">
+            <a:schemeClr val="tx1"/>
+          </a:fontRef>
+        </p:style>
+      </p:cxnSp>
+      <p:sp>
+        <p:nvSpPr>
+          <p:cNvPr id="10" name="Half Frame 9">
+            <a:extLst>
+              <a:ext uri="{FF2B5EF4-FFF2-40B4-BE49-F238E27FC236}">
+                <a16:creationId xmlns:a16="http://schemas.microsoft.com/office/drawing/2014/main" id="{93A8A7A7-BA9D-101C-459A-1CF75ECDC32D}"/>
+              </a:ext>
+            </a:extLst>
+          </p:cNvPr>
+          <p:cNvSpPr>
+            <a:spLocks noChangeAspect="1"/>
+          </p:cNvSpPr>
+          <p:nvPr/>
+        </p:nvSpPr>
+        <p:spPr>
+          <a:xfrm>
+            <a:off x="54000" y="54000"/>
+            <a:ext cx="576000" cy="576000"/>
+          </a:xfrm>
+          <a:prstGeom prst="halfFrame">
+            <a:avLst>
+              <a:gd name="adj1" fmla="val 7127"/>
+              <a:gd name="adj2" fmla="val 8806"/>
+            </a:avLst>
+          </a:prstGeom>
+          <a:solidFill>
+            <a:srgbClr val="905AA6"/>
+          </a:solidFill>
+          <a:ln>
+            <a:noFill/>
+          </a:ln>
+        </p:spPr>
+        <p:style>
+          <a:lnRef idx="2">
+            <a:schemeClr val="accent1">
+              <a:shade val="15000"/>
+            </a:schemeClr>
+          </a:lnRef>
+          <a:fillRef idx="1">
+            <a:schemeClr val="accent1"/>
+          </a:fillRef>
+          <a:effectRef idx="0">
+            <a:schemeClr val="accent1"/>
+          </a:effectRef>
+          <a:fontRef idx="minor">
+            <a:schemeClr val="lt1"/>
+          </a:fontRef>
+        </p:style>
+        <p:txBody>
+          <a:bodyPr rtlCol="0" anchor="ctr"/>
+          <a:lstStyle/>
+          <a:p>
+            <a:pPr algn="ctr"/>
+            <a:endParaRPr lang="en-CA">
+              <a:solidFill>
+                <a:schemeClr val="tx1"/>
+              </a:solidFill>
+            </a:endParaRPr>
+          </a:p>
+        </p:txBody>
+      </p:sp>
+      <p:sp>
+        <p:nvSpPr>
+          <p:cNvPr id="11" name="TextBox 10">
+            <a:extLst>
+              <a:ext uri="{FF2B5EF4-FFF2-40B4-BE49-F238E27FC236}">
+                <a16:creationId xmlns:a16="http://schemas.microsoft.com/office/drawing/2014/main" id="{4B24F357-AAD0-DE56-501D-45D84BDD294A}"/>
+              </a:ext>
+            </a:extLst>
+          </p:cNvPr>
+          <p:cNvSpPr txBox="1"/>
+          <p:nvPr/>
+        </p:nvSpPr>
+        <p:spPr>
+          <a:xfrm>
+            <a:off x="108857" y="114299"/>
+            <a:ext cx="5600700" cy="461665"/>
+          </a:xfrm>
+          <a:prstGeom prst="rect">
+            <a:avLst/>
+          </a:prstGeom>
+          <a:noFill/>
+        </p:spPr>
+        <p:txBody>
+          <a:bodyPr wrap="square" rtlCol="0">
+            <a:spAutoFit/>
+          </a:bodyPr>
+          <a:lstStyle/>
+          <a:p>
+            <a:r>
+              <a:rPr lang="en-US" sz="2400" dirty="0"/>
+              <a:t>Model Tuning – Mean Travel Time</a:t>
+            </a:r>
+            <a:endParaRPr lang="en-CA" sz="2400" dirty="0"/>
+          </a:p>
+        </p:txBody>
+      </p:sp>
+      <p:pic>
+        <p:nvPicPr>
+          <p:cNvPr id="4" name="Picture 3">
+            <a:extLst>
+              <a:ext uri="{FF2B5EF4-FFF2-40B4-BE49-F238E27FC236}">
+                <a16:creationId xmlns:a16="http://schemas.microsoft.com/office/drawing/2014/main" id="{45FED38C-9124-AF29-8FD0-5015C75011B8}"/>
+              </a:ext>
+            </a:extLst>
+          </p:cNvPr>
+          <p:cNvPicPr>
+            <a:picLocks noChangeAspect="1"/>
+          </p:cNvPicPr>
+          <p:nvPr/>
+        </p:nvPicPr>
+        <p:blipFill>
+          <a:blip r:embed="rId3">
+            <a:extLst>
+              <a:ext uri="{28A0092B-C50C-407E-A947-70E740481C1C}">
+                <a14:useLocalDpi xmlns:a14="http://schemas.microsoft.com/office/drawing/2010/main" val="0"/>
+              </a:ext>
+            </a:extLst>
+          </a:blip>
+          <a:srcRect/>
+          <a:stretch/>
+        </p:blipFill>
+        <p:spPr>
+          <a:xfrm>
+            <a:off x="0" y="501649"/>
+            <a:ext cx="3068907" cy="5689462"/>
+          </a:xfrm>
+          <a:prstGeom prst="rect">
+            <a:avLst/>
+          </a:prstGeom>
+        </p:spPr>
+      </p:pic>
+      <p:sp>
+        <p:nvSpPr>
+          <p:cNvPr id="7" name="TextBox 6">
+            <a:extLst>
+              <a:ext uri="{FF2B5EF4-FFF2-40B4-BE49-F238E27FC236}">
+                <a16:creationId xmlns:a16="http://schemas.microsoft.com/office/drawing/2014/main" id="{BB85A621-6C8A-D290-3F4A-D23A71B7D4AC}"/>
+              </a:ext>
+            </a:extLst>
+          </p:cNvPr>
+          <p:cNvSpPr txBox="1"/>
+          <p:nvPr/>
+        </p:nvSpPr>
+        <p:spPr>
+          <a:xfrm>
+            <a:off x="53999" y="6356350"/>
+            <a:ext cx="11711819" cy="461665"/>
+          </a:xfrm>
+          <a:prstGeom prst="rect">
+            <a:avLst/>
+          </a:prstGeom>
+          <a:noFill/>
+        </p:spPr>
+        <p:txBody>
+          <a:bodyPr wrap="square">
+            <a:spAutoFit/>
+          </a:bodyPr>
+          <a:lstStyle/>
+          <a:p>
+            <a:r>
+              <a:rPr lang="en-CA" sz="1200" b="0" i="0" dirty="0">
+                <a:solidFill>
+                  <a:srgbClr val="212121"/>
+                </a:solidFill>
+                <a:effectLst/>
+                <a:latin typeface="BlinkMacSystemFont"/>
+              </a:rPr>
+              <a:t>Shin J, Xing S, McCullum L, </a:t>
+            </a:r>
+            <a:r>
+              <a:rPr lang="en-CA" sz="1200" b="0" i="0" dirty="0" err="1">
+                <a:solidFill>
+                  <a:srgbClr val="212121"/>
+                </a:solidFill>
+                <a:effectLst/>
+                <a:latin typeface="BlinkMacSystemFont"/>
+              </a:rPr>
+              <a:t>Hammi</a:t>
+            </a:r>
+            <a:r>
+              <a:rPr lang="en-CA" sz="1200" b="0" i="0" dirty="0">
+                <a:solidFill>
+                  <a:srgbClr val="212121"/>
+                </a:solidFill>
+                <a:effectLst/>
+                <a:latin typeface="BlinkMacSystemFont"/>
+              </a:rPr>
+              <a:t> A, </a:t>
+            </a:r>
+            <a:r>
+              <a:rPr lang="en-CA" sz="1200" b="0" i="0" dirty="0" err="1">
+                <a:solidFill>
+                  <a:srgbClr val="212121"/>
+                </a:solidFill>
+                <a:effectLst/>
+                <a:latin typeface="BlinkMacSystemFont"/>
+              </a:rPr>
+              <a:t>Pursley</a:t>
+            </a:r>
+            <a:r>
+              <a:rPr lang="en-CA" sz="1200" b="0" i="0" dirty="0">
+                <a:solidFill>
+                  <a:srgbClr val="212121"/>
+                </a:solidFill>
+                <a:effectLst/>
+                <a:latin typeface="BlinkMacSystemFont"/>
+              </a:rPr>
+              <a:t> J, Correa CA, Withrow J, Domal S, </a:t>
+            </a:r>
+            <a:r>
+              <a:rPr lang="en-CA" sz="1200" b="0" i="0" dirty="0" err="1">
+                <a:solidFill>
+                  <a:srgbClr val="212121"/>
+                </a:solidFill>
+                <a:effectLst/>
+                <a:latin typeface="BlinkMacSystemFont"/>
+              </a:rPr>
+              <a:t>Bolch</a:t>
+            </a:r>
+            <a:r>
+              <a:rPr lang="en-CA" sz="1200" b="0" i="0" dirty="0">
+                <a:solidFill>
+                  <a:srgbClr val="212121"/>
+                </a:solidFill>
+                <a:effectLst/>
+                <a:latin typeface="BlinkMacSystemFont"/>
+              </a:rPr>
+              <a:t> W, </a:t>
+            </a:r>
+            <a:r>
+              <a:rPr lang="en-CA" sz="1200" b="0" i="0" dirty="0" err="1">
+                <a:solidFill>
+                  <a:srgbClr val="212121"/>
+                </a:solidFill>
+                <a:effectLst/>
+                <a:latin typeface="BlinkMacSystemFont"/>
+              </a:rPr>
+              <a:t>Paganetti</a:t>
+            </a:r>
+            <a:r>
+              <a:rPr lang="en-CA" sz="1200" b="0" i="0" dirty="0">
+                <a:solidFill>
+                  <a:srgbClr val="212121"/>
+                </a:solidFill>
+                <a:effectLst/>
+                <a:latin typeface="BlinkMacSystemFont"/>
+              </a:rPr>
+              <a:t> H, </a:t>
+            </a:r>
+            <a:r>
+              <a:rPr lang="en-CA" sz="1200" b="0" i="0" dirty="0" err="1">
+                <a:solidFill>
+                  <a:srgbClr val="212121"/>
+                </a:solidFill>
+                <a:effectLst/>
+                <a:latin typeface="BlinkMacSystemFont"/>
+              </a:rPr>
+              <a:t>Grassberger</a:t>
+            </a:r>
+            <a:r>
+              <a:rPr lang="en-CA" sz="1200" b="0" i="0" dirty="0">
+                <a:solidFill>
+                  <a:srgbClr val="212121"/>
+                </a:solidFill>
+                <a:effectLst/>
+                <a:latin typeface="BlinkMacSystemFont"/>
+              </a:rPr>
+              <a:t> C. HEDOS-a computational tool to assess radiation dose to circulating blood cells during external beam radiotherapy based on whole-body blood flow simulations. Phys Med Biol. 2021 Aug 3;66(16)</a:t>
+            </a:r>
+            <a:endParaRPr lang="en-CA" sz="1200" dirty="0">
+              <a:solidFill>
+                <a:srgbClr val="212121"/>
+              </a:solidFill>
+              <a:latin typeface="BlinkMacSystemFont"/>
+            </a:endParaRPr>
+          </a:p>
+        </p:txBody>
+      </p:sp>
+      <p:pic>
+        <p:nvPicPr>
+          <p:cNvPr id="17" name="Graphic 16" descr="Heart organ outline">
+            <a:extLst>
+              <a:ext uri="{FF2B5EF4-FFF2-40B4-BE49-F238E27FC236}">
+                <a16:creationId xmlns:a16="http://schemas.microsoft.com/office/drawing/2014/main" id="{7373F203-7BA8-5E3C-198C-9751FDF1125D}"/>
+              </a:ext>
+            </a:extLst>
+          </p:cNvPr>
+          <p:cNvPicPr>
+            <a:picLocks noChangeAspect="1"/>
+          </p:cNvPicPr>
+          <p:nvPr/>
+        </p:nvPicPr>
+        <p:blipFill>
+          <a:blip r:embed="rId4">
+            <a:extLst>
+              <a:ext uri="{96DAC541-7B7A-43D3-8B79-37D633B846F1}">
+                <asvg:svgBlip xmlns:asvg="http://schemas.microsoft.com/office/drawing/2016/SVG/main" r:embed="rId5"/>
+              </a:ext>
+            </a:extLst>
+          </a:blip>
+          <a:stretch>
+            <a:fillRect/>
+          </a:stretch>
+        </p:blipFill>
+        <p:spPr>
+          <a:xfrm>
+            <a:off x="3638547" y="891255"/>
+            <a:ext cx="1269355" cy="1269355"/>
+          </a:xfrm>
+          <a:prstGeom prst="rect">
+            <a:avLst/>
+          </a:prstGeom>
+        </p:spPr>
+      </p:pic>
+      <p:pic>
+        <p:nvPicPr>
+          <p:cNvPr id="23" name="Graphic 22" descr="Heart organ outline">
+            <a:extLst>
+              <a:ext uri="{FF2B5EF4-FFF2-40B4-BE49-F238E27FC236}">
+                <a16:creationId xmlns:a16="http://schemas.microsoft.com/office/drawing/2014/main" id="{4DFDA764-6CC7-BFD6-7264-CEEACD275081}"/>
+              </a:ext>
+            </a:extLst>
+          </p:cNvPr>
+          <p:cNvPicPr>
+            <a:picLocks noChangeAspect="1"/>
+          </p:cNvPicPr>
+          <p:nvPr/>
+        </p:nvPicPr>
+        <p:blipFill>
+          <a:blip r:embed="rId4">
+            <a:extLst>
+              <a:ext uri="{96DAC541-7B7A-43D3-8B79-37D633B846F1}">
+                <asvg:svgBlip xmlns:asvg="http://schemas.microsoft.com/office/drawing/2016/SVG/main" r:embed="rId5"/>
+              </a:ext>
+            </a:extLst>
+          </a:blip>
+          <a:stretch>
+            <a:fillRect/>
+          </a:stretch>
+        </p:blipFill>
+        <p:spPr>
+          <a:xfrm>
+            <a:off x="8734422" y="888857"/>
+            <a:ext cx="1269355" cy="1269355"/>
+          </a:xfrm>
+          <a:prstGeom prst="rect">
+            <a:avLst/>
+          </a:prstGeom>
+        </p:spPr>
+      </p:pic>
+      <p:cxnSp>
+        <p:nvCxnSpPr>
+          <p:cNvPr id="19" name="Straight Arrow Connector 18">
+            <a:extLst>
+              <a:ext uri="{FF2B5EF4-FFF2-40B4-BE49-F238E27FC236}">
+                <a16:creationId xmlns:a16="http://schemas.microsoft.com/office/drawing/2014/main" id="{ED849E5D-3D5C-9D7C-45EB-EEE977CCD5C3}"/>
+              </a:ext>
+            </a:extLst>
+          </p:cNvPr>
+          <p:cNvCxnSpPr>
+            <a:cxnSpLocks/>
+          </p:cNvCxnSpPr>
+          <p:nvPr/>
+        </p:nvCxnSpPr>
+        <p:spPr>
+          <a:xfrm>
+            <a:off x="4076696" y="1676400"/>
+            <a:ext cx="5133979" cy="0"/>
+          </a:xfrm>
+          <a:prstGeom prst="straightConnector1">
+            <a:avLst/>
+          </a:prstGeom>
+          <a:ln w="57150" cap="rnd">
+            <a:solidFill>
+              <a:srgbClr val="0DBFD5"/>
+            </a:solidFill>
+            <a:tailEnd type="triangle"/>
+          </a:ln>
+        </p:spPr>
+        <p:style>
+          <a:lnRef idx="2">
+            <a:schemeClr val="accent1"/>
+          </a:lnRef>
+          <a:fillRef idx="0">
+            <a:schemeClr val="accent1"/>
+          </a:fillRef>
+          <a:effectRef idx="1">
+            <a:schemeClr val="accent1"/>
+          </a:effectRef>
+          <a:fontRef idx="minor">
+            <a:schemeClr val="tx1"/>
+          </a:fontRef>
+        </p:style>
+      </p:cxnSp>
+    </p:spTree>
+    <p:extLst>
+      <p:ext uri="{BB962C8B-B14F-4D97-AF65-F5344CB8AC3E}">
+        <p14:creationId xmlns:p14="http://schemas.microsoft.com/office/powerpoint/2010/main" val="4210689026"/>
+      </p:ext>
+    </p:extLst>
+  </p:cSld>
+  <p:clrMapOvr>
+    <a:masterClrMapping/>
+  </p:clrMapOvr>
+</p:sld>
+</file>
+
+<file path=ppt/slides/slide18.xml><?xml version="1.0" encoding="utf-8"?>
+<p:sld xmlns:a="http://schemas.openxmlformats.org/drawingml/2006/main" xmlns:r="http://schemas.openxmlformats.org/officeDocument/2006/relationships" xmlns:p="http://schemas.openxmlformats.org/presentationml/2006/main">
+  <p:cSld>
+    <p:spTree>
+      <p:nvGrpSpPr>
+        <p:cNvPr id="1" name="">
+          <a:extLst>
+            <a:ext uri="{FF2B5EF4-FFF2-40B4-BE49-F238E27FC236}">
+              <a16:creationId xmlns:a16="http://schemas.microsoft.com/office/drawing/2014/main" id="{ED9C4F43-C940-5B4C-2C98-0C009FFE940F}"/>
+            </a:ext>
+          </a:extLst>
+        </p:cNvPr>
+        <p:cNvGrpSpPr/>
+        <p:nvPr/>
+      </p:nvGrpSpPr>
+      <p:grpSpPr>
+        <a:xfrm>
+          <a:off x="0" y="0"/>
+          <a:ext cx="0" cy="0"/>
+          <a:chOff x="0" y="0"/>
+          <a:chExt cx="0" cy="0"/>
+        </a:xfrm>
+      </p:grpSpPr>
+      <p:sp>
+        <p:nvSpPr>
+          <p:cNvPr id="15" name="Rectangle 14">
+            <a:extLst>
+              <a:ext uri="{FF2B5EF4-FFF2-40B4-BE49-F238E27FC236}">
+                <a16:creationId xmlns:a16="http://schemas.microsoft.com/office/drawing/2014/main" id="{AF1F8515-29C6-A4F1-9103-183C1FA74CCE}"/>
+              </a:ext>
+            </a:extLst>
+          </p:cNvPr>
+          <p:cNvSpPr/>
+          <p:nvPr/>
+        </p:nvSpPr>
+        <p:spPr>
+          <a:xfrm>
+            <a:off x="3638545" y="2877450"/>
+            <a:ext cx="7239001" cy="2627044"/>
+          </a:xfrm>
+          <a:prstGeom prst="rect">
+            <a:avLst/>
+          </a:prstGeom>
+          <a:solidFill>
+            <a:srgbClr val="E3D6E9">
+              <a:alpha val="55000"/>
+            </a:srgbClr>
+          </a:solidFill>
+          <a:ln w="76200">
+            <a:noFill/>
+            <a:prstDash val="sysDash"/>
+          </a:ln>
+        </p:spPr>
+        <p:style>
+          <a:lnRef idx="2">
+            <a:schemeClr val="accent1">
+              <a:shade val="15000"/>
+            </a:schemeClr>
+          </a:lnRef>
+          <a:fillRef idx="1">
+            <a:schemeClr val="accent1"/>
+          </a:fillRef>
+          <a:effectRef idx="0">
+            <a:schemeClr val="accent1"/>
+          </a:effectRef>
+          <a:fontRef idx="minor">
+            <a:schemeClr val="lt1"/>
+          </a:fontRef>
+        </p:style>
+        <p:txBody>
+          <a:bodyPr rtlCol="0" anchor="ctr"/>
+          <a:lstStyle/>
+          <a:p>
+            <a:pPr algn="ctr"/>
+            <a:endParaRPr lang="en-CA"/>
+          </a:p>
+        </p:txBody>
+      </p:sp>
+      <p:sp>
+        <p:nvSpPr>
+          <p:cNvPr id="6" name="Slide Number Placeholder 5">
+            <a:extLst>
+              <a:ext uri="{FF2B5EF4-FFF2-40B4-BE49-F238E27FC236}">
+                <a16:creationId xmlns:a16="http://schemas.microsoft.com/office/drawing/2014/main" id="{4B5043D3-3984-403D-E672-FEBAFB7FFEF8}"/>
+              </a:ext>
+            </a:extLst>
+          </p:cNvPr>
+          <p:cNvSpPr>
+            <a:spLocks noGrp="1"/>
+          </p:cNvSpPr>
+          <p:nvPr>
+            <p:ph type="sldNum" sz="quarter" idx="12"/>
+          </p:nvPr>
+        </p:nvSpPr>
+        <p:spPr>
+          <a:xfrm>
+            <a:off x="9282793" y="6420757"/>
+            <a:ext cx="2743200" cy="365125"/>
+          </a:xfrm>
+        </p:spPr>
+        <p:txBody>
+          <a:bodyPr/>
+          <a:lstStyle/>
+          <a:p>
+            <a:fld id="{1E5564C7-97C0-40C1-9717-452594735347}" type="slidenum">
+              <a:rPr lang="en-CA" smtClean="0"/>
+              <a:t>18</a:t>
+            </a:fld>
+            <a:endParaRPr lang="en-CA" dirty="0"/>
+          </a:p>
+        </p:txBody>
+      </p:sp>
+      <p:cxnSp>
+        <p:nvCxnSpPr>
+          <p:cNvPr id="8" name="Straight Connector 7">
+            <a:extLst>
+              <a:ext uri="{FF2B5EF4-FFF2-40B4-BE49-F238E27FC236}">
+                <a16:creationId xmlns:a16="http://schemas.microsoft.com/office/drawing/2014/main" id="{40770288-6DCB-1CC6-F152-5AAD17F3FC09}"/>
+              </a:ext>
+            </a:extLst>
+          </p:cNvPr>
+          <p:cNvCxnSpPr>
+            <a:cxnSpLocks/>
+          </p:cNvCxnSpPr>
+          <p:nvPr/>
+        </p:nvCxnSpPr>
+        <p:spPr>
+          <a:xfrm>
+            <a:off x="166007" y="6356350"/>
+            <a:ext cx="11859986" cy="0"/>
+          </a:xfrm>
+          <a:prstGeom prst="line">
+            <a:avLst/>
+          </a:prstGeom>
+          <a:ln>
+            <a:solidFill>
+              <a:srgbClr val="905AA6"/>
+            </a:solidFill>
+          </a:ln>
+        </p:spPr>
+        <p:style>
+          <a:lnRef idx="1">
+            <a:schemeClr val="accent1"/>
+          </a:lnRef>
+          <a:fillRef idx="0">
+            <a:schemeClr val="accent1"/>
+          </a:fillRef>
+          <a:effectRef idx="0">
+            <a:schemeClr val="accent1"/>
+          </a:effectRef>
+          <a:fontRef idx="minor">
+            <a:schemeClr val="tx1"/>
+          </a:fontRef>
+        </p:style>
+      </p:cxnSp>
+      <p:sp>
+        <p:nvSpPr>
+          <p:cNvPr id="10" name="Half Frame 9">
+            <a:extLst>
+              <a:ext uri="{FF2B5EF4-FFF2-40B4-BE49-F238E27FC236}">
+                <a16:creationId xmlns:a16="http://schemas.microsoft.com/office/drawing/2014/main" id="{93A8A7A7-BA9D-101C-459A-1CF75ECDC32D}"/>
+              </a:ext>
+            </a:extLst>
+          </p:cNvPr>
+          <p:cNvSpPr>
+            <a:spLocks noChangeAspect="1"/>
+          </p:cNvSpPr>
+          <p:nvPr/>
+        </p:nvSpPr>
+        <p:spPr>
+          <a:xfrm>
+            <a:off x="54000" y="54000"/>
+            <a:ext cx="576000" cy="576000"/>
+          </a:xfrm>
+          <a:prstGeom prst="halfFrame">
+            <a:avLst>
+              <a:gd name="adj1" fmla="val 7127"/>
+              <a:gd name="adj2" fmla="val 8806"/>
+            </a:avLst>
+          </a:prstGeom>
+          <a:solidFill>
+            <a:srgbClr val="905AA6"/>
+          </a:solidFill>
+          <a:ln>
+            <a:noFill/>
+          </a:ln>
+        </p:spPr>
+        <p:style>
+          <a:lnRef idx="2">
+            <a:schemeClr val="accent1">
+              <a:shade val="15000"/>
+            </a:schemeClr>
+          </a:lnRef>
+          <a:fillRef idx="1">
+            <a:schemeClr val="accent1"/>
+          </a:fillRef>
+          <a:effectRef idx="0">
+            <a:schemeClr val="accent1"/>
+          </a:effectRef>
+          <a:fontRef idx="minor">
+            <a:schemeClr val="lt1"/>
+          </a:fontRef>
+        </p:style>
+        <p:txBody>
+          <a:bodyPr rtlCol="0" anchor="ctr"/>
+          <a:lstStyle/>
+          <a:p>
+            <a:pPr algn="ctr"/>
+            <a:endParaRPr lang="en-CA">
+              <a:solidFill>
+                <a:schemeClr val="tx1"/>
+              </a:solidFill>
+            </a:endParaRPr>
+          </a:p>
+        </p:txBody>
+      </p:sp>
+      <p:sp>
+        <p:nvSpPr>
+          <p:cNvPr id="11" name="TextBox 10">
+            <a:extLst>
+              <a:ext uri="{FF2B5EF4-FFF2-40B4-BE49-F238E27FC236}">
+                <a16:creationId xmlns:a16="http://schemas.microsoft.com/office/drawing/2014/main" id="{4B24F357-AAD0-DE56-501D-45D84BDD294A}"/>
+              </a:ext>
+            </a:extLst>
+          </p:cNvPr>
+          <p:cNvSpPr txBox="1"/>
+          <p:nvPr/>
+        </p:nvSpPr>
+        <p:spPr>
+          <a:xfrm>
+            <a:off x="108857" y="114299"/>
+            <a:ext cx="5600700" cy="461665"/>
+          </a:xfrm>
+          <a:prstGeom prst="rect">
+            <a:avLst/>
+          </a:prstGeom>
+          <a:noFill/>
+        </p:spPr>
+        <p:txBody>
+          <a:bodyPr wrap="square" rtlCol="0">
+            <a:spAutoFit/>
+          </a:bodyPr>
+          <a:lstStyle/>
+          <a:p>
+            <a:r>
+              <a:rPr lang="en-US" sz="2400" dirty="0"/>
+              <a:t>Model Tuning – Mean Travel Time</a:t>
+            </a:r>
+            <a:endParaRPr lang="en-CA" sz="2400" dirty="0"/>
+          </a:p>
+        </p:txBody>
+      </p:sp>
+      <p:pic>
+        <p:nvPicPr>
+          <p:cNvPr id="4" name="Picture 3">
+            <a:extLst>
+              <a:ext uri="{FF2B5EF4-FFF2-40B4-BE49-F238E27FC236}">
+                <a16:creationId xmlns:a16="http://schemas.microsoft.com/office/drawing/2014/main" id="{45FED38C-9124-AF29-8FD0-5015C75011B8}"/>
+              </a:ext>
+            </a:extLst>
+          </p:cNvPr>
+          <p:cNvPicPr>
+            <a:picLocks noChangeAspect="1"/>
+          </p:cNvPicPr>
+          <p:nvPr/>
+        </p:nvPicPr>
+        <p:blipFill>
+          <a:blip r:embed="rId3">
+            <a:extLst>
+              <a:ext uri="{28A0092B-C50C-407E-A947-70E740481C1C}">
+                <a14:useLocalDpi xmlns:a14="http://schemas.microsoft.com/office/drawing/2010/main" val="0"/>
+              </a:ext>
+            </a:extLst>
+          </a:blip>
+          <a:srcRect/>
+          <a:stretch/>
+        </p:blipFill>
+        <p:spPr>
+          <a:xfrm>
+            <a:off x="0" y="501649"/>
+            <a:ext cx="3068907" cy="5689462"/>
+          </a:xfrm>
+          <a:prstGeom prst="rect">
+            <a:avLst/>
+          </a:prstGeom>
+        </p:spPr>
+      </p:pic>
+      <p:sp>
+        <p:nvSpPr>
+          <p:cNvPr id="7" name="TextBox 6">
+            <a:extLst>
+              <a:ext uri="{FF2B5EF4-FFF2-40B4-BE49-F238E27FC236}">
+                <a16:creationId xmlns:a16="http://schemas.microsoft.com/office/drawing/2014/main" id="{BB85A621-6C8A-D290-3F4A-D23A71B7D4AC}"/>
+              </a:ext>
+            </a:extLst>
+          </p:cNvPr>
+          <p:cNvSpPr txBox="1"/>
+          <p:nvPr/>
+        </p:nvSpPr>
+        <p:spPr>
+          <a:xfrm>
+            <a:off x="53999" y="6356350"/>
+            <a:ext cx="11711819" cy="461665"/>
+          </a:xfrm>
+          <a:prstGeom prst="rect">
+            <a:avLst/>
+          </a:prstGeom>
+          <a:noFill/>
+        </p:spPr>
+        <p:txBody>
+          <a:bodyPr wrap="square">
+            <a:spAutoFit/>
+          </a:bodyPr>
+          <a:lstStyle/>
+          <a:p>
+            <a:r>
+              <a:rPr lang="en-CA" sz="1200" b="0" i="0" dirty="0">
+                <a:solidFill>
+                  <a:srgbClr val="212121"/>
+                </a:solidFill>
+                <a:effectLst/>
+                <a:latin typeface="BlinkMacSystemFont"/>
+              </a:rPr>
+              <a:t>Shin J, Xing S, McCullum L, </a:t>
+            </a:r>
+            <a:r>
+              <a:rPr lang="en-CA" sz="1200" b="0" i="0" dirty="0" err="1">
+                <a:solidFill>
+                  <a:srgbClr val="212121"/>
+                </a:solidFill>
+                <a:effectLst/>
+                <a:latin typeface="BlinkMacSystemFont"/>
+              </a:rPr>
+              <a:t>Hammi</a:t>
+            </a:r>
+            <a:r>
+              <a:rPr lang="en-CA" sz="1200" b="0" i="0" dirty="0">
+                <a:solidFill>
+                  <a:srgbClr val="212121"/>
+                </a:solidFill>
+                <a:effectLst/>
+                <a:latin typeface="BlinkMacSystemFont"/>
+              </a:rPr>
+              <a:t> A, </a:t>
+            </a:r>
+            <a:r>
+              <a:rPr lang="en-CA" sz="1200" b="0" i="0" dirty="0" err="1">
+                <a:solidFill>
+                  <a:srgbClr val="212121"/>
+                </a:solidFill>
+                <a:effectLst/>
+                <a:latin typeface="BlinkMacSystemFont"/>
+              </a:rPr>
+              <a:t>Pursley</a:t>
+            </a:r>
+            <a:r>
+              <a:rPr lang="en-CA" sz="1200" b="0" i="0" dirty="0">
+                <a:solidFill>
+                  <a:srgbClr val="212121"/>
+                </a:solidFill>
+                <a:effectLst/>
+                <a:latin typeface="BlinkMacSystemFont"/>
+              </a:rPr>
+              <a:t> J, Correa CA, Withrow J, Domal S, </a:t>
+            </a:r>
+            <a:r>
+              <a:rPr lang="en-CA" sz="1200" b="0" i="0" dirty="0" err="1">
+                <a:solidFill>
+                  <a:srgbClr val="212121"/>
+                </a:solidFill>
+                <a:effectLst/>
+                <a:latin typeface="BlinkMacSystemFont"/>
+              </a:rPr>
+              <a:t>Bolch</a:t>
+            </a:r>
+            <a:r>
+              <a:rPr lang="en-CA" sz="1200" b="0" i="0" dirty="0">
+                <a:solidFill>
+                  <a:srgbClr val="212121"/>
+                </a:solidFill>
+                <a:effectLst/>
+                <a:latin typeface="BlinkMacSystemFont"/>
+              </a:rPr>
+              <a:t> W, </a:t>
+            </a:r>
+            <a:r>
+              <a:rPr lang="en-CA" sz="1200" b="0" i="0" dirty="0" err="1">
+                <a:solidFill>
+                  <a:srgbClr val="212121"/>
+                </a:solidFill>
+                <a:effectLst/>
+                <a:latin typeface="BlinkMacSystemFont"/>
+              </a:rPr>
+              <a:t>Paganetti</a:t>
+            </a:r>
+            <a:r>
+              <a:rPr lang="en-CA" sz="1200" b="0" i="0" dirty="0">
+                <a:solidFill>
+                  <a:srgbClr val="212121"/>
+                </a:solidFill>
+                <a:effectLst/>
+                <a:latin typeface="BlinkMacSystemFont"/>
+              </a:rPr>
+              <a:t> H, </a:t>
+            </a:r>
+            <a:r>
+              <a:rPr lang="en-CA" sz="1200" b="0" i="0" dirty="0" err="1">
+                <a:solidFill>
+                  <a:srgbClr val="212121"/>
+                </a:solidFill>
+                <a:effectLst/>
+                <a:latin typeface="BlinkMacSystemFont"/>
+              </a:rPr>
+              <a:t>Grassberger</a:t>
+            </a:r>
+            <a:r>
+              <a:rPr lang="en-CA" sz="1200" b="0" i="0" dirty="0">
+                <a:solidFill>
+                  <a:srgbClr val="212121"/>
+                </a:solidFill>
+                <a:effectLst/>
+                <a:latin typeface="BlinkMacSystemFont"/>
+              </a:rPr>
+              <a:t> C. HEDOS-a computational tool to assess radiation dose to circulating blood cells during external beam radiotherapy based on whole-body blood flow simulations. Phys Med Biol. 2021 Aug 3;66(16)</a:t>
+            </a:r>
+            <a:endParaRPr lang="en-CA" sz="1200" dirty="0">
+              <a:solidFill>
+                <a:srgbClr val="212121"/>
+              </a:solidFill>
+              <a:latin typeface="BlinkMacSystemFont"/>
+            </a:endParaRPr>
+          </a:p>
+        </p:txBody>
+      </p:sp>
+      <mc:AlternateContent xmlns:mc="http://schemas.openxmlformats.org/markup-compatibility/2006">
+        <mc:Choice xmlns:a14="http://schemas.microsoft.com/office/drawing/2010/main" Requires="a14">
+          <p:sp>
+            <p:nvSpPr>
+              <p:cNvPr id="9" name="TextBox 8">
+                <a:extLst>
+                  <a:ext uri="{FF2B5EF4-FFF2-40B4-BE49-F238E27FC236}">
+                    <a16:creationId xmlns:a16="http://schemas.microsoft.com/office/drawing/2014/main" id="{D973A899-7053-5E3B-2584-C086AD02F458}"/>
+                  </a:ext>
+                </a:extLst>
+              </p:cNvPr>
+              <p:cNvSpPr txBox="1"/>
+              <p:nvPr/>
+            </p:nvSpPr>
+            <p:spPr>
+              <a:xfrm>
+                <a:off x="3638544" y="3346380"/>
+                <a:ext cx="7239001" cy="1569660"/>
+              </a:xfrm>
+              <a:prstGeom prst="rect">
+                <a:avLst/>
+              </a:prstGeom>
+              <a:noFill/>
+            </p:spPr>
+            <p:txBody>
+              <a:bodyPr wrap="square" rtlCol="0">
+                <a:spAutoFit/>
+              </a:bodyPr>
+              <a:lstStyle/>
+              <a:p>
+                <a:r>
+                  <a:rPr lang="en-US" sz="2400" dirty="0"/>
+                  <a:t>Mean Travel Time (MTT) = </a:t>
+                </a:r>
+                <a:r>
+                  <a:rPr lang="en-US" sz="3200" dirty="0"/>
+                  <a:t>39.11 </a:t>
+                </a:r>
+                <a14:m>
+                  <m:oMath xmlns:m="http://schemas.openxmlformats.org/officeDocument/2006/math">
+                    <m:r>
+                      <a:rPr lang="en-US" sz="3200" i="1" smtClean="0">
+                        <a:latin typeface="Cambria Math" panose="02040503050406030204" pitchFamily="18" charset="0"/>
+                        <a:ea typeface="Cambria Math" panose="02040503050406030204" pitchFamily="18" charset="0"/>
+                      </a:rPr>
+                      <m:t>±</m:t>
+                    </m:r>
+                    <m:r>
+                      <a:rPr lang="en-US" sz="3200" b="0" i="1" smtClean="0">
+                        <a:latin typeface="Cambria Math" panose="02040503050406030204" pitchFamily="18" charset="0"/>
+                        <a:ea typeface="Cambria Math" panose="02040503050406030204" pitchFamily="18" charset="0"/>
+                      </a:rPr>
+                      <m:t> </m:t>
+                    </m:r>
+                  </m:oMath>
+                </a14:m>
+                <a:r>
+                  <a:rPr lang="en-CA" sz="3200" dirty="0"/>
+                  <a:t>15.62 sec</a:t>
+                </a:r>
+              </a:p>
+              <a:p>
+                <a:endParaRPr lang="en-CA" sz="3200" dirty="0"/>
+              </a:p>
+              <a:p>
+                <a:r>
+                  <a:rPr lang="en-CA" sz="2400" dirty="0"/>
+                  <a:t>HEDOS-a MTT = </a:t>
+                </a:r>
+                <a:r>
+                  <a:rPr lang="en-CA" sz="3200" dirty="0"/>
+                  <a:t>44 sec</a:t>
+                </a:r>
+                <a:endParaRPr lang="en-CA" sz="2400" dirty="0"/>
+              </a:p>
+            </p:txBody>
+          </p:sp>
+        </mc:Choice>
+        <mc:Fallback>
+          <p:sp>
+            <p:nvSpPr>
+              <p:cNvPr id="9" name="TextBox 8">
+                <a:extLst>
+                  <a:ext uri="{FF2B5EF4-FFF2-40B4-BE49-F238E27FC236}">
+                    <a16:creationId xmlns:a16="http://schemas.microsoft.com/office/drawing/2014/main" id="{D973A899-7053-5E3B-2584-C086AD02F458}"/>
+                  </a:ext>
+                </a:extLst>
+              </p:cNvPr>
+              <p:cNvSpPr txBox="1">
+                <a:spLocks noRot="1" noChangeAspect="1" noMove="1" noResize="1" noEditPoints="1" noAdjustHandles="1" noChangeArrowheads="1" noChangeShapeType="1" noTextEdit="1"/>
+              </p:cNvSpPr>
+              <p:nvPr/>
+            </p:nvSpPr>
+            <p:spPr>
+              <a:xfrm>
+                <a:off x="3638544" y="3346380"/>
+                <a:ext cx="7239001" cy="1569660"/>
+              </a:xfrm>
+              <a:prstGeom prst="rect">
+                <a:avLst/>
+              </a:prstGeom>
+              <a:blipFill>
+                <a:blip r:embed="rId4"/>
+                <a:stretch>
+                  <a:fillRect l="-1348" t="-4669" b="-12451"/>
+                </a:stretch>
+              </a:blipFill>
+            </p:spPr>
+            <p:txBody>
+              <a:bodyPr/>
+              <a:lstStyle/>
+              <a:p>
+                <a:r>
+                  <a:rPr lang="en-CA">
+                    <a:noFill/>
+                  </a:rPr>
+                  <a:t> </a:t>
+                </a:r>
+              </a:p>
+            </p:txBody>
+          </p:sp>
+        </mc:Fallback>
+      </mc:AlternateContent>
+      <p:pic>
+        <p:nvPicPr>
+          <p:cNvPr id="17" name="Graphic 16" descr="Heart organ outline">
+            <a:extLst>
+              <a:ext uri="{FF2B5EF4-FFF2-40B4-BE49-F238E27FC236}">
+                <a16:creationId xmlns:a16="http://schemas.microsoft.com/office/drawing/2014/main" id="{7373F203-7BA8-5E3C-198C-9751FDF1125D}"/>
+              </a:ext>
+            </a:extLst>
+          </p:cNvPr>
+          <p:cNvPicPr>
+            <a:picLocks noChangeAspect="1"/>
+          </p:cNvPicPr>
+          <p:nvPr/>
+        </p:nvPicPr>
+        <p:blipFill>
+          <a:blip r:embed="rId5">
+            <a:extLst>
+              <a:ext uri="{96DAC541-7B7A-43D3-8B79-37D633B846F1}">
+                <asvg:svgBlip xmlns:asvg="http://schemas.microsoft.com/office/drawing/2016/SVG/main" r:embed="rId6"/>
+              </a:ext>
+            </a:extLst>
+          </a:blip>
+          <a:stretch>
+            <a:fillRect/>
+          </a:stretch>
+        </p:blipFill>
+        <p:spPr>
+          <a:xfrm>
+            <a:off x="3638547" y="891255"/>
+            <a:ext cx="1269355" cy="1269355"/>
+          </a:xfrm>
+          <a:prstGeom prst="rect">
+            <a:avLst/>
+          </a:prstGeom>
+        </p:spPr>
+      </p:pic>
+      <p:pic>
+        <p:nvPicPr>
+          <p:cNvPr id="23" name="Graphic 22" descr="Heart organ outline">
+            <a:extLst>
+              <a:ext uri="{FF2B5EF4-FFF2-40B4-BE49-F238E27FC236}">
+                <a16:creationId xmlns:a16="http://schemas.microsoft.com/office/drawing/2014/main" id="{4DFDA764-6CC7-BFD6-7264-CEEACD275081}"/>
+              </a:ext>
+            </a:extLst>
+          </p:cNvPr>
+          <p:cNvPicPr>
+            <a:picLocks noChangeAspect="1"/>
+          </p:cNvPicPr>
+          <p:nvPr/>
+        </p:nvPicPr>
+        <p:blipFill>
+          <a:blip r:embed="rId5">
+            <a:extLst>
+              <a:ext uri="{96DAC541-7B7A-43D3-8B79-37D633B846F1}">
+                <asvg:svgBlip xmlns:asvg="http://schemas.microsoft.com/office/drawing/2016/SVG/main" r:embed="rId6"/>
+              </a:ext>
+            </a:extLst>
+          </a:blip>
+          <a:stretch>
+            <a:fillRect/>
+          </a:stretch>
+        </p:blipFill>
+        <p:spPr>
+          <a:xfrm>
+            <a:off x="8734422" y="888857"/>
+            <a:ext cx="1269355" cy="1269355"/>
+          </a:xfrm>
+          <a:prstGeom prst="rect">
+            <a:avLst/>
+          </a:prstGeom>
+        </p:spPr>
+      </p:pic>
+      <p:cxnSp>
+        <p:nvCxnSpPr>
+          <p:cNvPr id="19" name="Straight Arrow Connector 18">
+            <a:extLst>
+              <a:ext uri="{FF2B5EF4-FFF2-40B4-BE49-F238E27FC236}">
+                <a16:creationId xmlns:a16="http://schemas.microsoft.com/office/drawing/2014/main" id="{ED849E5D-3D5C-9D7C-45EB-EEE977CCD5C3}"/>
+              </a:ext>
+            </a:extLst>
+          </p:cNvPr>
+          <p:cNvCxnSpPr>
+            <a:cxnSpLocks/>
+          </p:cNvCxnSpPr>
+          <p:nvPr/>
+        </p:nvCxnSpPr>
+        <p:spPr>
+          <a:xfrm>
+            <a:off x="4076696" y="1676400"/>
+            <a:ext cx="5133979" cy="0"/>
+          </a:xfrm>
+          <a:prstGeom prst="straightConnector1">
+            <a:avLst/>
+          </a:prstGeom>
+          <a:ln w="57150" cap="rnd">
+            <a:solidFill>
+              <a:srgbClr val="0DBFD5"/>
+            </a:solidFill>
+            <a:tailEnd type="triangle"/>
+          </a:ln>
+        </p:spPr>
+        <p:style>
+          <a:lnRef idx="2">
+            <a:schemeClr val="accent1"/>
+          </a:lnRef>
+          <a:fillRef idx="0">
+            <a:schemeClr val="accent1"/>
+          </a:fillRef>
+          <a:effectRef idx="1">
+            <a:schemeClr val="accent1"/>
+          </a:effectRef>
+          <a:fontRef idx="minor">
+            <a:schemeClr val="tx1"/>
+          </a:fontRef>
+        </p:style>
+      </p:cxnSp>
+    </p:spTree>
+    <p:extLst>
+      <p:ext uri="{BB962C8B-B14F-4D97-AF65-F5344CB8AC3E}">
+        <p14:creationId xmlns:p14="http://schemas.microsoft.com/office/powerpoint/2010/main" val="188825368"/>
+      </p:ext>
+    </p:extLst>
+  </p:cSld>
+  <p:clrMapOvr>
+    <a:masterClrMapping/>
+  </p:clrMapOvr>
+</p:sld>
+</file>
+
+<file path=ppt/slides/slide19.xml><?xml version="1.0" encoding="utf-8"?>
+<p:sld xmlns:a="http://schemas.openxmlformats.org/drawingml/2006/main" xmlns:r="http://schemas.openxmlformats.org/officeDocument/2006/relationships" xmlns:p="http://schemas.openxmlformats.org/presentationml/2006/main">
+  <p:cSld>
+    <p:spTree>
+      <p:nvGrpSpPr>
+        <p:cNvPr id="1" name=""/>
+        <p:cNvGrpSpPr/>
+        <p:nvPr/>
+      </p:nvGrpSpPr>
+      <p:grpSpPr>
+        <a:xfrm>
+          <a:off x="0" y="0"/>
+          <a:ext cx="0" cy="0"/>
+          <a:chOff x="0" y="0"/>
+          <a:chExt cx="0" cy="0"/>
+        </a:xfrm>
+      </p:grpSpPr>
+      <p:sp>
+        <p:nvSpPr>
+          <p:cNvPr id="6" name="Slide Number Placeholder 5">
+            <a:extLst>
+              <a:ext uri="{FF2B5EF4-FFF2-40B4-BE49-F238E27FC236}">
+                <a16:creationId xmlns:a16="http://schemas.microsoft.com/office/drawing/2014/main" id="{74FB7EC2-71BA-402D-7669-A778C3CC61F4}"/>
+              </a:ext>
+            </a:extLst>
+          </p:cNvPr>
+          <p:cNvSpPr>
+            <a:spLocks noGrp="1"/>
+          </p:cNvSpPr>
+          <p:nvPr>
+            <p:ph type="sldNum" sz="quarter" idx="12"/>
+          </p:nvPr>
+        </p:nvSpPr>
+        <p:spPr>
+          <a:xfrm>
+            <a:off x="9282793" y="6420757"/>
+            <a:ext cx="2743200" cy="365125"/>
+          </a:xfrm>
+        </p:spPr>
+        <p:txBody>
+          <a:bodyPr/>
+          <a:lstStyle/>
+          <a:p>
+            <a:fld id="{1E5564C7-97C0-40C1-9717-452594735347}" type="slidenum">
+              <a:rPr lang="en-CA" smtClean="0"/>
+              <a:t>19</a:t>
             </a:fld>
             <a:endParaRPr lang="en-CA" dirty="0"/>
           </a:p>
@@ -19966,7 +21789,7 @@
         <p:spPr>
           <a:xfrm>
             <a:off x="166007" y="914400"/>
-            <a:ext cx="5539849" cy="2308324"/>
+            <a:ext cx="5539849" cy="1569660"/>
           </a:xfrm>
           <a:prstGeom prst="rect">
             <a:avLst/>
@@ -19980,26 +21803,6 @@
             <a:spAutoFit/>
           </a:bodyPr>
           <a:lstStyle/>
-          <a:p>
-            <a:pPr marL="285750" indent="-285750">
-              <a:buFont typeface="Arial" panose="020B0604020202020204" pitchFamily="34" charset="0"/>
-              <a:buChar char="•"/>
-            </a:pPr>
-            <a:r>
-              <a:rPr lang="en-CA" sz="2400" dirty="0"/>
-              <a:t>Determine average travel time</a:t>
-            </a:r>
-          </a:p>
-          <a:p>
-            <a:pPr marL="742950" lvl="1" indent="-285750">
-              <a:buFont typeface="Arial" panose="020B0604020202020204" pitchFamily="34" charset="0"/>
-              <a:buChar char="•"/>
-            </a:pPr>
-            <a:r>
-              <a:rPr lang="en-CA" sz="2400" dirty="0"/>
-              <a:t>Further tuning? </a:t>
-            </a:r>
-          </a:p>
           <a:p>
             <a:pPr marL="285750" indent="-285750">
               <a:buFont typeface="Arial" panose="020B0604020202020204" pitchFamily="34" charset="0"/>
@@ -20102,7 +21905,7 @@
 </p:sld>
 </file>
 
-<file path=ppt/slides/slide18.xml><?xml version="1.0" encoding="utf-8"?>
+<file path=ppt/slides/slide2.xml><?xml version="1.0" encoding="utf-8"?>
 <p:sld xmlns:a="http://schemas.openxmlformats.org/drawingml/2006/main" xmlns:r="http://schemas.openxmlformats.org/officeDocument/2006/relationships" xmlns:p="http://schemas.openxmlformats.org/presentationml/2006/main">
   <p:cSld>
     <p:spTree>
@@ -20147,7 +21950,597 @@
           <a:p>
             <a:fld id="{1E5564C7-97C0-40C1-9717-452594735347}" type="slidenum">
               <a:rPr lang="en-CA" smtClean="0"/>
-              <a:t>18</a:t>
+              <a:t>2</a:t>
+            </a:fld>
+            <a:endParaRPr lang="en-CA" dirty="0"/>
+          </a:p>
+        </p:txBody>
+      </p:sp>
+      <p:cxnSp>
+        <p:nvCxnSpPr>
+          <p:cNvPr id="8" name="Straight Connector 7">
+            <a:extLst>
+              <a:ext uri="{FF2B5EF4-FFF2-40B4-BE49-F238E27FC236}">
+                <a16:creationId xmlns:a16="http://schemas.microsoft.com/office/drawing/2014/main" id="{FF39A71E-9C68-0132-D8FD-8A9DB6E41BDE}"/>
+              </a:ext>
+            </a:extLst>
+          </p:cNvPr>
+          <p:cNvCxnSpPr>
+            <a:cxnSpLocks/>
+          </p:cNvCxnSpPr>
+          <p:nvPr/>
+        </p:nvCxnSpPr>
+        <p:spPr>
+          <a:xfrm>
+            <a:off x="166007" y="6356350"/>
+            <a:ext cx="11859986" cy="0"/>
+          </a:xfrm>
+          <a:prstGeom prst="line">
+            <a:avLst/>
+          </a:prstGeom>
+          <a:ln>
+            <a:solidFill>
+              <a:srgbClr val="905AA6"/>
+            </a:solidFill>
+          </a:ln>
+        </p:spPr>
+        <p:style>
+          <a:lnRef idx="1">
+            <a:schemeClr val="accent1"/>
+          </a:lnRef>
+          <a:fillRef idx="0">
+            <a:schemeClr val="accent1"/>
+          </a:fillRef>
+          <a:effectRef idx="0">
+            <a:schemeClr val="accent1"/>
+          </a:effectRef>
+          <a:fontRef idx="minor">
+            <a:schemeClr val="tx1"/>
+          </a:fontRef>
+        </p:style>
+      </p:cxnSp>
+      <p:sp>
+        <p:nvSpPr>
+          <p:cNvPr id="10" name="Half Frame 9">
+            <a:extLst>
+              <a:ext uri="{FF2B5EF4-FFF2-40B4-BE49-F238E27FC236}">
+                <a16:creationId xmlns:a16="http://schemas.microsoft.com/office/drawing/2014/main" id="{BBE0D6D3-13F9-2B97-D1DB-5C47044A0DF8}"/>
+              </a:ext>
+            </a:extLst>
+          </p:cNvPr>
+          <p:cNvSpPr>
+            <a:spLocks noChangeAspect="1"/>
+          </p:cNvSpPr>
+          <p:nvPr/>
+        </p:nvSpPr>
+        <p:spPr>
+          <a:xfrm>
+            <a:off x="54000" y="54000"/>
+            <a:ext cx="576000" cy="576000"/>
+          </a:xfrm>
+          <a:prstGeom prst="halfFrame">
+            <a:avLst>
+              <a:gd name="adj1" fmla="val 7127"/>
+              <a:gd name="adj2" fmla="val 8806"/>
+            </a:avLst>
+          </a:prstGeom>
+          <a:solidFill>
+            <a:srgbClr val="905AA6"/>
+          </a:solidFill>
+          <a:ln>
+            <a:noFill/>
+          </a:ln>
+        </p:spPr>
+        <p:style>
+          <a:lnRef idx="2">
+            <a:schemeClr val="accent1">
+              <a:shade val="15000"/>
+            </a:schemeClr>
+          </a:lnRef>
+          <a:fillRef idx="1">
+            <a:schemeClr val="accent1"/>
+          </a:fillRef>
+          <a:effectRef idx="0">
+            <a:schemeClr val="accent1"/>
+          </a:effectRef>
+          <a:fontRef idx="minor">
+            <a:schemeClr val="lt1"/>
+          </a:fontRef>
+        </p:style>
+        <p:txBody>
+          <a:bodyPr rtlCol="0" anchor="ctr"/>
+          <a:lstStyle/>
+          <a:p>
+            <a:pPr algn="ctr"/>
+            <a:endParaRPr lang="en-CA">
+              <a:solidFill>
+                <a:schemeClr val="tx1"/>
+              </a:solidFill>
+            </a:endParaRPr>
+          </a:p>
+        </p:txBody>
+      </p:sp>
+      <p:sp>
+        <p:nvSpPr>
+          <p:cNvPr id="11" name="TextBox 10">
+            <a:extLst>
+              <a:ext uri="{FF2B5EF4-FFF2-40B4-BE49-F238E27FC236}">
+                <a16:creationId xmlns:a16="http://schemas.microsoft.com/office/drawing/2014/main" id="{83A72DEE-4D6D-459E-6399-5DDE30903E99}"/>
+              </a:ext>
+            </a:extLst>
+          </p:cNvPr>
+          <p:cNvSpPr txBox="1"/>
+          <p:nvPr/>
+        </p:nvSpPr>
+        <p:spPr>
+          <a:xfrm>
+            <a:off x="108857" y="114299"/>
+            <a:ext cx="5600700" cy="461665"/>
+          </a:xfrm>
+          <a:prstGeom prst="rect">
+            <a:avLst/>
+          </a:prstGeom>
+          <a:noFill/>
+        </p:spPr>
+        <p:txBody>
+          <a:bodyPr wrap="square" rtlCol="0">
+            <a:spAutoFit/>
+          </a:bodyPr>
+          <a:lstStyle/>
+          <a:p>
+            <a:r>
+              <a:rPr lang="en-US" sz="2400" dirty="0"/>
+              <a:t>M</a:t>
+            </a:r>
+            <a:r>
+              <a:rPr lang="en-CA" sz="2400" dirty="0" err="1"/>
+              <a:t>otivation</a:t>
+            </a:r>
+            <a:endParaRPr lang="en-CA" sz="2400" dirty="0"/>
+          </a:p>
+        </p:txBody>
+      </p:sp>
+      <p:sp>
+        <p:nvSpPr>
+          <p:cNvPr id="4" name="Rectangle: Rounded Corners 3">
+            <a:extLst>
+              <a:ext uri="{FF2B5EF4-FFF2-40B4-BE49-F238E27FC236}">
+                <a16:creationId xmlns:a16="http://schemas.microsoft.com/office/drawing/2014/main" id="{C18478FF-6B83-B8B6-6E25-37D82C9B56F7}"/>
+              </a:ext>
+            </a:extLst>
+          </p:cNvPr>
+          <p:cNvSpPr/>
+          <p:nvPr/>
+        </p:nvSpPr>
+        <p:spPr>
+          <a:xfrm>
+            <a:off x="2351314" y="751957"/>
+            <a:ext cx="7489371" cy="2008409"/>
+          </a:xfrm>
+          <a:prstGeom prst="roundRect">
+            <a:avLst/>
+          </a:prstGeom>
+          <a:solidFill>
+            <a:srgbClr val="905AA6"/>
+          </a:solidFill>
+          <a:ln>
+            <a:solidFill>
+              <a:srgbClr val="905AA6"/>
+            </a:solidFill>
+          </a:ln>
+        </p:spPr>
+        <p:style>
+          <a:lnRef idx="2">
+            <a:schemeClr val="accent1">
+              <a:shade val="15000"/>
+            </a:schemeClr>
+          </a:lnRef>
+          <a:fillRef idx="1">
+            <a:schemeClr val="accent1"/>
+          </a:fillRef>
+          <a:effectRef idx="0">
+            <a:schemeClr val="accent1"/>
+          </a:effectRef>
+          <a:fontRef idx="minor">
+            <a:schemeClr val="lt1"/>
+          </a:fontRef>
+        </p:style>
+        <p:txBody>
+          <a:bodyPr rtlCol="0" anchor="ctr"/>
+          <a:lstStyle/>
+          <a:p>
+            <a:pPr algn="ctr"/>
+            <a:r>
+              <a:rPr lang="en-US" sz="3600" dirty="0">
+                <a:solidFill>
+                  <a:schemeClr val="bg1"/>
+                </a:solidFill>
+              </a:rPr>
+              <a:t>What is the heterogeneity of dose to the circulating blood volume during TBI?</a:t>
+            </a:r>
+            <a:endParaRPr lang="en-CA" sz="3600" dirty="0">
+              <a:solidFill>
+                <a:schemeClr val="bg1"/>
+              </a:solidFill>
+            </a:endParaRPr>
+          </a:p>
+        </p:txBody>
+      </p:sp>
+      <p:sp>
+        <p:nvSpPr>
+          <p:cNvPr id="14" name="Rectangle: Rounded Corners 13">
+            <a:extLst>
+              <a:ext uri="{FF2B5EF4-FFF2-40B4-BE49-F238E27FC236}">
+                <a16:creationId xmlns:a16="http://schemas.microsoft.com/office/drawing/2014/main" id="{3EABC374-3118-1735-2855-34CF3258D774}"/>
+              </a:ext>
+            </a:extLst>
+          </p:cNvPr>
+          <p:cNvSpPr/>
+          <p:nvPr/>
+        </p:nvSpPr>
+        <p:spPr>
+          <a:xfrm>
+            <a:off x="342000" y="3953361"/>
+            <a:ext cx="3197678" cy="2277835"/>
+          </a:xfrm>
+          <a:prstGeom prst="roundRect">
+            <a:avLst/>
+          </a:prstGeom>
+          <a:solidFill>
+            <a:srgbClr val="905AA6"/>
+          </a:solidFill>
+          <a:ln>
+            <a:solidFill>
+              <a:srgbClr val="905AA6"/>
+            </a:solidFill>
+          </a:ln>
+        </p:spPr>
+        <p:style>
+          <a:lnRef idx="2">
+            <a:schemeClr val="accent1">
+              <a:shade val="15000"/>
+            </a:schemeClr>
+          </a:lnRef>
+          <a:fillRef idx="1">
+            <a:schemeClr val="accent1"/>
+          </a:fillRef>
+          <a:effectRef idx="0">
+            <a:schemeClr val="accent1"/>
+          </a:effectRef>
+          <a:fontRef idx="minor">
+            <a:schemeClr val="lt1"/>
+          </a:fontRef>
+        </p:style>
+        <p:txBody>
+          <a:bodyPr rtlCol="0" anchor="ctr"/>
+          <a:lstStyle/>
+          <a:p>
+            <a:pPr algn="ctr"/>
+            <a:r>
+              <a:rPr lang="en-US" sz="3600" dirty="0"/>
+              <a:t>Determine dose deposition in time</a:t>
+            </a:r>
+            <a:endParaRPr lang="en-CA" sz="3600" dirty="0"/>
+          </a:p>
+        </p:txBody>
+      </p:sp>
+      <p:sp>
+        <p:nvSpPr>
+          <p:cNvPr id="15" name="Rectangle: Rounded Corners 14">
+            <a:extLst>
+              <a:ext uri="{FF2B5EF4-FFF2-40B4-BE49-F238E27FC236}">
+                <a16:creationId xmlns:a16="http://schemas.microsoft.com/office/drawing/2014/main" id="{377DA0B4-CB4D-A702-23E4-9DD05A9E2375}"/>
+              </a:ext>
+            </a:extLst>
+          </p:cNvPr>
+          <p:cNvSpPr/>
+          <p:nvPr/>
+        </p:nvSpPr>
+        <p:spPr>
+          <a:xfrm>
+            <a:off x="4497161" y="3961881"/>
+            <a:ext cx="3197678" cy="2277835"/>
+          </a:xfrm>
+          <a:prstGeom prst="roundRect">
+            <a:avLst/>
+          </a:prstGeom>
+          <a:solidFill>
+            <a:srgbClr val="905AA6"/>
+          </a:solidFill>
+          <a:ln>
+            <a:solidFill>
+              <a:srgbClr val="905AA6"/>
+            </a:solidFill>
+          </a:ln>
+        </p:spPr>
+        <p:style>
+          <a:lnRef idx="2">
+            <a:schemeClr val="accent1">
+              <a:shade val="15000"/>
+            </a:schemeClr>
+          </a:lnRef>
+          <a:fillRef idx="1">
+            <a:schemeClr val="accent1"/>
+          </a:fillRef>
+          <a:effectRef idx="0">
+            <a:schemeClr val="accent1"/>
+          </a:effectRef>
+          <a:fontRef idx="minor">
+            <a:schemeClr val="lt1"/>
+          </a:fontRef>
+        </p:style>
+        <p:txBody>
+          <a:bodyPr rtlCol="0" anchor="ctr"/>
+          <a:lstStyle/>
+          <a:p>
+            <a:pPr algn="ctr"/>
+            <a:r>
+              <a:rPr lang="en-US" sz="3600" dirty="0"/>
+              <a:t>Track blood flow through the body</a:t>
+            </a:r>
+            <a:endParaRPr lang="en-CA" sz="3600" dirty="0"/>
+          </a:p>
+        </p:txBody>
+      </p:sp>
+      <p:sp>
+        <p:nvSpPr>
+          <p:cNvPr id="17" name="Rectangle: Rounded Corners 16">
+            <a:extLst>
+              <a:ext uri="{FF2B5EF4-FFF2-40B4-BE49-F238E27FC236}">
+                <a16:creationId xmlns:a16="http://schemas.microsoft.com/office/drawing/2014/main" id="{25DF2847-7B8C-697E-BC1D-62C4E847C5DC}"/>
+              </a:ext>
+            </a:extLst>
+          </p:cNvPr>
+          <p:cNvSpPr/>
+          <p:nvPr/>
+        </p:nvSpPr>
+        <p:spPr>
+          <a:xfrm>
+            <a:off x="8652322" y="3953360"/>
+            <a:ext cx="3197678" cy="2277835"/>
+          </a:xfrm>
+          <a:prstGeom prst="roundRect">
+            <a:avLst/>
+          </a:prstGeom>
+          <a:solidFill>
+            <a:srgbClr val="905AA6"/>
+          </a:solidFill>
+          <a:ln>
+            <a:solidFill>
+              <a:srgbClr val="905AA6"/>
+            </a:solidFill>
+          </a:ln>
+        </p:spPr>
+        <p:style>
+          <a:lnRef idx="2">
+            <a:schemeClr val="accent1">
+              <a:shade val="15000"/>
+            </a:schemeClr>
+          </a:lnRef>
+          <a:fillRef idx="1">
+            <a:schemeClr val="accent1"/>
+          </a:fillRef>
+          <a:effectRef idx="0">
+            <a:schemeClr val="accent1"/>
+          </a:effectRef>
+          <a:fontRef idx="minor">
+            <a:schemeClr val="lt1"/>
+          </a:fontRef>
+        </p:style>
+        <p:txBody>
+          <a:bodyPr rtlCol="0" anchor="ctr"/>
+          <a:lstStyle/>
+          <a:p>
+            <a:pPr algn="ctr"/>
+            <a:r>
+              <a:rPr lang="en-US" sz="3600" dirty="0">
+                <a:solidFill>
+                  <a:schemeClr val="bg1"/>
+                </a:solidFill>
+              </a:rPr>
+              <a:t>Model various TBI treatments</a:t>
+            </a:r>
+            <a:endParaRPr lang="en-CA" sz="3600" dirty="0">
+              <a:solidFill>
+                <a:schemeClr val="bg1"/>
+              </a:solidFill>
+            </a:endParaRPr>
+          </a:p>
+        </p:txBody>
+      </p:sp>
+      <p:cxnSp>
+        <p:nvCxnSpPr>
+          <p:cNvPr id="19" name="Straight Connector 18">
+            <a:extLst>
+              <a:ext uri="{FF2B5EF4-FFF2-40B4-BE49-F238E27FC236}">
+                <a16:creationId xmlns:a16="http://schemas.microsoft.com/office/drawing/2014/main" id="{9B7C0BCA-D334-4F3D-9DBC-4046F67404C5}"/>
+              </a:ext>
+            </a:extLst>
+          </p:cNvPr>
+          <p:cNvCxnSpPr>
+            <a:stCxn id="14" idx="0"/>
+            <a:endCxn id="4" idx="2"/>
+          </p:cNvCxnSpPr>
+          <p:nvPr/>
+        </p:nvCxnSpPr>
+        <p:spPr>
+          <a:xfrm flipV="1">
+            <a:off x="1940839" y="2760366"/>
+            <a:ext cx="4155161" cy="1192995"/>
+          </a:xfrm>
+          <a:prstGeom prst="line">
+            <a:avLst/>
+          </a:prstGeom>
+          <a:ln w="28575">
+            <a:solidFill>
+              <a:srgbClr val="905AA6"/>
+            </a:solidFill>
+          </a:ln>
+        </p:spPr>
+        <p:style>
+          <a:lnRef idx="1">
+            <a:schemeClr val="accent1"/>
+          </a:lnRef>
+          <a:fillRef idx="0">
+            <a:schemeClr val="accent1"/>
+          </a:fillRef>
+          <a:effectRef idx="0">
+            <a:schemeClr val="accent1"/>
+          </a:effectRef>
+          <a:fontRef idx="minor">
+            <a:schemeClr val="tx1"/>
+          </a:fontRef>
+        </p:style>
+      </p:cxnSp>
+      <p:cxnSp>
+        <p:nvCxnSpPr>
+          <p:cNvPr id="20" name="Straight Connector 19">
+            <a:extLst>
+              <a:ext uri="{FF2B5EF4-FFF2-40B4-BE49-F238E27FC236}">
+                <a16:creationId xmlns:a16="http://schemas.microsoft.com/office/drawing/2014/main" id="{74D9F3D4-D022-BE1D-3FD7-E262CC61E2B7}"/>
+              </a:ext>
+            </a:extLst>
+          </p:cNvPr>
+          <p:cNvCxnSpPr>
+            <a:cxnSpLocks/>
+            <a:stCxn id="15" idx="0"/>
+            <a:endCxn id="4" idx="2"/>
+          </p:cNvCxnSpPr>
+          <p:nvPr/>
+        </p:nvCxnSpPr>
+        <p:spPr>
+          <a:xfrm flipV="1">
+            <a:off x="6096000" y="2760366"/>
+            <a:ext cx="0" cy="1201515"/>
+          </a:xfrm>
+          <a:prstGeom prst="line">
+            <a:avLst/>
+          </a:prstGeom>
+          <a:ln w="28575">
+            <a:solidFill>
+              <a:srgbClr val="905AA6"/>
+            </a:solidFill>
+          </a:ln>
+        </p:spPr>
+        <p:style>
+          <a:lnRef idx="1">
+            <a:schemeClr val="accent1"/>
+          </a:lnRef>
+          <a:fillRef idx="0">
+            <a:schemeClr val="accent1"/>
+          </a:fillRef>
+          <a:effectRef idx="0">
+            <a:schemeClr val="accent1"/>
+          </a:effectRef>
+          <a:fontRef idx="minor">
+            <a:schemeClr val="tx1"/>
+          </a:fontRef>
+        </p:style>
+      </p:cxnSp>
+      <p:cxnSp>
+        <p:nvCxnSpPr>
+          <p:cNvPr id="23" name="Straight Connector 22">
+            <a:extLst>
+              <a:ext uri="{FF2B5EF4-FFF2-40B4-BE49-F238E27FC236}">
+                <a16:creationId xmlns:a16="http://schemas.microsoft.com/office/drawing/2014/main" id="{F535A133-F7F0-142B-3A4C-20C5BA16087A}"/>
+              </a:ext>
+            </a:extLst>
+          </p:cNvPr>
+          <p:cNvCxnSpPr>
+            <a:cxnSpLocks/>
+            <a:stCxn id="17" idx="0"/>
+            <a:endCxn id="4" idx="2"/>
+          </p:cNvCxnSpPr>
+          <p:nvPr/>
+        </p:nvCxnSpPr>
+        <p:spPr>
+          <a:xfrm flipH="1" flipV="1">
+            <a:off x="6096000" y="2760366"/>
+            <a:ext cx="4155161" cy="1192994"/>
+          </a:xfrm>
+          <a:prstGeom prst="line">
+            <a:avLst/>
+          </a:prstGeom>
+          <a:ln w="28575">
+            <a:solidFill>
+              <a:srgbClr val="905AA6"/>
+            </a:solidFill>
+          </a:ln>
+        </p:spPr>
+        <p:style>
+          <a:lnRef idx="1">
+            <a:schemeClr val="accent1"/>
+          </a:lnRef>
+          <a:fillRef idx="0">
+            <a:schemeClr val="accent1"/>
+          </a:fillRef>
+          <a:effectRef idx="0">
+            <a:schemeClr val="accent1"/>
+          </a:effectRef>
+          <a:fontRef idx="minor">
+            <a:schemeClr val="tx1"/>
+          </a:fontRef>
+        </p:style>
+      </p:cxnSp>
+    </p:spTree>
+    <p:extLst>
+      <p:ext uri="{BB962C8B-B14F-4D97-AF65-F5344CB8AC3E}">
+        <p14:creationId xmlns:p14="http://schemas.microsoft.com/office/powerpoint/2010/main" val="1375378903"/>
+      </p:ext>
+    </p:extLst>
+  </p:cSld>
+  <p:clrMapOvr>
+    <a:masterClrMapping/>
+  </p:clrMapOvr>
+</p:sld>
+</file>
+
+<file path=ppt/slides/slide20.xml><?xml version="1.0" encoding="utf-8"?>
+<p:sld xmlns:a="http://schemas.openxmlformats.org/drawingml/2006/main" xmlns:r="http://schemas.openxmlformats.org/officeDocument/2006/relationships" xmlns:p="http://schemas.openxmlformats.org/presentationml/2006/main">
+  <p:cSld>
+    <p:spTree>
+      <p:nvGrpSpPr>
+        <p:cNvPr id="1" name=""/>
+        <p:cNvGrpSpPr/>
+        <p:nvPr/>
+      </p:nvGrpSpPr>
+      <p:grpSpPr>
+        <a:xfrm>
+          <a:off x="0" y="0"/>
+          <a:ext cx="0" cy="0"/>
+          <a:chOff x="0" y="0"/>
+          <a:chExt cx="0" cy="0"/>
+        </a:xfrm>
+      </p:grpSpPr>
+      <p:sp>
+        <p:nvSpPr>
+          <p:cNvPr id="6" name="Slide Number Placeholder 5">
+            <a:extLst>
+              <a:ext uri="{FF2B5EF4-FFF2-40B4-BE49-F238E27FC236}">
+                <a16:creationId xmlns:a16="http://schemas.microsoft.com/office/drawing/2014/main" id="{74FB7EC2-71BA-402D-7669-A778C3CC61F4}"/>
+              </a:ext>
+            </a:extLst>
+          </p:cNvPr>
+          <p:cNvSpPr>
+            <a:spLocks noGrp="1"/>
+          </p:cNvSpPr>
+          <p:nvPr>
+            <p:ph type="sldNum" sz="quarter" idx="12"/>
+          </p:nvPr>
+        </p:nvSpPr>
+        <p:spPr>
+          <a:xfrm>
+            <a:off x="9282793" y="6420757"/>
+            <a:ext cx="2743200" cy="365125"/>
+          </a:xfrm>
+        </p:spPr>
+        <p:txBody>
+          <a:bodyPr/>
+          <a:lstStyle/>
+          <a:p>
+            <a:fld id="{1E5564C7-97C0-40C1-9717-452594735347}" type="slidenum">
+              <a:rPr lang="en-CA" smtClean="0"/>
+              <a:t>20</a:t>
             </a:fld>
             <a:endParaRPr lang="en-CA" dirty="0"/>
           </a:p>
@@ -20743,7 +23136,7 @@
 </p:sld>
 </file>
 
-<file path=ppt/slides/slide19.xml><?xml version="1.0" encoding="utf-8"?>
+<file path=ppt/slides/slide21.xml><?xml version="1.0" encoding="utf-8"?>
 <p:sld xmlns:a="http://schemas.openxmlformats.org/drawingml/2006/main" xmlns:r="http://schemas.openxmlformats.org/officeDocument/2006/relationships" xmlns:p="http://schemas.openxmlformats.org/presentationml/2006/main">
   <p:cSld>
     <p:spTree>
@@ -20794,7 +23187,7 @@
           <a:p>
             <a:fld id="{1E5564C7-97C0-40C1-9717-452594735347}" type="slidenum">
               <a:rPr lang="en-CA" smtClean="0"/>
-              <a:t>19</a:t>
+              <a:t>21</a:t>
             </a:fld>
             <a:endParaRPr lang="en-CA" dirty="0"/>
           </a:p>
@@ -21297,7 +23690,7 @@
 </p:sld>
 </file>
 
-<file path=ppt/slides/slide2.xml><?xml version="1.0" encoding="utf-8"?>
+<file path=ppt/slides/slide22.xml><?xml version="1.0" encoding="utf-8"?>
 <p:sld xmlns:a="http://schemas.openxmlformats.org/drawingml/2006/main" xmlns:r="http://schemas.openxmlformats.org/officeDocument/2006/relationships" xmlns:p="http://schemas.openxmlformats.org/presentationml/2006/main">
   <p:cSld>
     <p:spTree>
@@ -21342,597 +23735,7 @@
           <a:p>
             <a:fld id="{1E5564C7-97C0-40C1-9717-452594735347}" type="slidenum">
               <a:rPr lang="en-CA" smtClean="0"/>
-              <a:t>2</a:t>
-            </a:fld>
-            <a:endParaRPr lang="en-CA" dirty="0"/>
-          </a:p>
-        </p:txBody>
-      </p:sp>
-      <p:cxnSp>
-        <p:nvCxnSpPr>
-          <p:cNvPr id="8" name="Straight Connector 7">
-            <a:extLst>
-              <a:ext uri="{FF2B5EF4-FFF2-40B4-BE49-F238E27FC236}">
-                <a16:creationId xmlns:a16="http://schemas.microsoft.com/office/drawing/2014/main" id="{FF39A71E-9C68-0132-D8FD-8A9DB6E41BDE}"/>
-              </a:ext>
-            </a:extLst>
-          </p:cNvPr>
-          <p:cNvCxnSpPr>
-            <a:cxnSpLocks/>
-          </p:cNvCxnSpPr>
-          <p:nvPr/>
-        </p:nvCxnSpPr>
-        <p:spPr>
-          <a:xfrm>
-            <a:off x="166007" y="6356350"/>
-            <a:ext cx="11859986" cy="0"/>
-          </a:xfrm>
-          <a:prstGeom prst="line">
-            <a:avLst/>
-          </a:prstGeom>
-          <a:ln>
-            <a:solidFill>
-              <a:srgbClr val="905AA6"/>
-            </a:solidFill>
-          </a:ln>
-        </p:spPr>
-        <p:style>
-          <a:lnRef idx="1">
-            <a:schemeClr val="accent1"/>
-          </a:lnRef>
-          <a:fillRef idx="0">
-            <a:schemeClr val="accent1"/>
-          </a:fillRef>
-          <a:effectRef idx="0">
-            <a:schemeClr val="accent1"/>
-          </a:effectRef>
-          <a:fontRef idx="minor">
-            <a:schemeClr val="tx1"/>
-          </a:fontRef>
-        </p:style>
-      </p:cxnSp>
-      <p:sp>
-        <p:nvSpPr>
-          <p:cNvPr id="10" name="Half Frame 9">
-            <a:extLst>
-              <a:ext uri="{FF2B5EF4-FFF2-40B4-BE49-F238E27FC236}">
-                <a16:creationId xmlns:a16="http://schemas.microsoft.com/office/drawing/2014/main" id="{BBE0D6D3-13F9-2B97-D1DB-5C47044A0DF8}"/>
-              </a:ext>
-            </a:extLst>
-          </p:cNvPr>
-          <p:cNvSpPr>
-            <a:spLocks noChangeAspect="1"/>
-          </p:cNvSpPr>
-          <p:nvPr/>
-        </p:nvSpPr>
-        <p:spPr>
-          <a:xfrm>
-            <a:off x="54000" y="54000"/>
-            <a:ext cx="576000" cy="576000"/>
-          </a:xfrm>
-          <a:prstGeom prst="halfFrame">
-            <a:avLst>
-              <a:gd name="adj1" fmla="val 7127"/>
-              <a:gd name="adj2" fmla="val 8806"/>
-            </a:avLst>
-          </a:prstGeom>
-          <a:solidFill>
-            <a:srgbClr val="905AA6"/>
-          </a:solidFill>
-          <a:ln>
-            <a:noFill/>
-          </a:ln>
-        </p:spPr>
-        <p:style>
-          <a:lnRef idx="2">
-            <a:schemeClr val="accent1">
-              <a:shade val="15000"/>
-            </a:schemeClr>
-          </a:lnRef>
-          <a:fillRef idx="1">
-            <a:schemeClr val="accent1"/>
-          </a:fillRef>
-          <a:effectRef idx="0">
-            <a:schemeClr val="accent1"/>
-          </a:effectRef>
-          <a:fontRef idx="minor">
-            <a:schemeClr val="lt1"/>
-          </a:fontRef>
-        </p:style>
-        <p:txBody>
-          <a:bodyPr rtlCol="0" anchor="ctr"/>
-          <a:lstStyle/>
-          <a:p>
-            <a:pPr algn="ctr"/>
-            <a:endParaRPr lang="en-CA">
-              <a:solidFill>
-                <a:schemeClr val="tx1"/>
-              </a:solidFill>
-            </a:endParaRPr>
-          </a:p>
-        </p:txBody>
-      </p:sp>
-      <p:sp>
-        <p:nvSpPr>
-          <p:cNvPr id="11" name="TextBox 10">
-            <a:extLst>
-              <a:ext uri="{FF2B5EF4-FFF2-40B4-BE49-F238E27FC236}">
-                <a16:creationId xmlns:a16="http://schemas.microsoft.com/office/drawing/2014/main" id="{83A72DEE-4D6D-459E-6399-5DDE30903E99}"/>
-              </a:ext>
-            </a:extLst>
-          </p:cNvPr>
-          <p:cNvSpPr txBox="1"/>
-          <p:nvPr/>
-        </p:nvSpPr>
-        <p:spPr>
-          <a:xfrm>
-            <a:off x="108857" y="114299"/>
-            <a:ext cx="5600700" cy="461665"/>
-          </a:xfrm>
-          <a:prstGeom prst="rect">
-            <a:avLst/>
-          </a:prstGeom>
-          <a:noFill/>
-        </p:spPr>
-        <p:txBody>
-          <a:bodyPr wrap="square" rtlCol="0">
-            <a:spAutoFit/>
-          </a:bodyPr>
-          <a:lstStyle/>
-          <a:p>
-            <a:r>
-              <a:rPr lang="en-US" sz="2400" dirty="0"/>
-              <a:t>M</a:t>
-            </a:r>
-            <a:r>
-              <a:rPr lang="en-CA" sz="2400" dirty="0" err="1"/>
-              <a:t>otivation</a:t>
-            </a:r>
-            <a:endParaRPr lang="en-CA" sz="2400" dirty="0"/>
-          </a:p>
-        </p:txBody>
-      </p:sp>
-      <p:sp>
-        <p:nvSpPr>
-          <p:cNvPr id="4" name="Rectangle: Rounded Corners 3">
-            <a:extLst>
-              <a:ext uri="{FF2B5EF4-FFF2-40B4-BE49-F238E27FC236}">
-                <a16:creationId xmlns:a16="http://schemas.microsoft.com/office/drawing/2014/main" id="{C18478FF-6B83-B8B6-6E25-37D82C9B56F7}"/>
-              </a:ext>
-            </a:extLst>
-          </p:cNvPr>
-          <p:cNvSpPr/>
-          <p:nvPr/>
-        </p:nvSpPr>
-        <p:spPr>
-          <a:xfrm>
-            <a:off x="2351314" y="751957"/>
-            <a:ext cx="7489371" cy="2008409"/>
-          </a:xfrm>
-          <a:prstGeom prst="roundRect">
-            <a:avLst/>
-          </a:prstGeom>
-          <a:solidFill>
-            <a:srgbClr val="905AA6"/>
-          </a:solidFill>
-          <a:ln>
-            <a:solidFill>
-              <a:srgbClr val="905AA6"/>
-            </a:solidFill>
-          </a:ln>
-        </p:spPr>
-        <p:style>
-          <a:lnRef idx="2">
-            <a:schemeClr val="accent1">
-              <a:shade val="15000"/>
-            </a:schemeClr>
-          </a:lnRef>
-          <a:fillRef idx="1">
-            <a:schemeClr val="accent1"/>
-          </a:fillRef>
-          <a:effectRef idx="0">
-            <a:schemeClr val="accent1"/>
-          </a:effectRef>
-          <a:fontRef idx="minor">
-            <a:schemeClr val="lt1"/>
-          </a:fontRef>
-        </p:style>
-        <p:txBody>
-          <a:bodyPr rtlCol="0" anchor="ctr"/>
-          <a:lstStyle/>
-          <a:p>
-            <a:pPr algn="ctr"/>
-            <a:r>
-              <a:rPr lang="en-US" sz="3600" dirty="0">
-                <a:solidFill>
-                  <a:schemeClr val="bg1"/>
-                </a:solidFill>
-              </a:rPr>
-              <a:t>What is the heterogeneity of dose to the circulating blood volume during TBI?</a:t>
-            </a:r>
-            <a:endParaRPr lang="en-CA" sz="3600" dirty="0">
-              <a:solidFill>
-                <a:schemeClr val="bg1"/>
-              </a:solidFill>
-            </a:endParaRPr>
-          </a:p>
-        </p:txBody>
-      </p:sp>
-      <p:sp>
-        <p:nvSpPr>
-          <p:cNvPr id="14" name="Rectangle: Rounded Corners 13">
-            <a:extLst>
-              <a:ext uri="{FF2B5EF4-FFF2-40B4-BE49-F238E27FC236}">
-                <a16:creationId xmlns:a16="http://schemas.microsoft.com/office/drawing/2014/main" id="{3EABC374-3118-1735-2855-34CF3258D774}"/>
-              </a:ext>
-            </a:extLst>
-          </p:cNvPr>
-          <p:cNvSpPr/>
-          <p:nvPr/>
-        </p:nvSpPr>
-        <p:spPr>
-          <a:xfrm>
-            <a:off x="342000" y="3953361"/>
-            <a:ext cx="3197678" cy="2277835"/>
-          </a:xfrm>
-          <a:prstGeom prst="roundRect">
-            <a:avLst/>
-          </a:prstGeom>
-          <a:solidFill>
-            <a:srgbClr val="905AA6"/>
-          </a:solidFill>
-          <a:ln>
-            <a:solidFill>
-              <a:srgbClr val="905AA6"/>
-            </a:solidFill>
-          </a:ln>
-        </p:spPr>
-        <p:style>
-          <a:lnRef idx="2">
-            <a:schemeClr val="accent1">
-              <a:shade val="15000"/>
-            </a:schemeClr>
-          </a:lnRef>
-          <a:fillRef idx="1">
-            <a:schemeClr val="accent1"/>
-          </a:fillRef>
-          <a:effectRef idx="0">
-            <a:schemeClr val="accent1"/>
-          </a:effectRef>
-          <a:fontRef idx="minor">
-            <a:schemeClr val="lt1"/>
-          </a:fontRef>
-        </p:style>
-        <p:txBody>
-          <a:bodyPr rtlCol="0" anchor="ctr"/>
-          <a:lstStyle/>
-          <a:p>
-            <a:pPr algn="ctr"/>
-            <a:r>
-              <a:rPr lang="en-US" sz="3600" dirty="0"/>
-              <a:t>Determine dose deposition in time</a:t>
-            </a:r>
-            <a:endParaRPr lang="en-CA" sz="3600" dirty="0"/>
-          </a:p>
-        </p:txBody>
-      </p:sp>
-      <p:sp>
-        <p:nvSpPr>
-          <p:cNvPr id="15" name="Rectangle: Rounded Corners 14">
-            <a:extLst>
-              <a:ext uri="{FF2B5EF4-FFF2-40B4-BE49-F238E27FC236}">
-                <a16:creationId xmlns:a16="http://schemas.microsoft.com/office/drawing/2014/main" id="{377DA0B4-CB4D-A702-23E4-9DD05A9E2375}"/>
-              </a:ext>
-            </a:extLst>
-          </p:cNvPr>
-          <p:cNvSpPr/>
-          <p:nvPr/>
-        </p:nvSpPr>
-        <p:spPr>
-          <a:xfrm>
-            <a:off x="4497161" y="3961881"/>
-            <a:ext cx="3197678" cy="2277835"/>
-          </a:xfrm>
-          <a:prstGeom prst="roundRect">
-            <a:avLst/>
-          </a:prstGeom>
-          <a:solidFill>
-            <a:srgbClr val="905AA6"/>
-          </a:solidFill>
-          <a:ln>
-            <a:solidFill>
-              <a:srgbClr val="905AA6"/>
-            </a:solidFill>
-          </a:ln>
-        </p:spPr>
-        <p:style>
-          <a:lnRef idx="2">
-            <a:schemeClr val="accent1">
-              <a:shade val="15000"/>
-            </a:schemeClr>
-          </a:lnRef>
-          <a:fillRef idx="1">
-            <a:schemeClr val="accent1"/>
-          </a:fillRef>
-          <a:effectRef idx="0">
-            <a:schemeClr val="accent1"/>
-          </a:effectRef>
-          <a:fontRef idx="minor">
-            <a:schemeClr val="lt1"/>
-          </a:fontRef>
-        </p:style>
-        <p:txBody>
-          <a:bodyPr rtlCol="0" anchor="ctr"/>
-          <a:lstStyle/>
-          <a:p>
-            <a:pPr algn="ctr"/>
-            <a:r>
-              <a:rPr lang="en-US" sz="3600" dirty="0"/>
-              <a:t>Track blood flow through the body</a:t>
-            </a:r>
-            <a:endParaRPr lang="en-CA" sz="3600" dirty="0"/>
-          </a:p>
-        </p:txBody>
-      </p:sp>
-      <p:sp>
-        <p:nvSpPr>
-          <p:cNvPr id="17" name="Rectangle: Rounded Corners 16">
-            <a:extLst>
-              <a:ext uri="{FF2B5EF4-FFF2-40B4-BE49-F238E27FC236}">
-                <a16:creationId xmlns:a16="http://schemas.microsoft.com/office/drawing/2014/main" id="{25DF2847-7B8C-697E-BC1D-62C4E847C5DC}"/>
-              </a:ext>
-            </a:extLst>
-          </p:cNvPr>
-          <p:cNvSpPr/>
-          <p:nvPr/>
-        </p:nvSpPr>
-        <p:spPr>
-          <a:xfrm>
-            <a:off x="8652322" y="3953360"/>
-            <a:ext cx="3197678" cy="2277835"/>
-          </a:xfrm>
-          <a:prstGeom prst="roundRect">
-            <a:avLst/>
-          </a:prstGeom>
-          <a:solidFill>
-            <a:srgbClr val="905AA6"/>
-          </a:solidFill>
-          <a:ln>
-            <a:solidFill>
-              <a:srgbClr val="905AA6"/>
-            </a:solidFill>
-          </a:ln>
-        </p:spPr>
-        <p:style>
-          <a:lnRef idx="2">
-            <a:schemeClr val="accent1">
-              <a:shade val="15000"/>
-            </a:schemeClr>
-          </a:lnRef>
-          <a:fillRef idx="1">
-            <a:schemeClr val="accent1"/>
-          </a:fillRef>
-          <a:effectRef idx="0">
-            <a:schemeClr val="accent1"/>
-          </a:effectRef>
-          <a:fontRef idx="minor">
-            <a:schemeClr val="lt1"/>
-          </a:fontRef>
-        </p:style>
-        <p:txBody>
-          <a:bodyPr rtlCol="0" anchor="ctr"/>
-          <a:lstStyle/>
-          <a:p>
-            <a:pPr algn="ctr"/>
-            <a:r>
-              <a:rPr lang="en-US" sz="3600" dirty="0">
-                <a:solidFill>
-                  <a:schemeClr val="bg1"/>
-                </a:solidFill>
-              </a:rPr>
-              <a:t>Model various TBI treatments</a:t>
-            </a:r>
-            <a:endParaRPr lang="en-CA" sz="3600" dirty="0">
-              <a:solidFill>
-                <a:schemeClr val="bg1"/>
-              </a:solidFill>
-            </a:endParaRPr>
-          </a:p>
-        </p:txBody>
-      </p:sp>
-      <p:cxnSp>
-        <p:nvCxnSpPr>
-          <p:cNvPr id="19" name="Straight Connector 18">
-            <a:extLst>
-              <a:ext uri="{FF2B5EF4-FFF2-40B4-BE49-F238E27FC236}">
-                <a16:creationId xmlns:a16="http://schemas.microsoft.com/office/drawing/2014/main" id="{9B7C0BCA-D334-4F3D-9DBC-4046F67404C5}"/>
-              </a:ext>
-            </a:extLst>
-          </p:cNvPr>
-          <p:cNvCxnSpPr>
-            <a:stCxn id="14" idx="0"/>
-            <a:endCxn id="4" idx="2"/>
-          </p:cNvCxnSpPr>
-          <p:nvPr/>
-        </p:nvCxnSpPr>
-        <p:spPr>
-          <a:xfrm flipV="1">
-            <a:off x="1940839" y="2760366"/>
-            <a:ext cx="4155161" cy="1192995"/>
-          </a:xfrm>
-          <a:prstGeom prst="line">
-            <a:avLst/>
-          </a:prstGeom>
-          <a:ln w="28575">
-            <a:solidFill>
-              <a:srgbClr val="905AA6"/>
-            </a:solidFill>
-          </a:ln>
-        </p:spPr>
-        <p:style>
-          <a:lnRef idx="1">
-            <a:schemeClr val="accent1"/>
-          </a:lnRef>
-          <a:fillRef idx="0">
-            <a:schemeClr val="accent1"/>
-          </a:fillRef>
-          <a:effectRef idx="0">
-            <a:schemeClr val="accent1"/>
-          </a:effectRef>
-          <a:fontRef idx="minor">
-            <a:schemeClr val="tx1"/>
-          </a:fontRef>
-        </p:style>
-      </p:cxnSp>
-      <p:cxnSp>
-        <p:nvCxnSpPr>
-          <p:cNvPr id="20" name="Straight Connector 19">
-            <a:extLst>
-              <a:ext uri="{FF2B5EF4-FFF2-40B4-BE49-F238E27FC236}">
-                <a16:creationId xmlns:a16="http://schemas.microsoft.com/office/drawing/2014/main" id="{74D9F3D4-D022-BE1D-3FD7-E262CC61E2B7}"/>
-              </a:ext>
-            </a:extLst>
-          </p:cNvPr>
-          <p:cNvCxnSpPr>
-            <a:cxnSpLocks/>
-            <a:stCxn id="15" idx="0"/>
-            <a:endCxn id="4" idx="2"/>
-          </p:cNvCxnSpPr>
-          <p:nvPr/>
-        </p:nvCxnSpPr>
-        <p:spPr>
-          <a:xfrm flipV="1">
-            <a:off x="6096000" y="2760366"/>
-            <a:ext cx="0" cy="1201515"/>
-          </a:xfrm>
-          <a:prstGeom prst="line">
-            <a:avLst/>
-          </a:prstGeom>
-          <a:ln w="28575">
-            <a:solidFill>
-              <a:srgbClr val="905AA6"/>
-            </a:solidFill>
-          </a:ln>
-        </p:spPr>
-        <p:style>
-          <a:lnRef idx="1">
-            <a:schemeClr val="accent1"/>
-          </a:lnRef>
-          <a:fillRef idx="0">
-            <a:schemeClr val="accent1"/>
-          </a:fillRef>
-          <a:effectRef idx="0">
-            <a:schemeClr val="accent1"/>
-          </a:effectRef>
-          <a:fontRef idx="minor">
-            <a:schemeClr val="tx1"/>
-          </a:fontRef>
-        </p:style>
-      </p:cxnSp>
-      <p:cxnSp>
-        <p:nvCxnSpPr>
-          <p:cNvPr id="23" name="Straight Connector 22">
-            <a:extLst>
-              <a:ext uri="{FF2B5EF4-FFF2-40B4-BE49-F238E27FC236}">
-                <a16:creationId xmlns:a16="http://schemas.microsoft.com/office/drawing/2014/main" id="{F535A133-F7F0-142B-3A4C-20C5BA16087A}"/>
-              </a:ext>
-            </a:extLst>
-          </p:cNvPr>
-          <p:cNvCxnSpPr>
-            <a:cxnSpLocks/>
-            <a:stCxn id="17" idx="0"/>
-            <a:endCxn id="4" idx="2"/>
-          </p:cNvCxnSpPr>
-          <p:nvPr/>
-        </p:nvCxnSpPr>
-        <p:spPr>
-          <a:xfrm flipH="1" flipV="1">
-            <a:off x="6096000" y="2760366"/>
-            <a:ext cx="4155161" cy="1192994"/>
-          </a:xfrm>
-          <a:prstGeom prst="line">
-            <a:avLst/>
-          </a:prstGeom>
-          <a:ln w="28575">
-            <a:solidFill>
-              <a:srgbClr val="905AA6"/>
-            </a:solidFill>
-          </a:ln>
-        </p:spPr>
-        <p:style>
-          <a:lnRef idx="1">
-            <a:schemeClr val="accent1"/>
-          </a:lnRef>
-          <a:fillRef idx="0">
-            <a:schemeClr val="accent1"/>
-          </a:fillRef>
-          <a:effectRef idx="0">
-            <a:schemeClr val="accent1"/>
-          </a:effectRef>
-          <a:fontRef idx="minor">
-            <a:schemeClr val="tx1"/>
-          </a:fontRef>
-        </p:style>
-      </p:cxnSp>
-    </p:spTree>
-    <p:extLst>
-      <p:ext uri="{BB962C8B-B14F-4D97-AF65-F5344CB8AC3E}">
-        <p14:creationId xmlns:p14="http://schemas.microsoft.com/office/powerpoint/2010/main" val="1375378903"/>
-      </p:ext>
-    </p:extLst>
-  </p:cSld>
-  <p:clrMapOvr>
-    <a:masterClrMapping/>
-  </p:clrMapOvr>
-</p:sld>
-</file>
-
-<file path=ppt/slides/slide20.xml><?xml version="1.0" encoding="utf-8"?>
-<p:sld xmlns:a="http://schemas.openxmlformats.org/drawingml/2006/main" xmlns:r="http://schemas.openxmlformats.org/officeDocument/2006/relationships" xmlns:p="http://schemas.openxmlformats.org/presentationml/2006/main">
-  <p:cSld>
-    <p:spTree>
-      <p:nvGrpSpPr>
-        <p:cNvPr id="1" name=""/>
-        <p:cNvGrpSpPr/>
-        <p:nvPr/>
-      </p:nvGrpSpPr>
-      <p:grpSpPr>
-        <a:xfrm>
-          <a:off x="0" y="0"/>
-          <a:ext cx="0" cy="0"/>
-          <a:chOff x="0" y="0"/>
-          <a:chExt cx="0" cy="0"/>
-        </a:xfrm>
-      </p:grpSpPr>
-      <p:sp>
-        <p:nvSpPr>
-          <p:cNvPr id="6" name="Slide Number Placeholder 5">
-            <a:extLst>
-              <a:ext uri="{FF2B5EF4-FFF2-40B4-BE49-F238E27FC236}">
-                <a16:creationId xmlns:a16="http://schemas.microsoft.com/office/drawing/2014/main" id="{74FB7EC2-71BA-402D-7669-A778C3CC61F4}"/>
-              </a:ext>
-            </a:extLst>
-          </p:cNvPr>
-          <p:cNvSpPr>
-            <a:spLocks noGrp="1"/>
-          </p:cNvSpPr>
-          <p:nvPr>
-            <p:ph type="sldNum" sz="quarter" idx="12"/>
-          </p:nvPr>
-        </p:nvSpPr>
-        <p:spPr>
-          <a:xfrm>
-            <a:off x="9282793" y="6420757"/>
-            <a:ext cx="2743200" cy="365125"/>
-          </a:xfrm>
-        </p:spPr>
-        <p:txBody>
-          <a:bodyPr/>
-          <a:lstStyle/>
-          <a:p>
-            <a:fld id="{1E5564C7-97C0-40C1-9717-452594735347}" type="slidenum">
-              <a:rPr lang="en-CA" smtClean="0"/>
-              <a:t>20</a:t>
+              <a:t>22</a:t>
             </a:fld>
             <a:endParaRPr lang="en-CA" dirty="0"/>
           </a:p>
@@ -23043,7 +24846,7 @@
 </p:sld>
 </file>
 
-<file path=ppt/slides/slide21.xml><?xml version="1.0" encoding="utf-8"?>
+<file path=ppt/slides/slide23.xml><?xml version="1.0" encoding="utf-8"?>
 <p:sld xmlns:a="http://schemas.openxmlformats.org/drawingml/2006/main" xmlns:r="http://schemas.openxmlformats.org/officeDocument/2006/relationships" xmlns:p="http://schemas.openxmlformats.org/presentationml/2006/main">
   <p:cSld>
     <p:spTree>
@@ -23088,7 +24891,7 @@
           <a:p>
             <a:fld id="{1E5564C7-97C0-40C1-9717-452594735347}" type="slidenum">
               <a:rPr lang="en-CA" smtClean="0"/>
-              <a:t>21</a:t>
+              <a:t>23</a:t>
             </a:fld>
             <a:endParaRPr lang="en-CA" dirty="0"/>
           </a:p>

--- a/Working Documents/COMP2025.pptx
+++ b/Working Documents/COMP2025.pptx
@@ -1783,7 +1783,7 @@
                   <a:cs typeface="+mn-cs"/>
                 </a:defRPr>
               </a:pPr>
-              <a:endParaRPr lang="en-US"/>
+              <a:endParaRPr lang="en-CA"/>
             </a:p>
           </c:txPr>
         </c:title>
@@ -3483,7 +3483,7 @@
                   <a:cs typeface="+mn-cs"/>
                 </a:defRPr>
               </a:pPr>
-              <a:endParaRPr lang="en-US"/>
+              <a:endParaRPr lang="en-CA"/>
             </a:p>
           </c:txPr>
         </c:title>
@@ -11577,7 +11577,7 @@
           <a:p>
             <a:fld id="{79DBBB50-28C2-4259-8A6E-8511330E65C5}" type="datetimeFigureOut">
               <a:rPr lang="en-CA" smtClean="0"/>
-              <a:t>29-May-2025</a:t>
+              <a:t>2025-06-02</a:t>
             </a:fld>
             <a:endParaRPr lang="en-CA"/>
           </a:p>
@@ -13960,7 +13960,7 @@
           <a:p>
             <a:fld id="{DF0AE50A-D16A-47CD-AF47-75A773AE29BA}" type="datetimeFigureOut">
               <a:rPr lang="en-CA" smtClean="0"/>
-              <a:t>29-May-2025</a:t>
+              <a:t>2025-06-02</a:t>
             </a:fld>
             <a:endParaRPr lang="en-CA"/>
           </a:p>
@@ -14160,7 +14160,7 @@
           <a:p>
             <a:fld id="{DF0AE50A-D16A-47CD-AF47-75A773AE29BA}" type="datetimeFigureOut">
               <a:rPr lang="en-CA" smtClean="0"/>
-              <a:t>29-May-2025</a:t>
+              <a:t>2025-06-02</a:t>
             </a:fld>
             <a:endParaRPr lang="en-CA"/>
           </a:p>
@@ -14370,7 +14370,7 @@
           <a:p>
             <a:fld id="{DF0AE50A-D16A-47CD-AF47-75A773AE29BA}" type="datetimeFigureOut">
               <a:rPr lang="en-CA" smtClean="0"/>
-              <a:t>29-May-2025</a:t>
+              <a:t>2025-06-02</a:t>
             </a:fld>
             <a:endParaRPr lang="en-CA"/>
           </a:p>
@@ -14570,7 +14570,7 @@
           <a:p>
             <a:fld id="{DF0AE50A-D16A-47CD-AF47-75A773AE29BA}" type="datetimeFigureOut">
               <a:rPr lang="en-CA" smtClean="0"/>
-              <a:t>29-May-2025</a:t>
+              <a:t>2025-06-02</a:t>
             </a:fld>
             <a:endParaRPr lang="en-CA"/>
           </a:p>
@@ -14846,7 +14846,7 @@
           <a:p>
             <a:fld id="{DF0AE50A-D16A-47CD-AF47-75A773AE29BA}" type="datetimeFigureOut">
               <a:rPr lang="en-CA" smtClean="0"/>
-              <a:t>29-May-2025</a:t>
+              <a:t>2025-06-02</a:t>
             </a:fld>
             <a:endParaRPr lang="en-CA"/>
           </a:p>
@@ -15114,7 +15114,7 @@
           <a:p>
             <a:fld id="{DF0AE50A-D16A-47CD-AF47-75A773AE29BA}" type="datetimeFigureOut">
               <a:rPr lang="en-CA" smtClean="0"/>
-              <a:t>29-May-2025</a:t>
+              <a:t>2025-06-02</a:t>
             </a:fld>
             <a:endParaRPr lang="en-CA"/>
           </a:p>
@@ -15529,7 +15529,7 @@
           <a:p>
             <a:fld id="{DF0AE50A-D16A-47CD-AF47-75A773AE29BA}" type="datetimeFigureOut">
               <a:rPr lang="en-CA" smtClean="0"/>
-              <a:t>29-May-2025</a:t>
+              <a:t>2025-06-02</a:t>
             </a:fld>
             <a:endParaRPr lang="en-CA"/>
           </a:p>
@@ -15671,7 +15671,7 @@
           <a:p>
             <a:fld id="{DF0AE50A-D16A-47CD-AF47-75A773AE29BA}" type="datetimeFigureOut">
               <a:rPr lang="en-CA" smtClean="0"/>
-              <a:t>29-May-2025</a:t>
+              <a:t>2025-06-02</a:t>
             </a:fld>
             <a:endParaRPr lang="en-CA"/>
           </a:p>
@@ -15784,7 +15784,7 @@
           <a:p>
             <a:fld id="{DF0AE50A-D16A-47CD-AF47-75A773AE29BA}" type="datetimeFigureOut">
               <a:rPr lang="en-CA" smtClean="0"/>
-              <a:t>29-May-2025</a:t>
+              <a:t>2025-06-02</a:t>
             </a:fld>
             <a:endParaRPr lang="en-CA"/>
           </a:p>
@@ -16097,7 +16097,7 @@
           <a:p>
             <a:fld id="{DF0AE50A-D16A-47CD-AF47-75A773AE29BA}" type="datetimeFigureOut">
               <a:rPr lang="en-CA" smtClean="0"/>
-              <a:t>29-May-2025</a:t>
+              <a:t>2025-06-02</a:t>
             </a:fld>
             <a:endParaRPr lang="en-CA"/>
           </a:p>
@@ -16386,7 +16386,7 @@
           <a:p>
             <a:fld id="{DF0AE50A-D16A-47CD-AF47-75A773AE29BA}" type="datetimeFigureOut">
               <a:rPr lang="en-CA" smtClean="0"/>
-              <a:t>29-May-2025</a:t>
+              <a:t>2025-06-02</a:t>
             </a:fld>
             <a:endParaRPr lang="en-CA"/>
           </a:p>
@@ -16629,7 +16629,7 @@
           <a:p>
             <a:fld id="{DF0AE50A-D16A-47CD-AF47-75A773AE29BA}" type="datetimeFigureOut">
               <a:rPr lang="en-CA" smtClean="0"/>
-              <a:t>29-May-2025</a:t>
+              <a:t>2025-06-02</a:t>
             </a:fld>
             <a:endParaRPr lang="en-CA"/>
           </a:p>
@@ -21165,8 +21165,8 @@
           </a:p>
         </p:txBody>
       </p:sp>
-      <mc:AlternateContent xmlns:mc="http://schemas.openxmlformats.org/markup-compatibility/2006">
-        <mc:Choice xmlns:a14="http://schemas.microsoft.com/office/drawing/2010/main" Requires="a14">
+      <mc:AlternateContent xmlns:mc="http://schemas.openxmlformats.org/markup-compatibility/2006" xmlns:a14="http://schemas.microsoft.com/office/drawing/2010/main">
+        <mc:Choice Requires="a14">
           <p:sp>
             <p:nvSpPr>
               <p:cNvPr id="9" name="TextBox 8">
@@ -21243,7 +21243,7 @@
             </p:txBody>
           </p:sp>
         </mc:Choice>
-        <mc:Fallback>
+        <mc:Fallback xmlns="">
           <p:sp>
             <p:nvSpPr>
               <p:cNvPr id="9" name="TextBox 8">

--- a/Working Documents/COMP2025.pptx
+++ b/Working Documents/COMP2025.pptx
@@ -1783,7 +1783,7 @@
                   <a:cs typeface="+mn-cs"/>
                 </a:defRPr>
               </a:pPr>
-              <a:endParaRPr lang="en-CA"/>
+              <a:endParaRPr lang="en-US"/>
             </a:p>
           </c:txPr>
         </c:title>
@@ -3483,7 +3483,7 @@
                   <a:cs typeface="+mn-cs"/>
                 </a:defRPr>
               </a:pPr>
-              <a:endParaRPr lang="en-CA"/>
+              <a:endParaRPr lang="en-US"/>
             </a:p>
           </c:txPr>
         </c:title>
@@ -11577,7 +11577,7 @@
           <a:p>
             <a:fld id="{79DBBB50-28C2-4259-8A6E-8511330E65C5}" type="datetimeFigureOut">
               <a:rPr lang="en-CA" smtClean="0"/>
-              <a:t>2025-06-02</a:t>
+              <a:t>29-May-2025</a:t>
             </a:fld>
             <a:endParaRPr lang="en-CA"/>
           </a:p>
@@ -13960,7 +13960,7 @@
           <a:p>
             <a:fld id="{DF0AE50A-D16A-47CD-AF47-75A773AE29BA}" type="datetimeFigureOut">
               <a:rPr lang="en-CA" smtClean="0"/>
-              <a:t>2025-06-02</a:t>
+              <a:t>29-May-2025</a:t>
             </a:fld>
             <a:endParaRPr lang="en-CA"/>
           </a:p>
@@ -14160,7 +14160,7 @@
           <a:p>
             <a:fld id="{DF0AE50A-D16A-47CD-AF47-75A773AE29BA}" type="datetimeFigureOut">
               <a:rPr lang="en-CA" smtClean="0"/>
-              <a:t>2025-06-02</a:t>
+              <a:t>29-May-2025</a:t>
             </a:fld>
             <a:endParaRPr lang="en-CA"/>
           </a:p>
@@ -14370,7 +14370,7 @@
           <a:p>
             <a:fld id="{DF0AE50A-D16A-47CD-AF47-75A773AE29BA}" type="datetimeFigureOut">
               <a:rPr lang="en-CA" smtClean="0"/>
-              <a:t>2025-06-02</a:t>
+              <a:t>29-May-2025</a:t>
             </a:fld>
             <a:endParaRPr lang="en-CA"/>
           </a:p>
@@ -14570,7 +14570,7 @@
           <a:p>
             <a:fld id="{DF0AE50A-D16A-47CD-AF47-75A773AE29BA}" type="datetimeFigureOut">
               <a:rPr lang="en-CA" smtClean="0"/>
-              <a:t>2025-06-02</a:t>
+              <a:t>29-May-2025</a:t>
             </a:fld>
             <a:endParaRPr lang="en-CA"/>
           </a:p>
@@ -14846,7 +14846,7 @@
           <a:p>
             <a:fld id="{DF0AE50A-D16A-47CD-AF47-75A773AE29BA}" type="datetimeFigureOut">
               <a:rPr lang="en-CA" smtClean="0"/>
-              <a:t>2025-06-02</a:t>
+              <a:t>29-May-2025</a:t>
             </a:fld>
             <a:endParaRPr lang="en-CA"/>
           </a:p>
@@ -15114,7 +15114,7 @@
           <a:p>
             <a:fld id="{DF0AE50A-D16A-47CD-AF47-75A773AE29BA}" type="datetimeFigureOut">
               <a:rPr lang="en-CA" smtClean="0"/>
-              <a:t>2025-06-02</a:t>
+              <a:t>29-May-2025</a:t>
             </a:fld>
             <a:endParaRPr lang="en-CA"/>
           </a:p>
@@ -15529,7 +15529,7 @@
           <a:p>
             <a:fld id="{DF0AE50A-D16A-47CD-AF47-75A773AE29BA}" type="datetimeFigureOut">
               <a:rPr lang="en-CA" smtClean="0"/>
-              <a:t>2025-06-02</a:t>
+              <a:t>29-May-2025</a:t>
             </a:fld>
             <a:endParaRPr lang="en-CA"/>
           </a:p>
@@ -15671,7 +15671,7 @@
           <a:p>
             <a:fld id="{DF0AE50A-D16A-47CD-AF47-75A773AE29BA}" type="datetimeFigureOut">
               <a:rPr lang="en-CA" smtClean="0"/>
-              <a:t>2025-06-02</a:t>
+              <a:t>29-May-2025</a:t>
             </a:fld>
             <a:endParaRPr lang="en-CA"/>
           </a:p>
@@ -15784,7 +15784,7 @@
           <a:p>
             <a:fld id="{DF0AE50A-D16A-47CD-AF47-75A773AE29BA}" type="datetimeFigureOut">
               <a:rPr lang="en-CA" smtClean="0"/>
-              <a:t>2025-06-02</a:t>
+              <a:t>29-May-2025</a:t>
             </a:fld>
             <a:endParaRPr lang="en-CA"/>
           </a:p>
@@ -16097,7 +16097,7 @@
           <a:p>
             <a:fld id="{DF0AE50A-D16A-47CD-AF47-75A773AE29BA}" type="datetimeFigureOut">
               <a:rPr lang="en-CA" smtClean="0"/>
-              <a:t>2025-06-02</a:t>
+              <a:t>29-May-2025</a:t>
             </a:fld>
             <a:endParaRPr lang="en-CA"/>
           </a:p>
@@ -16386,7 +16386,7 @@
           <a:p>
             <a:fld id="{DF0AE50A-D16A-47CD-AF47-75A773AE29BA}" type="datetimeFigureOut">
               <a:rPr lang="en-CA" smtClean="0"/>
-              <a:t>2025-06-02</a:t>
+              <a:t>29-May-2025</a:t>
             </a:fld>
             <a:endParaRPr lang="en-CA"/>
           </a:p>
@@ -16629,7 +16629,7 @@
           <a:p>
             <a:fld id="{DF0AE50A-D16A-47CD-AF47-75A773AE29BA}" type="datetimeFigureOut">
               <a:rPr lang="en-CA" smtClean="0"/>
-              <a:t>2025-06-02</a:t>
+              <a:t>29-May-2025</a:t>
             </a:fld>
             <a:endParaRPr lang="en-CA"/>
           </a:p>
@@ -21165,8 +21165,8 @@
           </a:p>
         </p:txBody>
       </p:sp>
-      <mc:AlternateContent xmlns:mc="http://schemas.openxmlformats.org/markup-compatibility/2006" xmlns:a14="http://schemas.microsoft.com/office/drawing/2010/main">
-        <mc:Choice Requires="a14">
+      <mc:AlternateContent xmlns:mc="http://schemas.openxmlformats.org/markup-compatibility/2006">
+        <mc:Choice xmlns:a14="http://schemas.microsoft.com/office/drawing/2010/main" Requires="a14">
           <p:sp>
             <p:nvSpPr>
               <p:cNvPr id="9" name="TextBox 8">
@@ -21243,7 +21243,7 @@
             </p:txBody>
           </p:sp>
         </mc:Choice>
-        <mc:Fallback xmlns="">
+        <mc:Fallback>
           <p:sp>
             <p:nvSpPr>
               <p:cNvPr id="9" name="TextBox 8">
